--- a/docs/curso/slides/m07-faturas.pptx
+++ b/docs/curso/slides/m07-faturas.pptx
@@ -3154,6 +3154,54 @@
           <a:chExt cx="0" cy="0"/>
         </a:xfrm>
       </p:grpSpPr>
+      <p:sp>
+        <p:nvSpPr>
+          <p:cNvPr id="25" name="Slide Number Placeholder 0"/>
+          <p:cNvSpPr>
+            <a:spLocks noGrp="1"/>
+          </p:cNvSpPr>
+          <p:nvPr>
+            <p:ph type="sldNum" sz="quarter" idx="4294967295"/>
+          </p:nvPr>
+        </p:nvSpPr>
+        <p:spPr>
+          <a:xfrm>
+            <a:off x="11292840" y="6556248"/>
+            <a:ext cx="548640" cy="256032"/>
+          </a:xfrm>
+          <a:prstGeom prst="rect">
+            <a:avLst/>
+          </a:prstGeom>
+          <a:extLst>
+            <a:ext uri="{C572A759-6A51-4108-AA02-DFA0A04FC94B}">
+              <ma14:wrappingTextBoxFlag xmlns:ma14="http://schemas.microsoft.com/office/mac/drawingml/2011/main" val="0"/>
+            </a:ext>
+          </a:extLst>
+        </p:spPr>
+        <p:txBody>
+          <a:bodyPr/>
+          <a:lstStyle>
+            <a:lvl1pPr>
+              <a:defRPr sz="900">
+                <a:solidFill>
+                  <a:srgbClr val="1B3A6B"/>
+                </a:solidFill>
+                <a:latin typeface="Arial"/>
+                <a:ea typeface="Arial"/>
+                <a:cs typeface="Arial"/>
+              </a:defRPr>
+            </a:lvl1pPr>
+          </a:lstStyle>
+          <a:p>
+            <a:pPr algn="r"/>
+            <a:fld id="{F7021451-1387-4CA6-816F-3879F97B5CBC}" type="slidenum">
+              <a:rPr b="1" lang="en-US"/>
+              <a:t>1000</a:t>
+            </a:fld>
+            <a:endParaRPr lang="en-US"/>
+          </a:p>
+        </p:txBody>
+      </p:sp>
     </p:spTree>
   </p:cSld>
   <p:clrMapOvr>
@@ -3179,6 +3227,54 @@
           <a:chExt cx="0" cy="0"/>
         </a:xfrm>
       </p:grpSpPr>
+      <p:sp>
+        <p:nvSpPr>
+          <p:cNvPr id="25" name="Slide Number Placeholder 0"/>
+          <p:cNvSpPr>
+            <a:spLocks noGrp="1"/>
+          </p:cNvSpPr>
+          <p:nvPr>
+            <p:ph type="sldNum" sz="quarter" idx="4294967295"/>
+          </p:nvPr>
+        </p:nvSpPr>
+        <p:spPr>
+          <a:xfrm>
+            <a:off x="11292840" y="6556248"/>
+            <a:ext cx="548640" cy="256032"/>
+          </a:xfrm>
+          <a:prstGeom prst="rect">
+            <a:avLst/>
+          </a:prstGeom>
+          <a:extLst>
+            <a:ext uri="{C572A759-6A51-4108-AA02-DFA0A04FC94B}">
+              <ma14:wrappingTextBoxFlag xmlns:ma14="http://schemas.microsoft.com/office/mac/drawingml/2011/main" val="0"/>
+            </a:ext>
+          </a:extLst>
+        </p:spPr>
+        <p:txBody>
+          <a:bodyPr/>
+          <a:lstStyle>
+            <a:lvl1pPr>
+              <a:defRPr sz="900">
+                <a:solidFill>
+                  <a:srgbClr val="1B3A6B"/>
+                </a:solidFill>
+                <a:latin typeface="Arial"/>
+                <a:ea typeface="Arial"/>
+                <a:cs typeface="Arial"/>
+              </a:defRPr>
+            </a:lvl1pPr>
+          </a:lstStyle>
+          <a:p>
+            <a:pPr algn="r"/>
+            <a:fld id="{F7021451-1387-4CA6-816F-3879F97B5CBC}" type="slidenum">
+              <a:rPr b="1" lang="en-US"/>
+              <a:t>null</a:t>
+            </a:fld>
+            <a:endParaRPr lang="en-US"/>
+          </a:p>
+        </p:txBody>
+      </p:sp>
     </p:spTree>
   </p:cSld>
   <p:clrMap bg1="lt1" tx1="dk1" bg2="lt2" tx2="dk2" accent1="accent1" accent2="accent2" accent3="accent3" accent4="accent4" accent5="accent5" accent6="accent6" hlink="hlink" folHlink="folHlink"/>
@@ -4012,7 +4108,7 @@
         </p:blipFill>
         <p:spPr>
           <a:xfrm>
-            <a:off x="411480" y="6547104"/>
+            <a:off x="548640" y="6547104"/>
             <a:ext cx="274320" cy="274320"/>
           </a:xfrm>
           <a:prstGeom prst="rect">
@@ -4028,7 +4124,7 @@
         </p:nvSpPr>
         <p:spPr>
           <a:xfrm>
-            <a:off x="749808" y="6528816"/>
+            <a:off x="886968" y="6528816"/>
             <a:ext cx="6400800" cy="310896"/>
           </a:xfrm>
           <a:prstGeom prst="rect">
@@ -4068,7 +4164,7 @@
         <p:spPr>
           <a:xfrm>
             <a:off x="7132320" y="6528816"/>
-            <a:ext cx="4663440" cy="310896"/>
+            <a:ext cx="4023360" cy="310896"/>
           </a:xfrm>
           <a:prstGeom prst="rect">
             <a:avLst/>
@@ -4106,7 +4202,7 @@
         </p:nvSpPr>
         <p:spPr>
           <a:xfrm>
-            <a:off x="411480" y="384048"/>
+            <a:off x="548640" y="384048"/>
             <a:ext cx="82296" cy="658368"/>
           </a:xfrm>
           <a:prstGeom prst="rect">
@@ -4126,7 +4222,7 @@
         </p:nvSpPr>
         <p:spPr>
           <a:xfrm>
-            <a:off x="640080" y="292608"/>
+            <a:off x="777240" y="292608"/>
             <a:ext cx="10972800" cy="274320"/>
           </a:xfrm>
           <a:prstGeom prst="rect">
@@ -4165,8 +4261,8 @@
         </p:nvSpPr>
         <p:spPr>
           <a:xfrm>
-            <a:off x="640080" y="530352"/>
-            <a:ext cx="11155680" cy="566928"/>
+            <a:off x="777240" y="530352"/>
+            <a:ext cx="10881360" cy="566928"/>
           </a:xfrm>
           <a:prstGeom prst="rect">
             <a:avLst/>
@@ -4339,6 +4435,54 @@
               <a:t>6. Créditos a expirar → cota alta ou cliente consumindo menos → reduzir cota/redistribuir</a:t>
             </a:r>
             <a:endParaRPr lang="en-US" sz="1300" dirty="0"/>
+          </a:p>
+        </p:txBody>
+      </p:sp>
+      <p:sp>
+        <p:nvSpPr>
+          <p:cNvPr id="25" name="Slide Number Placeholder 0"/>
+          <p:cNvSpPr>
+            <a:spLocks noGrp="1"/>
+          </p:cNvSpPr>
+          <p:nvPr>
+            <p:ph type="sldNum" sz="quarter" idx="4294967295"/>
+          </p:nvPr>
+        </p:nvSpPr>
+        <p:spPr>
+          <a:xfrm>
+            <a:off x="11292840" y="6556248"/>
+            <a:ext cx="548640" cy="256032"/>
+          </a:xfrm>
+          <a:prstGeom prst="rect">
+            <a:avLst/>
+          </a:prstGeom>
+          <a:extLst>
+            <a:ext uri="{C572A759-6A51-4108-AA02-DFA0A04FC94B}">
+              <ma14:wrappingTextBoxFlag xmlns:ma14="http://schemas.microsoft.com/office/mac/drawingml/2011/main" val="0"/>
+            </a:ext>
+          </a:extLst>
+        </p:spPr>
+        <p:txBody>
+          <a:bodyPr/>
+          <a:lstStyle>
+            <a:lvl1pPr>
+              <a:defRPr sz="900">
+                <a:solidFill>
+                  <a:srgbClr val="1B3A6B"/>
+                </a:solidFill>
+                <a:latin typeface="Arial"/>
+                <a:ea typeface="Arial"/>
+                <a:cs typeface="Arial"/>
+              </a:defRPr>
+            </a:lvl1pPr>
+          </a:lstStyle>
+          <a:p>
+            <a:pPr algn="r"/>
+            <a:fld id="{F7021451-1387-4CA6-816F-3879F97B5CBC}" type="slidenum">
+              <a:rPr b="1" lang="en-US"/>
+              <a:t>10</a:t>
+            </a:fld>
+            <a:endParaRPr lang="en-US"/>
           </a:p>
         </p:txBody>
       </p:sp>
@@ -4415,7 +4559,7 @@
         </p:blipFill>
         <p:spPr>
           <a:xfrm>
-            <a:off x="411480" y="6547104"/>
+            <a:off x="548640" y="6547104"/>
             <a:ext cx="274320" cy="274320"/>
           </a:xfrm>
           <a:prstGeom prst="rect">
@@ -4431,7 +4575,7 @@
         </p:nvSpPr>
         <p:spPr>
           <a:xfrm>
-            <a:off x="749808" y="6528816"/>
+            <a:off x="886968" y="6528816"/>
             <a:ext cx="6400800" cy="310896"/>
           </a:xfrm>
           <a:prstGeom prst="rect">
@@ -4471,7 +4615,7 @@
         <p:spPr>
           <a:xfrm>
             <a:off x="7132320" y="6528816"/>
-            <a:ext cx="4663440" cy="310896"/>
+            <a:ext cx="4023360" cy="310896"/>
           </a:xfrm>
           <a:prstGeom prst="rect">
             <a:avLst/>
@@ -4509,7 +4653,7 @@
         </p:nvSpPr>
         <p:spPr>
           <a:xfrm>
-            <a:off x="411480" y="384048"/>
+            <a:off x="548640" y="384048"/>
             <a:ext cx="82296" cy="658368"/>
           </a:xfrm>
           <a:prstGeom prst="rect">
@@ -4529,7 +4673,7 @@
         </p:nvSpPr>
         <p:spPr>
           <a:xfrm>
-            <a:off x="640080" y="292608"/>
+            <a:off x="777240" y="292608"/>
             <a:ext cx="10972800" cy="274320"/>
           </a:xfrm>
           <a:prstGeom prst="rect">
@@ -4568,8 +4712,8 @@
         </p:nvSpPr>
         <p:spPr>
           <a:xfrm>
-            <a:off x="640080" y="530352"/>
-            <a:ext cx="11155680" cy="566928"/>
+            <a:off x="777240" y="530352"/>
+            <a:ext cx="10881360" cy="566928"/>
           </a:xfrm>
           <a:prstGeom prst="rect">
             <a:avLst/>
@@ -4609,8 +4753,8 @@
         </p:nvSpPr>
         <p:spPr>
           <a:xfrm>
-            <a:off x="411480" y="1325880"/>
-            <a:ext cx="5577840" cy="2331720"/>
+            <a:off x="548640" y="1325880"/>
+            <a:ext cx="5431536" cy="2331720"/>
           </a:xfrm>
           <a:prstGeom prst="roundRect">
             <a:avLst>
@@ -4643,7 +4787,7 @@
         </p:nvSpPr>
         <p:spPr>
           <a:xfrm>
-            <a:off x="594360" y="1508760"/>
+            <a:off x="731520" y="1508760"/>
             <a:ext cx="457200" cy="457200"/>
           </a:xfrm>
           <a:prstGeom prst="ellipse">
@@ -4663,7 +4807,7 @@
         </p:nvSpPr>
         <p:spPr>
           <a:xfrm>
-            <a:off x="594360" y="1508760"/>
+            <a:off x="731520" y="1508760"/>
             <a:ext cx="457200" cy="457200"/>
           </a:xfrm>
           <a:prstGeom prst="rect">
@@ -4702,8 +4846,8 @@
         </p:nvSpPr>
         <p:spPr>
           <a:xfrm>
-            <a:off x="1188720" y="1435608"/>
-            <a:ext cx="4663440" cy="2112264"/>
+            <a:off x="1325880" y="1435608"/>
+            <a:ext cx="4517136" cy="2112264"/>
           </a:xfrm>
           <a:prstGeom prst="rect">
             <a:avLst/>
@@ -4743,8 +4887,8 @@
         </p:nvSpPr>
         <p:spPr>
           <a:xfrm>
-            <a:off x="6217920" y="1325880"/>
-            <a:ext cx="5577840" cy="2331720"/>
+            <a:off x="6208776" y="1325880"/>
+            <a:ext cx="5431536" cy="2331720"/>
           </a:xfrm>
           <a:prstGeom prst="roundRect">
             <a:avLst>
@@ -4777,7 +4921,7 @@
         </p:nvSpPr>
         <p:spPr>
           <a:xfrm>
-            <a:off x="6400800" y="1508760"/>
+            <a:off x="6391656" y="1508760"/>
             <a:ext cx="457200" cy="457200"/>
           </a:xfrm>
           <a:prstGeom prst="ellipse">
@@ -4797,7 +4941,7 @@
         </p:nvSpPr>
         <p:spPr>
           <a:xfrm>
-            <a:off x="6400800" y="1508760"/>
+            <a:off x="6391656" y="1508760"/>
             <a:ext cx="457200" cy="457200"/>
           </a:xfrm>
           <a:prstGeom prst="rect">
@@ -4836,8 +4980,8 @@
         </p:nvSpPr>
         <p:spPr>
           <a:xfrm>
-            <a:off x="6995160" y="1435608"/>
-            <a:ext cx="4663440" cy="2112264"/>
+            <a:off x="6986016" y="1435608"/>
+            <a:ext cx="4517136" cy="2112264"/>
           </a:xfrm>
           <a:prstGeom prst="rect">
             <a:avLst/>
@@ -4877,8 +5021,8 @@
         </p:nvSpPr>
         <p:spPr>
           <a:xfrm>
-            <a:off x="411480" y="3886200"/>
-            <a:ext cx="5577840" cy="2331720"/>
+            <a:off x="548640" y="3886200"/>
+            <a:ext cx="5431536" cy="2331720"/>
           </a:xfrm>
           <a:prstGeom prst="roundRect">
             <a:avLst>
@@ -4911,7 +5055,7 @@
         </p:nvSpPr>
         <p:spPr>
           <a:xfrm>
-            <a:off x="594360" y="4069080"/>
+            <a:off x="731520" y="4069080"/>
             <a:ext cx="457200" cy="457200"/>
           </a:xfrm>
           <a:prstGeom prst="ellipse">
@@ -4931,7 +5075,7 @@
         </p:nvSpPr>
         <p:spPr>
           <a:xfrm>
-            <a:off x="594360" y="4069080"/>
+            <a:off x="731520" y="4069080"/>
             <a:ext cx="457200" cy="457200"/>
           </a:xfrm>
           <a:prstGeom prst="rect">
@@ -4970,8 +5114,8 @@
         </p:nvSpPr>
         <p:spPr>
           <a:xfrm>
-            <a:off x="1188720" y="3995928"/>
-            <a:ext cx="4663440" cy="2112264"/>
+            <a:off x="1325880" y="3995928"/>
+            <a:ext cx="4517136" cy="2112264"/>
           </a:xfrm>
           <a:prstGeom prst="rect">
             <a:avLst/>
@@ -5011,8 +5155,8 @@
         </p:nvSpPr>
         <p:spPr>
           <a:xfrm>
-            <a:off x="6217920" y="3886200"/>
-            <a:ext cx="5577840" cy="2331720"/>
+            <a:off x="6208776" y="3886200"/>
+            <a:ext cx="5431536" cy="2331720"/>
           </a:xfrm>
           <a:prstGeom prst="roundRect">
             <a:avLst>
@@ -5045,7 +5189,7 @@
         </p:nvSpPr>
         <p:spPr>
           <a:xfrm>
-            <a:off x="6400800" y="4069080"/>
+            <a:off x="6391656" y="4069080"/>
             <a:ext cx="457200" cy="457200"/>
           </a:xfrm>
           <a:prstGeom prst="ellipse">
@@ -5065,7 +5209,7 @@
         </p:nvSpPr>
         <p:spPr>
           <a:xfrm>
-            <a:off x="6400800" y="4069080"/>
+            <a:off x="6391656" y="4069080"/>
             <a:ext cx="457200" cy="457200"/>
           </a:xfrm>
           <a:prstGeom prst="rect">
@@ -5104,8 +5248,8 @@
         </p:nvSpPr>
         <p:spPr>
           <a:xfrm>
-            <a:off x="6995160" y="3995928"/>
-            <a:ext cx="4663440" cy="2112264"/>
+            <a:off x="6986016" y="3995928"/>
+            <a:ext cx="4517136" cy="2112264"/>
           </a:xfrm>
           <a:prstGeom prst="rect">
             <a:avLst/>
@@ -5134,6 +5278,54 @@
               <a:t>ouvidoria/ANEEL se necessário</a:t>
             </a:r>
             <a:endParaRPr lang="en-US" sz="1800" dirty="0"/>
+          </a:p>
+        </p:txBody>
+      </p:sp>
+      <p:sp>
+        <p:nvSpPr>
+          <p:cNvPr id="25" name="Slide Number Placeholder 0"/>
+          <p:cNvSpPr>
+            <a:spLocks noGrp="1"/>
+          </p:cNvSpPr>
+          <p:nvPr>
+            <p:ph type="sldNum" sz="quarter" idx="4294967295"/>
+          </p:nvPr>
+        </p:nvSpPr>
+        <p:spPr>
+          <a:xfrm>
+            <a:off x="11292840" y="6556248"/>
+            <a:ext cx="548640" cy="256032"/>
+          </a:xfrm>
+          <a:prstGeom prst="rect">
+            <a:avLst/>
+          </a:prstGeom>
+          <a:extLst>
+            <a:ext uri="{C572A759-6A51-4108-AA02-DFA0A04FC94B}">
+              <ma14:wrappingTextBoxFlag xmlns:ma14="http://schemas.microsoft.com/office/mac/drawingml/2011/main" val="0"/>
+            </a:ext>
+          </a:extLst>
+        </p:spPr>
+        <p:txBody>
+          <a:bodyPr/>
+          <a:lstStyle>
+            <a:lvl1pPr>
+              <a:defRPr sz="900">
+                <a:solidFill>
+                  <a:srgbClr val="1B3A6B"/>
+                </a:solidFill>
+                <a:latin typeface="Arial"/>
+                <a:ea typeface="Arial"/>
+                <a:cs typeface="Arial"/>
+              </a:defRPr>
+            </a:lvl1pPr>
+          </a:lstStyle>
+          <a:p>
+            <a:pPr algn="r"/>
+            <a:fld id="{F7021451-1387-4CA6-816F-3879F97B5CBC}" type="slidenum">
+              <a:rPr b="1" lang="en-US"/>
+              <a:t>11</a:t>
+            </a:fld>
+            <a:endParaRPr lang="en-US"/>
           </a:p>
         </p:txBody>
       </p:sp>
@@ -5210,7 +5402,7 @@
         </p:blipFill>
         <p:spPr>
           <a:xfrm>
-            <a:off x="411480" y="6547104"/>
+            <a:off x="548640" y="6547104"/>
             <a:ext cx="274320" cy="274320"/>
           </a:xfrm>
           <a:prstGeom prst="rect">
@@ -5226,7 +5418,7 @@
         </p:nvSpPr>
         <p:spPr>
           <a:xfrm>
-            <a:off x="749808" y="6528816"/>
+            <a:off x="886968" y="6528816"/>
             <a:ext cx="6400800" cy="310896"/>
           </a:xfrm>
           <a:prstGeom prst="rect">
@@ -5266,7 +5458,7 @@
         <p:spPr>
           <a:xfrm>
             <a:off x="7132320" y="6528816"/>
-            <a:ext cx="4663440" cy="310896"/>
+            <a:ext cx="4023360" cy="310896"/>
           </a:xfrm>
           <a:prstGeom prst="rect">
             <a:avLst/>
@@ -5304,7 +5496,7 @@
         </p:nvSpPr>
         <p:spPr>
           <a:xfrm>
-            <a:off x="411480" y="384048"/>
+            <a:off x="548640" y="384048"/>
             <a:ext cx="82296" cy="658368"/>
           </a:xfrm>
           <a:prstGeom prst="rect">
@@ -5324,7 +5516,7 @@
         </p:nvSpPr>
         <p:spPr>
           <a:xfrm>
-            <a:off x="640080" y="292608"/>
+            <a:off x="777240" y="292608"/>
             <a:ext cx="10972800" cy="274320"/>
           </a:xfrm>
           <a:prstGeom prst="rect">
@@ -5363,8 +5555,8 @@
         </p:nvSpPr>
         <p:spPr>
           <a:xfrm>
-            <a:off x="640080" y="530352"/>
-            <a:ext cx="11155680" cy="566928"/>
+            <a:off x="777240" y="530352"/>
+            <a:ext cx="10881360" cy="566928"/>
           </a:xfrm>
           <a:prstGeom prst="rect">
             <a:avLst/>
@@ -5404,12 +5596,12 @@
         </p:nvSpPr>
         <p:spPr>
           <a:xfrm>
-            <a:off x="411480" y="1325880"/>
-            <a:ext cx="3642360" cy="4892040"/>
+            <a:off x="548640" y="1325880"/>
+            <a:ext cx="3544824" cy="4892040"/>
           </a:xfrm>
           <a:prstGeom prst="roundRect">
             <a:avLst>
-              <a:gd name="adj" fmla="val 2008"/>
+              <a:gd name="adj" fmla="val 2064"/>
             </a:avLst>
           </a:prstGeom>
           <a:solidFill>
@@ -5438,7 +5630,7 @@
         </p:nvSpPr>
         <p:spPr>
           <a:xfrm>
-            <a:off x="594360" y="1508760"/>
+            <a:off x="731520" y="1508760"/>
             <a:ext cx="457200" cy="457200"/>
           </a:xfrm>
           <a:prstGeom prst="ellipse">
@@ -5458,7 +5650,7 @@
         </p:nvSpPr>
         <p:spPr>
           <a:xfrm>
-            <a:off x="594360" y="1508760"/>
+            <a:off x="731520" y="1508760"/>
             <a:ext cx="457200" cy="457200"/>
           </a:xfrm>
           <a:prstGeom prst="rect">
@@ -5497,8 +5689,8 @@
         </p:nvSpPr>
         <p:spPr>
           <a:xfrm>
-            <a:off x="1188720" y="1435608"/>
-            <a:ext cx="2727960" cy="4672584"/>
+            <a:off x="1325880" y="1435608"/>
+            <a:ext cx="2630424" cy="4672584"/>
           </a:xfrm>
           <a:prstGeom prst="rect">
             <a:avLst/>
@@ -5538,12 +5730,12 @@
         </p:nvSpPr>
         <p:spPr>
           <a:xfrm>
-            <a:off x="4282440" y="1325880"/>
-            <a:ext cx="3642360" cy="4892040"/>
+            <a:off x="4322064" y="1325880"/>
+            <a:ext cx="3544824" cy="4892040"/>
           </a:xfrm>
           <a:prstGeom prst="roundRect">
             <a:avLst>
-              <a:gd name="adj" fmla="val 2008"/>
+              <a:gd name="adj" fmla="val 2064"/>
             </a:avLst>
           </a:prstGeom>
           <a:solidFill>
@@ -5572,7 +5764,7 @@
         </p:nvSpPr>
         <p:spPr>
           <a:xfrm>
-            <a:off x="4465320" y="1508760"/>
+            <a:off x="4504944" y="1508760"/>
             <a:ext cx="457200" cy="457200"/>
           </a:xfrm>
           <a:prstGeom prst="ellipse">
@@ -5592,7 +5784,7 @@
         </p:nvSpPr>
         <p:spPr>
           <a:xfrm>
-            <a:off x="4465320" y="1508760"/>
+            <a:off x="4504944" y="1508760"/>
             <a:ext cx="457200" cy="457200"/>
           </a:xfrm>
           <a:prstGeom prst="rect">
@@ -5631,8 +5823,8 @@
         </p:nvSpPr>
         <p:spPr>
           <a:xfrm>
-            <a:off x="5059680" y="1435608"/>
-            <a:ext cx="2727960" cy="4672584"/>
+            <a:off x="5099304" y="1435608"/>
+            <a:ext cx="2630424" cy="4672584"/>
           </a:xfrm>
           <a:prstGeom prst="rect">
             <a:avLst/>
@@ -5672,12 +5864,12 @@
         </p:nvSpPr>
         <p:spPr>
           <a:xfrm>
-            <a:off x="8153400" y="1325880"/>
-            <a:ext cx="3642360" cy="4892040"/>
+            <a:off x="8095488" y="1325880"/>
+            <a:ext cx="3544824" cy="4892040"/>
           </a:xfrm>
           <a:prstGeom prst="roundRect">
             <a:avLst>
-              <a:gd name="adj" fmla="val 2008"/>
+              <a:gd name="adj" fmla="val 2064"/>
             </a:avLst>
           </a:prstGeom>
           <a:solidFill>
@@ -5706,7 +5898,7 @@
         </p:nvSpPr>
         <p:spPr>
           <a:xfrm>
-            <a:off x="8336280" y="1508760"/>
+            <a:off x="8278368" y="1508760"/>
             <a:ext cx="457200" cy="457200"/>
           </a:xfrm>
           <a:prstGeom prst="ellipse">
@@ -5726,7 +5918,7 @@
         </p:nvSpPr>
         <p:spPr>
           <a:xfrm>
-            <a:off x="8336280" y="1508760"/>
+            <a:off x="8278368" y="1508760"/>
             <a:ext cx="457200" cy="457200"/>
           </a:xfrm>
           <a:prstGeom prst="rect">
@@ -5765,8 +5957,8 @@
         </p:nvSpPr>
         <p:spPr>
           <a:xfrm>
-            <a:off x="8930640" y="1435608"/>
-            <a:ext cx="2727960" cy="4672584"/>
+            <a:off x="8872728" y="1435608"/>
+            <a:ext cx="2630424" cy="4672584"/>
           </a:xfrm>
           <a:prstGeom prst="rect">
             <a:avLst/>
@@ -5795,6 +5987,54 @@
               <a:t>registre e protocole</a:t>
             </a:r>
             <a:endParaRPr lang="en-US" sz="1800" dirty="0"/>
+          </a:p>
+        </p:txBody>
+      </p:sp>
+      <p:sp>
+        <p:nvSpPr>
+          <p:cNvPr id="25" name="Slide Number Placeholder 0"/>
+          <p:cNvSpPr>
+            <a:spLocks noGrp="1"/>
+          </p:cNvSpPr>
+          <p:nvPr>
+            <p:ph type="sldNum" sz="quarter" idx="4294967295"/>
+          </p:nvPr>
+        </p:nvSpPr>
+        <p:spPr>
+          <a:xfrm>
+            <a:off x="11292840" y="6556248"/>
+            <a:ext cx="548640" cy="256032"/>
+          </a:xfrm>
+          <a:prstGeom prst="rect">
+            <a:avLst/>
+          </a:prstGeom>
+          <a:extLst>
+            <a:ext uri="{C572A759-6A51-4108-AA02-DFA0A04FC94B}">
+              <ma14:wrappingTextBoxFlag xmlns:ma14="http://schemas.microsoft.com/office/mac/drawingml/2011/main" val="0"/>
+            </a:ext>
+          </a:extLst>
+        </p:spPr>
+        <p:txBody>
+          <a:bodyPr/>
+          <a:lstStyle>
+            <a:lvl1pPr>
+              <a:defRPr sz="900">
+                <a:solidFill>
+                  <a:srgbClr val="1B3A6B"/>
+                </a:solidFill>
+                <a:latin typeface="Arial"/>
+                <a:ea typeface="Arial"/>
+                <a:cs typeface="Arial"/>
+              </a:defRPr>
+            </a:lvl1pPr>
+          </a:lstStyle>
+          <a:p>
+            <a:pPr algn="r"/>
+            <a:fld id="{F7021451-1387-4CA6-816F-3879F97B5CBC}" type="slidenum">
+              <a:rPr b="1" lang="en-US"/>
+              <a:t>12</a:t>
+            </a:fld>
+            <a:endParaRPr lang="en-US"/>
           </a:p>
         </p:txBody>
       </p:sp>
@@ -5858,6 +6098,45 @@
         </p:nvSpPr>
         <p:spPr>
           <a:xfrm>
+            <a:off x="457200" y="548640"/>
+            <a:ext cx="3474720" cy="1737360"/>
+          </a:xfrm>
+          <a:prstGeom prst="rect">
+            <a:avLst/>
+          </a:prstGeom>
+          <a:noFill/>
+          <a:ln/>
+        </p:spPr>
+        <p:txBody>
+          <a:bodyPr wrap="square" rtlCol="0" anchor="ctr"/>
+          <a:lstStyle/>
+          <a:p>
+            <a:pPr indent="0" marL="0">
+              <a:buNone/>
+            </a:pPr>
+            <a:r>
+              <a:rPr lang="en-US" sz="11000" b="1" dirty="0">
+                <a:solidFill>
+                  <a:srgbClr val="11396F"/>
+                </a:solidFill>
+                <a:latin typeface="Arial" pitchFamily="34" charset="0"/>
+                <a:ea typeface="Arial" pitchFamily="34" charset="-122"/>
+                <a:cs typeface="Arial" pitchFamily="34" charset="-120"/>
+              </a:rPr>
+              <a:t>03</a:t>
+            </a:r>
+            <a:endParaRPr lang="en-US" sz="11000" dirty="0"/>
+          </a:p>
+        </p:txBody>
+      </p:sp>
+      <p:sp>
+        <p:nvSpPr>
+          <p:cNvPr id="4" name="Text 2"/>
+          <p:cNvSpPr/>
+          <p:nvPr/>
+        </p:nvSpPr>
+        <p:spPr>
+          <a:xfrm>
             <a:off x="548640" y="2194560"/>
             <a:ext cx="3291840" cy="548640"/>
           </a:xfrm>
@@ -5891,7 +6170,46 @@
       </p:sp>
       <p:sp>
         <p:nvSpPr>
-          <p:cNvPr id="4" name="Text 2"/>
+          <p:cNvPr id="5" name="Text 3"/>
+          <p:cNvSpPr/>
+          <p:nvPr/>
+        </p:nvSpPr>
+        <p:spPr>
+          <a:xfrm>
+            <a:off x="548640" y="3200400"/>
+            <a:ext cx="3383280" cy="457200"/>
+          </a:xfrm>
+          <a:prstGeom prst="rect">
+            <a:avLst/>
+          </a:prstGeom>
+          <a:noFill/>
+          <a:ln/>
+        </p:spPr>
+        <p:txBody>
+          <a:bodyPr wrap="square" rtlCol="0" anchor="ctr"/>
+          <a:lstStyle/>
+          <a:p>
+            <a:pPr indent="0" marL="0">
+              <a:buNone/>
+            </a:pPr>
+            <a:r>
+              <a:rPr lang="en-US" sz="1100" dirty="0">
+                <a:solidFill>
+                  <a:srgbClr val="C7D2E3"/>
+                </a:solidFill>
+                <a:latin typeface="Arial" pitchFamily="34" charset="0"/>
+                <a:ea typeface="Arial" pitchFamily="34" charset="-122"/>
+                <a:cs typeface="Arial" pitchFamily="34" charset="-120"/>
+              </a:rPr>
+              <a:t>M7 · Etapa 3 · Operação ponta a ponta</a:t>
+            </a:r>
+            <a:endParaRPr lang="en-US" sz="1100" dirty="0"/>
+          </a:p>
+        </p:txBody>
+      </p:sp>
+      <p:sp>
+        <p:nvSpPr>
+          <p:cNvPr id="6" name="Text 4"/>
           <p:cNvSpPr/>
           <p:nvPr/>
         </p:nvSpPr>
@@ -5930,7 +6248,7 @@
       </p:sp>
       <p:pic>
         <p:nvPicPr>
-          <p:cNvPr id="5" name="Image 0" descr="/www/wwwroot/rexar/gdsolar/docs/curso/slides/assets/logo-gdsolar.png">    </p:cNvPr>
+          <p:cNvPr id="7" name="Image 0" descr="/www/wwwroot/rexar/gdsolar/docs/curso/slides/assets/logo-gdsolar.png">    </p:cNvPr>
           <p:cNvPicPr>
             <a:picLocks noChangeAspect="1"/>
           </p:cNvPicPr>
@@ -5954,7 +6272,7 @@
       </p:pic>
       <p:sp>
         <p:nvSpPr>
-          <p:cNvPr id="6" name="Text 3"/>
+          <p:cNvPr id="8" name="Text 5"/>
           <p:cNvSpPr/>
           <p:nvPr/>
         </p:nvSpPr>
@@ -5995,7 +6313,7 @@
       </p:sp>
       <p:sp>
         <p:nvSpPr>
-          <p:cNvPr id="7" name="Text 4"/>
+          <p:cNvPr id="9" name="Text 6"/>
           <p:cNvSpPr/>
           <p:nvPr/>
         </p:nvSpPr>
@@ -6036,7 +6354,7 @@
       </p:sp>
       <p:sp>
         <p:nvSpPr>
-          <p:cNvPr id="8" name="Text 5"/>
+          <p:cNvPr id="10" name="Text 7"/>
           <p:cNvSpPr/>
           <p:nvPr/>
         </p:nvSpPr>
@@ -6194,7 +6512,7 @@
         </p:blipFill>
         <p:spPr>
           <a:xfrm>
-            <a:off x="411480" y="6547104"/>
+            <a:off x="548640" y="6547104"/>
             <a:ext cx="274320" cy="274320"/>
           </a:xfrm>
           <a:prstGeom prst="rect">
@@ -6210,7 +6528,7 @@
         </p:nvSpPr>
         <p:spPr>
           <a:xfrm>
-            <a:off x="749808" y="6528816"/>
+            <a:off x="886968" y="6528816"/>
             <a:ext cx="6400800" cy="310896"/>
           </a:xfrm>
           <a:prstGeom prst="rect">
@@ -6250,7 +6568,7 @@
         <p:spPr>
           <a:xfrm>
             <a:off x="7132320" y="6528816"/>
-            <a:ext cx="4663440" cy="310896"/>
+            <a:ext cx="4023360" cy="310896"/>
           </a:xfrm>
           <a:prstGeom prst="rect">
             <a:avLst/>
@@ -6288,7 +6606,7 @@
         </p:nvSpPr>
         <p:spPr>
           <a:xfrm>
-            <a:off x="411480" y="384048"/>
+            <a:off x="548640" y="384048"/>
             <a:ext cx="82296" cy="658368"/>
           </a:xfrm>
           <a:prstGeom prst="rect">
@@ -6308,7 +6626,7 @@
         </p:nvSpPr>
         <p:spPr>
           <a:xfrm>
-            <a:off x="640080" y="292608"/>
+            <a:off x="777240" y="292608"/>
             <a:ext cx="10972800" cy="274320"/>
           </a:xfrm>
           <a:prstGeom prst="rect">
@@ -6347,8 +6665,8 @@
         </p:nvSpPr>
         <p:spPr>
           <a:xfrm>
-            <a:off x="640080" y="530352"/>
-            <a:ext cx="11155680" cy="566928"/>
+            <a:off x="777240" y="530352"/>
+            <a:ext cx="10881360" cy="566928"/>
           </a:xfrm>
           <a:prstGeom prst="rect">
             <a:avLst/>
@@ -6388,8 +6706,8 @@
         </p:nvSpPr>
         <p:spPr>
           <a:xfrm>
-            <a:off x="411480" y="2651760"/>
-            <a:ext cx="2944368" cy="1463040"/>
+            <a:off x="548640" y="2651760"/>
+            <a:ext cx="2852928" cy="1463040"/>
           </a:xfrm>
           <a:prstGeom prst="chevron">
             <a:avLst/>
@@ -6413,8 +6731,8 @@
         </p:nvSpPr>
         <p:spPr>
           <a:xfrm>
-            <a:off x="731520" y="2651760"/>
-            <a:ext cx="2423160" cy="1463040"/>
+            <a:off x="868680" y="2651760"/>
+            <a:ext cx="2331720" cy="1463040"/>
           </a:xfrm>
           <a:prstGeom prst="rect">
             <a:avLst/>
@@ -6454,8 +6772,8 @@
         </p:nvSpPr>
         <p:spPr>
           <a:xfrm>
-            <a:off x="3246120" y="2651760"/>
-            <a:ext cx="2944368" cy="1463040"/>
+            <a:off x="3291840" y="2651760"/>
+            <a:ext cx="2852928" cy="1463040"/>
           </a:xfrm>
           <a:prstGeom prst="chevron">
             <a:avLst/>
@@ -6479,8 +6797,8 @@
         </p:nvSpPr>
         <p:spPr>
           <a:xfrm>
-            <a:off x="3566160" y="2651760"/>
-            <a:ext cx="2423160" cy="1463040"/>
+            <a:off x="3611880" y="2651760"/>
+            <a:ext cx="2331720" cy="1463040"/>
           </a:xfrm>
           <a:prstGeom prst="rect">
             <a:avLst/>
@@ -6520,8 +6838,8 @@
         </p:nvSpPr>
         <p:spPr>
           <a:xfrm>
-            <a:off x="6080760" y="2651760"/>
-            <a:ext cx="2944368" cy="1463040"/>
+            <a:off x="6035040" y="2651760"/>
+            <a:ext cx="2852928" cy="1463040"/>
           </a:xfrm>
           <a:prstGeom prst="chevron">
             <a:avLst/>
@@ -6545,8 +6863,8 @@
         </p:nvSpPr>
         <p:spPr>
           <a:xfrm>
-            <a:off x="6400800" y="2651760"/>
-            <a:ext cx="2423160" cy="1463040"/>
+            <a:off x="6355080" y="2651760"/>
+            <a:ext cx="2331720" cy="1463040"/>
           </a:xfrm>
           <a:prstGeom prst="rect">
             <a:avLst/>
@@ -6586,8 +6904,8 @@
         </p:nvSpPr>
         <p:spPr>
           <a:xfrm>
-            <a:off x="8915400" y="2651760"/>
-            <a:ext cx="2944368" cy="1463040"/>
+            <a:off x="8778240" y="2651760"/>
+            <a:ext cx="2852928" cy="1463040"/>
           </a:xfrm>
           <a:prstGeom prst="chevron">
             <a:avLst/>
@@ -6611,8 +6929,8 @@
         </p:nvSpPr>
         <p:spPr>
           <a:xfrm>
-            <a:off x="9235440" y="2651760"/>
-            <a:ext cx="2423160" cy="1463040"/>
+            <a:off x="9098280" y="2651760"/>
+            <a:ext cx="2331720" cy="1463040"/>
           </a:xfrm>
           <a:prstGeom prst="rect">
             <a:avLst/>
@@ -6641,6 +6959,54 @@
               <a:t>revisão</a:t>
             </a:r>
             <a:endParaRPr lang="en-US" sz="1500" dirty="0"/>
+          </a:p>
+        </p:txBody>
+      </p:sp>
+      <p:sp>
+        <p:nvSpPr>
+          <p:cNvPr id="25" name="Slide Number Placeholder 0"/>
+          <p:cNvSpPr>
+            <a:spLocks noGrp="1"/>
+          </p:cNvSpPr>
+          <p:nvPr>
+            <p:ph type="sldNum" sz="quarter" idx="4294967295"/>
+          </p:nvPr>
+        </p:nvSpPr>
+        <p:spPr>
+          <a:xfrm>
+            <a:off x="11292840" y="6556248"/>
+            <a:ext cx="548640" cy="256032"/>
+          </a:xfrm>
+          <a:prstGeom prst="rect">
+            <a:avLst/>
+          </a:prstGeom>
+          <a:extLst>
+            <a:ext uri="{C572A759-6A51-4108-AA02-DFA0A04FC94B}">
+              <ma14:wrappingTextBoxFlag xmlns:ma14="http://schemas.microsoft.com/office/mac/drawingml/2011/main" val="0"/>
+            </a:ext>
+          </a:extLst>
+        </p:spPr>
+        <p:txBody>
+          <a:bodyPr/>
+          <a:lstStyle>
+            <a:lvl1pPr>
+              <a:defRPr sz="900">
+                <a:solidFill>
+                  <a:srgbClr val="1B3A6B"/>
+                </a:solidFill>
+                <a:latin typeface="Arial"/>
+                <a:ea typeface="Arial"/>
+                <a:cs typeface="Arial"/>
+              </a:defRPr>
+            </a:lvl1pPr>
+          </a:lstStyle>
+          <a:p>
+            <a:pPr algn="r"/>
+            <a:fld id="{F7021451-1387-4CA6-816F-3879F97B5CBC}" type="slidenum">
+              <a:rPr b="1" lang="en-US"/>
+              <a:t>14</a:t>
+            </a:fld>
+            <a:endParaRPr lang="en-US"/>
           </a:p>
         </p:txBody>
       </p:sp>
@@ -6717,7 +7083,7 @@
         </p:blipFill>
         <p:spPr>
           <a:xfrm>
-            <a:off x="411480" y="6547104"/>
+            <a:off x="548640" y="6547104"/>
             <a:ext cx="274320" cy="274320"/>
           </a:xfrm>
           <a:prstGeom prst="rect">
@@ -6733,7 +7099,7 @@
         </p:nvSpPr>
         <p:spPr>
           <a:xfrm>
-            <a:off x="749808" y="6528816"/>
+            <a:off x="886968" y="6528816"/>
             <a:ext cx="6400800" cy="310896"/>
           </a:xfrm>
           <a:prstGeom prst="rect">
@@ -6773,7 +7139,7 @@
         <p:spPr>
           <a:xfrm>
             <a:off x="7132320" y="6528816"/>
-            <a:ext cx="4663440" cy="310896"/>
+            <a:ext cx="4023360" cy="310896"/>
           </a:xfrm>
           <a:prstGeom prst="rect">
             <a:avLst/>
@@ -6811,7 +7177,7 @@
         </p:nvSpPr>
         <p:spPr>
           <a:xfrm>
-            <a:off x="411480" y="384048"/>
+            <a:off x="548640" y="384048"/>
             <a:ext cx="82296" cy="658368"/>
           </a:xfrm>
           <a:prstGeom prst="rect">
@@ -6831,7 +7197,7 @@
         </p:nvSpPr>
         <p:spPr>
           <a:xfrm>
-            <a:off x="640080" y="292608"/>
+            <a:off x="777240" y="292608"/>
             <a:ext cx="10972800" cy="274320"/>
           </a:xfrm>
           <a:prstGeom prst="rect">
@@ -6870,8 +7236,8 @@
         </p:nvSpPr>
         <p:spPr>
           <a:xfrm>
-            <a:off x="640080" y="530352"/>
-            <a:ext cx="11155680" cy="566928"/>
+            <a:off x="777240" y="530352"/>
+            <a:ext cx="10881360" cy="566928"/>
           </a:xfrm>
           <a:prstGeom prst="rect">
             <a:avLst/>
@@ -6911,8 +7277,8 @@
         </p:nvSpPr>
         <p:spPr>
           <a:xfrm>
-            <a:off x="411480" y="1325880"/>
-            <a:ext cx="5577840" cy="2331720"/>
+            <a:off x="548640" y="1325880"/>
+            <a:ext cx="5431536" cy="2331720"/>
           </a:xfrm>
           <a:prstGeom prst="roundRect">
             <a:avLst>
@@ -6945,7 +7311,7 @@
         </p:nvSpPr>
         <p:spPr>
           <a:xfrm>
-            <a:off x="594360" y="1508760"/>
+            <a:off x="731520" y="1508760"/>
             <a:ext cx="457200" cy="457200"/>
           </a:xfrm>
           <a:prstGeom prst="ellipse">
@@ -6965,7 +7331,7 @@
         </p:nvSpPr>
         <p:spPr>
           <a:xfrm>
-            <a:off x="594360" y="1508760"/>
+            <a:off x="731520" y="1508760"/>
             <a:ext cx="457200" cy="457200"/>
           </a:xfrm>
           <a:prstGeom prst="rect">
@@ -7004,8 +7370,8 @@
         </p:nvSpPr>
         <p:spPr>
           <a:xfrm>
-            <a:off x="1188720" y="1435608"/>
-            <a:ext cx="4663440" cy="2112264"/>
+            <a:off x="1325880" y="1435608"/>
+            <a:ext cx="4517136" cy="2112264"/>
           </a:xfrm>
           <a:prstGeom prst="rect">
             <a:avLst/>
@@ -7045,8 +7411,8 @@
         </p:nvSpPr>
         <p:spPr>
           <a:xfrm>
-            <a:off x="6217920" y="1325880"/>
-            <a:ext cx="5577840" cy="2331720"/>
+            <a:off x="6208776" y="1325880"/>
+            <a:ext cx="5431536" cy="2331720"/>
           </a:xfrm>
           <a:prstGeom prst="roundRect">
             <a:avLst>
@@ -7079,7 +7445,7 @@
         </p:nvSpPr>
         <p:spPr>
           <a:xfrm>
-            <a:off x="6400800" y="1508760"/>
+            <a:off x="6391656" y="1508760"/>
             <a:ext cx="457200" cy="457200"/>
           </a:xfrm>
           <a:prstGeom prst="ellipse">
@@ -7099,7 +7465,7 @@
         </p:nvSpPr>
         <p:spPr>
           <a:xfrm>
-            <a:off x="6400800" y="1508760"/>
+            <a:off x="6391656" y="1508760"/>
             <a:ext cx="457200" cy="457200"/>
           </a:xfrm>
           <a:prstGeom prst="rect">
@@ -7138,8 +7504,8 @@
         </p:nvSpPr>
         <p:spPr>
           <a:xfrm>
-            <a:off x="6995160" y="1435608"/>
-            <a:ext cx="4663440" cy="2112264"/>
+            <a:off x="6986016" y="1435608"/>
+            <a:ext cx="4517136" cy="2112264"/>
           </a:xfrm>
           <a:prstGeom prst="rect">
             <a:avLst/>
@@ -7179,8 +7545,8 @@
         </p:nvSpPr>
         <p:spPr>
           <a:xfrm>
-            <a:off x="411480" y="3886200"/>
-            <a:ext cx="5577840" cy="2331720"/>
+            <a:off x="548640" y="3886200"/>
+            <a:ext cx="5431536" cy="2331720"/>
           </a:xfrm>
           <a:prstGeom prst="roundRect">
             <a:avLst>
@@ -7213,7 +7579,7 @@
         </p:nvSpPr>
         <p:spPr>
           <a:xfrm>
-            <a:off x="594360" y="4069080"/>
+            <a:off x="731520" y="4069080"/>
             <a:ext cx="457200" cy="457200"/>
           </a:xfrm>
           <a:prstGeom prst="ellipse">
@@ -7233,7 +7599,7 @@
         </p:nvSpPr>
         <p:spPr>
           <a:xfrm>
-            <a:off x="594360" y="4069080"/>
+            <a:off x="731520" y="4069080"/>
             <a:ext cx="457200" cy="457200"/>
           </a:xfrm>
           <a:prstGeom prst="rect">
@@ -7272,8 +7638,8 @@
         </p:nvSpPr>
         <p:spPr>
           <a:xfrm>
-            <a:off x="1188720" y="3995928"/>
-            <a:ext cx="4663440" cy="2112264"/>
+            <a:off x="1325880" y="3995928"/>
+            <a:ext cx="4517136" cy="2112264"/>
           </a:xfrm>
           <a:prstGeom prst="rect">
             <a:avLst/>
@@ -7313,8 +7679,8 @@
         </p:nvSpPr>
         <p:spPr>
           <a:xfrm>
-            <a:off x="6217920" y="3886200"/>
-            <a:ext cx="5577840" cy="2331720"/>
+            <a:off x="6208776" y="3886200"/>
+            <a:ext cx="5431536" cy="2331720"/>
           </a:xfrm>
           <a:prstGeom prst="roundRect">
             <a:avLst>
@@ -7347,7 +7713,7 @@
         </p:nvSpPr>
         <p:spPr>
           <a:xfrm>
-            <a:off x="6400800" y="4069080"/>
+            <a:off x="6391656" y="4069080"/>
             <a:ext cx="457200" cy="457200"/>
           </a:xfrm>
           <a:prstGeom prst="ellipse">
@@ -7367,7 +7733,7 @@
         </p:nvSpPr>
         <p:spPr>
           <a:xfrm>
-            <a:off x="6400800" y="4069080"/>
+            <a:off x="6391656" y="4069080"/>
             <a:ext cx="457200" cy="457200"/>
           </a:xfrm>
           <a:prstGeom prst="rect">
@@ -7406,8 +7772,8 @@
         </p:nvSpPr>
         <p:spPr>
           <a:xfrm>
-            <a:off x="6995160" y="3995928"/>
-            <a:ext cx="4663440" cy="2112264"/>
+            <a:off x="6986016" y="3995928"/>
+            <a:ext cx="4517136" cy="2112264"/>
           </a:xfrm>
           <a:prstGeom prst="rect">
             <a:avLst/>
@@ -7436,6 +7802,54 @@
               <a:t>layout não reconhecido</a:t>
             </a:r>
             <a:endParaRPr lang="en-US" sz="1800" dirty="0"/>
+          </a:p>
+        </p:txBody>
+      </p:sp>
+      <p:sp>
+        <p:nvSpPr>
+          <p:cNvPr id="25" name="Slide Number Placeholder 0"/>
+          <p:cNvSpPr>
+            <a:spLocks noGrp="1"/>
+          </p:cNvSpPr>
+          <p:nvPr>
+            <p:ph type="sldNum" sz="quarter" idx="4294967295"/>
+          </p:nvPr>
+        </p:nvSpPr>
+        <p:spPr>
+          <a:xfrm>
+            <a:off x="11292840" y="6556248"/>
+            <a:ext cx="548640" cy="256032"/>
+          </a:xfrm>
+          <a:prstGeom prst="rect">
+            <a:avLst/>
+          </a:prstGeom>
+          <a:extLst>
+            <a:ext uri="{C572A759-6A51-4108-AA02-DFA0A04FC94B}">
+              <ma14:wrappingTextBoxFlag xmlns:ma14="http://schemas.microsoft.com/office/mac/drawingml/2011/main" val="0"/>
+            </a:ext>
+          </a:extLst>
+        </p:spPr>
+        <p:txBody>
+          <a:bodyPr/>
+          <a:lstStyle>
+            <a:lvl1pPr>
+              <a:defRPr sz="900">
+                <a:solidFill>
+                  <a:srgbClr val="1B3A6B"/>
+                </a:solidFill>
+                <a:latin typeface="Arial"/>
+                <a:ea typeface="Arial"/>
+                <a:cs typeface="Arial"/>
+              </a:defRPr>
+            </a:lvl1pPr>
+          </a:lstStyle>
+          <a:p>
+            <a:pPr algn="r"/>
+            <a:fld id="{F7021451-1387-4CA6-816F-3879F97B5CBC}" type="slidenum">
+              <a:rPr b="1" lang="en-US"/>
+              <a:t>15</a:t>
+            </a:fld>
+            <a:endParaRPr lang="en-US"/>
           </a:p>
         </p:txBody>
       </p:sp>
@@ -7512,7 +7926,7 @@
         </p:blipFill>
         <p:spPr>
           <a:xfrm>
-            <a:off x="411480" y="6547104"/>
+            <a:off x="548640" y="6547104"/>
             <a:ext cx="274320" cy="274320"/>
           </a:xfrm>
           <a:prstGeom prst="rect">
@@ -7528,7 +7942,7 @@
         </p:nvSpPr>
         <p:spPr>
           <a:xfrm>
-            <a:off x="749808" y="6528816"/>
+            <a:off x="886968" y="6528816"/>
             <a:ext cx="6400800" cy="310896"/>
           </a:xfrm>
           <a:prstGeom prst="rect">
@@ -7568,7 +7982,7 @@
         <p:spPr>
           <a:xfrm>
             <a:off x="7132320" y="6528816"/>
-            <a:ext cx="4663440" cy="310896"/>
+            <a:ext cx="4023360" cy="310896"/>
           </a:xfrm>
           <a:prstGeom prst="rect">
             <a:avLst/>
@@ -7606,7 +8020,7 @@
         </p:nvSpPr>
         <p:spPr>
           <a:xfrm>
-            <a:off x="411480" y="384048"/>
+            <a:off x="548640" y="384048"/>
             <a:ext cx="82296" cy="658368"/>
           </a:xfrm>
           <a:prstGeom prst="rect">
@@ -7626,7 +8040,7 @@
         </p:nvSpPr>
         <p:spPr>
           <a:xfrm>
-            <a:off x="640080" y="292608"/>
+            <a:off x="777240" y="292608"/>
             <a:ext cx="10972800" cy="274320"/>
           </a:xfrm>
           <a:prstGeom prst="rect">
@@ -7665,8 +8079,8 @@
         </p:nvSpPr>
         <p:spPr>
           <a:xfrm>
-            <a:off x="640080" y="530352"/>
-            <a:ext cx="11155680" cy="566928"/>
+            <a:off x="777240" y="530352"/>
+            <a:ext cx="10881360" cy="566928"/>
           </a:xfrm>
           <a:prstGeom prst="rect">
             <a:avLst/>
@@ -7706,8 +8120,8 @@
         </p:nvSpPr>
         <p:spPr>
           <a:xfrm>
-            <a:off x="411480" y="1325880"/>
-            <a:ext cx="5577840" cy="4937760"/>
+            <a:off x="548640" y="1325880"/>
+            <a:ext cx="5431536" cy="4937760"/>
           </a:xfrm>
           <a:prstGeom prst="roundRect">
             <a:avLst>
@@ -7733,7 +8147,7 @@
         </p:nvSpPr>
         <p:spPr>
           <a:xfrm>
-            <a:off x="594360" y="1508760"/>
+            <a:off x="731520" y="1508760"/>
             <a:ext cx="822960" cy="384048"/>
           </a:xfrm>
           <a:prstGeom prst="roundRect">
@@ -7755,7 +8169,7 @@
         </p:nvSpPr>
         <p:spPr>
           <a:xfrm>
-            <a:off x="594360" y="1508760"/>
+            <a:off x="731520" y="1508760"/>
             <a:ext cx="822960" cy="384048"/>
           </a:xfrm>
           <a:prstGeom prst="rect">
@@ -7794,8 +8208,8 @@
         </p:nvSpPr>
         <p:spPr>
           <a:xfrm>
-            <a:off x="1508760" y="1463040"/>
-            <a:ext cx="4343400" cy="502920"/>
+            <a:off x="1645920" y="1463040"/>
+            <a:ext cx="4197096" cy="502920"/>
           </a:xfrm>
           <a:prstGeom prst="rect">
             <a:avLst/>
@@ -7835,8 +8249,8 @@
         </p:nvSpPr>
         <p:spPr>
           <a:xfrm>
-            <a:off x="640080" y="2057400"/>
-            <a:ext cx="5120640" cy="4069080"/>
+            <a:off x="777240" y="2057400"/>
+            <a:ext cx="4974336" cy="4069080"/>
           </a:xfrm>
           <a:prstGeom prst="rect">
             <a:avLst/>
@@ -7910,8 +8324,8 @@
         </p:nvSpPr>
         <p:spPr>
           <a:xfrm>
-            <a:off x="6217920" y="1325880"/>
-            <a:ext cx="5577840" cy="4937760"/>
+            <a:off x="6208776" y="1325880"/>
+            <a:ext cx="5431536" cy="4937760"/>
           </a:xfrm>
           <a:prstGeom prst="roundRect">
             <a:avLst>
@@ -7937,7 +8351,7 @@
         </p:nvSpPr>
         <p:spPr>
           <a:xfrm>
-            <a:off x="6400800" y="1508760"/>
+            <a:off x="6391656" y="1508760"/>
             <a:ext cx="822960" cy="384048"/>
           </a:xfrm>
           <a:prstGeom prst="roundRect">
@@ -7959,7 +8373,7 @@
         </p:nvSpPr>
         <p:spPr>
           <a:xfrm>
-            <a:off x="6400800" y="1508760"/>
+            <a:off x="6391656" y="1508760"/>
             <a:ext cx="822960" cy="384048"/>
           </a:xfrm>
           <a:prstGeom prst="rect">
@@ -7998,8 +8412,8 @@
         </p:nvSpPr>
         <p:spPr>
           <a:xfrm>
-            <a:off x="7315200" y="1463040"/>
-            <a:ext cx="4343400" cy="502920"/>
+            <a:off x="7306056" y="1463040"/>
+            <a:ext cx="4197096" cy="502920"/>
           </a:xfrm>
           <a:prstGeom prst="rect">
             <a:avLst/>
@@ -8039,8 +8453,8 @@
         </p:nvSpPr>
         <p:spPr>
           <a:xfrm>
-            <a:off x="6446520" y="2057400"/>
-            <a:ext cx="5120640" cy="4069080"/>
+            <a:off x="6437376" y="2057400"/>
+            <a:ext cx="4974336" cy="4069080"/>
           </a:xfrm>
           <a:prstGeom prst="rect">
             <a:avLst/>
@@ -8069,6 +8483,54 @@
               <a:t>Histórico de Importação: cada execução, cada e-mail, cada erro</a:t>
             </a:r>
             <a:endParaRPr lang="en-US" sz="1500" dirty="0"/>
+          </a:p>
+        </p:txBody>
+      </p:sp>
+      <p:sp>
+        <p:nvSpPr>
+          <p:cNvPr id="25" name="Slide Number Placeholder 0"/>
+          <p:cNvSpPr>
+            <a:spLocks noGrp="1"/>
+          </p:cNvSpPr>
+          <p:nvPr>
+            <p:ph type="sldNum" sz="quarter" idx="4294967295"/>
+          </p:nvPr>
+        </p:nvSpPr>
+        <p:spPr>
+          <a:xfrm>
+            <a:off x="11292840" y="6556248"/>
+            <a:ext cx="548640" cy="256032"/>
+          </a:xfrm>
+          <a:prstGeom prst="rect">
+            <a:avLst/>
+          </a:prstGeom>
+          <a:extLst>
+            <a:ext uri="{C572A759-6A51-4108-AA02-DFA0A04FC94B}">
+              <ma14:wrappingTextBoxFlag xmlns:ma14="http://schemas.microsoft.com/office/mac/drawingml/2011/main" val="0"/>
+            </a:ext>
+          </a:extLst>
+        </p:spPr>
+        <p:txBody>
+          <a:bodyPr/>
+          <a:lstStyle>
+            <a:lvl1pPr>
+              <a:defRPr sz="900">
+                <a:solidFill>
+                  <a:srgbClr val="1B3A6B"/>
+                </a:solidFill>
+                <a:latin typeface="Arial"/>
+                <a:ea typeface="Arial"/>
+                <a:cs typeface="Arial"/>
+              </a:defRPr>
+            </a:lvl1pPr>
+          </a:lstStyle>
+          <a:p>
+            <a:pPr algn="r"/>
+            <a:fld id="{F7021451-1387-4CA6-816F-3879F97B5CBC}" type="slidenum">
+              <a:rPr b="1" lang="en-US"/>
+              <a:t>16</a:t>
+            </a:fld>
+            <a:endParaRPr lang="en-US"/>
           </a:p>
         </p:txBody>
       </p:sp>
@@ -8145,7 +8607,7 @@
         </p:blipFill>
         <p:spPr>
           <a:xfrm>
-            <a:off x="411480" y="6547104"/>
+            <a:off x="548640" y="6547104"/>
             <a:ext cx="274320" cy="274320"/>
           </a:xfrm>
           <a:prstGeom prst="rect">
@@ -8161,7 +8623,7 @@
         </p:nvSpPr>
         <p:spPr>
           <a:xfrm>
-            <a:off x="749808" y="6528816"/>
+            <a:off x="886968" y="6528816"/>
             <a:ext cx="6400800" cy="310896"/>
           </a:xfrm>
           <a:prstGeom prst="rect">
@@ -8201,7 +8663,7 @@
         <p:spPr>
           <a:xfrm>
             <a:off x="7132320" y="6528816"/>
-            <a:ext cx="4663440" cy="310896"/>
+            <a:ext cx="4023360" cy="310896"/>
           </a:xfrm>
           <a:prstGeom prst="rect">
             <a:avLst/>
@@ -8239,7 +8701,7 @@
         </p:nvSpPr>
         <p:spPr>
           <a:xfrm>
-            <a:off x="411480" y="384048"/>
+            <a:off x="548640" y="384048"/>
             <a:ext cx="82296" cy="658368"/>
           </a:xfrm>
           <a:prstGeom prst="rect">
@@ -8259,7 +8721,7 @@
         </p:nvSpPr>
         <p:spPr>
           <a:xfrm>
-            <a:off x="640080" y="292608"/>
+            <a:off x="777240" y="292608"/>
             <a:ext cx="10972800" cy="274320"/>
           </a:xfrm>
           <a:prstGeom prst="rect">
@@ -8298,8 +8760,8 @@
         </p:nvSpPr>
         <p:spPr>
           <a:xfrm>
-            <a:off x="640080" y="530352"/>
-            <a:ext cx="11155680" cy="566928"/>
+            <a:off x="777240" y="530352"/>
+            <a:ext cx="10881360" cy="566928"/>
           </a:xfrm>
           <a:prstGeom prst="rect">
             <a:avLst/>
@@ -8339,8 +8801,8 @@
         </p:nvSpPr>
         <p:spPr>
           <a:xfrm>
-            <a:off x="411480" y="1325880"/>
-            <a:ext cx="3642360" cy="2331720"/>
+            <a:off x="548640" y="1325880"/>
+            <a:ext cx="3544824" cy="2331720"/>
           </a:xfrm>
           <a:prstGeom prst="roundRect">
             <a:avLst>
@@ -8373,7 +8835,7 @@
         </p:nvSpPr>
         <p:spPr>
           <a:xfrm>
-            <a:off x="594360" y="1508760"/>
+            <a:off x="731520" y="1508760"/>
             <a:ext cx="457200" cy="457200"/>
           </a:xfrm>
           <a:prstGeom prst="ellipse">
@@ -8393,7 +8855,7 @@
         </p:nvSpPr>
         <p:spPr>
           <a:xfrm>
-            <a:off x="594360" y="1508760"/>
+            <a:off x="731520" y="1508760"/>
             <a:ext cx="457200" cy="457200"/>
           </a:xfrm>
           <a:prstGeom prst="rect">
@@ -8432,8 +8894,8 @@
         </p:nvSpPr>
         <p:spPr>
           <a:xfrm>
-            <a:off x="1188720" y="1435608"/>
-            <a:ext cx="2727960" cy="2112264"/>
+            <a:off x="1325880" y="1435608"/>
+            <a:ext cx="2630424" cy="2112264"/>
           </a:xfrm>
           <a:prstGeom prst="rect">
             <a:avLst/>
@@ -8473,8 +8935,8 @@
         </p:nvSpPr>
         <p:spPr>
           <a:xfrm>
-            <a:off x="4282440" y="1325880"/>
-            <a:ext cx="3642360" cy="2331720"/>
+            <a:off x="4322064" y="1325880"/>
+            <a:ext cx="3544824" cy="2331720"/>
           </a:xfrm>
           <a:prstGeom prst="roundRect">
             <a:avLst>
@@ -8507,7 +8969,7 @@
         </p:nvSpPr>
         <p:spPr>
           <a:xfrm>
-            <a:off x="4465320" y="1508760"/>
+            <a:off x="4504944" y="1508760"/>
             <a:ext cx="457200" cy="457200"/>
           </a:xfrm>
           <a:prstGeom prst="ellipse">
@@ -8527,7 +8989,7 @@
         </p:nvSpPr>
         <p:spPr>
           <a:xfrm>
-            <a:off x="4465320" y="1508760"/>
+            <a:off x="4504944" y="1508760"/>
             <a:ext cx="457200" cy="457200"/>
           </a:xfrm>
           <a:prstGeom prst="rect">
@@ -8566,8 +9028,8 @@
         </p:nvSpPr>
         <p:spPr>
           <a:xfrm>
-            <a:off x="5059680" y="1435608"/>
-            <a:ext cx="2727960" cy="2112264"/>
+            <a:off x="5099304" y="1435608"/>
+            <a:ext cx="2630424" cy="2112264"/>
           </a:xfrm>
           <a:prstGeom prst="rect">
             <a:avLst/>
@@ -8607,8 +9069,8 @@
         </p:nvSpPr>
         <p:spPr>
           <a:xfrm>
-            <a:off x="8153400" y="1325880"/>
-            <a:ext cx="3642360" cy="2331720"/>
+            <a:off x="8095488" y="1325880"/>
+            <a:ext cx="3544824" cy="2331720"/>
           </a:xfrm>
           <a:prstGeom prst="roundRect">
             <a:avLst>
@@ -8641,7 +9103,7 @@
         </p:nvSpPr>
         <p:spPr>
           <a:xfrm>
-            <a:off x="8336280" y="1508760"/>
+            <a:off x="8278368" y="1508760"/>
             <a:ext cx="457200" cy="457200"/>
           </a:xfrm>
           <a:prstGeom prst="ellipse">
@@ -8661,7 +9123,7 @@
         </p:nvSpPr>
         <p:spPr>
           <a:xfrm>
-            <a:off x="8336280" y="1508760"/>
+            <a:off x="8278368" y="1508760"/>
             <a:ext cx="457200" cy="457200"/>
           </a:xfrm>
           <a:prstGeom prst="rect">
@@ -8700,8 +9162,8 @@
         </p:nvSpPr>
         <p:spPr>
           <a:xfrm>
-            <a:off x="8930640" y="1435608"/>
-            <a:ext cx="2727960" cy="2112264"/>
+            <a:off x="8872728" y="1435608"/>
+            <a:ext cx="2630424" cy="2112264"/>
           </a:xfrm>
           <a:prstGeom prst="rect">
             <a:avLst/>
@@ -8741,8 +9203,8 @@
         </p:nvSpPr>
         <p:spPr>
           <a:xfrm>
-            <a:off x="411480" y="3886200"/>
-            <a:ext cx="3642360" cy="2331720"/>
+            <a:off x="548640" y="3886200"/>
+            <a:ext cx="3544824" cy="2331720"/>
           </a:xfrm>
           <a:prstGeom prst="roundRect">
             <a:avLst>
@@ -8775,7 +9237,7 @@
         </p:nvSpPr>
         <p:spPr>
           <a:xfrm>
-            <a:off x="594360" y="4069080"/>
+            <a:off x="731520" y="4069080"/>
             <a:ext cx="457200" cy="457200"/>
           </a:xfrm>
           <a:prstGeom prst="ellipse">
@@ -8795,7 +9257,7 @@
         </p:nvSpPr>
         <p:spPr>
           <a:xfrm>
-            <a:off x="594360" y="4069080"/>
+            <a:off x="731520" y="4069080"/>
             <a:ext cx="457200" cy="457200"/>
           </a:xfrm>
           <a:prstGeom prst="rect">
@@ -8834,8 +9296,8 @@
         </p:nvSpPr>
         <p:spPr>
           <a:xfrm>
-            <a:off x="1188720" y="3995928"/>
-            <a:ext cx="2727960" cy="2112264"/>
+            <a:off x="1325880" y="3995928"/>
+            <a:ext cx="2630424" cy="2112264"/>
           </a:xfrm>
           <a:prstGeom prst="rect">
             <a:avLst/>
@@ -8875,8 +9337,8 @@
         </p:nvSpPr>
         <p:spPr>
           <a:xfrm>
-            <a:off x="4282440" y="3886200"/>
-            <a:ext cx="3642360" cy="2331720"/>
+            <a:off x="4322064" y="3886200"/>
+            <a:ext cx="3544824" cy="2331720"/>
           </a:xfrm>
           <a:prstGeom prst="roundRect">
             <a:avLst>
@@ -8909,7 +9371,7 @@
         </p:nvSpPr>
         <p:spPr>
           <a:xfrm>
-            <a:off x="4465320" y="4069080"/>
+            <a:off x="4504944" y="4069080"/>
             <a:ext cx="457200" cy="457200"/>
           </a:xfrm>
           <a:prstGeom prst="ellipse">
@@ -8929,7 +9391,7 @@
         </p:nvSpPr>
         <p:spPr>
           <a:xfrm>
-            <a:off x="4465320" y="4069080"/>
+            <a:off x="4504944" y="4069080"/>
             <a:ext cx="457200" cy="457200"/>
           </a:xfrm>
           <a:prstGeom prst="rect">
@@ -8968,8 +9430,8 @@
         </p:nvSpPr>
         <p:spPr>
           <a:xfrm>
-            <a:off x="5059680" y="3995928"/>
-            <a:ext cx="2727960" cy="2112264"/>
+            <a:off x="5099304" y="3995928"/>
+            <a:ext cx="2630424" cy="2112264"/>
           </a:xfrm>
           <a:prstGeom prst="rect">
             <a:avLst/>
@@ -8998,6 +9460,54 @@
               <a:t>upload para exceções</a:t>
             </a:r>
             <a:endParaRPr lang="en-US" sz="1800" dirty="0"/>
+          </a:p>
+        </p:txBody>
+      </p:sp>
+      <p:sp>
+        <p:nvSpPr>
+          <p:cNvPr id="25" name="Slide Number Placeholder 0"/>
+          <p:cNvSpPr>
+            <a:spLocks noGrp="1"/>
+          </p:cNvSpPr>
+          <p:nvPr>
+            <p:ph type="sldNum" sz="quarter" idx="4294967295"/>
+          </p:nvPr>
+        </p:nvSpPr>
+        <p:spPr>
+          <a:xfrm>
+            <a:off x="11292840" y="6556248"/>
+            <a:ext cx="548640" cy="256032"/>
+          </a:xfrm>
+          <a:prstGeom prst="rect">
+            <a:avLst/>
+          </a:prstGeom>
+          <a:extLst>
+            <a:ext uri="{C572A759-6A51-4108-AA02-DFA0A04FC94B}">
+              <ma14:wrappingTextBoxFlag xmlns:ma14="http://schemas.microsoft.com/office/mac/drawingml/2011/main" val="0"/>
+            </a:ext>
+          </a:extLst>
+        </p:spPr>
+        <p:txBody>
+          <a:bodyPr/>
+          <a:lstStyle>
+            <a:lvl1pPr>
+              <a:defRPr sz="900">
+                <a:solidFill>
+                  <a:srgbClr val="1B3A6B"/>
+                </a:solidFill>
+                <a:latin typeface="Arial"/>
+                <a:ea typeface="Arial"/>
+                <a:cs typeface="Arial"/>
+              </a:defRPr>
+            </a:lvl1pPr>
+          </a:lstStyle>
+          <a:p>
+            <a:pPr algn="r"/>
+            <a:fld id="{F7021451-1387-4CA6-816F-3879F97B5CBC}" type="slidenum">
+              <a:rPr b="1" lang="en-US"/>
+              <a:t>17</a:t>
+            </a:fld>
+            <a:endParaRPr lang="en-US"/>
           </a:p>
         </p:txBody>
       </p:sp>
@@ -9061,6 +9571,45 @@
         </p:nvSpPr>
         <p:spPr>
           <a:xfrm>
+            <a:off x="457200" y="548640"/>
+            <a:ext cx="3474720" cy="1737360"/>
+          </a:xfrm>
+          <a:prstGeom prst="rect">
+            <a:avLst/>
+          </a:prstGeom>
+          <a:noFill/>
+          <a:ln/>
+        </p:spPr>
+        <p:txBody>
+          <a:bodyPr wrap="square" rtlCol="0" anchor="ctr"/>
+          <a:lstStyle/>
+          <a:p>
+            <a:pPr indent="0" marL="0">
+              <a:buNone/>
+            </a:pPr>
+            <a:r>
+              <a:rPr lang="en-US" sz="11000" b="1" dirty="0">
+                <a:solidFill>
+                  <a:srgbClr val="11396F"/>
+                </a:solidFill>
+                <a:latin typeface="Arial" pitchFamily="34" charset="0"/>
+                <a:ea typeface="Arial" pitchFamily="34" charset="-122"/>
+                <a:cs typeface="Arial" pitchFamily="34" charset="-120"/>
+              </a:rPr>
+              <a:t>04</a:t>
+            </a:r>
+            <a:endParaRPr lang="en-US" sz="11000" dirty="0"/>
+          </a:p>
+        </p:txBody>
+      </p:sp>
+      <p:sp>
+        <p:nvSpPr>
+          <p:cNvPr id="4" name="Text 2"/>
+          <p:cNvSpPr/>
+          <p:nvPr/>
+        </p:nvSpPr>
+        <p:spPr>
+          <a:xfrm>
             <a:off x="548640" y="2194560"/>
             <a:ext cx="3291840" cy="548640"/>
           </a:xfrm>
@@ -9094,7 +9643,46 @@
       </p:sp>
       <p:sp>
         <p:nvSpPr>
-          <p:cNvPr id="4" name="Text 2"/>
+          <p:cNvPr id="5" name="Text 3"/>
+          <p:cNvSpPr/>
+          <p:nvPr/>
+        </p:nvSpPr>
+        <p:spPr>
+          <a:xfrm>
+            <a:off x="548640" y="3200400"/>
+            <a:ext cx="3383280" cy="457200"/>
+          </a:xfrm>
+          <a:prstGeom prst="rect">
+            <a:avLst/>
+          </a:prstGeom>
+          <a:noFill/>
+          <a:ln/>
+        </p:spPr>
+        <p:txBody>
+          <a:bodyPr wrap="square" rtlCol="0" anchor="ctr"/>
+          <a:lstStyle/>
+          <a:p>
+            <a:pPr indent="0" marL="0">
+              <a:buNone/>
+            </a:pPr>
+            <a:r>
+              <a:rPr lang="en-US" sz="1100" dirty="0">
+                <a:solidFill>
+                  <a:srgbClr val="C7D2E3"/>
+                </a:solidFill>
+                <a:latin typeface="Arial" pitchFamily="34" charset="0"/>
+                <a:ea typeface="Arial" pitchFamily="34" charset="-122"/>
+                <a:cs typeface="Arial" pitchFamily="34" charset="-120"/>
+              </a:rPr>
+              <a:t>M7 · Etapa 3 · Operação ponta a ponta</a:t>
+            </a:r>
+            <a:endParaRPr lang="en-US" sz="1100" dirty="0"/>
+          </a:p>
+        </p:txBody>
+      </p:sp>
+      <p:sp>
+        <p:nvSpPr>
+          <p:cNvPr id="6" name="Text 4"/>
           <p:cNvSpPr/>
           <p:nvPr/>
         </p:nvSpPr>
@@ -9133,7 +9721,7 @@
       </p:sp>
       <p:pic>
         <p:nvPicPr>
-          <p:cNvPr id="5" name="Image 0" descr="/www/wwwroot/rexar/gdsolar/docs/curso/slides/assets/logo-gdsolar.png">    </p:cNvPr>
+          <p:cNvPr id="7" name="Image 0" descr="/www/wwwroot/rexar/gdsolar/docs/curso/slides/assets/logo-gdsolar.png">    </p:cNvPr>
           <p:cNvPicPr>
             <a:picLocks noChangeAspect="1"/>
           </p:cNvPicPr>
@@ -9157,7 +9745,7 @@
       </p:pic>
       <p:sp>
         <p:nvSpPr>
-          <p:cNvPr id="6" name="Text 3"/>
+          <p:cNvPr id="8" name="Text 5"/>
           <p:cNvSpPr/>
           <p:nvPr/>
         </p:nvSpPr>
@@ -9198,7 +9786,7 @@
       </p:sp>
       <p:sp>
         <p:nvSpPr>
-          <p:cNvPr id="7" name="Text 4"/>
+          <p:cNvPr id="9" name="Text 6"/>
           <p:cNvSpPr/>
           <p:nvPr/>
         </p:nvSpPr>
@@ -9239,7 +9827,7 @@
       </p:sp>
       <p:sp>
         <p:nvSpPr>
-          <p:cNvPr id="8" name="Text 5"/>
+          <p:cNvPr id="10" name="Text 7"/>
           <p:cNvSpPr/>
           <p:nvPr/>
         </p:nvSpPr>
@@ -9418,7 +10006,7 @@
         </p:blipFill>
         <p:spPr>
           <a:xfrm>
-            <a:off x="411480" y="6547104"/>
+            <a:off x="548640" y="6547104"/>
             <a:ext cx="274320" cy="274320"/>
           </a:xfrm>
           <a:prstGeom prst="rect">
@@ -9434,7 +10022,7 @@
         </p:nvSpPr>
         <p:spPr>
           <a:xfrm>
-            <a:off x="749808" y="6528816"/>
+            <a:off x="886968" y="6528816"/>
             <a:ext cx="6400800" cy="310896"/>
           </a:xfrm>
           <a:prstGeom prst="rect">
@@ -9474,7 +10062,7 @@
         <p:spPr>
           <a:xfrm>
             <a:off x="7132320" y="6528816"/>
-            <a:ext cx="4663440" cy="310896"/>
+            <a:ext cx="4023360" cy="310896"/>
           </a:xfrm>
           <a:prstGeom prst="rect">
             <a:avLst/>
@@ -9512,7 +10100,7 @@
         </p:nvSpPr>
         <p:spPr>
           <a:xfrm>
-            <a:off x="411480" y="384048"/>
+            <a:off x="548640" y="384048"/>
             <a:ext cx="82296" cy="658368"/>
           </a:xfrm>
           <a:prstGeom prst="rect">
@@ -9532,7 +10120,7 @@
         </p:nvSpPr>
         <p:spPr>
           <a:xfrm>
-            <a:off x="640080" y="292608"/>
+            <a:off x="777240" y="292608"/>
             <a:ext cx="10972800" cy="274320"/>
           </a:xfrm>
           <a:prstGeom prst="rect">
@@ -9571,8 +10159,8 @@
         </p:nvSpPr>
         <p:spPr>
           <a:xfrm>
-            <a:off x="640080" y="530352"/>
-            <a:ext cx="11155680" cy="566928"/>
+            <a:off x="777240" y="530352"/>
+            <a:ext cx="10881360" cy="566928"/>
           </a:xfrm>
           <a:prstGeom prst="rect">
             <a:avLst/>
@@ -9613,7 +10201,7 @@
         <p:spPr>
           <a:xfrm>
             <a:off x="548640" y="1325880"/>
-            <a:ext cx="11155680" cy="4937760"/>
+            <a:ext cx="5486400" cy="4937760"/>
           </a:xfrm>
           <a:prstGeom prst="rect">
             <a:avLst/>
@@ -9635,7 +10223,7 @@
               <a:buChar char="●"/>
             </a:pPr>
             <a:r>
-              <a:rPr lang="en-US" sz="2000" dirty="0">
+              <a:rPr lang="en-US" sz="1800" dirty="0">
                 <a:solidFill>
                   <a:srgbClr val="1F2937"/>
                 </a:solidFill>
@@ -9645,7 +10233,7 @@
               </a:rPr>
               <a:t>Extração: pendente</a:t>
             </a:r>
-            <a:endParaRPr lang="en-US" sz="2000" dirty="0"/>
+            <a:endParaRPr lang="en-US" sz="1800" dirty="0"/>
           </a:p>
           <a:p>
             <a:pPr marL="342900" indent="-342900">
@@ -9656,7 +10244,7 @@
               <a:buChar char="●"/>
             </a:pPr>
             <a:r>
-              <a:rPr lang="en-US" sz="2000" dirty="0">
+              <a:rPr lang="en-US" sz="1800" dirty="0">
                 <a:solidFill>
                   <a:srgbClr val="1F2937"/>
                 </a:solidFill>
@@ -9666,7 +10254,7 @@
               </a:rPr>
               <a:t>sucesso</a:t>
             </a:r>
-            <a:endParaRPr lang="en-US" sz="2000" dirty="0"/>
+            <a:endParaRPr lang="en-US" sz="1800" dirty="0"/>
           </a:p>
           <a:p>
             <a:pPr marL="342900" indent="-342900">
@@ -9677,7 +10265,7 @@
               <a:buChar char="●"/>
             </a:pPr>
             <a:r>
-              <a:rPr lang="en-US" sz="2000" dirty="0">
+              <a:rPr lang="en-US" sz="1800" dirty="0">
                 <a:solidFill>
                   <a:srgbClr val="1F2937"/>
                 </a:solidFill>
@@ -9687,7 +10275,7 @@
               </a:rPr>
               <a:t>erro</a:t>
             </a:r>
-            <a:endParaRPr lang="en-US" sz="2000" dirty="0"/>
+            <a:endParaRPr lang="en-US" sz="1800" dirty="0"/>
           </a:p>
           <a:p>
             <a:pPr marL="342900" indent="-342900">
@@ -9698,7 +10286,7 @@
               <a:buChar char="●"/>
             </a:pPr>
             <a:r>
-              <a:rPr lang="en-US" sz="2000" dirty="0">
+              <a:rPr lang="en-US" sz="1800" dirty="0">
                 <a:solidFill>
                   <a:srgbClr val="1F2937"/>
                 </a:solidFill>
@@ -9708,8 +10296,32 @@
               </a:rPr>
               <a:t>Revisão: pendente de revisão</a:t>
             </a:r>
-            <a:endParaRPr lang="en-US" sz="2000" dirty="0"/>
-          </a:p>
+            <a:endParaRPr lang="en-US" sz="1800" dirty="0"/>
+          </a:p>
+        </p:txBody>
+      </p:sp>
+      <p:sp>
+        <p:nvSpPr>
+          <p:cNvPr id="10" name="Text 7"/>
+          <p:cNvSpPr/>
+          <p:nvPr/>
+        </p:nvSpPr>
+        <p:spPr>
+          <a:xfrm>
+            <a:off x="6263640" y="1325880"/>
+            <a:ext cx="5486400" cy="4937760"/>
+          </a:xfrm>
+          <a:prstGeom prst="rect">
+            <a:avLst/>
+          </a:prstGeom>
+          <a:noFill/>
+          <a:ln/>
+        </p:spPr>
+        <p:txBody>
+          <a:bodyPr wrap="square" rtlCol="0" anchor="t">
+            <a:normAutofit/>
+          </a:bodyPr>
+          <a:lstStyle/>
           <a:p>
             <a:pPr marL="342900" indent="-342900">
               <a:spcAft>
@@ -9719,7 +10331,7 @@
               <a:buChar char="●"/>
             </a:pPr>
             <a:r>
-              <a:rPr lang="en-US" sz="2000" dirty="0">
+              <a:rPr lang="en-US" sz="1800" dirty="0">
                 <a:solidFill>
                   <a:srgbClr val="1F2937"/>
                 </a:solidFill>
@@ -9729,7 +10341,7 @@
               </a:rPr>
               <a:t>revisada</a:t>
             </a:r>
-            <a:endParaRPr lang="en-US" sz="2000" dirty="0"/>
+            <a:endParaRPr lang="en-US" sz="1800" dirty="0"/>
           </a:p>
           <a:p>
             <a:pPr marL="342900" indent="-342900">
@@ -9740,7 +10352,7 @@
               <a:buChar char="●"/>
             </a:pPr>
             <a:r>
-              <a:rPr lang="en-US" sz="2000" dirty="0">
+              <a:rPr lang="en-US" sz="1800" dirty="0">
                 <a:solidFill>
                   <a:srgbClr val="1F2937"/>
                 </a:solidFill>
@@ -9750,7 +10362,7 @@
               </a:rPr>
               <a:t>corrigida</a:t>
             </a:r>
-            <a:endParaRPr lang="en-US" sz="2000" dirty="0"/>
+            <a:endParaRPr lang="en-US" sz="1800" dirty="0"/>
           </a:p>
           <a:p>
             <a:pPr marL="342900" indent="-342900">
@@ -9761,7 +10373,7 @@
               <a:buChar char="●"/>
             </a:pPr>
             <a:r>
-              <a:rPr lang="en-US" sz="2000" dirty="0">
+              <a:rPr lang="en-US" sz="1800" dirty="0">
                 <a:solidFill>
                   <a:srgbClr val="1F2937"/>
                 </a:solidFill>
@@ -9771,7 +10383,7 @@
               </a:rPr>
               <a:t>aprovada</a:t>
             </a:r>
-            <a:endParaRPr lang="en-US" sz="2000" dirty="0"/>
+            <a:endParaRPr lang="en-US" sz="1800" dirty="0"/>
           </a:p>
           <a:p>
             <a:pPr marL="342900" indent="-342900">
@@ -9782,7 +10394,7 @@
               <a:buChar char="●"/>
             </a:pPr>
             <a:r>
-              <a:rPr lang="en-US" sz="2000" dirty="0">
+              <a:rPr lang="en-US" sz="1800" dirty="0">
                 <a:solidFill>
                   <a:srgbClr val="1F2937"/>
                 </a:solidFill>
@@ -9792,7 +10404,55 @@
               </a:rPr>
               <a:t>rejeitada</a:t>
             </a:r>
-            <a:endParaRPr lang="en-US" sz="2000" dirty="0"/>
+            <a:endParaRPr lang="en-US" sz="1800" dirty="0"/>
+          </a:p>
+        </p:txBody>
+      </p:sp>
+      <p:sp>
+        <p:nvSpPr>
+          <p:cNvPr id="25" name="Slide Number Placeholder 0"/>
+          <p:cNvSpPr>
+            <a:spLocks noGrp="1"/>
+          </p:cNvSpPr>
+          <p:nvPr>
+            <p:ph type="sldNum" sz="quarter" idx="4294967295"/>
+          </p:nvPr>
+        </p:nvSpPr>
+        <p:spPr>
+          <a:xfrm>
+            <a:off x="11292840" y="6556248"/>
+            <a:ext cx="548640" cy="256032"/>
+          </a:xfrm>
+          <a:prstGeom prst="rect">
+            <a:avLst/>
+          </a:prstGeom>
+          <a:extLst>
+            <a:ext uri="{C572A759-6A51-4108-AA02-DFA0A04FC94B}">
+              <ma14:wrappingTextBoxFlag xmlns:ma14="http://schemas.microsoft.com/office/mac/drawingml/2011/main" val="0"/>
+            </a:ext>
+          </a:extLst>
+        </p:spPr>
+        <p:txBody>
+          <a:bodyPr/>
+          <a:lstStyle>
+            <a:lvl1pPr>
+              <a:defRPr sz="900">
+                <a:solidFill>
+                  <a:srgbClr val="1B3A6B"/>
+                </a:solidFill>
+                <a:latin typeface="Arial"/>
+                <a:ea typeface="Arial"/>
+                <a:cs typeface="Arial"/>
+              </a:defRPr>
+            </a:lvl1pPr>
+          </a:lstStyle>
+          <a:p>
+            <a:pPr algn="r"/>
+            <a:fld id="{F7021451-1387-4CA6-816F-3879F97B5CBC}" type="slidenum">
+              <a:rPr b="1" lang="en-US"/>
+              <a:t>19</a:t>
+            </a:fld>
+            <a:endParaRPr lang="en-US"/>
           </a:p>
         </p:txBody>
       </p:sp>
@@ -9856,6 +10516,45 @@
         </p:nvSpPr>
         <p:spPr>
           <a:xfrm>
+            <a:off x="457200" y="548640"/>
+            <a:ext cx="3474720" cy="1737360"/>
+          </a:xfrm>
+          <a:prstGeom prst="rect">
+            <a:avLst/>
+          </a:prstGeom>
+          <a:noFill/>
+          <a:ln/>
+        </p:spPr>
+        <p:txBody>
+          <a:bodyPr wrap="square" rtlCol="0" anchor="ctr"/>
+          <a:lstStyle/>
+          <a:p>
+            <a:pPr indent="0" marL="0">
+              <a:buNone/>
+            </a:pPr>
+            <a:r>
+              <a:rPr lang="en-US" sz="11000" b="1" dirty="0">
+                <a:solidFill>
+                  <a:srgbClr val="11396F"/>
+                </a:solidFill>
+                <a:latin typeface="Arial" pitchFamily="34" charset="0"/>
+                <a:ea typeface="Arial" pitchFamily="34" charset="-122"/>
+                <a:cs typeface="Arial" pitchFamily="34" charset="-120"/>
+              </a:rPr>
+              <a:t>01</a:t>
+            </a:r>
+            <a:endParaRPr lang="en-US" sz="11000" dirty="0"/>
+          </a:p>
+        </p:txBody>
+      </p:sp>
+      <p:sp>
+        <p:nvSpPr>
+          <p:cNvPr id="4" name="Text 2"/>
+          <p:cNvSpPr/>
+          <p:nvPr/>
+        </p:nvSpPr>
+        <p:spPr>
+          <a:xfrm>
             <a:off x="548640" y="2194560"/>
             <a:ext cx="3291840" cy="548640"/>
           </a:xfrm>
@@ -9889,7 +10588,46 @@
       </p:sp>
       <p:sp>
         <p:nvSpPr>
-          <p:cNvPr id="4" name="Text 2"/>
+          <p:cNvPr id="5" name="Text 3"/>
+          <p:cNvSpPr/>
+          <p:nvPr/>
+        </p:nvSpPr>
+        <p:spPr>
+          <a:xfrm>
+            <a:off x="548640" y="3200400"/>
+            <a:ext cx="3383280" cy="457200"/>
+          </a:xfrm>
+          <a:prstGeom prst="rect">
+            <a:avLst/>
+          </a:prstGeom>
+          <a:noFill/>
+          <a:ln/>
+        </p:spPr>
+        <p:txBody>
+          <a:bodyPr wrap="square" rtlCol="0" anchor="ctr"/>
+          <a:lstStyle/>
+          <a:p>
+            <a:pPr indent="0" marL="0">
+              <a:buNone/>
+            </a:pPr>
+            <a:r>
+              <a:rPr lang="en-US" sz="1100" dirty="0">
+                <a:solidFill>
+                  <a:srgbClr val="C7D2E3"/>
+                </a:solidFill>
+                <a:latin typeface="Arial" pitchFamily="34" charset="0"/>
+                <a:ea typeface="Arial" pitchFamily="34" charset="-122"/>
+                <a:cs typeface="Arial" pitchFamily="34" charset="-120"/>
+              </a:rPr>
+              <a:t>M7 · Etapa 3 · Operação ponta a ponta</a:t>
+            </a:r>
+            <a:endParaRPr lang="en-US" sz="1100" dirty="0"/>
+          </a:p>
+        </p:txBody>
+      </p:sp>
+      <p:sp>
+        <p:nvSpPr>
+          <p:cNvPr id="6" name="Text 4"/>
           <p:cNvSpPr/>
           <p:nvPr/>
         </p:nvSpPr>
@@ -9928,7 +10666,7 @@
       </p:sp>
       <p:pic>
         <p:nvPicPr>
-          <p:cNvPr id="5" name="Image 0" descr="/www/wwwroot/rexar/gdsolar/docs/curso/slides/assets/logo-gdsolar.png">    </p:cNvPr>
+          <p:cNvPr id="7" name="Image 0" descr="/www/wwwroot/rexar/gdsolar/docs/curso/slides/assets/logo-gdsolar.png">    </p:cNvPr>
           <p:cNvPicPr>
             <a:picLocks noChangeAspect="1"/>
           </p:cNvPicPr>
@@ -9952,7 +10690,7 @@
       </p:pic>
       <p:sp>
         <p:nvSpPr>
-          <p:cNvPr id="6" name="Text 3"/>
+          <p:cNvPr id="8" name="Text 5"/>
           <p:cNvSpPr/>
           <p:nvPr/>
         </p:nvSpPr>
@@ -9993,7 +10731,7 @@
       </p:sp>
       <p:sp>
         <p:nvSpPr>
-          <p:cNvPr id="7" name="Text 4"/>
+          <p:cNvPr id="9" name="Text 6"/>
           <p:cNvSpPr/>
           <p:nvPr/>
         </p:nvSpPr>
@@ -10034,7 +10772,7 @@
       </p:sp>
       <p:sp>
         <p:nvSpPr>
-          <p:cNvPr id="8" name="Text 5"/>
+          <p:cNvPr id="10" name="Text 7"/>
           <p:cNvSpPr/>
           <p:nvPr/>
         </p:nvSpPr>
@@ -10213,7 +10951,7 @@
         </p:blipFill>
         <p:spPr>
           <a:xfrm>
-            <a:off x="411480" y="6547104"/>
+            <a:off x="548640" y="6547104"/>
             <a:ext cx="274320" cy="274320"/>
           </a:xfrm>
           <a:prstGeom prst="rect">
@@ -10229,7 +10967,7 @@
         </p:nvSpPr>
         <p:spPr>
           <a:xfrm>
-            <a:off x="749808" y="6528816"/>
+            <a:off x="886968" y="6528816"/>
             <a:ext cx="6400800" cy="310896"/>
           </a:xfrm>
           <a:prstGeom prst="rect">
@@ -10269,7 +11007,7 @@
         <p:spPr>
           <a:xfrm>
             <a:off x="7132320" y="6528816"/>
-            <a:ext cx="4663440" cy="310896"/>
+            <a:ext cx="4023360" cy="310896"/>
           </a:xfrm>
           <a:prstGeom prst="rect">
             <a:avLst/>
@@ -10307,7 +11045,7 @@
         </p:nvSpPr>
         <p:spPr>
           <a:xfrm>
-            <a:off x="411480" y="384048"/>
+            <a:off x="548640" y="384048"/>
             <a:ext cx="82296" cy="658368"/>
           </a:xfrm>
           <a:prstGeom prst="rect">
@@ -10327,7 +11065,7 @@
         </p:nvSpPr>
         <p:spPr>
           <a:xfrm>
-            <a:off x="640080" y="292608"/>
+            <a:off x="777240" y="292608"/>
             <a:ext cx="10972800" cy="274320"/>
           </a:xfrm>
           <a:prstGeom prst="rect">
@@ -10366,8 +11104,8 @@
         </p:nvSpPr>
         <p:spPr>
           <a:xfrm>
-            <a:off x="640080" y="530352"/>
-            <a:ext cx="11155680" cy="566928"/>
+            <a:off x="777240" y="530352"/>
+            <a:ext cx="10881360" cy="566928"/>
           </a:xfrm>
           <a:prstGeom prst="rect">
             <a:avLst/>
@@ -10407,8 +11145,8 @@
         </p:nvSpPr>
         <p:spPr>
           <a:xfrm>
-            <a:off x="411480" y="1325880"/>
-            <a:ext cx="3642360" cy="2331720"/>
+            <a:off x="548640" y="1325880"/>
+            <a:ext cx="3544824" cy="2331720"/>
           </a:xfrm>
           <a:prstGeom prst="roundRect">
             <a:avLst>
@@ -10441,7 +11179,7 @@
         </p:nvSpPr>
         <p:spPr>
           <a:xfrm>
-            <a:off x="594360" y="1508760"/>
+            <a:off x="731520" y="1508760"/>
             <a:ext cx="457200" cy="457200"/>
           </a:xfrm>
           <a:prstGeom prst="ellipse">
@@ -10461,7 +11199,7 @@
         </p:nvSpPr>
         <p:spPr>
           <a:xfrm>
-            <a:off x="594360" y="1508760"/>
+            <a:off x="731520" y="1508760"/>
             <a:ext cx="457200" cy="457200"/>
           </a:xfrm>
           <a:prstGeom prst="rect">
@@ -10500,8 +11238,8 @@
         </p:nvSpPr>
         <p:spPr>
           <a:xfrm>
-            <a:off x="1188720" y="1435608"/>
-            <a:ext cx="2727960" cy="2112264"/>
+            <a:off x="1325880" y="1435608"/>
+            <a:ext cx="2630424" cy="2112264"/>
           </a:xfrm>
           <a:prstGeom prst="rect">
             <a:avLst/>
@@ -10541,8 +11279,8 @@
         </p:nvSpPr>
         <p:spPr>
           <a:xfrm>
-            <a:off x="4282440" y="1325880"/>
-            <a:ext cx="3642360" cy="2331720"/>
+            <a:off x="4322064" y="1325880"/>
+            <a:ext cx="3544824" cy="2331720"/>
           </a:xfrm>
           <a:prstGeom prst="roundRect">
             <a:avLst>
@@ -10575,7 +11313,7 @@
         </p:nvSpPr>
         <p:spPr>
           <a:xfrm>
-            <a:off x="4465320" y="1508760"/>
+            <a:off x="4504944" y="1508760"/>
             <a:ext cx="457200" cy="457200"/>
           </a:xfrm>
           <a:prstGeom prst="ellipse">
@@ -10595,7 +11333,7 @@
         </p:nvSpPr>
         <p:spPr>
           <a:xfrm>
-            <a:off x="4465320" y="1508760"/>
+            <a:off x="4504944" y="1508760"/>
             <a:ext cx="457200" cy="457200"/>
           </a:xfrm>
           <a:prstGeom prst="rect">
@@ -10634,8 +11372,8 @@
         </p:nvSpPr>
         <p:spPr>
           <a:xfrm>
-            <a:off x="5059680" y="1435608"/>
-            <a:ext cx="2727960" cy="2112264"/>
+            <a:off x="5099304" y="1435608"/>
+            <a:ext cx="2630424" cy="2112264"/>
           </a:xfrm>
           <a:prstGeom prst="rect">
             <a:avLst/>
@@ -10675,8 +11413,8 @@
         </p:nvSpPr>
         <p:spPr>
           <a:xfrm>
-            <a:off x="8153400" y="1325880"/>
-            <a:ext cx="3642360" cy="2331720"/>
+            <a:off x="8095488" y="1325880"/>
+            <a:ext cx="3544824" cy="2331720"/>
           </a:xfrm>
           <a:prstGeom prst="roundRect">
             <a:avLst>
@@ -10709,7 +11447,7 @@
         </p:nvSpPr>
         <p:spPr>
           <a:xfrm>
-            <a:off x="8336280" y="1508760"/>
+            <a:off x="8278368" y="1508760"/>
             <a:ext cx="457200" cy="457200"/>
           </a:xfrm>
           <a:prstGeom prst="ellipse">
@@ -10729,7 +11467,7 @@
         </p:nvSpPr>
         <p:spPr>
           <a:xfrm>
-            <a:off x="8336280" y="1508760"/>
+            <a:off x="8278368" y="1508760"/>
             <a:ext cx="457200" cy="457200"/>
           </a:xfrm>
           <a:prstGeom prst="rect">
@@ -10768,8 +11506,8 @@
         </p:nvSpPr>
         <p:spPr>
           <a:xfrm>
-            <a:off x="8930640" y="1435608"/>
-            <a:ext cx="2727960" cy="2112264"/>
+            <a:off x="8872728" y="1435608"/>
+            <a:ext cx="2630424" cy="2112264"/>
           </a:xfrm>
           <a:prstGeom prst="rect">
             <a:avLst/>
@@ -10809,8 +11547,8 @@
         </p:nvSpPr>
         <p:spPr>
           <a:xfrm>
-            <a:off x="411480" y="3886200"/>
-            <a:ext cx="3642360" cy="2331720"/>
+            <a:off x="548640" y="3886200"/>
+            <a:ext cx="3544824" cy="2331720"/>
           </a:xfrm>
           <a:prstGeom prst="roundRect">
             <a:avLst>
@@ -10843,7 +11581,7 @@
         </p:nvSpPr>
         <p:spPr>
           <a:xfrm>
-            <a:off x="594360" y="4069080"/>
+            <a:off x="731520" y="4069080"/>
             <a:ext cx="457200" cy="457200"/>
           </a:xfrm>
           <a:prstGeom prst="ellipse">
@@ -10863,7 +11601,7 @@
         </p:nvSpPr>
         <p:spPr>
           <a:xfrm>
-            <a:off x="594360" y="4069080"/>
+            <a:off x="731520" y="4069080"/>
             <a:ext cx="457200" cy="457200"/>
           </a:xfrm>
           <a:prstGeom prst="rect">
@@ -10902,8 +11640,8 @@
         </p:nvSpPr>
         <p:spPr>
           <a:xfrm>
-            <a:off x="1188720" y="3995928"/>
-            <a:ext cx="2727960" cy="2112264"/>
+            <a:off x="1325880" y="3995928"/>
+            <a:ext cx="2630424" cy="2112264"/>
           </a:xfrm>
           <a:prstGeom prst="rect">
             <a:avLst/>
@@ -10943,8 +11681,8 @@
         </p:nvSpPr>
         <p:spPr>
           <a:xfrm>
-            <a:off x="4282440" y="3886200"/>
-            <a:ext cx="3642360" cy="2331720"/>
+            <a:off x="4322064" y="3886200"/>
+            <a:ext cx="3544824" cy="2331720"/>
           </a:xfrm>
           <a:prstGeom prst="roundRect">
             <a:avLst>
@@ -10977,7 +11715,7 @@
         </p:nvSpPr>
         <p:spPr>
           <a:xfrm>
-            <a:off x="4465320" y="4069080"/>
+            <a:off x="4504944" y="4069080"/>
             <a:ext cx="457200" cy="457200"/>
           </a:xfrm>
           <a:prstGeom prst="ellipse">
@@ -10997,7 +11735,7 @@
         </p:nvSpPr>
         <p:spPr>
           <a:xfrm>
-            <a:off x="4465320" y="4069080"/>
+            <a:off x="4504944" y="4069080"/>
             <a:ext cx="457200" cy="457200"/>
           </a:xfrm>
           <a:prstGeom prst="rect">
@@ -11036,8 +11774,8 @@
         </p:nvSpPr>
         <p:spPr>
           <a:xfrm>
-            <a:off x="5059680" y="3995928"/>
-            <a:ext cx="2727960" cy="2112264"/>
+            <a:off x="5099304" y="3995928"/>
+            <a:ext cx="2630424" cy="2112264"/>
           </a:xfrm>
           <a:prstGeom prst="rect">
             <a:avLst/>
@@ -11077,8 +11815,8 @@
         </p:nvSpPr>
         <p:spPr>
           <a:xfrm>
-            <a:off x="8153400" y="3886200"/>
-            <a:ext cx="3642360" cy="2331720"/>
+            <a:off x="8095488" y="3886200"/>
+            <a:ext cx="3544824" cy="2331720"/>
           </a:xfrm>
           <a:prstGeom prst="roundRect">
             <a:avLst>
@@ -11111,7 +11849,7 @@
         </p:nvSpPr>
         <p:spPr>
           <a:xfrm>
-            <a:off x="8336280" y="4069080"/>
+            <a:off x="8278368" y="4069080"/>
             <a:ext cx="457200" cy="457200"/>
           </a:xfrm>
           <a:prstGeom prst="ellipse">
@@ -11131,7 +11869,7 @@
         </p:nvSpPr>
         <p:spPr>
           <a:xfrm>
-            <a:off x="8336280" y="4069080"/>
+            <a:off x="8278368" y="4069080"/>
             <a:ext cx="457200" cy="457200"/>
           </a:xfrm>
           <a:prstGeom prst="rect">
@@ -11170,8 +11908,8 @@
         </p:nvSpPr>
         <p:spPr>
           <a:xfrm>
-            <a:off x="8930640" y="3995928"/>
-            <a:ext cx="2727960" cy="2112264"/>
+            <a:off x="8872728" y="3995928"/>
+            <a:ext cx="2630424" cy="2112264"/>
           </a:xfrm>
           <a:prstGeom prst="rect">
             <a:avLst/>
@@ -11200,6 +11938,54 @@
               <a:t>Usina vinculada e pendências zeradas</a:t>
             </a:r>
             <a:endParaRPr lang="en-US" sz="1800" dirty="0"/>
+          </a:p>
+        </p:txBody>
+      </p:sp>
+      <p:sp>
+        <p:nvSpPr>
+          <p:cNvPr id="25" name="Slide Number Placeholder 0"/>
+          <p:cNvSpPr>
+            <a:spLocks noGrp="1"/>
+          </p:cNvSpPr>
+          <p:nvPr>
+            <p:ph type="sldNum" sz="quarter" idx="4294967295"/>
+          </p:nvPr>
+        </p:nvSpPr>
+        <p:spPr>
+          <a:xfrm>
+            <a:off x="11292840" y="6556248"/>
+            <a:ext cx="548640" cy="256032"/>
+          </a:xfrm>
+          <a:prstGeom prst="rect">
+            <a:avLst/>
+          </a:prstGeom>
+          <a:extLst>
+            <a:ext uri="{C572A759-6A51-4108-AA02-DFA0A04FC94B}">
+              <ma14:wrappingTextBoxFlag xmlns:ma14="http://schemas.microsoft.com/office/mac/drawingml/2011/main" val="0"/>
+            </a:ext>
+          </a:extLst>
+        </p:spPr>
+        <p:txBody>
+          <a:bodyPr/>
+          <a:lstStyle>
+            <a:lvl1pPr>
+              <a:defRPr sz="900">
+                <a:solidFill>
+                  <a:srgbClr val="1B3A6B"/>
+                </a:solidFill>
+                <a:latin typeface="Arial"/>
+                <a:ea typeface="Arial"/>
+                <a:cs typeface="Arial"/>
+              </a:defRPr>
+            </a:lvl1pPr>
+          </a:lstStyle>
+          <a:p>
+            <a:pPr algn="r"/>
+            <a:fld id="{F7021451-1387-4CA6-816F-3879F97B5CBC}" type="slidenum">
+              <a:rPr b="1" lang="en-US"/>
+              <a:t>20</a:t>
+            </a:fld>
+            <a:endParaRPr lang="en-US"/>
           </a:p>
         </p:txBody>
       </p:sp>
@@ -11276,7 +12062,7 @@
         </p:blipFill>
         <p:spPr>
           <a:xfrm>
-            <a:off x="411480" y="6547104"/>
+            <a:off x="548640" y="6547104"/>
             <a:ext cx="274320" cy="274320"/>
           </a:xfrm>
           <a:prstGeom prst="rect">
@@ -11292,7 +12078,7 @@
         </p:nvSpPr>
         <p:spPr>
           <a:xfrm>
-            <a:off x="749808" y="6528816"/>
+            <a:off x="886968" y="6528816"/>
             <a:ext cx="6400800" cy="310896"/>
           </a:xfrm>
           <a:prstGeom prst="rect">
@@ -11332,7 +12118,7 @@
         <p:spPr>
           <a:xfrm>
             <a:off x="7132320" y="6528816"/>
-            <a:ext cx="4663440" cy="310896"/>
+            <a:ext cx="4023360" cy="310896"/>
           </a:xfrm>
           <a:prstGeom prst="rect">
             <a:avLst/>
@@ -11370,7 +12156,7 @@
         </p:nvSpPr>
         <p:spPr>
           <a:xfrm>
-            <a:off x="411480" y="384048"/>
+            <a:off x="548640" y="384048"/>
             <a:ext cx="82296" cy="658368"/>
           </a:xfrm>
           <a:prstGeom prst="rect">
@@ -11390,7 +12176,7 @@
         </p:nvSpPr>
         <p:spPr>
           <a:xfrm>
-            <a:off x="640080" y="292608"/>
+            <a:off x="777240" y="292608"/>
             <a:ext cx="10972800" cy="274320"/>
           </a:xfrm>
           <a:prstGeom prst="rect">
@@ -11429,8 +12215,8 @@
         </p:nvSpPr>
         <p:spPr>
           <a:xfrm>
-            <a:off x="640080" y="530352"/>
-            <a:ext cx="11155680" cy="566928"/>
+            <a:off x="777240" y="530352"/>
+            <a:ext cx="10881360" cy="566928"/>
           </a:xfrm>
           <a:prstGeom prst="rect">
             <a:avLst/>
@@ -11471,7 +12257,7 @@
         <p:spPr>
           <a:xfrm>
             <a:off x="548640" y="1325880"/>
-            <a:ext cx="11155680" cy="4937760"/>
+            <a:ext cx="5486400" cy="4937760"/>
           </a:xfrm>
           <a:prstGeom prst="rect">
             <a:avLst/>
@@ -11493,7 +12279,7 @@
               <a:buChar char="●"/>
             </a:pPr>
             <a:r>
-              <a:rPr lang="en-US" sz="1600" dirty="0">
+              <a:rPr lang="en-US" sz="1800" dirty="0">
                 <a:solidFill>
                   <a:srgbClr val="1F2937"/>
                 </a:solidFill>
@@ -11503,7 +12289,7 @@
               </a:rPr>
               <a:t>Erro do leitor automático (erro)</a:t>
             </a:r>
-            <a:endParaRPr lang="en-US" sz="1600" dirty="0"/>
+            <a:endParaRPr lang="en-US" sz="1800" dirty="0"/>
           </a:p>
           <a:p>
             <a:pPr marL="342900" indent="-342900">
@@ -11514,7 +12300,7 @@
               <a:buChar char="●"/>
             </a:pPr>
             <a:r>
-              <a:rPr lang="en-US" sz="1600" dirty="0">
+              <a:rPr lang="en-US" sz="1800" dirty="0">
                 <a:solidFill>
                   <a:srgbClr val="1F2937"/>
                 </a:solidFill>
@@ -11524,7 +12310,7 @@
               </a:rPr>
               <a:t>Fatura sem UC vinculada (erro)</a:t>
             </a:r>
-            <a:endParaRPr lang="en-US" sz="1600" dirty="0"/>
+            <a:endParaRPr lang="en-US" sz="1800" dirty="0"/>
           </a:p>
           <a:p>
             <a:pPr marL="342900" indent="-342900">
@@ -11535,7 +12321,7 @@
               <a:buChar char="●"/>
             </a:pPr>
             <a:r>
-              <a:rPr lang="en-US" sz="1600" dirty="0">
+              <a:rPr lang="en-US" sz="1800" dirty="0">
                 <a:solidFill>
                   <a:srgbClr val="1F2937"/>
                 </a:solidFill>
@@ -11545,7 +12331,7 @@
               </a:rPr>
               <a:t>Cliente sem regra de desconto ativa (aviso)</a:t>
             </a:r>
-            <a:endParaRPr lang="en-US" sz="1600" dirty="0"/>
+            <a:endParaRPr lang="en-US" sz="1800" dirty="0"/>
           </a:p>
           <a:p>
             <a:pPr marL="342900" indent="-342900">
@@ -11556,7 +12342,7 @@
               <a:buChar char="●"/>
             </a:pPr>
             <a:r>
-              <a:rPr lang="en-US" sz="1600" dirty="0">
+              <a:rPr lang="en-US" sz="1800" dirty="0">
                 <a:solidFill>
                   <a:srgbClr val="1F2937"/>
                 </a:solidFill>
@@ -11566,8 +12352,32 @@
               </a:rPr>
               <a:t>Valor total inválido (erro)</a:t>
             </a:r>
-            <a:endParaRPr lang="en-US" sz="1600" dirty="0"/>
-          </a:p>
+            <a:endParaRPr lang="en-US" sz="1800" dirty="0"/>
+          </a:p>
+        </p:txBody>
+      </p:sp>
+      <p:sp>
+        <p:nvSpPr>
+          <p:cNvPr id="10" name="Text 7"/>
+          <p:cNvSpPr/>
+          <p:nvPr/>
+        </p:nvSpPr>
+        <p:spPr>
+          <a:xfrm>
+            <a:off x="6263640" y="1325880"/>
+            <a:ext cx="5486400" cy="4937760"/>
+          </a:xfrm>
+          <a:prstGeom prst="rect">
+            <a:avLst/>
+          </a:prstGeom>
+          <a:noFill/>
+          <a:ln/>
+        </p:spPr>
+        <p:txBody>
+          <a:bodyPr wrap="square" rtlCol="0" anchor="t">
+            <a:normAutofit/>
+          </a:bodyPr>
+          <a:lstStyle/>
           <a:p>
             <a:pPr marL="342900" indent="-342900">
               <a:spcAft>
@@ -11577,7 +12387,7 @@
               <a:buChar char="●"/>
             </a:pPr>
             <a:r>
-              <a:rPr lang="en-US" sz="1600" dirty="0">
+              <a:rPr lang="en-US" sz="1800" dirty="0">
                 <a:solidFill>
                   <a:srgbClr val="1F2937"/>
                 </a:solidFill>
@@ -11587,7 +12397,7 @@
               </a:rPr>
               <a:t>Consumo ausente ou inválido (aviso)</a:t>
             </a:r>
-            <a:endParaRPr lang="en-US" sz="1600" dirty="0"/>
+            <a:endParaRPr lang="en-US" sz="1800" dirty="0"/>
           </a:p>
           <a:p>
             <a:pPr marL="342900" indent="-342900">
@@ -11598,7 +12408,7 @@
               <a:buChar char="●"/>
             </a:pPr>
             <a:r>
-              <a:rPr lang="en-US" sz="1600" dirty="0">
+              <a:rPr lang="en-US" sz="1800" dirty="0">
                 <a:solidFill>
                   <a:srgbClr val="1F2937"/>
                 </a:solidFill>
@@ -11608,7 +12418,7 @@
               </a:rPr>
               <a:t>Fatura duplicada para a UC e referência (erro)</a:t>
             </a:r>
-            <a:endParaRPr lang="en-US" sz="1600" dirty="0"/>
+            <a:endParaRPr lang="en-US" sz="1800" dirty="0"/>
           </a:p>
           <a:p>
             <a:pPr marL="342900" indent="-342900">
@@ -11619,7 +12429,7 @@
               <a:buChar char="●"/>
             </a:pPr>
             <a:r>
-              <a:rPr lang="en-US" sz="1600" dirty="0">
+              <a:rPr lang="en-US" sz="1800" dirty="0">
                 <a:solidFill>
                   <a:srgbClr val="1F2937"/>
                 </a:solidFill>
@@ -11629,7 +12439,55 @@
               </a:rPr>
               <a:t>Usina da fatura ≠ vínculo ativo da UC (aviso)</a:t>
             </a:r>
-            <a:endParaRPr lang="en-US" sz="1600" dirty="0"/>
+            <a:endParaRPr lang="en-US" sz="1800" dirty="0"/>
+          </a:p>
+        </p:txBody>
+      </p:sp>
+      <p:sp>
+        <p:nvSpPr>
+          <p:cNvPr id="25" name="Slide Number Placeholder 0"/>
+          <p:cNvSpPr>
+            <a:spLocks noGrp="1"/>
+          </p:cNvSpPr>
+          <p:nvPr>
+            <p:ph type="sldNum" sz="quarter" idx="4294967295"/>
+          </p:nvPr>
+        </p:nvSpPr>
+        <p:spPr>
+          <a:xfrm>
+            <a:off x="11292840" y="6556248"/>
+            <a:ext cx="548640" cy="256032"/>
+          </a:xfrm>
+          <a:prstGeom prst="rect">
+            <a:avLst/>
+          </a:prstGeom>
+          <a:extLst>
+            <a:ext uri="{C572A759-6A51-4108-AA02-DFA0A04FC94B}">
+              <ma14:wrappingTextBoxFlag xmlns:ma14="http://schemas.microsoft.com/office/mac/drawingml/2011/main" val="0"/>
+            </a:ext>
+          </a:extLst>
+        </p:spPr>
+        <p:txBody>
+          <a:bodyPr/>
+          <a:lstStyle>
+            <a:lvl1pPr>
+              <a:defRPr sz="900">
+                <a:solidFill>
+                  <a:srgbClr val="1B3A6B"/>
+                </a:solidFill>
+                <a:latin typeface="Arial"/>
+                <a:ea typeface="Arial"/>
+                <a:cs typeface="Arial"/>
+              </a:defRPr>
+            </a:lvl1pPr>
+          </a:lstStyle>
+          <a:p>
+            <a:pPr algn="r"/>
+            <a:fld id="{F7021451-1387-4CA6-816F-3879F97B5CBC}" type="slidenum">
+              <a:rPr b="1" lang="en-US"/>
+              <a:t>21</a:t>
+            </a:fld>
+            <a:endParaRPr lang="en-US"/>
           </a:p>
         </p:txBody>
       </p:sp>
@@ -11706,7 +12564,7 @@
         </p:blipFill>
         <p:spPr>
           <a:xfrm>
-            <a:off x="411480" y="6547104"/>
+            <a:off x="548640" y="6547104"/>
             <a:ext cx="274320" cy="274320"/>
           </a:xfrm>
           <a:prstGeom prst="rect">
@@ -11722,7 +12580,7 @@
         </p:nvSpPr>
         <p:spPr>
           <a:xfrm>
-            <a:off x="749808" y="6528816"/>
+            <a:off x="886968" y="6528816"/>
             <a:ext cx="6400800" cy="310896"/>
           </a:xfrm>
           <a:prstGeom prst="rect">
@@ -11762,7 +12620,7 @@
         <p:spPr>
           <a:xfrm>
             <a:off x="7132320" y="6528816"/>
-            <a:ext cx="4663440" cy="310896"/>
+            <a:ext cx="4023360" cy="310896"/>
           </a:xfrm>
           <a:prstGeom prst="rect">
             <a:avLst/>
@@ -11800,7 +12658,7 @@
         </p:nvSpPr>
         <p:spPr>
           <a:xfrm>
-            <a:off x="411480" y="384048"/>
+            <a:off x="548640" y="384048"/>
             <a:ext cx="82296" cy="658368"/>
           </a:xfrm>
           <a:prstGeom prst="rect">
@@ -11820,7 +12678,7 @@
         </p:nvSpPr>
         <p:spPr>
           <a:xfrm>
-            <a:off x="640080" y="292608"/>
+            <a:off x="777240" y="292608"/>
             <a:ext cx="10972800" cy="274320"/>
           </a:xfrm>
           <a:prstGeom prst="rect">
@@ -11859,8 +12717,8 @@
         </p:nvSpPr>
         <p:spPr>
           <a:xfrm>
-            <a:off x="640080" y="530352"/>
-            <a:ext cx="11155680" cy="566928"/>
+            <a:off x="777240" y="530352"/>
+            <a:ext cx="10881360" cy="566928"/>
           </a:xfrm>
           <a:prstGeom prst="rect">
             <a:avLst/>
@@ -11900,8 +12758,8 @@
         </p:nvSpPr>
         <p:spPr>
           <a:xfrm>
-            <a:off x="411480" y="1325880"/>
-            <a:ext cx="5577840" cy="2331720"/>
+            <a:off x="548640" y="1325880"/>
+            <a:ext cx="5431536" cy="2331720"/>
           </a:xfrm>
           <a:prstGeom prst="roundRect">
             <a:avLst>
@@ -11934,7 +12792,7 @@
         </p:nvSpPr>
         <p:spPr>
           <a:xfrm>
-            <a:off x="594360" y="1508760"/>
+            <a:off x="731520" y="1508760"/>
             <a:ext cx="457200" cy="457200"/>
           </a:xfrm>
           <a:prstGeom prst="ellipse">
@@ -11954,7 +12812,7 @@
         </p:nvSpPr>
         <p:spPr>
           <a:xfrm>
-            <a:off x="594360" y="1508760"/>
+            <a:off x="731520" y="1508760"/>
             <a:ext cx="457200" cy="457200"/>
           </a:xfrm>
           <a:prstGeom prst="rect">
@@ -11993,8 +12851,8 @@
         </p:nvSpPr>
         <p:spPr>
           <a:xfrm>
-            <a:off x="1188720" y="1435608"/>
-            <a:ext cx="4663440" cy="2112264"/>
+            <a:off x="1325880" y="1435608"/>
+            <a:ext cx="4517136" cy="2112264"/>
           </a:xfrm>
           <a:prstGeom prst="rect">
             <a:avLst/>
@@ -12034,8 +12892,8 @@
         </p:nvSpPr>
         <p:spPr>
           <a:xfrm>
-            <a:off x="6217920" y="1325880"/>
-            <a:ext cx="5577840" cy="2331720"/>
+            <a:off x="6208776" y="1325880"/>
+            <a:ext cx="5431536" cy="2331720"/>
           </a:xfrm>
           <a:prstGeom prst="roundRect">
             <a:avLst>
@@ -12068,7 +12926,7 @@
         </p:nvSpPr>
         <p:spPr>
           <a:xfrm>
-            <a:off x="6400800" y="1508760"/>
+            <a:off x="6391656" y="1508760"/>
             <a:ext cx="457200" cy="457200"/>
           </a:xfrm>
           <a:prstGeom prst="ellipse">
@@ -12088,7 +12946,7 @@
         </p:nvSpPr>
         <p:spPr>
           <a:xfrm>
-            <a:off x="6400800" y="1508760"/>
+            <a:off x="6391656" y="1508760"/>
             <a:ext cx="457200" cy="457200"/>
           </a:xfrm>
           <a:prstGeom prst="rect">
@@ -12127,8 +12985,8 @@
         </p:nvSpPr>
         <p:spPr>
           <a:xfrm>
-            <a:off x="6995160" y="1435608"/>
-            <a:ext cx="4663440" cy="2112264"/>
+            <a:off x="6986016" y="1435608"/>
+            <a:ext cx="4517136" cy="2112264"/>
           </a:xfrm>
           <a:prstGeom prst="rect">
             <a:avLst/>
@@ -12168,8 +13026,8 @@
         </p:nvSpPr>
         <p:spPr>
           <a:xfrm>
-            <a:off x="411480" y="3886200"/>
-            <a:ext cx="5577840" cy="2331720"/>
+            <a:off x="548640" y="3886200"/>
+            <a:ext cx="5431536" cy="2331720"/>
           </a:xfrm>
           <a:prstGeom prst="roundRect">
             <a:avLst>
@@ -12202,7 +13060,7 @@
         </p:nvSpPr>
         <p:spPr>
           <a:xfrm>
-            <a:off x="594360" y="4069080"/>
+            <a:off x="731520" y="4069080"/>
             <a:ext cx="457200" cy="457200"/>
           </a:xfrm>
           <a:prstGeom prst="ellipse">
@@ -12222,7 +13080,7 @@
         </p:nvSpPr>
         <p:spPr>
           <a:xfrm>
-            <a:off x="594360" y="4069080"/>
+            <a:off x="731520" y="4069080"/>
             <a:ext cx="457200" cy="457200"/>
           </a:xfrm>
           <a:prstGeom prst="rect">
@@ -12261,8 +13119,8 @@
         </p:nvSpPr>
         <p:spPr>
           <a:xfrm>
-            <a:off x="1188720" y="3995928"/>
-            <a:ext cx="4663440" cy="2112264"/>
+            <a:off x="1325880" y="3995928"/>
+            <a:ext cx="4517136" cy="2112264"/>
           </a:xfrm>
           <a:prstGeom prst="rect">
             <a:avLst/>
@@ -12302,8 +13160,8 @@
         </p:nvSpPr>
         <p:spPr>
           <a:xfrm>
-            <a:off x="6217920" y="3886200"/>
-            <a:ext cx="5577840" cy="2331720"/>
+            <a:off x="6208776" y="3886200"/>
+            <a:ext cx="5431536" cy="2331720"/>
           </a:xfrm>
           <a:prstGeom prst="roundRect">
             <a:avLst>
@@ -12336,7 +13194,7 @@
         </p:nvSpPr>
         <p:spPr>
           <a:xfrm>
-            <a:off x="6400800" y="4069080"/>
+            <a:off x="6391656" y="4069080"/>
             <a:ext cx="457200" cy="457200"/>
           </a:xfrm>
           <a:prstGeom prst="ellipse">
@@ -12356,7 +13214,7 @@
         </p:nvSpPr>
         <p:spPr>
           <a:xfrm>
-            <a:off x="6400800" y="4069080"/>
+            <a:off x="6391656" y="4069080"/>
             <a:ext cx="457200" cy="457200"/>
           </a:xfrm>
           <a:prstGeom prst="rect">
@@ -12395,8 +13253,8 @@
         </p:nvSpPr>
         <p:spPr>
           <a:xfrm>
-            <a:off x="6995160" y="3995928"/>
-            <a:ext cx="4663440" cy="2112264"/>
+            <a:off x="6986016" y="3995928"/>
+            <a:ext cx="4517136" cy="2112264"/>
           </a:xfrm>
           <a:prstGeom prst="rect">
             <a:avLst/>
@@ -12425,6 +13283,54 @@
               <a:t>dupla checagem acima de um valor</a:t>
             </a:r>
             <a:endParaRPr lang="en-US" sz="1800" dirty="0"/>
+          </a:p>
+        </p:txBody>
+      </p:sp>
+      <p:sp>
+        <p:nvSpPr>
+          <p:cNvPr id="25" name="Slide Number Placeholder 0"/>
+          <p:cNvSpPr>
+            <a:spLocks noGrp="1"/>
+          </p:cNvSpPr>
+          <p:nvPr>
+            <p:ph type="sldNum" sz="quarter" idx="4294967295"/>
+          </p:nvPr>
+        </p:nvSpPr>
+        <p:spPr>
+          <a:xfrm>
+            <a:off x="11292840" y="6556248"/>
+            <a:ext cx="548640" cy="256032"/>
+          </a:xfrm>
+          <a:prstGeom prst="rect">
+            <a:avLst/>
+          </a:prstGeom>
+          <a:extLst>
+            <a:ext uri="{C572A759-6A51-4108-AA02-DFA0A04FC94B}">
+              <ma14:wrappingTextBoxFlag xmlns:ma14="http://schemas.microsoft.com/office/mac/drawingml/2011/main" val="0"/>
+            </a:ext>
+          </a:extLst>
+        </p:spPr>
+        <p:txBody>
+          <a:bodyPr/>
+          <a:lstStyle>
+            <a:lvl1pPr>
+              <a:defRPr sz="900">
+                <a:solidFill>
+                  <a:srgbClr val="1B3A6B"/>
+                </a:solidFill>
+                <a:latin typeface="Arial"/>
+                <a:ea typeface="Arial"/>
+                <a:cs typeface="Arial"/>
+              </a:defRPr>
+            </a:lvl1pPr>
+          </a:lstStyle>
+          <a:p>
+            <a:pPr algn="r"/>
+            <a:fld id="{F7021451-1387-4CA6-816F-3879F97B5CBC}" type="slidenum">
+              <a:rPr b="1" lang="en-US"/>
+              <a:t>22</a:t>
+            </a:fld>
+            <a:endParaRPr lang="en-US"/>
           </a:p>
         </p:txBody>
       </p:sp>
@@ -12501,7 +13407,7 @@
         </p:blipFill>
         <p:spPr>
           <a:xfrm>
-            <a:off x="411480" y="6547104"/>
+            <a:off x="548640" y="6547104"/>
             <a:ext cx="274320" cy="274320"/>
           </a:xfrm>
           <a:prstGeom prst="rect">
@@ -12517,7 +13423,7 @@
         </p:nvSpPr>
         <p:spPr>
           <a:xfrm>
-            <a:off x="749808" y="6528816"/>
+            <a:off x="886968" y="6528816"/>
             <a:ext cx="6400800" cy="310896"/>
           </a:xfrm>
           <a:prstGeom prst="rect">
@@ -12557,7 +13463,7 @@
         <p:spPr>
           <a:xfrm>
             <a:off x="7132320" y="6528816"/>
-            <a:ext cx="4663440" cy="310896"/>
+            <a:ext cx="4023360" cy="310896"/>
           </a:xfrm>
           <a:prstGeom prst="rect">
             <a:avLst/>
@@ -12595,7 +13501,7 @@
         </p:nvSpPr>
         <p:spPr>
           <a:xfrm>
-            <a:off x="411480" y="384048"/>
+            <a:off x="548640" y="384048"/>
             <a:ext cx="82296" cy="658368"/>
           </a:xfrm>
           <a:prstGeom prst="rect">
@@ -12615,7 +13521,7 @@
         </p:nvSpPr>
         <p:spPr>
           <a:xfrm>
-            <a:off x="640080" y="292608"/>
+            <a:off x="777240" y="292608"/>
             <a:ext cx="10972800" cy="274320"/>
           </a:xfrm>
           <a:prstGeom prst="rect">
@@ -12654,8 +13560,8 @@
         </p:nvSpPr>
         <p:spPr>
           <a:xfrm>
-            <a:off x="640080" y="530352"/>
-            <a:ext cx="11155680" cy="566928"/>
+            <a:off x="777240" y="530352"/>
+            <a:ext cx="10881360" cy="566928"/>
           </a:xfrm>
           <a:prstGeom prst="rect">
             <a:avLst/>
@@ -12695,12 +13601,12 @@
         </p:nvSpPr>
         <p:spPr>
           <a:xfrm>
-            <a:off x="411480" y="1325880"/>
-            <a:ext cx="3642360" cy="4892040"/>
+            <a:off x="548640" y="1325880"/>
+            <a:ext cx="3544824" cy="4892040"/>
           </a:xfrm>
           <a:prstGeom prst="roundRect">
             <a:avLst>
-              <a:gd name="adj" fmla="val 2008"/>
+              <a:gd name="adj" fmla="val 2064"/>
             </a:avLst>
           </a:prstGeom>
           <a:solidFill>
@@ -12729,7 +13635,7 @@
         </p:nvSpPr>
         <p:spPr>
           <a:xfrm>
-            <a:off x="594360" y="1508760"/>
+            <a:off x="731520" y="1508760"/>
             <a:ext cx="457200" cy="457200"/>
           </a:xfrm>
           <a:prstGeom prst="ellipse">
@@ -12749,7 +13655,7 @@
         </p:nvSpPr>
         <p:spPr>
           <a:xfrm>
-            <a:off x="594360" y="1508760"/>
+            <a:off x="731520" y="1508760"/>
             <a:ext cx="457200" cy="457200"/>
           </a:xfrm>
           <a:prstGeom prst="rect">
@@ -12788,8 +13694,8 @@
         </p:nvSpPr>
         <p:spPr>
           <a:xfrm>
-            <a:off x="1188720" y="1435608"/>
-            <a:ext cx="2727960" cy="4672584"/>
+            <a:off x="1325880" y="1435608"/>
+            <a:ext cx="2630424" cy="4672584"/>
           </a:xfrm>
           <a:prstGeom prst="rect">
             <a:avLst/>
@@ -12829,12 +13735,12 @@
         </p:nvSpPr>
         <p:spPr>
           <a:xfrm>
-            <a:off x="4282440" y="1325880"/>
-            <a:ext cx="3642360" cy="4892040"/>
+            <a:off x="4322064" y="1325880"/>
+            <a:ext cx="3544824" cy="4892040"/>
           </a:xfrm>
           <a:prstGeom prst="roundRect">
             <a:avLst>
-              <a:gd name="adj" fmla="val 2008"/>
+              <a:gd name="adj" fmla="val 2064"/>
             </a:avLst>
           </a:prstGeom>
           <a:solidFill>
@@ -12863,7 +13769,7 @@
         </p:nvSpPr>
         <p:spPr>
           <a:xfrm>
-            <a:off x="4465320" y="1508760"/>
+            <a:off x="4504944" y="1508760"/>
             <a:ext cx="457200" cy="457200"/>
           </a:xfrm>
           <a:prstGeom prst="ellipse">
@@ -12883,7 +13789,7 @@
         </p:nvSpPr>
         <p:spPr>
           <a:xfrm>
-            <a:off x="4465320" y="1508760"/>
+            <a:off x="4504944" y="1508760"/>
             <a:ext cx="457200" cy="457200"/>
           </a:xfrm>
           <a:prstGeom prst="rect">
@@ -12922,8 +13828,8 @@
         </p:nvSpPr>
         <p:spPr>
           <a:xfrm>
-            <a:off x="5059680" y="1435608"/>
-            <a:ext cx="2727960" cy="4672584"/>
+            <a:off x="5099304" y="1435608"/>
+            <a:ext cx="2630424" cy="4672584"/>
           </a:xfrm>
           <a:prstGeom prst="rect">
             <a:avLst/>
@@ -12963,12 +13869,12 @@
         </p:nvSpPr>
         <p:spPr>
           <a:xfrm>
-            <a:off x="8153400" y="1325880"/>
-            <a:ext cx="3642360" cy="4892040"/>
+            <a:off x="8095488" y="1325880"/>
+            <a:ext cx="3544824" cy="4892040"/>
           </a:xfrm>
           <a:prstGeom prst="roundRect">
             <a:avLst>
-              <a:gd name="adj" fmla="val 2008"/>
+              <a:gd name="adj" fmla="val 2064"/>
             </a:avLst>
           </a:prstGeom>
           <a:solidFill>
@@ -12997,7 +13903,7 @@
         </p:nvSpPr>
         <p:spPr>
           <a:xfrm>
-            <a:off x="8336280" y="1508760"/>
+            <a:off x="8278368" y="1508760"/>
             <a:ext cx="457200" cy="457200"/>
           </a:xfrm>
           <a:prstGeom prst="ellipse">
@@ -13017,7 +13923,7 @@
         </p:nvSpPr>
         <p:spPr>
           <a:xfrm>
-            <a:off x="8336280" y="1508760"/>
+            <a:off x="8278368" y="1508760"/>
             <a:ext cx="457200" cy="457200"/>
           </a:xfrm>
           <a:prstGeom prst="rect">
@@ -13056,8 +13962,8 @@
         </p:nvSpPr>
         <p:spPr>
           <a:xfrm>
-            <a:off x="8930640" y="1435608"/>
-            <a:ext cx="2727960" cy="4672584"/>
+            <a:off x="8872728" y="1435608"/>
+            <a:ext cx="2630424" cy="4672584"/>
           </a:xfrm>
           <a:prstGeom prst="rect">
             <a:avLst/>
@@ -13086,6 +13992,54 @@
               <a:t>correções justificadas</a:t>
             </a:r>
             <a:endParaRPr lang="en-US" sz="1800" dirty="0"/>
+          </a:p>
+        </p:txBody>
+      </p:sp>
+      <p:sp>
+        <p:nvSpPr>
+          <p:cNvPr id="25" name="Slide Number Placeholder 0"/>
+          <p:cNvSpPr>
+            <a:spLocks noGrp="1"/>
+          </p:cNvSpPr>
+          <p:nvPr>
+            <p:ph type="sldNum" sz="quarter" idx="4294967295"/>
+          </p:nvPr>
+        </p:nvSpPr>
+        <p:spPr>
+          <a:xfrm>
+            <a:off x="11292840" y="6556248"/>
+            <a:ext cx="548640" cy="256032"/>
+          </a:xfrm>
+          <a:prstGeom prst="rect">
+            <a:avLst/>
+          </a:prstGeom>
+          <a:extLst>
+            <a:ext uri="{C572A759-6A51-4108-AA02-DFA0A04FC94B}">
+              <ma14:wrappingTextBoxFlag xmlns:ma14="http://schemas.microsoft.com/office/mac/drawingml/2011/main" val="0"/>
+            </a:ext>
+          </a:extLst>
+        </p:spPr>
+        <p:txBody>
+          <a:bodyPr/>
+          <a:lstStyle>
+            <a:lvl1pPr>
+              <a:defRPr sz="900">
+                <a:solidFill>
+                  <a:srgbClr val="1B3A6B"/>
+                </a:solidFill>
+                <a:latin typeface="Arial"/>
+                <a:ea typeface="Arial"/>
+                <a:cs typeface="Arial"/>
+              </a:defRPr>
+            </a:lvl1pPr>
+          </a:lstStyle>
+          <a:p>
+            <a:pPr algn="r"/>
+            <a:fld id="{F7021451-1387-4CA6-816F-3879F97B5CBC}" type="slidenum">
+              <a:rPr b="1" lang="en-US"/>
+              <a:t>23</a:t>
+            </a:fld>
+            <a:endParaRPr lang="en-US"/>
           </a:p>
         </p:txBody>
       </p:sp>
@@ -13149,6 +14103,45 @@
         </p:nvSpPr>
         <p:spPr>
           <a:xfrm>
+            <a:off x="457200" y="548640"/>
+            <a:ext cx="3474720" cy="1737360"/>
+          </a:xfrm>
+          <a:prstGeom prst="rect">
+            <a:avLst/>
+          </a:prstGeom>
+          <a:noFill/>
+          <a:ln/>
+        </p:spPr>
+        <p:txBody>
+          <a:bodyPr wrap="square" rtlCol="0" anchor="ctr"/>
+          <a:lstStyle/>
+          <a:p>
+            <a:pPr indent="0" marL="0">
+              <a:buNone/>
+            </a:pPr>
+            <a:r>
+              <a:rPr lang="en-US" sz="11000" b="1" dirty="0">
+                <a:solidFill>
+                  <a:srgbClr val="11396F"/>
+                </a:solidFill>
+                <a:latin typeface="Arial" pitchFamily="34" charset="0"/>
+                <a:ea typeface="Arial" pitchFamily="34" charset="-122"/>
+                <a:cs typeface="Arial" pitchFamily="34" charset="-120"/>
+              </a:rPr>
+              <a:t>05</a:t>
+            </a:r>
+            <a:endParaRPr lang="en-US" sz="11000" dirty="0"/>
+          </a:p>
+        </p:txBody>
+      </p:sp>
+      <p:sp>
+        <p:nvSpPr>
+          <p:cNvPr id="4" name="Text 2"/>
+          <p:cNvSpPr/>
+          <p:nvPr/>
+        </p:nvSpPr>
+        <p:spPr>
+          <a:xfrm>
             <a:off x="548640" y="2194560"/>
             <a:ext cx="3291840" cy="548640"/>
           </a:xfrm>
@@ -13182,7 +14175,46 @@
       </p:sp>
       <p:sp>
         <p:nvSpPr>
-          <p:cNvPr id="4" name="Text 2"/>
+          <p:cNvPr id="5" name="Text 3"/>
+          <p:cNvSpPr/>
+          <p:nvPr/>
+        </p:nvSpPr>
+        <p:spPr>
+          <a:xfrm>
+            <a:off x="548640" y="3200400"/>
+            <a:ext cx="3383280" cy="457200"/>
+          </a:xfrm>
+          <a:prstGeom prst="rect">
+            <a:avLst/>
+          </a:prstGeom>
+          <a:noFill/>
+          <a:ln/>
+        </p:spPr>
+        <p:txBody>
+          <a:bodyPr wrap="square" rtlCol="0" anchor="ctr"/>
+          <a:lstStyle/>
+          <a:p>
+            <a:pPr indent="0" marL="0">
+              <a:buNone/>
+            </a:pPr>
+            <a:r>
+              <a:rPr lang="en-US" sz="1100" dirty="0">
+                <a:solidFill>
+                  <a:srgbClr val="C7D2E3"/>
+                </a:solidFill>
+                <a:latin typeface="Arial" pitchFamily="34" charset="0"/>
+                <a:ea typeface="Arial" pitchFamily="34" charset="-122"/>
+                <a:cs typeface="Arial" pitchFamily="34" charset="-120"/>
+              </a:rPr>
+              <a:t>M7 · Etapa 3 · Operação ponta a ponta</a:t>
+            </a:r>
+            <a:endParaRPr lang="en-US" sz="1100" dirty="0"/>
+          </a:p>
+        </p:txBody>
+      </p:sp>
+      <p:sp>
+        <p:nvSpPr>
+          <p:cNvPr id="6" name="Text 4"/>
           <p:cNvSpPr/>
           <p:nvPr/>
         </p:nvSpPr>
@@ -13221,7 +14253,7 @@
       </p:sp>
       <p:pic>
         <p:nvPicPr>
-          <p:cNvPr id="5" name="Image 0" descr="/www/wwwroot/rexar/gdsolar/docs/curso/slides/assets/logo-gdsolar.png">    </p:cNvPr>
+          <p:cNvPr id="7" name="Image 0" descr="/www/wwwroot/rexar/gdsolar/docs/curso/slides/assets/logo-gdsolar.png">    </p:cNvPr>
           <p:cNvPicPr>
             <a:picLocks noChangeAspect="1"/>
           </p:cNvPicPr>
@@ -13245,7 +14277,7 @@
       </p:pic>
       <p:sp>
         <p:nvSpPr>
-          <p:cNvPr id="6" name="Text 3"/>
+          <p:cNvPr id="8" name="Text 5"/>
           <p:cNvSpPr/>
           <p:nvPr/>
         </p:nvSpPr>
@@ -13286,7 +14318,7 @@
       </p:sp>
       <p:sp>
         <p:nvSpPr>
-          <p:cNvPr id="7" name="Text 4"/>
+          <p:cNvPr id="9" name="Text 6"/>
           <p:cNvSpPr/>
           <p:nvPr/>
         </p:nvSpPr>
@@ -13327,7 +14359,7 @@
       </p:sp>
       <p:sp>
         <p:nvSpPr>
-          <p:cNvPr id="8" name="Text 5"/>
+          <p:cNvPr id="10" name="Text 7"/>
           <p:cNvSpPr/>
           <p:nvPr/>
         </p:nvSpPr>
@@ -13443,7 +14475,7 @@
         </p:blipFill>
         <p:spPr>
           <a:xfrm>
-            <a:off x="411480" y="6547104"/>
+            <a:off x="548640" y="6547104"/>
             <a:ext cx="274320" cy="274320"/>
           </a:xfrm>
           <a:prstGeom prst="rect">
@@ -13459,7 +14491,7 @@
         </p:nvSpPr>
         <p:spPr>
           <a:xfrm>
-            <a:off x="749808" y="6528816"/>
+            <a:off x="886968" y="6528816"/>
             <a:ext cx="6400800" cy="310896"/>
           </a:xfrm>
           <a:prstGeom prst="rect">
@@ -13499,7 +14531,7 @@
         <p:spPr>
           <a:xfrm>
             <a:off x="7132320" y="6528816"/>
-            <a:ext cx="4663440" cy="310896"/>
+            <a:ext cx="4023360" cy="310896"/>
           </a:xfrm>
           <a:prstGeom prst="rect">
             <a:avLst/>
@@ -13537,7 +14569,7 @@
         </p:nvSpPr>
         <p:spPr>
           <a:xfrm>
-            <a:off x="411480" y="384048"/>
+            <a:off x="548640" y="384048"/>
             <a:ext cx="82296" cy="658368"/>
           </a:xfrm>
           <a:prstGeom prst="rect">
@@ -13557,7 +14589,7 @@
         </p:nvSpPr>
         <p:spPr>
           <a:xfrm>
-            <a:off x="640080" y="292608"/>
+            <a:off x="777240" y="292608"/>
             <a:ext cx="10972800" cy="274320"/>
           </a:xfrm>
           <a:prstGeom prst="rect">
@@ -13596,8 +14628,8 @@
         </p:nvSpPr>
         <p:spPr>
           <a:xfrm>
-            <a:off x="640080" y="530352"/>
-            <a:ext cx="11155680" cy="566928"/>
+            <a:off x="777240" y="530352"/>
+            <a:ext cx="10881360" cy="566928"/>
           </a:xfrm>
           <a:prstGeom prst="rect">
             <a:avLst/>
@@ -13951,6 +14983,54 @@
               <a:t>Observações → revisada → aprovar · fica registrado quem revisou e quando</a:t>
             </a:r>
             <a:endParaRPr lang="en-US" sz="1500" dirty="0"/>
+          </a:p>
+        </p:txBody>
+      </p:sp>
+      <p:sp>
+        <p:nvSpPr>
+          <p:cNvPr id="25" name="Slide Number Placeholder 0"/>
+          <p:cNvSpPr>
+            <a:spLocks noGrp="1"/>
+          </p:cNvSpPr>
+          <p:nvPr>
+            <p:ph type="sldNum" sz="quarter" idx="4294967295"/>
+          </p:nvPr>
+        </p:nvSpPr>
+        <p:spPr>
+          <a:xfrm>
+            <a:off x="11292840" y="6556248"/>
+            <a:ext cx="548640" cy="256032"/>
+          </a:xfrm>
+          <a:prstGeom prst="rect">
+            <a:avLst/>
+          </a:prstGeom>
+          <a:extLst>
+            <a:ext uri="{C572A759-6A51-4108-AA02-DFA0A04FC94B}">
+              <ma14:wrappingTextBoxFlag xmlns:ma14="http://schemas.microsoft.com/office/mac/drawingml/2011/main" val="0"/>
+            </a:ext>
+          </a:extLst>
+        </p:spPr>
+        <p:txBody>
+          <a:bodyPr/>
+          <a:lstStyle>
+            <a:lvl1pPr>
+              <a:defRPr sz="900">
+                <a:solidFill>
+                  <a:srgbClr val="1B3A6B"/>
+                </a:solidFill>
+                <a:latin typeface="Arial"/>
+                <a:ea typeface="Arial"/>
+                <a:cs typeface="Arial"/>
+              </a:defRPr>
+            </a:lvl1pPr>
+          </a:lstStyle>
+          <a:p>
+            <a:pPr algn="r"/>
+            <a:fld id="{F7021451-1387-4CA6-816F-3879F97B5CBC}" type="slidenum">
+              <a:rPr b="1" lang="en-US"/>
+              <a:t>25</a:t>
+            </a:fld>
+            <a:endParaRPr lang="en-US"/>
           </a:p>
         </p:txBody>
       </p:sp>
@@ -14027,7 +15107,7 @@
         </p:blipFill>
         <p:spPr>
           <a:xfrm>
-            <a:off x="411480" y="6547104"/>
+            <a:off x="548640" y="6547104"/>
             <a:ext cx="274320" cy="274320"/>
           </a:xfrm>
           <a:prstGeom prst="rect">
@@ -14043,7 +15123,7 @@
         </p:nvSpPr>
         <p:spPr>
           <a:xfrm>
-            <a:off x="749808" y="6528816"/>
+            <a:off x="886968" y="6528816"/>
             <a:ext cx="6400800" cy="310896"/>
           </a:xfrm>
           <a:prstGeom prst="rect">
@@ -14083,7 +15163,7 @@
         <p:spPr>
           <a:xfrm>
             <a:off x="7132320" y="6528816"/>
-            <a:ext cx="4663440" cy="310896"/>
+            <a:ext cx="4023360" cy="310896"/>
           </a:xfrm>
           <a:prstGeom prst="rect">
             <a:avLst/>
@@ -14121,7 +15201,7 @@
         </p:nvSpPr>
         <p:spPr>
           <a:xfrm>
-            <a:off x="411480" y="384048"/>
+            <a:off x="548640" y="384048"/>
             <a:ext cx="82296" cy="658368"/>
           </a:xfrm>
           <a:prstGeom prst="rect">
@@ -14141,7 +15221,7 @@
         </p:nvSpPr>
         <p:spPr>
           <a:xfrm>
-            <a:off x="640080" y="292608"/>
+            <a:off x="777240" y="292608"/>
             <a:ext cx="10972800" cy="274320"/>
           </a:xfrm>
           <a:prstGeom prst="rect">
@@ -14180,8 +15260,8 @@
         </p:nvSpPr>
         <p:spPr>
           <a:xfrm>
-            <a:off x="640080" y="530352"/>
-            <a:ext cx="11155680" cy="566928"/>
+            <a:off x="777240" y="530352"/>
+            <a:ext cx="10881360" cy="566928"/>
           </a:xfrm>
           <a:prstGeom prst="rect">
             <a:avLst/>
@@ -14382,6 +15462,54 @@
               <a:t>Filtre por status e por cliente · revise em lote</a:t>
             </a:r>
             <a:endParaRPr lang="en-US" sz="1500" dirty="0"/>
+          </a:p>
+        </p:txBody>
+      </p:sp>
+      <p:sp>
+        <p:nvSpPr>
+          <p:cNvPr id="25" name="Slide Number Placeholder 0"/>
+          <p:cNvSpPr>
+            <a:spLocks noGrp="1"/>
+          </p:cNvSpPr>
+          <p:nvPr>
+            <p:ph type="sldNum" sz="quarter" idx="4294967295"/>
+          </p:nvPr>
+        </p:nvSpPr>
+        <p:spPr>
+          <a:xfrm>
+            <a:off x="11292840" y="6556248"/>
+            <a:ext cx="548640" cy="256032"/>
+          </a:xfrm>
+          <a:prstGeom prst="rect">
+            <a:avLst/>
+          </a:prstGeom>
+          <a:extLst>
+            <a:ext uri="{C572A759-6A51-4108-AA02-DFA0A04FC94B}">
+              <ma14:wrappingTextBoxFlag xmlns:ma14="http://schemas.microsoft.com/office/mac/drawingml/2011/main" val="0"/>
+            </a:ext>
+          </a:extLst>
+        </p:spPr>
+        <p:txBody>
+          <a:bodyPr/>
+          <a:lstStyle>
+            <a:lvl1pPr>
+              <a:defRPr sz="900">
+                <a:solidFill>
+                  <a:srgbClr val="1B3A6B"/>
+                </a:solidFill>
+                <a:latin typeface="Arial"/>
+                <a:ea typeface="Arial"/>
+                <a:cs typeface="Arial"/>
+              </a:defRPr>
+            </a:lvl1pPr>
+          </a:lstStyle>
+          <a:p>
+            <a:pPr algn="r"/>
+            <a:fld id="{F7021451-1387-4CA6-816F-3879F97B5CBC}" type="slidenum">
+              <a:rPr b="1" lang="en-US"/>
+              <a:t>26</a:t>
+            </a:fld>
+            <a:endParaRPr lang="en-US"/>
           </a:p>
         </p:txBody>
       </p:sp>
@@ -14445,6 +15573,45 @@
         </p:nvSpPr>
         <p:spPr>
           <a:xfrm>
+            <a:off x="457200" y="548640"/>
+            <a:ext cx="3474720" cy="1737360"/>
+          </a:xfrm>
+          <a:prstGeom prst="rect">
+            <a:avLst/>
+          </a:prstGeom>
+          <a:noFill/>
+          <a:ln/>
+        </p:spPr>
+        <p:txBody>
+          <a:bodyPr wrap="square" rtlCol="0" anchor="ctr"/>
+          <a:lstStyle/>
+          <a:p>
+            <a:pPr indent="0" marL="0">
+              <a:buNone/>
+            </a:pPr>
+            <a:r>
+              <a:rPr lang="en-US" sz="11000" b="1" dirty="0">
+                <a:solidFill>
+                  <a:srgbClr val="11396F"/>
+                </a:solidFill>
+                <a:latin typeface="Arial" pitchFamily="34" charset="0"/>
+                <a:ea typeface="Arial" pitchFamily="34" charset="-122"/>
+                <a:cs typeface="Arial" pitchFamily="34" charset="-120"/>
+              </a:rPr>
+              <a:t>06</a:t>
+            </a:r>
+            <a:endParaRPr lang="en-US" sz="11000" dirty="0"/>
+          </a:p>
+        </p:txBody>
+      </p:sp>
+      <p:sp>
+        <p:nvSpPr>
+          <p:cNvPr id="4" name="Text 2"/>
+          <p:cNvSpPr/>
+          <p:nvPr/>
+        </p:nvSpPr>
+        <p:spPr>
+          <a:xfrm>
             <a:off x="548640" y="2194560"/>
             <a:ext cx="3291840" cy="548640"/>
           </a:xfrm>
@@ -14478,7 +15645,46 @@
       </p:sp>
       <p:sp>
         <p:nvSpPr>
-          <p:cNvPr id="4" name="Text 2"/>
+          <p:cNvPr id="5" name="Text 3"/>
+          <p:cNvSpPr/>
+          <p:nvPr/>
+        </p:nvSpPr>
+        <p:spPr>
+          <a:xfrm>
+            <a:off x="548640" y="3200400"/>
+            <a:ext cx="3383280" cy="457200"/>
+          </a:xfrm>
+          <a:prstGeom prst="rect">
+            <a:avLst/>
+          </a:prstGeom>
+          <a:noFill/>
+          <a:ln/>
+        </p:spPr>
+        <p:txBody>
+          <a:bodyPr wrap="square" rtlCol="0" anchor="ctr"/>
+          <a:lstStyle/>
+          <a:p>
+            <a:pPr indent="0" marL="0">
+              <a:buNone/>
+            </a:pPr>
+            <a:r>
+              <a:rPr lang="en-US" sz="1100" dirty="0">
+                <a:solidFill>
+                  <a:srgbClr val="C7D2E3"/>
+                </a:solidFill>
+                <a:latin typeface="Arial" pitchFamily="34" charset="0"/>
+                <a:ea typeface="Arial" pitchFamily="34" charset="-122"/>
+                <a:cs typeface="Arial" pitchFamily="34" charset="-120"/>
+              </a:rPr>
+              <a:t>M7 · Etapa 3 · Operação ponta a ponta</a:t>
+            </a:r>
+            <a:endParaRPr lang="en-US" sz="1100" dirty="0"/>
+          </a:p>
+        </p:txBody>
+      </p:sp>
+      <p:sp>
+        <p:nvSpPr>
+          <p:cNvPr id="6" name="Text 4"/>
           <p:cNvSpPr/>
           <p:nvPr/>
         </p:nvSpPr>
@@ -14517,7 +15723,7 @@
       </p:sp>
       <p:pic>
         <p:nvPicPr>
-          <p:cNvPr id="5" name="Image 0" descr="/www/wwwroot/rexar/gdsolar/docs/curso/slides/assets/logo-gdsolar.png">    </p:cNvPr>
+          <p:cNvPr id="7" name="Image 0" descr="/www/wwwroot/rexar/gdsolar/docs/curso/slides/assets/logo-gdsolar.png">    </p:cNvPr>
           <p:cNvPicPr>
             <a:picLocks noChangeAspect="1"/>
           </p:cNvPicPr>
@@ -14541,7 +15747,7 @@
       </p:pic>
       <p:sp>
         <p:nvSpPr>
-          <p:cNvPr id="6" name="Text 3"/>
+          <p:cNvPr id="8" name="Text 5"/>
           <p:cNvSpPr/>
           <p:nvPr/>
         </p:nvSpPr>
@@ -14582,7 +15788,7 @@
       </p:sp>
       <p:sp>
         <p:nvSpPr>
-          <p:cNvPr id="7" name="Text 4"/>
+          <p:cNvPr id="9" name="Text 6"/>
           <p:cNvSpPr/>
           <p:nvPr/>
         </p:nvSpPr>
@@ -14623,7 +15829,7 @@
       </p:sp>
       <p:sp>
         <p:nvSpPr>
-          <p:cNvPr id="8" name="Text 5"/>
+          <p:cNvPr id="10" name="Text 7"/>
           <p:cNvSpPr/>
           <p:nvPr/>
         </p:nvSpPr>
@@ -14739,7 +15945,7 @@
         </p:blipFill>
         <p:spPr>
           <a:xfrm>
-            <a:off x="411480" y="6547104"/>
+            <a:off x="548640" y="6547104"/>
             <a:ext cx="274320" cy="274320"/>
           </a:xfrm>
           <a:prstGeom prst="rect">
@@ -14755,7 +15961,7 @@
         </p:nvSpPr>
         <p:spPr>
           <a:xfrm>
-            <a:off x="749808" y="6528816"/>
+            <a:off x="886968" y="6528816"/>
             <a:ext cx="6400800" cy="310896"/>
           </a:xfrm>
           <a:prstGeom prst="rect">
@@ -14795,7 +16001,7 @@
         <p:spPr>
           <a:xfrm>
             <a:off x="7132320" y="6528816"/>
-            <a:ext cx="4663440" cy="310896"/>
+            <a:ext cx="4023360" cy="310896"/>
           </a:xfrm>
           <a:prstGeom prst="rect">
             <a:avLst/>
@@ -14833,7 +16039,7 @@
         </p:nvSpPr>
         <p:spPr>
           <a:xfrm>
-            <a:off x="411480" y="384048"/>
+            <a:off x="548640" y="384048"/>
             <a:ext cx="82296" cy="658368"/>
           </a:xfrm>
           <a:prstGeom prst="rect">
@@ -14853,7 +16059,7 @@
         </p:nvSpPr>
         <p:spPr>
           <a:xfrm>
-            <a:off x="640080" y="292608"/>
+            <a:off x="777240" y="292608"/>
             <a:ext cx="10972800" cy="274320"/>
           </a:xfrm>
           <a:prstGeom prst="rect">
@@ -14892,8 +16098,8 @@
         </p:nvSpPr>
         <p:spPr>
           <a:xfrm>
-            <a:off x="640080" y="530352"/>
-            <a:ext cx="11155680" cy="566928"/>
+            <a:off x="777240" y="530352"/>
+            <a:ext cx="10881360" cy="566928"/>
           </a:xfrm>
           <a:prstGeom prst="rect">
             <a:avLst/>
@@ -15247,6 +16453,54 @@
               <a:t>Sem desconto ativo → criar a regra na ficha do cliente → conferir a margem na fatura</a:t>
             </a:r>
             <a:endParaRPr lang="en-US" sz="1500" dirty="0"/>
+          </a:p>
+        </p:txBody>
+      </p:sp>
+      <p:sp>
+        <p:nvSpPr>
+          <p:cNvPr id="25" name="Slide Number Placeholder 0"/>
+          <p:cNvSpPr>
+            <a:spLocks noGrp="1"/>
+          </p:cNvSpPr>
+          <p:nvPr>
+            <p:ph type="sldNum" sz="quarter" idx="4294967295"/>
+          </p:nvPr>
+        </p:nvSpPr>
+        <p:spPr>
+          <a:xfrm>
+            <a:off x="11292840" y="6556248"/>
+            <a:ext cx="548640" cy="256032"/>
+          </a:xfrm>
+          <a:prstGeom prst="rect">
+            <a:avLst/>
+          </a:prstGeom>
+          <a:extLst>
+            <a:ext uri="{C572A759-6A51-4108-AA02-DFA0A04FC94B}">
+              <ma14:wrappingTextBoxFlag xmlns:ma14="http://schemas.microsoft.com/office/mac/drawingml/2011/main" val="0"/>
+            </a:ext>
+          </a:extLst>
+        </p:spPr>
+        <p:txBody>
+          <a:bodyPr/>
+          <a:lstStyle>
+            <a:lvl1pPr>
+              <a:defRPr sz="900">
+                <a:solidFill>
+                  <a:srgbClr val="1B3A6B"/>
+                </a:solidFill>
+                <a:latin typeface="Arial"/>
+                <a:ea typeface="Arial"/>
+                <a:cs typeface="Arial"/>
+              </a:defRPr>
+            </a:lvl1pPr>
+          </a:lstStyle>
+          <a:p>
+            <a:pPr algn="r"/>
+            <a:fld id="{F7021451-1387-4CA6-816F-3879F97B5CBC}" type="slidenum">
+              <a:rPr b="1" lang="en-US"/>
+              <a:t>28</a:t>
+            </a:fld>
+            <a:endParaRPr lang="en-US"/>
           </a:p>
         </p:txBody>
       </p:sp>
@@ -15323,7 +16577,7 @@
         </p:blipFill>
         <p:spPr>
           <a:xfrm>
-            <a:off x="411480" y="6547104"/>
+            <a:off x="548640" y="6547104"/>
             <a:ext cx="274320" cy="274320"/>
           </a:xfrm>
           <a:prstGeom prst="rect">
@@ -15339,7 +16593,7 @@
         </p:nvSpPr>
         <p:spPr>
           <a:xfrm>
-            <a:off x="749808" y="6528816"/>
+            <a:off x="886968" y="6528816"/>
             <a:ext cx="6400800" cy="310896"/>
           </a:xfrm>
           <a:prstGeom prst="rect">
@@ -15379,7 +16633,7 @@
         <p:spPr>
           <a:xfrm>
             <a:off x="7132320" y="6528816"/>
-            <a:ext cx="4663440" cy="310896"/>
+            <a:ext cx="4023360" cy="310896"/>
           </a:xfrm>
           <a:prstGeom prst="rect">
             <a:avLst/>
@@ -15417,7 +16671,7 @@
         </p:nvSpPr>
         <p:spPr>
           <a:xfrm>
-            <a:off x="411480" y="384048"/>
+            <a:off x="548640" y="384048"/>
             <a:ext cx="82296" cy="658368"/>
           </a:xfrm>
           <a:prstGeom prst="rect">
@@ -15437,7 +16691,7 @@
         </p:nvSpPr>
         <p:spPr>
           <a:xfrm>
-            <a:off x="640080" y="292608"/>
+            <a:off x="777240" y="292608"/>
             <a:ext cx="10972800" cy="274320"/>
           </a:xfrm>
           <a:prstGeom prst="rect">
@@ -15476,8 +16730,8 @@
         </p:nvSpPr>
         <p:spPr>
           <a:xfrm>
-            <a:off x="640080" y="530352"/>
-            <a:ext cx="11155680" cy="566928"/>
+            <a:off x="777240" y="530352"/>
+            <a:ext cx="10881360" cy="566928"/>
           </a:xfrm>
           <a:prstGeom prst="rect">
             <a:avLst/>
@@ -15517,8 +16771,8 @@
         </p:nvSpPr>
         <p:spPr>
           <a:xfrm>
-            <a:off x="411480" y="1325880"/>
-            <a:ext cx="11384280" cy="4937760"/>
+            <a:off x="548640" y="1325880"/>
+            <a:ext cx="11091672" cy="4937760"/>
           </a:xfrm>
           <a:prstGeom prst="roundRect">
             <a:avLst>
@@ -15544,7 +16798,7 @@
         </p:nvSpPr>
         <p:spPr>
           <a:xfrm>
-            <a:off x="594360" y="1508760"/>
+            <a:off x="731520" y="1508760"/>
             <a:ext cx="822960" cy="384048"/>
           </a:xfrm>
           <a:prstGeom prst="roundRect">
@@ -15566,7 +16820,7 @@
         </p:nvSpPr>
         <p:spPr>
           <a:xfrm>
-            <a:off x="594360" y="1508760"/>
+            <a:off x="731520" y="1508760"/>
             <a:ext cx="822960" cy="384048"/>
           </a:xfrm>
           <a:prstGeom prst="rect">
@@ -15605,8 +16859,8 @@
         </p:nvSpPr>
         <p:spPr>
           <a:xfrm>
-            <a:off x="1508760" y="1463040"/>
-            <a:ext cx="10149840" cy="502920"/>
+            <a:off x="1645920" y="1463040"/>
+            <a:ext cx="9857232" cy="502920"/>
           </a:xfrm>
           <a:prstGeom prst="rect">
             <a:avLst/>
@@ -15646,8 +16900,8 @@
         </p:nvSpPr>
         <p:spPr>
           <a:xfrm>
-            <a:off x="640080" y="2057400"/>
-            <a:ext cx="10927080" cy="4069080"/>
+            <a:off x="777240" y="2057400"/>
+            <a:ext cx="10634472" cy="4069080"/>
           </a:xfrm>
           <a:prstGeom prst="rect">
             <a:avLst/>
@@ -15693,6 +16947,54 @@
               <a:t>3+ pendências resolvidas com justificativa</a:t>
             </a:r>
             <a:endParaRPr lang="en-US" sz="1500" dirty="0"/>
+          </a:p>
+        </p:txBody>
+      </p:sp>
+      <p:sp>
+        <p:nvSpPr>
+          <p:cNvPr id="25" name="Slide Number Placeholder 0"/>
+          <p:cNvSpPr>
+            <a:spLocks noGrp="1"/>
+          </p:cNvSpPr>
+          <p:nvPr>
+            <p:ph type="sldNum" sz="quarter" idx="4294967295"/>
+          </p:nvPr>
+        </p:nvSpPr>
+        <p:spPr>
+          <a:xfrm>
+            <a:off x="11292840" y="6556248"/>
+            <a:ext cx="548640" cy="256032"/>
+          </a:xfrm>
+          <a:prstGeom prst="rect">
+            <a:avLst/>
+          </a:prstGeom>
+          <a:extLst>
+            <a:ext uri="{C572A759-6A51-4108-AA02-DFA0A04FC94B}">
+              <ma14:wrappingTextBoxFlag xmlns:ma14="http://schemas.microsoft.com/office/mac/drawingml/2011/main" val="0"/>
+            </a:ext>
+          </a:extLst>
+        </p:spPr>
+        <p:txBody>
+          <a:bodyPr/>
+          <a:lstStyle>
+            <a:lvl1pPr>
+              <a:defRPr sz="900">
+                <a:solidFill>
+                  <a:srgbClr val="1B3A6B"/>
+                </a:solidFill>
+                <a:latin typeface="Arial"/>
+                <a:ea typeface="Arial"/>
+                <a:cs typeface="Arial"/>
+              </a:defRPr>
+            </a:lvl1pPr>
+          </a:lstStyle>
+          <a:p>
+            <a:pPr algn="r"/>
+            <a:fld id="{F7021451-1387-4CA6-816F-3879F97B5CBC}" type="slidenum">
+              <a:rPr b="1" lang="en-US"/>
+              <a:t>29</a:t>
+            </a:fld>
+            <a:endParaRPr lang="en-US"/>
           </a:p>
         </p:txBody>
       </p:sp>
@@ -15769,7 +17071,7 @@
         </p:blipFill>
         <p:spPr>
           <a:xfrm>
-            <a:off x="411480" y="6547104"/>
+            <a:off x="548640" y="6547104"/>
             <a:ext cx="274320" cy="274320"/>
           </a:xfrm>
           <a:prstGeom prst="rect">
@@ -15785,7 +17087,7 @@
         </p:nvSpPr>
         <p:spPr>
           <a:xfrm>
-            <a:off x="749808" y="6528816"/>
+            <a:off x="886968" y="6528816"/>
             <a:ext cx="6400800" cy="310896"/>
           </a:xfrm>
           <a:prstGeom prst="rect">
@@ -15825,7 +17127,7 @@
         <p:spPr>
           <a:xfrm>
             <a:off x="7132320" y="6528816"/>
-            <a:ext cx="4663440" cy="310896"/>
+            <a:ext cx="4023360" cy="310896"/>
           </a:xfrm>
           <a:prstGeom prst="rect">
             <a:avLst/>
@@ -15863,7 +17165,7 @@
         </p:nvSpPr>
         <p:spPr>
           <a:xfrm>
-            <a:off x="411480" y="384048"/>
+            <a:off x="548640" y="384048"/>
             <a:ext cx="82296" cy="658368"/>
           </a:xfrm>
           <a:prstGeom prst="rect">
@@ -15883,7 +17185,7 @@
         </p:nvSpPr>
         <p:spPr>
           <a:xfrm>
-            <a:off x="640080" y="292608"/>
+            <a:off x="777240" y="292608"/>
             <a:ext cx="10972800" cy="274320"/>
           </a:xfrm>
           <a:prstGeom prst="rect">
@@ -15922,8 +17224,8 @@
         </p:nvSpPr>
         <p:spPr>
           <a:xfrm>
-            <a:off x="640080" y="530352"/>
-            <a:ext cx="11155680" cy="566928"/>
+            <a:off x="777240" y="530352"/>
+            <a:ext cx="10881360" cy="566928"/>
           </a:xfrm>
           <a:prstGeom prst="rect">
             <a:avLst/>
@@ -15963,8 +17265,8 @@
         </p:nvSpPr>
         <p:spPr>
           <a:xfrm>
-            <a:off x="411480" y="1325880"/>
-            <a:ext cx="3642360" cy="2331720"/>
+            <a:off x="548640" y="1325880"/>
+            <a:ext cx="3544824" cy="2331720"/>
           </a:xfrm>
           <a:prstGeom prst="roundRect">
             <a:avLst>
@@ -15997,7 +17299,7 @@
         </p:nvSpPr>
         <p:spPr>
           <a:xfrm>
-            <a:off x="594360" y="1508760"/>
+            <a:off x="731520" y="1508760"/>
             <a:ext cx="457200" cy="457200"/>
           </a:xfrm>
           <a:prstGeom prst="ellipse">
@@ -16017,7 +17319,7 @@
         </p:nvSpPr>
         <p:spPr>
           <a:xfrm>
-            <a:off x="594360" y="1508760"/>
+            <a:off x="731520" y="1508760"/>
             <a:ext cx="457200" cy="457200"/>
           </a:xfrm>
           <a:prstGeom prst="rect">
@@ -16056,8 +17358,8 @@
         </p:nvSpPr>
         <p:spPr>
           <a:xfrm>
-            <a:off x="1188720" y="1435608"/>
-            <a:ext cx="2727960" cy="2112264"/>
+            <a:off x="1325880" y="1435608"/>
+            <a:ext cx="2630424" cy="2112264"/>
           </a:xfrm>
           <a:prstGeom prst="rect">
             <a:avLst/>
@@ -16097,8 +17399,8 @@
         </p:nvSpPr>
         <p:spPr>
           <a:xfrm>
-            <a:off x="4282440" y="1325880"/>
-            <a:ext cx="3642360" cy="2331720"/>
+            <a:off x="4322064" y="1325880"/>
+            <a:ext cx="3544824" cy="2331720"/>
           </a:xfrm>
           <a:prstGeom prst="roundRect">
             <a:avLst>
@@ -16131,7 +17433,7 @@
         </p:nvSpPr>
         <p:spPr>
           <a:xfrm>
-            <a:off x="4465320" y="1508760"/>
+            <a:off x="4504944" y="1508760"/>
             <a:ext cx="457200" cy="457200"/>
           </a:xfrm>
           <a:prstGeom prst="ellipse">
@@ -16151,7 +17453,7 @@
         </p:nvSpPr>
         <p:spPr>
           <a:xfrm>
-            <a:off x="4465320" y="1508760"/>
+            <a:off x="4504944" y="1508760"/>
             <a:ext cx="457200" cy="457200"/>
           </a:xfrm>
           <a:prstGeom prst="rect">
@@ -16190,8 +17492,8 @@
         </p:nvSpPr>
         <p:spPr>
           <a:xfrm>
-            <a:off x="5059680" y="1435608"/>
-            <a:ext cx="2727960" cy="2112264"/>
+            <a:off x="5099304" y="1435608"/>
+            <a:ext cx="2630424" cy="2112264"/>
           </a:xfrm>
           <a:prstGeom prst="rect">
             <a:avLst/>
@@ -16231,8 +17533,8 @@
         </p:nvSpPr>
         <p:spPr>
           <a:xfrm>
-            <a:off x="8153400" y="1325880"/>
-            <a:ext cx="3642360" cy="2331720"/>
+            <a:off x="8095488" y="1325880"/>
+            <a:ext cx="3544824" cy="2331720"/>
           </a:xfrm>
           <a:prstGeom prst="roundRect">
             <a:avLst>
@@ -16265,7 +17567,7 @@
         </p:nvSpPr>
         <p:spPr>
           <a:xfrm>
-            <a:off x="8336280" y="1508760"/>
+            <a:off x="8278368" y="1508760"/>
             <a:ext cx="457200" cy="457200"/>
           </a:xfrm>
           <a:prstGeom prst="ellipse">
@@ -16285,7 +17587,7 @@
         </p:nvSpPr>
         <p:spPr>
           <a:xfrm>
-            <a:off x="8336280" y="1508760"/>
+            <a:off x="8278368" y="1508760"/>
             <a:ext cx="457200" cy="457200"/>
           </a:xfrm>
           <a:prstGeom prst="rect">
@@ -16324,8 +17626,8 @@
         </p:nvSpPr>
         <p:spPr>
           <a:xfrm>
-            <a:off x="8930640" y="1435608"/>
-            <a:ext cx="2727960" cy="2112264"/>
+            <a:off x="8872728" y="1435608"/>
+            <a:ext cx="2630424" cy="2112264"/>
           </a:xfrm>
           <a:prstGeom prst="rect">
             <a:avLst/>
@@ -16365,8 +17667,8 @@
         </p:nvSpPr>
         <p:spPr>
           <a:xfrm>
-            <a:off x="411480" y="3886200"/>
-            <a:ext cx="3642360" cy="2331720"/>
+            <a:off x="548640" y="3886200"/>
+            <a:ext cx="3544824" cy="2331720"/>
           </a:xfrm>
           <a:prstGeom prst="roundRect">
             <a:avLst>
@@ -16399,7 +17701,7 @@
         </p:nvSpPr>
         <p:spPr>
           <a:xfrm>
-            <a:off x="594360" y="4069080"/>
+            <a:off x="731520" y="4069080"/>
             <a:ext cx="457200" cy="457200"/>
           </a:xfrm>
           <a:prstGeom prst="ellipse">
@@ -16419,7 +17721,7 @@
         </p:nvSpPr>
         <p:spPr>
           <a:xfrm>
-            <a:off x="594360" y="4069080"/>
+            <a:off x="731520" y="4069080"/>
             <a:ext cx="457200" cy="457200"/>
           </a:xfrm>
           <a:prstGeom prst="rect">
@@ -16458,8 +17760,8 @@
         </p:nvSpPr>
         <p:spPr>
           <a:xfrm>
-            <a:off x="1188720" y="3995928"/>
-            <a:ext cx="2727960" cy="2112264"/>
+            <a:off x="1325880" y="3995928"/>
+            <a:ext cx="2630424" cy="2112264"/>
           </a:xfrm>
           <a:prstGeom prst="rect">
             <a:avLst/>
@@ -16499,8 +17801,8 @@
         </p:nvSpPr>
         <p:spPr>
           <a:xfrm>
-            <a:off x="4282440" y="3886200"/>
-            <a:ext cx="3642360" cy="2331720"/>
+            <a:off x="4322064" y="3886200"/>
+            <a:ext cx="3544824" cy="2331720"/>
           </a:xfrm>
           <a:prstGeom prst="roundRect">
             <a:avLst>
@@ -16533,7 +17835,7 @@
         </p:nvSpPr>
         <p:spPr>
           <a:xfrm>
-            <a:off x="4465320" y="4069080"/>
+            <a:off x="4504944" y="4069080"/>
             <a:ext cx="457200" cy="457200"/>
           </a:xfrm>
           <a:prstGeom prst="ellipse">
@@ -16553,7 +17855,7 @@
         </p:nvSpPr>
         <p:spPr>
           <a:xfrm>
-            <a:off x="4465320" y="4069080"/>
+            <a:off x="4504944" y="4069080"/>
             <a:ext cx="457200" cy="457200"/>
           </a:xfrm>
           <a:prstGeom prst="rect">
@@ -16592,8 +17894,8 @@
         </p:nvSpPr>
         <p:spPr>
           <a:xfrm>
-            <a:off x="5059680" y="3995928"/>
-            <a:ext cx="2727960" cy="2112264"/>
+            <a:off x="5099304" y="3995928"/>
+            <a:ext cx="2630424" cy="2112264"/>
           </a:xfrm>
           <a:prstGeom prst="rect">
             <a:avLst/>
@@ -16633,8 +17935,8 @@
         </p:nvSpPr>
         <p:spPr>
           <a:xfrm>
-            <a:off x="8153400" y="3886200"/>
-            <a:ext cx="3642360" cy="2331720"/>
+            <a:off x="8095488" y="3886200"/>
+            <a:ext cx="3544824" cy="2331720"/>
           </a:xfrm>
           <a:prstGeom prst="roundRect">
             <a:avLst>
@@ -16667,7 +17969,7 @@
         </p:nvSpPr>
         <p:spPr>
           <a:xfrm>
-            <a:off x="8336280" y="4069080"/>
+            <a:off x="8278368" y="4069080"/>
             <a:ext cx="457200" cy="457200"/>
           </a:xfrm>
           <a:prstGeom prst="ellipse">
@@ -16687,7 +17989,7 @@
         </p:nvSpPr>
         <p:spPr>
           <a:xfrm>
-            <a:off x="8336280" y="4069080"/>
+            <a:off x="8278368" y="4069080"/>
             <a:ext cx="457200" cy="457200"/>
           </a:xfrm>
           <a:prstGeom prst="rect">
@@ -16726,8 +18028,8 @@
         </p:nvSpPr>
         <p:spPr>
           <a:xfrm>
-            <a:off x="8930640" y="3995928"/>
-            <a:ext cx="2727960" cy="2112264"/>
+            <a:off x="8872728" y="3995928"/>
+            <a:ext cx="2630424" cy="2112264"/>
           </a:xfrm>
           <a:prstGeom prst="rect">
             <a:avLst/>
@@ -16756,6 +18058,54 @@
               <a:t>Histórico</a:t>
             </a:r>
             <a:endParaRPr lang="en-US" sz="1800" dirty="0"/>
+          </a:p>
+        </p:txBody>
+      </p:sp>
+      <p:sp>
+        <p:nvSpPr>
+          <p:cNvPr id="25" name="Slide Number Placeholder 0"/>
+          <p:cNvSpPr>
+            <a:spLocks noGrp="1"/>
+          </p:cNvSpPr>
+          <p:nvPr>
+            <p:ph type="sldNum" sz="quarter" idx="4294967295"/>
+          </p:nvPr>
+        </p:nvSpPr>
+        <p:spPr>
+          <a:xfrm>
+            <a:off x="11292840" y="6556248"/>
+            <a:ext cx="548640" cy="256032"/>
+          </a:xfrm>
+          <a:prstGeom prst="rect">
+            <a:avLst/>
+          </a:prstGeom>
+          <a:extLst>
+            <a:ext uri="{C572A759-6A51-4108-AA02-DFA0A04FC94B}">
+              <ma14:wrappingTextBoxFlag xmlns:ma14="http://schemas.microsoft.com/office/mac/drawingml/2011/main" val="0"/>
+            </a:ext>
+          </a:extLst>
+        </p:spPr>
+        <p:txBody>
+          <a:bodyPr/>
+          <a:lstStyle>
+            <a:lvl1pPr>
+              <a:defRPr sz="900">
+                <a:solidFill>
+                  <a:srgbClr val="1B3A6B"/>
+                </a:solidFill>
+                <a:latin typeface="Arial"/>
+                <a:ea typeface="Arial"/>
+                <a:cs typeface="Arial"/>
+              </a:defRPr>
+            </a:lvl1pPr>
+          </a:lstStyle>
+          <a:p>
+            <a:pPr algn="r"/>
+            <a:fld id="{F7021451-1387-4CA6-816F-3879F97B5CBC}" type="slidenum">
+              <a:rPr b="1" lang="en-US"/>
+              <a:t>3</a:t>
+            </a:fld>
+            <a:endParaRPr lang="en-US"/>
           </a:p>
         </p:txBody>
       </p:sp>
@@ -16832,7 +18182,7 @@
         </p:blipFill>
         <p:spPr>
           <a:xfrm>
-            <a:off x="411480" y="6547104"/>
+            <a:off x="548640" y="6547104"/>
             <a:ext cx="274320" cy="274320"/>
           </a:xfrm>
           <a:prstGeom prst="rect">
@@ -16848,7 +18198,7 @@
         </p:nvSpPr>
         <p:spPr>
           <a:xfrm>
-            <a:off x="749808" y="6528816"/>
+            <a:off x="886968" y="6528816"/>
             <a:ext cx="6400800" cy="310896"/>
           </a:xfrm>
           <a:prstGeom prst="rect">
@@ -16888,7 +18238,7 @@
         <p:spPr>
           <a:xfrm>
             <a:off x="7132320" y="6528816"/>
-            <a:ext cx="4663440" cy="310896"/>
+            <a:ext cx="4023360" cy="310896"/>
           </a:xfrm>
           <a:prstGeom prst="rect">
             <a:avLst/>
@@ -16926,7 +18276,7 @@
         </p:nvSpPr>
         <p:spPr>
           <a:xfrm>
-            <a:off x="411480" y="384048"/>
+            <a:off x="548640" y="384048"/>
             <a:ext cx="82296" cy="658368"/>
           </a:xfrm>
           <a:prstGeom prst="rect">
@@ -16946,7 +18296,7 @@
         </p:nvSpPr>
         <p:spPr>
           <a:xfrm>
-            <a:off x="640080" y="292608"/>
+            <a:off x="777240" y="292608"/>
             <a:ext cx="10972800" cy="274320"/>
           </a:xfrm>
           <a:prstGeom prst="rect">
@@ -16985,8 +18335,8 @@
         </p:nvSpPr>
         <p:spPr>
           <a:xfrm>
-            <a:off x="640080" y="530352"/>
-            <a:ext cx="11155680" cy="566928"/>
+            <a:off x="777240" y="530352"/>
+            <a:ext cx="10881360" cy="566928"/>
           </a:xfrm>
           <a:prstGeom prst="rect">
             <a:avLst/>
@@ -17026,8 +18376,8 @@
         </p:nvSpPr>
         <p:spPr>
           <a:xfrm>
-            <a:off x="411480" y="1325880"/>
-            <a:ext cx="5577840" cy="411480"/>
+            <a:off x="548640" y="1325880"/>
+            <a:ext cx="5394960" cy="411480"/>
           </a:xfrm>
           <a:prstGeom prst="rect">
             <a:avLst/>
@@ -17065,8 +18415,8 @@
         </p:nvSpPr>
         <p:spPr>
           <a:xfrm>
-            <a:off x="411480" y="1783080"/>
-            <a:ext cx="5577840" cy="4480560"/>
+            <a:off x="548640" y="1783080"/>
+            <a:ext cx="5394960" cy="4480560"/>
           </a:xfrm>
           <a:prstGeom prst="rect">
             <a:avLst/>
@@ -17149,8 +18499,8 @@
         </p:nvSpPr>
         <p:spPr>
           <a:xfrm>
-            <a:off x="6309360" y="1325880"/>
-            <a:ext cx="5486400" cy="4937760"/>
+            <a:off x="6172200" y="1325880"/>
+            <a:ext cx="5468112" cy="4937760"/>
           </a:xfrm>
           <a:prstGeom prst="roundRect">
             <a:avLst>
@@ -17171,8 +18521,8 @@
         </p:nvSpPr>
         <p:spPr>
           <a:xfrm>
-            <a:off x="6629400" y="1554480"/>
-            <a:ext cx="4846320" cy="4480560"/>
+            <a:off x="6492240" y="1554480"/>
+            <a:ext cx="4828032" cy="4480560"/>
           </a:xfrm>
           <a:prstGeom prst="rect">
             <a:avLst/>
@@ -17216,6 +18566,54 @@
               <a:t>Primeiro ciclo de faturas: faturas de 1 mês dos 15 clientes importadas (PDFs fictícios do curso), revisadas e aprovadas; registro de pelo menos 3 pendências resolvidas (UC ausente, fatura duplicada, dado corrigido manualmente), com a justificativa nas observações da revisão.</a:t>
             </a:r>
             <a:endParaRPr lang="en-US" sz="1300" dirty="0"/>
+          </a:p>
+        </p:txBody>
+      </p:sp>
+      <p:sp>
+        <p:nvSpPr>
+          <p:cNvPr id="25" name="Slide Number Placeholder 0"/>
+          <p:cNvSpPr>
+            <a:spLocks noGrp="1"/>
+          </p:cNvSpPr>
+          <p:nvPr>
+            <p:ph type="sldNum" sz="quarter" idx="4294967295"/>
+          </p:nvPr>
+        </p:nvSpPr>
+        <p:spPr>
+          <a:xfrm>
+            <a:off x="11292840" y="6556248"/>
+            <a:ext cx="548640" cy="256032"/>
+          </a:xfrm>
+          <a:prstGeom prst="rect">
+            <a:avLst/>
+          </a:prstGeom>
+          <a:extLst>
+            <a:ext uri="{C572A759-6A51-4108-AA02-DFA0A04FC94B}">
+              <ma14:wrappingTextBoxFlag xmlns:ma14="http://schemas.microsoft.com/office/mac/drawingml/2011/main" val="0"/>
+            </a:ext>
+          </a:extLst>
+        </p:spPr>
+        <p:txBody>
+          <a:bodyPr/>
+          <a:lstStyle>
+            <a:lvl1pPr>
+              <a:defRPr sz="900">
+                <a:solidFill>
+                  <a:srgbClr val="1B3A6B"/>
+                </a:solidFill>
+                <a:latin typeface="Arial"/>
+                <a:ea typeface="Arial"/>
+                <a:cs typeface="Arial"/>
+              </a:defRPr>
+            </a:lvl1pPr>
+          </a:lstStyle>
+          <a:p>
+            <a:pPr algn="r"/>
+            <a:fld id="{F7021451-1387-4CA6-816F-3879F97B5CBC}" type="slidenum">
+              <a:rPr b="1" lang="en-US"/>
+              <a:t>30</a:t>
+            </a:fld>
+            <a:endParaRPr lang="en-US"/>
           </a:p>
         </p:txBody>
       </p:sp>
@@ -17292,7 +18690,7 @@
         </p:blipFill>
         <p:spPr>
           <a:xfrm>
-            <a:off x="411480" y="6547104"/>
+            <a:off x="548640" y="6547104"/>
             <a:ext cx="274320" cy="274320"/>
           </a:xfrm>
           <a:prstGeom prst="rect">
@@ -17308,7 +18706,7 @@
         </p:nvSpPr>
         <p:spPr>
           <a:xfrm>
-            <a:off x="749808" y="6528816"/>
+            <a:off x="886968" y="6528816"/>
             <a:ext cx="6400800" cy="310896"/>
           </a:xfrm>
           <a:prstGeom prst="rect">
@@ -17348,7 +18746,7 @@
         <p:spPr>
           <a:xfrm>
             <a:off x="7132320" y="6528816"/>
-            <a:ext cx="4663440" cy="310896"/>
+            <a:ext cx="4023360" cy="310896"/>
           </a:xfrm>
           <a:prstGeom prst="rect">
             <a:avLst/>
@@ -17386,7 +18784,7 @@
         </p:nvSpPr>
         <p:spPr>
           <a:xfrm>
-            <a:off x="411480" y="384048"/>
+            <a:off x="548640" y="384048"/>
             <a:ext cx="82296" cy="658368"/>
           </a:xfrm>
           <a:prstGeom prst="rect">
@@ -17406,7 +18804,7 @@
         </p:nvSpPr>
         <p:spPr>
           <a:xfrm>
-            <a:off x="640080" y="292608"/>
+            <a:off x="777240" y="292608"/>
             <a:ext cx="10972800" cy="274320"/>
           </a:xfrm>
           <a:prstGeom prst="rect">
@@ -17445,8 +18843,8 @@
         </p:nvSpPr>
         <p:spPr>
           <a:xfrm>
-            <a:off x="640080" y="530352"/>
-            <a:ext cx="11155680" cy="566928"/>
+            <a:off x="777240" y="530352"/>
+            <a:ext cx="10881360" cy="566928"/>
           </a:xfrm>
           <a:prstGeom prst="rect">
             <a:avLst/>
@@ -17486,8 +18884,8 @@
         </p:nvSpPr>
         <p:spPr>
           <a:xfrm>
-            <a:off x="411480" y="1325880"/>
-            <a:ext cx="11384280" cy="4892040"/>
+            <a:off x="548640" y="1325880"/>
+            <a:ext cx="11091672" cy="4892040"/>
           </a:xfrm>
           <a:prstGeom prst="roundRect">
             <a:avLst>
@@ -17520,7 +18918,7 @@
         </p:nvSpPr>
         <p:spPr>
           <a:xfrm>
-            <a:off x="594360" y="1508760"/>
+            <a:off x="731520" y="1508760"/>
             <a:ext cx="457200" cy="457200"/>
           </a:xfrm>
           <a:prstGeom prst="ellipse">
@@ -17540,7 +18938,7 @@
         </p:nvSpPr>
         <p:spPr>
           <a:xfrm>
-            <a:off x="594360" y="1508760"/>
+            <a:off x="731520" y="1508760"/>
             <a:ext cx="457200" cy="457200"/>
           </a:xfrm>
           <a:prstGeom prst="rect">
@@ -17579,8 +18977,8 @@
         </p:nvSpPr>
         <p:spPr>
           <a:xfrm>
-            <a:off x="1188720" y="1435608"/>
-            <a:ext cx="10469880" cy="4672584"/>
+            <a:off x="1325880" y="1435608"/>
+            <a:ext cx="10177272" cy="4672584"/>
           </a:xfrm>
           <a:prstGeom prst="rect">
             <a:avLst/>
@@ -17598,7 +18996,7 @@
               <a:buNone/>
             </a:pPr>
             <a:r>
-              <a:rPr lang="en-US" sz="1600" dirty="0">
+              <a:rPr lang="en-US" sz="1800" dirty="0">
                 <a:solidFill>
                   <a:srgbClr val="1F2937"/>
                 </a:solidFill>
@@ -17608,7 +19006,55 @@
               </a:rPr>
               <a:t>Consumo (positivo) − Energia injetada/compensada (negativo) = o que sobra para pagar</a:t>
             </a:r>
-            <a:endParaRPr lang="en-US" sz="1600" dirty="0"/>
+            <a:endParaRPr lang="en-US" sz="1800" dirty="0"/>
+          </a:p>
+        </p:txBody>
+      </p:sp>
+      <p:sp>
+        <p:nvSpPr>
+          <p:cNvPr id="25" name="Slide Number Placeholder 0"/>
+          <p:cNvSpPr>
+            <a:spLocks noGrp="1"/>
+          </p:cNvSpPr>
+          <p:nvPr>
+            <p:ph type="sldNum" sz="quarter" idx="4294967295"/>
+          </p:nvPr>
+        </p:nvSpPr>
+        <p:spPr>
+          <a:xfrm>
+            <a:off x="11292840" y="6556248"/>
+            <a:ext cx="548640" cy="256032"/>
+          </a:xfrm>
+          <a:prstGeom prst="rect">
+            <a:avLst/>
+          </a:prstGeom>
+          <a:extLst>
+            <a:ext uri="{C572A759-6A51-4108-AA02-DFA0A04FC94B}">
+              <ma14:wrappingTextBoxFlag xmlns:ma14="http://schemas.microsoft.com/office/mac/drawingml/2011/main" val="0"/>
+            </a:ext>
+          </a:extLst>
+        </p:spPr>
+        <p:txBody>
+          <a:bodyPr/>
+          <a:lstStyle>
+            <a:lvl1pPr>
+              <a:defRPr sz="900">
+                <a:solidFill>
+                  <a:srgbClr val="1B3A6B"/>
+                </a:solidFill>
+                <a:latin typeface="Arial"/>
+                <a:ea typeface="Arial"/>
+                <a:cs typeface="Arial"/>
+              </a:defRPr>
+            </a:lvl1pPr>
+          </a:lstStyle>
+          <a:p>
+            <a:pPr algn="r"/>
+            <a:fld id="{F7021451-1387-4CA6-816F-3879F97B5CBC}" type="slidenum">
+              <a:rPr b="1" lang="en-US"/>
+              <a:t>4</a:t>
+            </a:fld>
+            <a:endParaRPr lang="en-US"/>
           </a:p>
         </p:txBody>
       </p:sp>
@@ -17685,7 +19131,7 @@
         </p:blipFill>
         <p:spPr>
           <a:xfrm>
-            <a:off x="411480" y="6547104"/>
+            <a:off x="548640" y="6547104"/>
             <a:ext cx="274320" cy="274320"/>
           </a:xfrm>
           <a:prstGeom prst="rect">
@@ -17701,7 +19147,7 @@
         </p:nvSpPr>
         <p:spPr>
           <a:xfrm>
-            <a:off x="749808" y="6528816"/>
+            <a:off x="886968" y="6528816"/>
             <a:ext cx="6400800" cy="310896"/>
           </a:xfrm>
           <a:prstGeom prst="rect">
@@ -17741,7 +19187,7 @@
         <p:spPr>
           <a:xfrm>
             <a:off x="7132320" y="6528816"/>
-            <a:ext cx="4663440" cy="310896"/>
+            <a:ext cx="4023360" cy="310896"/>
           </a:xfrm>
           <a:prstGeom prst="rect">
             <a:avLst/>
@@ -17779,7 +19225,7 @@
         </p:nvSpPr>
         <p:spPr>
           <a:xfrm>
-            <a:off x="411480" y="384048"/>
+            <a:off x="548640" y="384048"/>
             <a:ext cx="82296" cy="658368"/>
           </a:xfrm>
           <a:prstGeom prst="rect">
@@ -17799,7 +19245,7 @@
         </p:nvSpPr>
         <p:spPr>
           <a:xfrm>
-            <a:off x="640080" y="292608"/>
+            <a:off x="777240" y="292608"/>
             <a:ext cx="10972800" cy="274320"/>
           </a:xfrm>
           <a:prstGeom prst="rect">
@@ -17838,8 +19284,8 @@
         </p:nvSpPr>
         <p:spPr>
           <a:xfrm>
-            <a:off x="640080" y="530352"/>
-            <a:ext cx="11155680" cy="566928"/>
+            <a:off x="777240" y="530352"/>
+            <a:ext cx="10881360" cy="566928"/>
           </a:xfrm>
           <a:prstGeom prst="rect">
             <a:avLst/>
@@ -17879,8 +19325,8 @@
         </p:nvSpPr>
         <p:spPr>
           <a:xfrm>
-            <a:off x="411480" y="1325880"/>
-            <a:ext cx="11384280" cy="4937760"/>
+            <a:off x="548640" y="1325880"/>
+            <a:ext cx="11091672" cy="4937760"/>
           </a:xfrm>
           <a:prstGeom prst="roundRect">
             <a:avLst>
@@ -17901,8 +19347,8 @@
         </p:nvSpPr>
         <p:spPr>
           <a:xfrm>
-            <a:off x="777240" y="1554480"/>
-            <a:ext cx="10652760" cy="4480560"/>
+            <a:off x="914400" y="1554480"/>
+            <a:ext cx="10360152" cy="4480560"/>
           </a:xfrm>
           <a:prstGeom prst="rect">
             <a:avLst/>
@@ -17923,7 +19369,7 @@
               <a:buNone/>
             </a:pPr>
             <a:r>
-              <a:rPr lang="en-US" sz="1800" b="1" dirty="0">
+              <a:rPr lang="en-US" sz="2400" b="1" dirty="0">
                 <a:solidFill>
                   <a:srgbClr val="FFFFFF"/>
                 </a:solidFill>
@@ -17933,7 +19379,7 @@
               </a:rPr>
               <a:t>Consumo injetado (R$) = soma das linhas compensadas (TE + TUSD + bandeira)</a:t>
             </a:r>
-            <a:endParaRPr lang="en-US" sz="1800" dirty="0"/>
+            <a:endParaRPr lang="en-US" sz="2400" dirty="0"/>
           </a:p>
           <a:p>
             <a:pPr indent="0" marL="0">
@@ -17943,7 +19389,7 @@
               <a:buNone/>
             </a:pPr>
             <a:r>
-              <a:rPr lang="en-US" sz="1800" b="1" dirty="0">
+              <a:rPr lang="en-US" sz="2400" b="1" dirty="0">
                 <a:solidFill>
                   <a:srgbClr val="F7A23B"/>
                 </a:solidFill>
@@ -17953,7 +19399,55 @@
               </a:rPr>
               <a:t>Ex.: R$ 2.119,00 → cobrança ao cliente = 2.119,00 × (1 − 20%) = R$ 1.695,20</a:t>
             </a:r>
-            <a:endParaRPr lang="en-US" sz="1800" dirty="0"/>
+            <a:endParaRPr lang="en-US" sz="2400" dirty="0"/>
+          </a:p>
+        </p:txBody>
+      </p:sp>
+      <p:sp>
+        <p:nvSpPr>
+          <p:cNvPr id="25" name="Slide Number Placeholder 0"/>
+          <p:cNvSpPr>
+            <a:spLocks noGrp="1"/>
+          </p:cNvSpPr>
+          <p:nvPr>
+            <p:ph type="sldNum" sz="quarter" idx="4294967295"/>
+          </p:nvPr>
+        </p:nvSpPr>
+        <p:spPr>
+          <a:xfrm>
+            <a:off x="11292840" y="6556248"/>
+            <a:ext cx="548640" cy="256032"/>
+          </a:xfrm>
+          <a:prstGeom prst="rect">
+            <a:avLst/>
+          </a:prstGeom>
+          <a:extLst>
+            <a:ext uri="{C572A759-6A51-4108-AA02-DFA0A04FC94B}">
+              <ma14:wrappingTextBoxFlag xmlns:ma14="http://schemas.microsoft.com/office/mac/drawingml/2011/main" val="0"/>
+            </a:ext>
+          </a:extLst>
+        </p:spPr>
+        <p:txBody>
+          <a:bodyPr/>
+          <a:lstStyle>
+            <a:lvl1pPr>
+              <a:defRPr sz="900">
+                <a:solidFill>
+                  <a:srgbClr val="1B3A6B"/>
+                </a:solidFill>
+                <a:latin typeface="Arial"/>
+                <a:ea typeface="Arial"/>
+                <a:cs typeface="Arial"/>
+              </a:defRPr>
+            </a:lvl1pPr>
+          </a:lstStyle>
+          <a:p>
+            <a:pPr algn="r"/>
+            <a:fld id="{F7021451-1387-4CA6-816F-3879F97B5CBC}" type="slidenum">
+              <a:rPr b="1" lang="en-US"/>
+              <a:t>5</a:t>
+            </a:fld>
+            <a:endParaRPr lang="en-US"/>
           </a:p>
         </p:txBody>
       </p:sp>
@@ -18030,7 +19524,7 @@
         </p:blipFill>
         <p:spPr>
           <a:xfrm>
-            <a:off x="411480" y="6547104"/>
+            <a:off x="548640" y="6547104"/>
             <a:ext cx="274320" cy="274320"/>
           </a:xfrm>
           <a:prstGeom prst="rect">
@@ -18046,7 +19540,7 @@
         </p:nvSpPr>
         <p:spPr>
           <a:xfrm>
-            <a:off x="749808" y="6528816"/>
+            <a:off x="886968" y="6528816"/>
             <a:ext cx="6400800" cy="310896"/>
           </a:xfrm>
           <a:prstGeom prst="rect">
@@ -18086,7 +19580,7 @@
         <p:spPr>
           <a:xfrm>
             <a:off x="7132320" y="6528816"/>
-            <a:ext cx="4663440" cy="310896"/>
+            <a:ext cx="4023360" cy="310896"/>
           </a:xfrm>
           <a:prstGeom prst="rect">
             <a:avLst/>
@@ -18124,7 +19618,7 @@
         </p:nvSpPr>
         <p:spPr>
           <a:xfrm>
-            <a:off x="411480" y="384048"/>
+            <a:off x="548640" y="384048"/>
             <a:ext cx="82296" cy="658368"/>
           </a:xfrm>
           <a:prstGeom prst="rect">
@@ -18144,7 +19638,7 @@
         </p:nvSpPr>
         <p:spPr>
           <a:xfrm>
-            <a:off x="640080" y="292608"/>
+            <a:off x="777240" y="292608"/>
             <a:ext cx="10972800" cy="274320"/>
           </a:xfrm>
           <a:prstGeom prst="rect">
@@ -18183,8 +19677,8 @@
         </p:nvSpPr>
         <p:spPr>
           <a:xfrm>
-            <a:off x="640080" y="530352"/>
-            <a:ext cx="11155680" cy="566928"/>
+            <a:off x="777240" y="530352"/>
+            <a:ext cx="10881360" cy="566928"/>
           </a:xfrm>
           <a:prstGeom prst="rect">
             <a:avLst/>
@@ -18224,8 +19718,8 @@
         </p:nvSpPr>
         <p:spPr>
           <a:xfrm>
-            <a:off x="411480" y="1325880"/>
-            <a:ext cx="5577840" cy="2331720"/>
+            <a:off x="548640" y="1325880"/>
+            <a:ext cx="5431536" cy="2331720"/>
           </a:xfrm>
           <a:prstGeom prst="roundRect">
             <a:avLst>
@@ -18258,7 +19752,7 @@
         </p:nvSpPr>
         <p:spPr>
           <a:xfrm>
-            <a:off x="594360" y="1508760"/>
+            <a:off x="731520" y="1508760"/>
             <a:ext cx="457200" cy="457200"/>
           </a:xfrm>
           <a:prstGeom prst="ellipse">
@@ -18278,7 +19772,7 @@
         </p:nvSpPr>
         <p:spPr>
           <a:xfrm>
-            <a:off x="594360" y="1508760"/>
+            <a:off x="731520" y="1508760"/>
             <a:ext cx="457200" cy="457200"/>
           </a:xfrm>
           <a:prstGeom prst="rect">
@@ -18317,8 +19811,8 @@
         </p:nvSpPr>
         <p:spPr>
           <a:xfrm>
-            <a:off x="1188720" y="1435608"/>
-            <a:ext cx="4663440" cy="2112264"/>
+            <a:off x="1325880" y="1435608"/>
+            <a:ext cx="4517136" cy="2112264"/>
           </a:xfrm>
           <a:prstGeom prst="rect">
             <a:avLst/>
@@ -18358,8 +19852,8 @@
         </p:nvSpPr>
         <p:spPr>
           <a:xfrm>
-            <a:off x="6217920" y="1325880"/>
-            <a:ext cx="5577840" cy="2331720"/>
+            <a:off x="6208776" y="1325880"/>
+            <a:ext cx="5431536" cy="2331720"/>
           </a:xfrm>
           <a:prstGeom prst="roundRect">
             <a:avLst>
@@ -18392,7 +19886,7 @@
         </p:nvSpPr>
         <p:spPr>
           <a:xfrm>
-            <a:off x="6400800" y="1508760"/>
+            <a:off x="6391656" y="1508760"/>
             <a:ext cx="457200" cy="457200"/>
           </a:xfrm>
           <a:prstGeom prst="ellipse">
@@ -18412,7 +19906,7 @@
         </p:nvSpPr>
         <p:spPr>
           <a:xfrm>
-            <a:off x="6400800" y="1508760"/>
+            <a:off x="6391656" y="1508760"/>
             <a:ext cx="457200" cy="457200"/>
           </a:xfrm>
           <a:prstGeom prst="rect">
@@ -18451,8 +19945,8 @@
         </p:nvSpPr>
         <p:spPr>
           <a:xfrm>
-            <a:off x="6995160" y="1435608"/>
-            <a:ext cx="4663440" cy="2112264"/>
+            <a:off x="6986016" y="1435608"/>
+            <a:ext cx="4517136" cy="2112264"/>
           </a:xfrm>
           <a:prstGeom prst="rect">
             <a:avLst/>
@@ -18492,8 +19986,8 @@
         </p:nvSpPr>
         <p:spPr>
           <a:xfrm>
-            <a:off x="411480" y="3886200"/>
-            <a:ext cx="5577840" cy="2331720"/>
+            <a:off x="548640" y="3886200"/>
+            <a:ext cx="5431536" cy="2331720"/>
           </a:xfrm>
           <a:prstGeom prst="roundRect">
             <a:avLst>
@@ -18526,7 +20020,7 @@
         </p:nvSpPr>
         <p:spPr>
           <a:xfrm>
-            <a:off x="594360" y="4069080"/>
+            <a:off x="731520" y="4069080"/>
             <a:ext cx="457200" cy="457200"/>
           </a:xfrm>
           <a:prstGeom prst="ellipse">
@@ -18546,7 +20040,7 @@
         </p:nvSpPr>
         <p:spPr>
           <a:xfrm>
-            <a:off x="594360" y="4069080"/>
+            <a:off x="731520" y="4069080"/>
             <a:ext cx="457200" cy="457200"/>
           </a:xfrm>
           <a:prstGeom prst="rect">
@@ -18585,8 +20079,8 @@
         </p:nvSpPr>
         <p:spPr>
           <a:xfrm>
-            <a:off x="1188720" y="3995928"/>
-            <a:ext cx="4663440" cy="2112264"/>
+            <a:off x="1325880" y="3995928"/>
+            <a:ext cx="4517136" cy="2112264"/>
           </a:xfrm>
           <a:prstGeom prst="rect">
             <a:avLst/>
@@ -18626,8 +20120,8 @@
         </p:nvSpPr>
         <p:spPr>
           <a:xfrm>
-            <a:off x="6217920" y="3886200"/>
-            <a:ext cx="5577840" cy="2331720"/>
+            <a:off x="6208776" y="3886200"/>
+            <a:ext cx="5431536" cy="2331720"/>
           </a:xfrm>
           <a:prstGeom prst="roundRect">
             <a:avLst>
@@ -18660,7 +20154,7 @@
         </p:nvSpPr>
         <p:spPr>
           <a:xfrm>
-            <a:off x="6400800" y="4069080"/>
+            <a:off x="6391656" y="4069080"/>
             <a:ext cx="457200" cy="457200"/>
           </a:xfrm>
           <a:prstGeom prst="ellipse">
@@ -18680,7 +20174,7 @@
         </p:nvSpPr>
         <p:spPr>
           <a:xfrm>
-            <a:off x="6400800" y="4069080"/>
+            <a:off x="6391656" y="4069080"/>
             <a:ext cx="457200" cy="457200"/>
           </a:xfrm>
           <a:prstGeom prst="rect">
@@ -18719,8 +20213,8 @@
         </p:nvSpPr>
         <p:spPr>
           <a:xfrm>
-            <a:off x="6995160" y="3995928"/>
-            <a:ext cx="4663440" cy="2112264"/>
+            <a:off x="6986016" y="3995928"/>
+            <a:ext cx="4517136" cy="2112264"/>
           </a:xfrm>
           <a:prstGeom prst="rect">
             <a:avLst/>
@@ -18749,6 +20243,54 @@
               <a:t>a expirar</a:t>
             </a:r>
             <a:endParaRPr lang="en-US" sz="1800" dirty="0"/>
+          </a:p>
+        </p:txBody>
+      </p:sp>
+      <p:sp>
+        <p:nvSpPr>
+          <p:cNvPr id="25" name="Slide Number Placeholder 0"/>
+          <p:cNvSpPr>
+            <a:spLocks noGrp="1"/>
+          </p:cNvSpPr>
+          <p:nvPr>
+            <p:ph type="sldNum" sz="quarter" idx="4294967295"/>
+          </p:nvPr>
+        </p:nvSpPr>
+        <p:spPr>
+          <a:xfrm>
+            <a:off x="11292840" y="6556248"/>
+            <a:ext cx="548640" cy="256032"/>
+          </a:xfrm>
+          <a:prstGeom prst="rect">
+            <a:avLst/>
+          </a:prstGeom>
+          <a:extLst>
+            <a:ext uri="{C572A759-6A51-4108-AA02-DFA0A04FC94B}">
+              <ma14:wrappingTextBoxFlag xmlns:ma14="http://schemas.microsoft.com/office/mac/drawingml/2011/main" val="0"/>
+            </a:ext>
+          </a:extLst>
+        </p:spPr>
+        <p:txBody>
+          <a:bodyPr/>
+          <a:lstStyle>
+            <a:lvl1pPr>
+              <a:defRPr sz="900">
+                <a:solidFill>
+                  <a:srgbClr val="1B3A6B"/>
+                </a:solidFill>
+                <a:latin typeface="Arial"/>
+                <a:ea typeface="Arial"/>
+                <a:cs typeface="Arial"/>
+              </a:defRPr>
+            </a:lvl1pPr>
+          </a:lstStyle>
+          <a:p>
+            <a:pPr algn="r"/>
+            <a:fld id="{F7021451-1387-4CA6-816F-3879F97B5CBC}" type="slidenum">
+              <a:rPr b="1" lang="en-US"/>
+              <a:t>6</a:t>
+            </a:fld>
+            <a:endParaRPr lang="en-US"/>
           </a:p>
         </p:txBody>
       </p:sp>
@@ -18825,7 +20367,7 @@
         </p:blipFill>
         <p:spPr>
           <a:xfrm>
-            <a:off x="411480" y="6547104"/>
+            <a:off x="548640" y="6547104"/>
             <a:ext cx="274320" cy="274320"/>
           </a:xfrm>
           <a:prstGeom prst="rect">
@@ -18841,7 +20383,7 @@
         </p:nvSpPr>
         <p:spPr>
           <a:xfrm>
-            <a:off x="749808" y="6528816"/>
+            <a:off x="886968" y="6528816"/>
             <a:ext cx="6400800" cy="310896"/>
           </a:xfrm>
           <a:prstGeom prst="rect">
@@ -18881,7 +20423,7 @@
         <p:spPr>
           <a:xfrm>
             <a:off x="7132320" y="6528816"/>
-            <a:ext cx="4663440" cy="310896"/>
+            <a:ext cx="4023360" cy="310896"/>
           </a:xfrm>
           <a:prstGeom prst="rect">
             <a:avLst/>
@@ -18919,7 +20461,7 @@
         </p:nvSpPr>
         <p:spPr>
           <a:xfrm>
-            <a:off x="411480" y="384048"/>
+            <a:off x="548640" y="384048"/>
             <a:ext cx="82296" cy="658368"/>
           </a:xfrm>
           <a:prstGeom prst="rect">
@@ -18939,7 +20481,7 @@
         </p:nvSpPr>
         <p:spPr>
           <a:xfrm>
-            <a:off x="640080" y="292608"/>
+            <a:off x="777240" y="292608"/>
             <a:ext cx="10972800" cy="274320"/>
           </a:xfrm>
           <a:prstGeom prst="rect">
@@ -18978,8 +20520,8 @@
         </p:nvSpPr>
         <p:spPr>
           <a:xfrm>
-            <a:off x="640080" y="530352"/>
-            <a:ext cx="11155680" cy="566928"/>
+            <a:off x="777240" y="530352"/>
+            <a:ext cx="10881360" cy="566928"/>
           </a:xfrm>
           <a:prstGeom prst="rect">
             <a:avLst/>
@@ -19019,8 +20561,8 @@
         </p:nvSpPr>
         <p:spPr>
           <a:xfrm>
-            <a:off x="411480" y="1325880"/>
-            <a:ext cx="5577840" cy="2331720"/>
+            <a:off x="548640" y="1325880"/>
+            <a:ext cx="5431536" cy="2331720"/>
           </a:xfrm>
           <a:prstGeom prst="roundRect">
             <a:avLst>
@@ -19053,7 +20595,7 @@
         </p:nvSpPr>
         <p:spPr>
           <a:xfrm>
-            <a:off x="594360" y="1508760"/>
+            <a:off x="731520" y="1508760"/>
             <a:ext cx="457200" cy="457200"/>
           </a:xfrm>
           <a:prstGeom prst="ellipse">
@@ -19073,7 +20615,7 @@
         </p:nvSpPr>
         <p:spPr>
           <a:xfrm>
-            <a:off x="594360" y="1508760"/>
+            <a:off x="731520" y="1508760"/>
             <a:ext cx="457200" cy="457200"/>
           </a:xfrm>
           <a:prstGeom prst="rect">
@@ -19112,8 +20654,8 @@
         </p:nvSpPr>
         <p:spPr>
           <a:xfrm>
-            <a:off x="1188720" y="1435608"/>
-            <a:ext cx="4663440" cy="2112264"/>
+            <a:off x="1325880" y="1435608"/>
+            <a:ext cx="4517136" cy="2112264"/>
           </a:xfrm>
           <a:prstGeom prst="rect">
             <a:avLst/>
@@ -19153,8 +20695,8 @@
         </p:nvSpPr>
         <p:spPr>
           <a:xfrm>
-            <a:off x="6217920" y="1325880"/>
-            <a:ext cx="5577840" cy="2331720"/>
+            <a:off x="6208776" y="1325880"/>
+            <a:ext cx="5431536" cy="2331720"/>
           </a:xfrm>
           <a:prstGeom prst="roundRect">
             <a:avLst>
@@ -19187,7 +20729,7 @@
         </p:nvSpPr>
         <p:spPr>
           <a:xfrm>
-            <a:off x="6400800" y="1508760"/>
+            <a:off x="6391656" y="1508760"/>
             <a:ext cx="457200" cy="457200"/>
           </a:xfrm>
           <a:prstGeom prst="ellipse">
@@ -19207,7 +20749,7 @@
         </p:nvSpPr>
         <p:spPr>
           <a:xfrm>
-            <a:off x="6400800" y="1508760"/>
+            <a:off x="6391656" y="1508760"/>
             <a:ext cx="457200" cy="457200"/>
           </a:xfrm>
           <a:prstGeom prst="rect">
@@ -19246,8 +20788,8 @@
         </p:nvSpPr>
         <p:spPr>
           <a:xfrm>
-            <a:off x="6995160" y="1435608"/>
-            <a:ext cx="4663440" cy="2112264"/>
+            <a:off x="6986016" y="1435608"/>
+            <a:ext cx="4517136" cy="2112264"/>
           </a:xfrm>
           <a:prstGeom prst="rect">
             <a:avLst/>
@@ -19287,8 +20829,8 @@
         </p:nvSpPr>
         <p:spPr>
           <a:xfrm>
-            <a:off x="411480" y="3886200"/>
-            <a:ext cx="5577840" cy="2331720"/>
+            <a:off x="548640" y="3886200"/>
+            <a:ext cx="5431536" cy="2331720"/>
           </a:xfrm>
           <a:prstGeom prst="roundRect">
             <a:avLst>
@@ -19321,7 +20863,7 @@
         </p:nvSpPr>
         <p:spPr>
           <a:xfrm>
-            <a:off x="594360" y="4069080"/>
+            <a:off x="731520" y="4069080"/>
             <a:ext cx="457200" cy="457200"/>
           </a:xfrm>
           <a:prstGeom prst="ellipse">
@@ -19341,7 +20883,7 @@
         </p:nvSpPr>
         <p:spPr>
           <a:xfrm>
-            <a:off x="594360" y="4069080"/>
+            <a:off x="731520" y="4069080"/>
             <a:ext cx="457200" cy="457200"/>
           </a:xfrm>
           <a:prstGeom prst="rect">
@@ -19380,8 +20922,8 @@
         </p:nvSpPr>
         <p:spPr>
           <a:xfrm>
-            <a:off x="1188720" y="3995928"/>
-            <a:ext cx="4663440" cy="2112264"/>
+            <a:off x="1325880" y="3995928"/>
+            <a:ext cx="4517136" cy="2112264"/>
           </a:xfrm>
           <a:prstGeom prst="rect">
             <a:avLst/>
@@ -19421,8 +20963,8 @@
         </p:nvSpPr>
         <p:spPr>
           <a:xfrm>
-            <a:off x="6217920" y="3886200"/>
-            <a:ext cx="5577840" cy="2331720"/>
+            <a:off x="6208776" y="3886200"/>
+            <a:ext cx="5431536" cy="2331720"/>
           </a:xfrm>
           <a:prstGeom prst="roundRect">
             <a:avLst>
@@ -19455,7 +20997,7 @@
         </p:nvSpPr>
         <p:spPr>
           <a:xfrm>
-            <a:off x="6400800" y="4069080"/>
+            <a:off x="6391656" y="4069080"/>
             <a:ext cx="457200" cy="457200"/>
           </a:xfrm>
           <a:prstGeom prst="ellipse">
@@ -19475,7 +21017,7 @@
         </p:nvSpPr>
         <p:spPr>
           <a:xfrm>
-            <a:off x="6400800" y="4069080"/>
+            <a:off x="6391656" y="4069080"/>
             <a:ext cx="457200" cy="457200"/>
           </a:xfrm>
           <a:prstGeom prst="rect">
@@ -19514,8 +21056,8 @@
         </p:nvSpPr>
         <p:spPr>
           <a:xfrm>
-            <a:off x="6995160" y="3995928"/>
-            <a:ext cx="4663440" cy="2112264"/>
+            <a:off x="6986016" y="3995928"/>
+            <a:ext cx="4517136" cy="2112264"/>
           </a:xfrm>
           <a:prstGeom prst="rect">
             <a:avLst/>
@@ -19544,6 +21086,54 @@
               <a:t>bloco da GD = termômetro</a:t>
             </a:r>
             <a:endParaRPr lang="en-US" sz="1800" dirty="0"/>
+          </a:p>
+        </p:txBody>
+      </p:sp>
+      <p:sp>
+        <p:nvSpPr>
+          <p:cNvPr id="25" name="Slide Number Placeholder 0"/>
+          <p:cNvSpPr>
+            <a:spLocks noGrp="1"/>
+          </p:cNvSpPr>
+          <p:nvPr>
+            <p:ph type="sldNum" sz="quarter" idx="4294967295"/>
+          </p:nvPr>
+        </p:nvSpPr>
+        <p:spPr>
+          <a:xfrm>
+            <a:off x="11292840" y="6556248"/>
+            <a:ext cx="548640" cy="256032"/>
+          </a:xfrm>
+          <a:prstGeom prst="rect">
+            <a:avLst/>
+          </a:prstGeom>
+          <a:extLst>
+            <a:ext uri="{C572A759-6A51-4108-AA02-DFA0A04FC94B}">
+              <ma14:wrappingTextBoxFlag xmlns:ma14="http://schemas.microsoft.com/office/mac/drawingml/2011/main" val="0"/>
+            </a:ext>
+          </a:extLst>
+        </p:spPr>
+        <p:txBody>
+          <a:bodyPr/>
+          <a:lstStyle>
+            <a:lvl1pPr>
+              <a:defRPr sz="900">
+                <a:solidFill>
+                  <a:srgbClr val="1B3A6B"/>
+                </a:solidFill>
+                <a:latin typeface="Arial"/>
+                <a:ea typeface="Arial"/>
+                <a:cs typeface="Arial"/>
+              </a:defRPr>
+            </a:lvl1pPr>
+          </a:lstStyle>
+          <a:p>
+            <a:pPr algn="r"/>
+            <a:fld id="{F7021451-1387-4CA6-816F-3879F97B5CBC}" type="slidenum">
+              <a:rPr b="1" lang="en-US"/>
+              <a:t>7</a:t>
+            </a:fld>
+            <a:endParaRPr lang="en-US"/>
           </a:p>
         </p:txBody>
       </p:sp>
@@ -19607,6 +21197,45 @@
         </p:nvSpPr>
         <p:spPr>
           <a:xfrm>
+            <a:off x="457200" y="548640"/>
+            <a:ext cx="3474720" cy="1737360"/>
+          </a:xfrm>
+          <a:prstGeom prst="rect">
+            <a:avLst/>
+          </a:prstGeom>
+          <a:noFill/>
+          <a:ln/>
+        </p:spPr>
+        <p:txBody>
+          <a:bodyPr wrap="square" rtlCol="0" anchor="ctr"/>
+          <a:lstStyle/>
+          <a:p>
+            <a:pPr indent="0" marL="0">
+              <a:buNone/>
+            </a:pPr>
+            <a:r>
+              <a:rPr lang="en-US" sz="11000" b="1" dirty="0">
+                <a:solidFill>
+                  <a:srgbClr val="11396F"/>
+                </a:solidFill>
+                <a:latin typeface="Arial" pitchFamily="34" charset="0"/>
+                <a:ea typeface="Arial" pitchFamily="34" charset="-122"/>
+                <a:cs typeface="Arial" pitchFamily="34" charset="-120"/>
+              </a:rPr>
+              <a:t>02</a:t>
+            </a:r>
+            <a:endParaRPr lang="en-US" sz="11000" dirty="0"/>
+          </a:p>
+        </p:txBody>
+      </p:sp>
+      <p:sp>
+        <p:nvSpPr>
+          <p:cNvPr id="4" name="Text 2"/>
+          <p:cNvSpPr/>
+          <p:nvPr/>
+        </p:nvSpPr>
+        <p:spPr>
+          <a:xfrm>
             <a:off x="548640" y="2194560"/>
             <a:ext cx="3291840" cy="548640"/>
           </a:xfrm>
@@ -19640,7 +21269,46 @@
       </p:sp>
       <p:sp>
         <p:nvSpPr>
-          <p:cNvPr id="4" name="Text 2"/>
+          <p:cNvPr id="5" name="Text 3"/>
+          <p:cNvSpPr/>
+          <p:nvPr/>
+        </p:nvSpPr>
+        <p:spPr>
+          <a:xfrm>
+            <a:off x="548640" y="3200400"/>
+            <a:ext cx="3383280" cy="457200"/>
+          </a:xfrm>
+          <a:prstGeom prst="rect">
+            <a:avLst/>
+          </a:prstGeom>
+          <a:noFill/>
+          <a:ln/>
+        </p:spPr>
+        <p:txBody>
+          <a:bodyPr wrap="square" rtlCol="0" anchor="ctr"/>
+          <a:lstStyle/>
+          <a:p>
+            <a:pPr indent="0" marL="0">
+              <a:buNone/>
+            </a:pPr>
+            <a:r>
+              <a:rPr lang="en-US" sz="1100" dirty="0">
+                <a:solidFill>
+                  <a:srgbClr val="C7D2E3"/>
+                </a:solidFill>
+                <a:latin typeface="Arial" pitchFamily="34" charset="0"/>
+                <a:ea typeface="Arial" pitchFamily="34" charset="-122"/>
+                <a:cs typeface="Arial" pitchFamily="34" charset="-120"/>
+              </a:rPr>
+              <a:t>M7 · Etapa 3 · Operação ponta a ponta</a:t>
+            </a:r>
+            <a:endParaRPr lang="en-US" sz="1100" dirty="0"/>
+          </a:p>
+        </p:txBody>
+      </p:sp>
+      <p:sp>
+        <p:nvSpPr>
+          <p:cNvPr id="6" name="Text 4"/>
           <p:cNvSpPr/>
           <p:nvPr/>
         </p:nvSpPr>
@@ -19679,7 +21347,7 @@
       </p:sp>
       <p:pic>
         <p:nvPicPr>
-          <p:cNvPr id="5" name="Image 0" descr="/www/wwwroot/rexar/gdsolar/docs/curso/slides/assets/logo-gdsolar.png">    </p:cNvPr>
+          <p:cNvPr id="7" name="Image 0" descr="/www/wwwroot/rexar/gdsolar/docs/curso/slides/assets/logo-gdsolar.png">    </p:cNvPr>
           <p:cNvPicPr>
             <a:picLocks noChangeAspect="1"/>
           </p:cNvPicPr>
@@ -19703,7 +21371,7 @@
       </p:pic>
       <p:sp>
         <p:nvSpPr>
-          <p:cNvPr id="6" name="Text 3"/>
+          <p:cNvPr id="8" name="Text 5"/>
           <p:cNvSpPr/>
           <p:nvPr/>
         </p:nvSpPr>
@@ -19744,7 +21412,7 @@
       </p:sp>
       <p:sp>
         <p:nvSpPr>
-          <p:cNvPr id="7" name="Text 4"/>
+          <p:cNvPr id="9" name="Text 6"/>
           <p:cNvSpPr/>
           <p:nvPr/>
         </p:nvSpPr>
@@ -19785,7 +21453,7 @@
       </p:sp>
       <p:sp>
         <p:nvSpPr>
-          <p:cNvPr id="8" name="Text 5"/>
+          <p:cNvPr id="10" name="Text 7"/>
           <p:cNvSpPr/>
           <p:nvPr/>
         </p:nvSpPr>
@@ -19943,7 +21611,7 @@
         </p:blipFill>
         <p:spPr>
           <a:xfrm>
-            <a:off x="411480" y="6547104"/>
+            <a:off x="548640" y="6547104"/>
             <a:ext cx="274320" cy="274320"/>
           </a:xfrm>
           <a:prstGeom prst="rect">
@@ -19959,7 +21627,7 @@
         </p:nvSpPr>
         <p:spPr>
           <a:xfrm>
-            <a:off x="749808" y="6528816"/>
+            <a:off x="886968" y="6528816"/>
             <a:ext cx="6400800" cy="310896"/>
           </a:xfrm>
           <a:prstGeom prst="rect">
@@ -19999,7 +21667,7 @@
         <p:spPr>
           <a:xfrm>
             <a:off x="7132320" y="6528816"/>
-            <a:ext cx="4663440" cy="310896"/>
+            <a:ext cx="4023360" cy="310896"/>
           </a:xfrm>
           <a:prstGeom prst="rect">
             <a:avLst/>
@@ -20037,7 +21705,7 @@
         </p:nvSpPr>
         <p:spPr>
           <a:xfrm>
-            <a:off x="411480" y="384048"/>
+            <a:off x="548640" y="384048"/>
             <a:ext cx="82296" cy="658368"/>
           </a:xfrm>
           <a:prstGeom prst="rect">
@@ -20057,7 +21725,7 @@
         </p:nvSpPr>
         <p:spPr>
           <a:xfrm>
-            <a:off x="640080" y="292608"/>
+            <a:off x="777240" y="292608"/>
             <a:ext cx="10972800" cy="274320"/>
           </a:xfrm>
           <a:prstGeom prst="rect">
@@ -20096,8 +21764,8 @@
         </p:nvSpPr>
         <p:spPr>
           <a:xfrm>
-            <a:off x="640080" y="530352"/>
-            <a:ext cx="11155680" cy="566928"/>
+            <a:off x="777240" y="530352"/>
+            <a:ext cx="10881360" cy="566928"/>
           </a:xfrm>
           <a:prstGeom prst="rect">
             <a:avLst/>
@@ -20137,8 +21805,8 @@
         </p:nvSpPr>
         <p:spPr>
           <a:xfrm>
-            <a:off x="411480" y="1325880"/>
-            <a:ext cx="11384280" cy="4937760"/>
+            <a:off x="548640" y="1325880"/>
+            <a:ext cx="11091672" cy="4937760"/>
           </a:xfrm>
           <a:prstGeom prst="roundRect">
             <a:avLst>
@@ -20159,8 +21827,8 @@
         </p:nvSpPr>
         <p:spPr>
           <a:xfrm>
-            <a:off x="777240" y="1554480"/>
-            <a:ext cx="10652760" cy="4480560"/>
+            <a:off x="914400" y="1554480"/>
+            <a:ext cx="10360152" cy="4480560"/>
           </a:xfrm>
           <a:prstGeom prst="rect">
             <a:avLst/>
@@ -20181,7 +21849,7 @@
               <a:buNone/>
             </a:pPr>
             <a:r>
-              <a:rPr lang="en-US" sz="2000" b="1" dirty="0">
+              <a:rPr lang="en-US" sz="2400" b="1" dirty="0">
                 <a:solidFill>
                   <a:srgbClr val="FFFFFF"/>
                 </a:solidFill>
@@ -20191,7 +21859,7 @@
               </a:rPr>
               <a:t>Créditos esperados = % do rateio × energia injetada da usina no ciclo</a:t>
             </a:r>
-            <a:endParaRPr lang="en-US" sz="2000" dirty="0"/>
+            <a:endParaRPr lang="en-US" sz="2400" dirty="0"/>
           </a:p>
           <a:p>
             <a:pPr indent="0" marL="0">
@@ -20201,7 +21869,7 @@
               <a:buNone/>
             </a:pPr>
             <a:r>
-              <a:rPr lang="en-US" sz="2000" b="1" dirty="0">
+              <a:rPr lang="en-US" sz="2400" b="1" dirty="0">
                 <a:solidFill>
                   <a:srgbClr val="F7A23B"/>
                 </a:solidFill>
@@ -20211,7 +21879,55 @@
               </a:rPr>
               <a:t>Ex.: 4% × 58.000 = 2.320 kWh</a:t>
             </a:r>
-            <a:endParaRPr lang="en-US" sz="2000" dirty="0"/>
+            <a:endParaRPr lang="en-US" sz="2400" dirty="0"/>
+          </a:p>
+        </p:txBody>
+      </p:sp>
+      <p:sp>
+        <p:nvSpPr>
+          <p:cNvPr id="25" name="Slide Number Placeholder 0"/>
+          <p:cNvSpPr>
+            <a:spLocks noGrp="1"/>
+          </p:cNvSpPr>
+          <p:nvPr>
+            <p:ph type="sldNum" sz="quarter" idx="4294967295"/>
+          </p:nvPr>
+        </p:nvSpPr>
+        <p:spPr>
+          <a:xfrm>
+            <a:off x="11292840" y="6556248"/>
+            <a:ext cx="548640" cy="256032"/>
+          </a:xfrm>
+          <a:prstGeom prst="rect">
+            <a:avLst/>
+          </a:prstGeom>
+          <a:extLst>
+            <a:ext uri="{C572A759-6A51-4108-AA02-DFA0A04FC94B}">
+              <ma14:wrappingTextBoxFlag xmlns:ma14="http://schemas.microsoft.com/office/mac/drawingml/2011/main" val="0"/>
+            </a:ext>
+          </a:extLst>
+        </p:spPr>
+        <p:txBody>
+          <a:bodyPr/>
+          <a:lstStyle>
+            <a:lvl1pPr>
+              <a:defRPr sz="900">
+                <a:solidFill>
+                  <a:srgbClr val="1B3A6B"/>
+                </a:solidFill>
+                <a:latin typeface="Arial"/>
+                <a:ea typeface="Arial"/>
+                <a:cs typeface="Arial"/>
+              </a:defRPr>
+            </a:lvl1pPr>
+          </a:lstStyle>
+          <a:p>
+            <a:pPr algn="r"/>
+            <a:fld id="{F7021451-1387-4CA6-816F-3879F97B5CBC}" type="slidenum">
+              <a:rPr b="1" lang="en-US"/>
+              <a:t>9</a:t>
+            </a:fld>
+            <a:endParaRPr lang="en-US"/>
           </a:p>
         </p:txBody>
       </p:sp>

--- a/docs/curso/slides/m07-faturas.pptx
+++ b/docs/curso/slides/m07-faturas.pptx
@@ -35,9 +35,13 @@
     <p:sldId id="283" r:id="rId29"/>
     <p:sldId id="284" r:id="rId30"/>
     <p:sldId id="285" r:id="rId31"/>
+    <p:sldId id="286" r:id="rId32"/>
+    <p:sldId id="287" r:id="rId33"/>
+    <p:sldId id="288" r:id="rId34"/>
+    <p:sldId id="289" r:id="rId35"/>
   </p:sldIdLst>
   <p:notesMasterIdLst>
-    <p:notesMasterId r:id="rId32"/>
+    <p:notesMasterId r:id="rId36"/>
   </p:notesMasterIdLst>
   <p:sldSz cx="12192000" cy="6858000"/>
   <p:notesSz cx="6858000" cy="12192000"/>
@@ -619,7 +623,7 @@
           <a:p>
             <a:r>
               <a:rPr lang="en-US" dirty="0"/>
-              <a:t>Situação um: a fatura veio sem nenhum crédito. As causas mais comuns são a lista de rateio ainda não aplicada pela distribuidora, a unidade consumidora fora da lista ou um problema de titularidade — por exemplo, a conta mudou de nome. Ação: confira o protocolo do rateio e cobre a distribuidora; se o erro for dela, peça o refaturamento. Situação dois: créditos menores que o esperado. Verifique se a usina gerou menos naquele ciclo e se o percentual da lista foi digitado corretamente. Situação três: créditos maiores que o consumo, com o saldo acumulando. A cota está alta para o consumo atual do cliente: revise. Situação quatro: leitura estimada. Às vezes a distribuidora não faz a leitura e fatura pela média; no mês seguinte vem o acerto. Anote e acompanhe, porque o consumo e os créditos do mês podem parecer estranhos. Situação cinco: créditos indo para a unidade errada — geralmente erro na lista. Corrija e peça o refaturamento das faturas afetadas. E situação seis: créditos prestes a expirar no saldo do cliente. Reduza a cota ou, se o contrato permitir, redistribua. Lembre do princípio da cobrança da plataforma: você cobra sobre a energia compensada na fatura do mês. Créditos que ficaram parados no saldo não entram na cobrança até serem usados. Isso é justo com o cliente, mas significa que sobra de crédito é receita adiada — ou perdida, se expirar.</a:t>
+              <a:t>As seis situações da tela cobrem quase tudo. Um princípio vale para todas: você cobra só o que foi compensado no mês. Crédito parado no saldo é receita adiada e, se expirar, perdida.</a:t>
             </a:r>
             <a:endParaRPr lang="en-US" dirty="0"/>
           </a:p>
@@ -707,7 +711,7 @@
           <a:p>
             <a:r>
               <a:rPr lang="en-US" dirty="0"/>
-              <a:t>Quando o problema é da distribuidora, registre tudo: nas observações da revisão da fatura, na plataforma, anote o que foi encontrado e o número do protocolo aberto. Acompanhe o prazo de resposta. Se não resolver, existem a ouvidoria da distribuidora e, em último caso, a ANEEL. Ter o histórico registrado faz diferença nessa hora.</a:t>
+              <a:t>Quando o erro é da distribuidora, registre nas observações da fatura, guarde o protocolo e acompanhe o prazo.</a:t>
             </a:r>
             <a:endParaRPr lang="en-US" dirty="0"/>
           </a:p>
@@ -795,7 +799,7 @@
           <a:p>
             <a:r>
               <a:rPr lang="en-US" dirty="0"/>
-              <a:t>Resumindo: calcule o esperado, compare com a fatura, identifique qual das seis situações aconteceu e aja, registrando tudo. Na próxima aula, como fazer as faturas chegarem sozinhas à plataforma.</a:t>
+              <a:t/>
             </a:r>
             <a:endParaRPr lang="en-US" dirty="0"/>
           </a:p>
@@ -971,7 +975,7 @@
           <a:p>
             <a:r>
               <a:rPr lang="en-US" dirty="0"/>
-              <a:t>A ideia é simples. Quase toda distribuidora permite cadastrar um e-mail para receber a fatura digital. Em vez do e-mail do cliente, você cadastra um endereço da sua empresa, dedicado àquele cliente. A plataforma tem um conjunto de caixas de e-mail e lê essas caixas de hora em hora. Quando chega uma fatura, ela baixa o PDF, desbloqueia se tiver senha, extrai os dados, identifica o cliente e a unidade consumidora e coloca a fatura na fila de revisão. Ter uma caixa por cliente evita confusão: cada fatura que chega numa caixa já se sabe de quem é. As caixas podem ser criadas pela própria tela de integrações, se a hospedagem de e-mail estiver integrada.</a:t>
+              <a:t>Você cadastra na distribuidora um e-mail da sua empresa, um por cliente. De hora em hora, a plataforma lê as caixas, desbloqueia o PDF, extrai os dados e coloca a fatura na fila de revisão.</a:t>
             </a:r>
             <a:endParaRPr lang="en-US" dirty="0"/>
           </a:p>
@@ -1059,7 +1063,7 @@
           <a:p>
             <a:r>
               <a:rPr lang="en-US" dirty="0"/>
-              <a:t>E o upload manual continua sendo útil: para o cliente recém-chegado, cuja fatura digital ainda não foi redirecionada; para uma segunda via; para distribuidoras sem envio por e-mail; e para casos em que a leitura automática não reconhece o layout. Nesses casos, você sobe o PDF e preenche ou corrige os dados na revisão. É o que você vai fazer no laboratório, já que no ambiente de aula a importação por e-mail está desligada.</a:t>
+              <a:t>O upload manual continua útil nos casos da tela. E, quando algo falha na importação, um alerta operacional avisa e se resolve sozinho quando volta a funcionar.</a:t>
             </a:r>
             <a:endParaRPr lang="en-US" dirty="0"/>
           </a:p>
@@ -1147,8 +1151,8 @@
           <a:p>
             <a:r>
               <a:rPr lang="en-US" dirty="0"/>
-              <a:t>Na ficha do cliente, na aba Integração, você associa a caixa de e-mail que recebe as faturas dele. Muitas distribuidoras enviam o PDF protegido por senha, normalmente com parte do CPF ou do CNPJ do titular; cadastre essa senha no campo de senha para desbloquear o PDF — ela fica guardada de forma criptografada. O filtro de remetente é opcional e serve para aceitar só e-mails vindos do endereço da distribuidora, ignorando propaganda e outros e-mails. Depois, com o cliente, faça o cadastro do e-mail de fatura digital no site ou aplicativo da distribuidora. Combine isso já no onboarding: é um dos documentos do contrato.
-Em Integrações, Histórico de Importação, você vê cada execução da rotina: quantos e-mails foram lidos, quantas faturas entraram, quantas deram erro e por quê. Também dá para disparar uma importação na hora, sem esperar a próxima rodada. Quando algo falha de forma que compromete o faturamento — uma caixa de e-mail inacessível, uma senha de PDF errada, um PDF ilegível —, a plataforma cria um alerta operacional, que aparece no sino do cabeçalho. E o alerta se resolve sozinho quando a importação volta a funcionar. Você não precisa ficar olhando o histórico: os alertas avisam.</a:t>
+              <a:t>Aba Integração: e-mail de recebimento senha do PDF filtro de remetente
+Histórico de Importação: cada execução, cada e-mail, cada erro</a:t>
             </a:r>
             <a:endParaRPr lang="en-US" dirty="0"/>
           </a:p>
@@ -1236,7 +1240,7 @@
           <a:p>
             <a:r>
               <a:rPr lang="en-US" dirty="0"/>
-              <a:t>Resumindo: uma caixa de e-mail por cliente, a senha do PDF cadastrada, a rotina lendo de hora em hora, os alertas avisando quando algo falha e o upload manual para as exceções. Na próxima aula, o que conferir na revisão da fatura.</a:t>
+              <a:t/>
             </a:r>
             <a:endParaRPr lang="en-US" dirty="0"/>
           </a:p>
@@ -1412,7 +1416,7 @@
           <a:p>
             <a:r>
               <a:rPr lang="en-US" dirty="0"/>
-              <a:t>Cada fatura tem dois status. O da extração diz se a leitura automática do PDF deu certo: pendente, sucesso ou erro. O da revisão diz em que ponto está o trabalho humano: pendente de revisão, revisada, corrigida — quando você alterou algum dado —, aprovada ou rejeitada. Só a fatura aprovada gera cobrança. A rejeitada é descartada, por exemplo, quando é uma duplicata.</a:t>
+              <a:t>Cada fatura tem dois status: o da leitura automática e o da revisão humana. Só a aprovada gera cobrança.</a:t>
             </a:r>
             <a:endParaRPr lang="en-US" dirty="0"/>
           </a:p>
@@ -1588,7 +1592,7 @@
           <a:p>
             <a:r>
               <a:rPr lang="en-US" dirty="0"/>
-              <a:t>Passo um: confira se a fatura é do cliente e da unidade consumidora certos — o nome do titular e o número da instalação no resumo técnico devem bater com o cadastro. Passo dois: referência, ou seja, o mês e o ano, e o vencimento. Passo três: o consumo e o valor total estão coerentes com o histórico do cliente? Um consumo três vezes maior que a média pode ser um erro de leitura ou uma mudança real — que vale uma ligação para o cliente. Passo quatro: compare a energia compensada com o esperado, a conta da aula 2. Passo cinco: o consumo injetado em reais, que é a base da cobrança, e a margem de desconto, que vem da regra ativa do cliente. A tela mostra, de forma transparente, como chegou nesses números, com as linhas da fatura usadas no cálculo; se uma linha ficou de fora ou entrou errada, você enxerga ali. E o valor da fatura ao cliente, que é o que será cobrado. Passo seis: a usina vinculada é a correta, e não há pendências abertas.</a:t>
+              <a:t>Siga sempre os seis passos da tela. Leva menos de dois minutos por fatura e evita a maioria dos erros de cobrança.</a:t>
             </a:r>
             <a:endParaRPr lang="en-US" dirty="0"/>
           </a:p>
@@ -1676,7 +1680,7 @@
           <a:p>
             <a:r>
               <a:rPr lang="en-US" dirty="0"/>
-              <a:t>A plataforma ajuda com pendências automáticas, que aparecem na própria fatura. As de erro impedem uma aprovação segura: o leitor automático falhou; a fatura não está ligada a nenhuma unidade consumidora; o valor total é inválido; ou já existe outra fatura para a mesma unidade e referência. As de aviso pedem atenção: o cliente não tem regra de desconto ativa, o consumo está ausente, ou a usina informada é diferente do vínculo ativo da unidade. Cada pendência é resolvida corrigindo a causa e marcando como resolvida, e você vai fazer isso no laboratório da aula 6.</a:t>
+              <a:t>As pendências automáticas ajudam. As de erro impedem uma aprovação segura; as de aviso pedem atenção.</a:t>
             </a:r>
             <a:endParaRPr lang="en-US" dirty="0"/>
           </a:p>
@@ -1764,7 +1768,7 @@
           <a:p>
             <a:r>
               <a:rPr lang="en-US" dirty="0"/>
-              <a:t>Algumas boas práticas. Revise as faturas em lote, num horário fixo, todos os dias ou a cada dois dias, para que nada envelheça na fila — a plataforma alerta quando uma fatura passa de três dias em revisão. Nunca aprove com pendência de erro aberta. Sempre que corrigir um dado manualmente, justifique nas observações da revisão. E, para faturas acima de um valor que você definir, use dupla checagem: uma pessoa revisa, outra aprova.</a:t>
+              <a:t>Revise em lote, num horário fixo, e justifique toda correção manual.</a:t>
             </a:r>
             <a:endParaRPr lang="en-US" dirty="0"/>
           </a:p>
@@ -1852,7 +1856,7 @@
           <a:p>
             <a:r>
               <a:rPr lang="en-US" dirty="0"/>
-              <a:t>Resumindo: seis passos de revisão, pendências de erro resolvidas antes de aprovar e correções sempre justificadas. Agora, para o laboratório.</a:t>
+              <a:t/>
             </a:r>
             <a:endParaRPr lang="en-US" dirty="0"/>
           </a:p>
@@ -2028,10 +2032,10 @@
           <a:p>
             <a:r>
               <a:rPr lang="en-US" dirty="0"/>
-              <a:t>Abra Financeiro e depois Faturas de Concessionárias, e crie uma nova fatura. Selecione o cliente — vamos começar pela padaria —, a unidade consumidora e anexe o PDF da pasta do curso. Salve. Em segundos, a plataforma lê o PDF. A tela da fatura abre com o status da extração e o status da revisão, que começa como pendente de revisão.
-Agora, o roteiro. Passo um: titular e número da instalação batem com a padaria. Passo dois: referência e vencimento conferem com o PDF. Passo três: consumo e valor total coerentes com o histórico — dois mil e quinhentos quilowatts-hora, dentro da média. Repare no indicador de completude dos dados, que mostra quantos campos foram analisados e se algum ficou inválido. Passo quatro: abra a seção de energia injetada e consumo injetado. Ela mostra exatamente quais linhas da fatura foram somadas: as de energia injetada em TE, TUSD e bandeira, com quantidades e valores. Compare a energia compensada com o esperado: quatro por cento da geração da usina no ciclo. Se bater, siga.
-Passo cinco: o consumo injetado total, em reais, a margem de desconto, que veio da regra ativa da padaria, e o valor da fatura ao cliente — o que a sua empresa vai cobrar. A tela explica como chegou em cada número. Confira com a sua conta: consumo injetado vezes um menos vinte por cento. Passo seis: a usina vinculada é a sua usina, e a lista de pendências está vazia, com a mensagem de que nenhuma pendência foi encontrada.
-Escreva uma observação curta na revisão, por exemplo "conferido, compensação igual ao esperado", e aprove a fatura. O status muda para aprovada, e a plataforma registra quem revisou e quando. Essa trilha é importante: se, daqui a seis meses, o cliente questionar uma cobrança, você sabe quem conferiu a fatura e o que foi visto. A partir daqui, a fatura está pronta para virar cobrança — o que acontece automaticamente na rotina de hora em hora ou com um clique, como você vai ver no próximo módulo.</a:t>
+              <a:t>Em Financeiro, Faturas de Concessionárias, crie uma fatura: cliente, UC e o PDF da pasta do curso.
+Confira titular, referência, vencimento, consumo e a energia compensada contra o esperado.
+Confira consumo injetado, margem de desconto e valor ao cliente. Usina vinculada correta e nenhuma pendência.
+Escreva a observação da revisão e aprove: fica registrado quem revisou e quando.</a:t>
             </a:r>
             <a:endParaRPr lang="en-US" dirty="0"/>
           </a:p>
@@ -2119,7 +2123,7 @@
           <a:p>
             <a:r>
               <a:rPr lang="en-US" dirty="0"/>
-              <a:t>Agora faça o mesmo para as faturas dos outros clientes. Use a lista de Faturas de Concessionárias com os filtros: por status, para ver só as pendentes de revisão, e por nome do cliente. Na operação real, é assim que se trabalha: uma fila, revisada em lote, todos os dias.</a:t>
+              <a:t>Repita para as outras faturas, usando os filtros por status e por cliente.</a:t>
             </a:r>
             <a:endParaRPr lang="en-US" dirty="0"/>
           </a:p>
@@ -2295,10 +2299,10 @@
           <a:p>
             <a:r>
               <a:rPr lang="en-US" dirty="0"/>
-              <a:t>Primeira pendência: a fatura não está vinculada a nenhuma unidade consumidora. A clínica abriu uma filial, a fatura dela chegou, mas a UC da filial não estava cadastrada. Resolva na origem: na ficha da clínica, cadastre a nova unidade consumidora com o número da instalação que aparece na fatura. Volte à fatura, abra a correção manual dos dados, selecione a UC e salve. Marque a pendência como resolvida. E lembre: se essa UC vai receber créditos, ela precisa de vínculo com a usina e de entrar na lista de rateio.
-Segunda: fatura duplicada. Aconteceu porque a mesma fatura chegou por e-mail e também foi enviada pelo cliente no WhatsApp. Compare com a fatura existente — mesma unidade, mesma referência, mesmos valores. Se for igual, rejeite a duplicata, com uma observação. Se for uma refaturação da distribuidora, com valores diferentes, a análise é outra: descubra qual é a válida antes de decidir, e, se a cobrança da original já tiver sido gerada, ajuste a cobrança, como você vai ver no módulo 8.
-Terceira: valor ou consumo inválido. Isso acontece quando o PDF tem um layout que o leitor automático não reconhece por completo, por exemplo de outra distribuidora, ou uma segunda via com formato diferente. Abra o PDF e use a correção manual: preencha o valor total, o consumo, a energia injetada e o consumo injetado, em quilowatts-hora e em reais, copiando da fatura. Repare que a plataforma não deixa salvar a revisão sem um valor total válido — uma trava que evita cobranças erradas. Salve: o status da revisão fica como corrigida, e a correção fica registrada. Justifique nas observações.
-Quarta: o cliente não tem regra de desconto ativa. Sem ela, a fatura não sabe que margem aplicar. Vá à ficha do cliente, na parte de desconto, e crie uma regra ativa com o percentual do contrato. Volte à fatura e confira que a margem de desconto apareceu. Resolva a pendência.</a:t>
+              <a:t>Sem UC vinculada: cadastre a UC do número da instalação e vincule-a na correção manual.
+Duplicada: compare com a existente e rejeite a duplicata, com observação.
+Valor ou consumo inválido: complete a correção manual a partir do PDF. A plataforma não aceita valor vazio.
+Sem regra de desconto: crie a regra na ficha do cliente e confira a margem na fatura.</a:t>
             </a:r>
             <a:endParaRPr lang="en-US" dirty="0"/>
           </a:p>
@@ -2386,7 +2390,7 @@
           <a:p>
             <a:r>
               <a:rPr lang="en-US" dirty="0"/>
-              <a:t>Antes de terminar, abra os Alertas Operacionais e filtre pelo módulo de faturas. É aqui que aparecem os problemas de importação, como senha de PDF errada ou fatura ilegível, e as faturas paradas em revisão há mais de três dias. Agora aprove as faturas que você corrigiu. O entregável do módulo é o primeiro ciclo de faturas: todas as faturas do mês um aprovadas e pelo menos três pendências resolvidas, com justificativa. No próximo módulo, essas faturas viram dinheiro: cobrança, Pix e boleto.</a:t>
+              <a:t>Em Alertas Operacionais, filtre por faturas e confira se não restou problema de importação.</a:t>
             </a:r>
             <a:endParaRPr lang="en-US" dirty="0"/>
           </a:p>
@@ -2474,7 +2478,7 @@
           <a:p>
             <a:r>
               <a:rPr lang="en-US" dirty="0"/>
-              <a:t>Uma fatura com geração distribuída tem os mesmos blocos de uma fatura comum, mais um. Identificação: titular, unidade consumidora, classe, endereço. Leitura e consumo: as leituras do medidor e o consumo do mês. Itens faturados: as linhas com quantidade, tarifa e valor. Tributos. O histórico de consumo. E o bloco novo: as informações da geração distribuída, onde a distribuidora informa os créditos recebidos, os créditos utilizados e o saldo acumulado. Cada distribuidora organiza e nomeia isso do seu jeito, mas os conceitos são sempre os mesmos.</a:t>
+              <a:t>A fatura com geração distribuída tem os blocos de sempre e mais um: as informações da geração distribuída.</a:t>
             </a:r>
             <a:endParaRPr lang="en-US" dirty="0"/>
           </a:p>
@@ -2604,6 +2608,358 @@
 </p:notes>
 </file>
 
+<file path=ppt/notesSlides/notesSlide31.xml><?xml version="1.0" encoding="utf-8"?>
+<p:notes xmlns:a="http://schemas.openxmlformats.org/drawingml/2006/main" xmlns:r="http://schemas.openxmlformats.org/officeDocument/2006/relationships" xmlns:p="http://schemas.openxmlformats.org/presentationml/2006/main">
+  <p:cSld>
+    <p:spTree>
+      <p:nvGrpSpPr>
+        <p:cNvPr id="1" name=""/>
+        <p:cNvGrpSpPr/>
+        <p:nvPr/>
+      </p:nvGrpSpPr>
+      <p:grpSpPr>
+        <a:xfrm>
+          <a:off x="0" y="0"/>
+          <a:ext cx="0" cy="0"/>
+          <a:chOff x="0" y="0"/>
+          <a:chExt cx="0" cy="0"/>
+        </a:xfrm>
+      </p:grpSpPr>
+      <p:sp>
+        <p:nvSpPr>
+          <p:cNvPr id="2" name="Slide Image Placeholder 1"/>
+          <p:cNvSpPr>
+            <a:spLocks noGrp="1" noRot="1" noChangeAspect="1"/>
+          </p:cNvSpPr>
+          <p:nvPr>
+            <p:ph type="sldImg"/>
+          </p:nvPr>
+        </p:nvSpPr>
+        <p:spPr/>
+      </p:sp>
+      <p:sp>
+        <p:nvSpPr>
+          <p:cNvPr id="3" name="Notes Placeholder 2"/>
+          <p:cNvSpPr>
+            <a:spLocks noGrp="1"/>
+          </p:cNvSpPr>
+          <p:nvPr>
+            <p:ph type="body" idx="1"/>
+          </p:nvPr>
+        </p:nvSpPr>
+        <p:spPr/>
+        <p:txBody>
+          <a:bodyPr/>
+          <a:lstStyle/>
+          <a:p>
+            <a:r>
+              <a:rPr lang="en-US" dirty="0"/>
+              <a:t/>
+            </a:r>
+            <a:endParaRPr lang="en-US" dirty="0"/>
+          </a:p>
+        </p:txBody>
+      </p:sp>
+      <p:sp>
+        <p:nvSpPr>
+          <p:cNvPr id="4" name="Slide Number Placeholder 3"/>
+          <p:cNvSpPr>
+            <a:spLocks noGrp="1"/>
+          </p:cNvSpPr>
+          <p:nvPr>
+            <p:ph type="sldNum" sz="quarter" idx="10"/>
+          </p:nvPr>
+        </p:nvSpPr>
+        <p:spPr/>
+        <p:txBody>
+          <a:bodyPr/>
+          <a:lstStyle/>
+          <a:p>
+            <a:fld id="{F7021451-1387-4CA6-816F-3879F97B5CBC}" type="slidenum">
+              <a:rPr lang="en-US"/>
+              <a:t>31</a:t>
+            </a:fld>
+            <a:endParaRPr lang="en-US"/>
+          </a:p>
+        </p:txBody>
+      </p:sp>
+    </p:spTree>
+    <p:extLst>
+      <p:ext uri="{BB962C8B-B14F-4D97-AF65-F5344CB8AC3E}">
+        <p14:creationId xmlns:p14="http://schemas.microsoft.com/office/powerpoint/2010/main" val="1024086991"/>
+      </p:ext>
+    </p:extLst>
+  </p:cSld>
+  <p:clrMapOvr>
+    <a:masterClrMapping/>
+  </p:clrMapOvr>
+</p:notes>
+</file>
+
+<file path=ppt/notesSlides/notesSlide32.xml><?xml version="1.0" encoding="utf-8"?>
+<p:notes xmlns:a="http://schemas.openxmlformats.org/drawingml/2006/main" xmlns:r="http://schemas.openxmlformats.org/officeDocument/2006/relationships" xmlns:p="http://schemas.openxmlformats.org/presentationml/2006/main">
+  <p:cSld>
+    <p:spTree>
+      <p:nvGrpSpPr>
+        <p:cNvPr id="1" name=""/>
+        <p:cNvGrpSpPr/>
+        <p:nvPr/>
+      </p:nvGrpSpPr>
+      <p:grpSpPr>
+        <a:xfrm>
+          <a:off x="0" y="0"/>
+          <a:ext cx="0" cy="0"/>
+          <a:chOff x="0" y="0"/>
+          <a:chExt cx="0" cy="0"/>
+        </a:xfrm>
+      </p:grpSpPr>
+      <p:sp>
+        <p:nvSpPr>
+          <p:cNvPr id="2" name="Slide Image Placeholder 1"/>
+          <p:cNvSpPr>
+            <a:spLocks noGrp="1" noRot="1" noChangeAspect="1"/>
+          </p:cNvSpPr>
+          <p:nvPr>
+            <p:ph type="sldImg"/>
+          </p:nvPr>
+        </p:nvSpPr>
+        <p:spPr/>
+      </p:sp>
+      <p:sp>
+        <p:nvSpPr>
+          <p:cNvPr id="3" name="Notes Placeholder 2"/>
+          <p:cNvSpPr>
+            <a:spLocks noGrp="1"/>
+          </p:cNvSpPr>
+          <p:nvPr>
+            <p:ph type="body" idx="1"/>
+          </p:nvPr>
+        </p:nvSpPr>
+        <p:spPr/>
+        <p:txBody>
+          <a:bodyPr/>
+          <a:lstStyle/>
+          <a:p>
+            <a:r>
+              <a:rPr lang="en-US" dirty="0"/>
+              <a:t/>
+            </a:r>
+            <a:endParaRPr lang="en-US" dirty="0"/>
+          </a:p>
+        </p:txBody>
+      </p:sp>
+      <p:sp>
+        <p:nvSpPr>
+          <p:cNvPr id="4" name="Slide Number Placeholder 3"/>
+          <p:cNvSpPr>
+            <a:spLocks noGrp="1"/>
+          </p:cNvSpPr>
+          <p:nvPr>
+            <p:ph type="sldNum" sz="quarter" idx="10"/>
+          </p:nvPr>
+        </p:nvSpPr>
+        <p:spPr/>
+        <p:txBody>
+          <a:bodyPr/>
+          <a:lstStyle/>
+          <a:p>
+            <a:fld id="{F7021451-1387-4CA6-816F-3879F97B5CBC}" type="slidenum">
+              <a:rPr lang="en-US"/>
+              <a:t>32</a:t>
+            </a:fld>
+            <a:endParaRPr lang="en-US"/>
+          </a:p>
+        </p:txBody>
+      </p:sp>
+    </p:spTree>
+    <p:extLst>
+      <p:ext uri="{BB962C8B-B14F-4D97-AF65-F5344CB8AC3E}">
+        <p14:creationId xmlns:p14="http://schemas.microsoft.com/office/powerpoint/2010/main" val="1024086991"/>
+      </p:ext>
+    </p:extLst>
+  </p:cSld>
+  <p:clrMapOvr>
+    <a:masterClrMapping/>
+  </p:clrMapOvr>
+</p:notes>
+</file>
+
+<file path=ppt/notesSlides/notesSlide33.xml><?xml version="1.0" encoding="utf-8"?>
+<p:notes xmlns:a="http://schemas.openxmlformats.org/drawingml/2006/main" xmlns:r="http://schemas.openxmlformats.org/officeDocument/2006/relationships" xmlns:p="http://schemas.openxmlformats.org/presentationml/2006/main">
+  <p:cSld>
+    <p:spTree>
+      <p:nvGrpSpPr>
+        <p:cNvPr id="1" name=""/>
+        <p:cNvGrpSpPr/>
+        <p:nvPr/>
+      </p:nvGrpSpPr>
+      <p:grpSpPr>
+        <a:xfrm>
+          <a:off x="0" y="0"/>
+          <a:ext cx="0" cy="0"/>
+          <a:chOff x="0" y="0"/>
+          <a:chExt cx="0" cy="0"/>
+        </a:xfrm>
+      </p:grpSpPr>
+      <p:sp>
+        <p:nvSpPr>
+          <p:cNvPr id="2" name="Slide Image Placeholder 1"/>
+          <p:cNvSpPr>
+            <a:spLocks noGrp="1" noRot="1" noChangeAspect="1"/>
+          </p:cNvSpPr>
+          <p:nvPr>
+            <p:ph type="sldImg"/>
+          </p:nvPr>
+        </p:nvSpPr>
+        <p:spPr/>
+      </p:sp>
+      <p:sp>
+        <p:nvSpPr>
+          <p:cNvPr id="3" name="Notes Placeholder 2"/>
+          <p:cNvSpPr>
+            <a:spLocks noGrp="1"/>
+          </p:cNvSpPr>
+          <p:nvPr>
+            <p:ph type="body" idx="1"/>
+          </p:nvPr>
+        </p:nvSpPr>
+        <p:spPr/>
+        <p:txBody>
+          <a:bodyPr/>
+          <a:lstStyle/>
+          <a:p>
+            <a:r>
+              <a:rPr lang="en-US" dirty="0"/>
+              <a:t/>
+            </a:r>
+            <a:endParaRPr lang="en-US" dirty="0"/>
+          </a:p>
+        </p:txBody>
+      </p:sp>
+      <p:sp>
+        <p:nvSpPr>
+          <p:cNvPr id="4" name="Slide Number Placeholder 3"/>
+          <p:cNvSpPr>
+            <a:spLocks noGrp="1"/>
+          </p:cNvSpPr>
+          <p:nvPr>
+            <p:ph type="sldNum" sz="quarter" idx="10"/>
+          </p:nvPr>
+        </p:nvSpPr>
+        <p:spPr/>
+        <p:txBody>
+          <a:bodyPr/>
+          <a:lstStyle/>
+          <a:p>
+            <a:fld id="{F7021451-1387-4CA6-816F-3879F97B5CBC}" type="slidenum">
+              <a:rPr lang="en-US"/>
+              <a:t>33</a:t>
+            </a:fld>
+            <a:endParaRPr lang="en-US"/>
+          </a:p>
+        </p:txBody>
+      </p:sp>
+    </p:spTree>
+    <p:extLst>
+      <p:ext uri="{BB962C8B-B14F-4D97-AF65-F5344CB8AC3E}">
+        <p14:creationId xmlns:p14="http://schemas.microsoft.com/office/powerpoint/2010/main" val="1024086991"/>
+      </p:ext>
+    </p:extLst>
+  </p:cSld>
+  <p:clrMapOvr>
+    <a:masterClrMapping/>
+  </p:clrMapOvr>
+</p:notes>
+</file>
+
+<file path=ppt/notesSlides/notesSlide34.xml><?xml version="1.0" encoding="utf-8"?>
+<p:notes xmlns:a="http://schemas.openxmlformats.org/drawingml/2006/main" xmlns:r="http://schemas.openxmlformats.org/officeDocument/2006/relationships" xmlns:p="http://schemas.openxmlformats.org/presentationml/2006/main">
+  <p:cSld>
+    <p:spTree>
+      <p:nvGrpSpPr>
+        <p:cNvPr id="1" name=""/>
+        <p:cNvGrpSpPr/>
+        <p:nvPr/>
+      </p:nvGrpSpPr>
+      <p:grpSpPr>
+        <a:xfrm>
+          <a:off x="0" y="0"/>
+          <a:ext cx="0" cy="0"/>
+          <a:chOff x="0" y="0"/>
+          <a:chExt cx="0" cy="0"/>
+        </a:xfrm>
+      </p:grpSpPr>
+      <p:sp>
+        <p:nvSpPr>
+          <p:cNvPr id="2" name="Slide Image Placeholder 1"/>
+          <p:cNvSpPr>
+            <a:spLocks noGrp="1" noRot="1" noChangeAspect="1"/>
+          </p:cNvSpPr>
+          <p:nvPr>
+            <p:ph type="sldImg"/>
+          </p:nvPr>
+        </p:nvSpPr>
+        <p:spPr/>
+      </p:sp>
+      <p:sp>
+        <p:nvSpPr>
+          <p:cNvPr id="3" name="Notes Placeholder 2"/>
+          <p:cNvSpPr>
+            <a:spLocks noGrp="1"/>
+          </p:cNvSpPr>
+          <p:nvPr>
+            <p:ph type="body" idx="1"/>
+          </p:nvPr>
+        </p:nvSpPr>
+        <p:spPr/>
+        <p:txBody>
+          <a:bodyPr/>
+          <a:lstStyle/>
+          <a:p>
+            <a:r>
+              <a:rPr lang="en-US" dirty="0"/>
+              <a:t/>
+            </a:r>
+            <a:endParaRPr lang="en-US" dirty="0"/>
+          </a:p>
+        </p:txBody>
+      </p:sp>
+      <p:sp>
+        <p:nvSpPr>
+          <p:cNvPr id="4" name="Slide Number Placeholder 3"/>
+          <p:cNvSpPr>
+            <a:spLocks noGrp="1"/>
+          </p:cNvSpPr>
+          <p:nvPr>
+            <p:ph type="sldNum" sz="quarter" idx="10"/>
+          </p:nvPr>
+        </p:nvSpPr>
+        <p:spPr/>
+        <p:txBody>
+          <a:bodyPr/>
+          <a:lstStyle/>
+          <a:p>
+            <a:fld id="{F7021451-1387-4CA6-816F-3879F97B5CBC}" type="slidenum">
+              <a:rPr lang="en-US"/>
+              <a:t>34</a:t>
+            </a:fld>
+            <a:endParaRPr lang="en-US"/>
+          </a:p>
+        </p:txBody>
+      </p:sp>
+    </p:spTree>
+    <p:extLst>
+      <p:ext uri="{BB962C8B-B14F-4D97-AF65-F5344CB8AC3E}">
+        <p14:creationId xmlns:p14="http://schemas.microsoft.com/office/powerpoint/2010/main" val="1024086991"/>
+      </p:ext>
+    </p:extLst>
+  </p:cSld>
+  <p:clrMapOvr>
+    <a:masterClrMapping/>
+  </p:clrMapOvr>
+</p:notes>
+</file>
+
 <file path=ppt/notesSlides/notesSlide4.xml><?xml version="1.0" encoding="utf-8"?>
 <p:notes xmlns:a="http://schemas.openxmlformats.org/drawingml/2006/main" xmlns:r="http://schemas.openxmlformats.org/officeDocument/2006/relationships" xmlns:p="http://schemas.openxmlformats.org/presentationml/2006/main">
   <p:cSld>
@@ -2650,7 +3006,7 @@
           <a:p>
             <a:r>
               <a:rPr lang="en-US" dirty="0"/>
-              <a:t>Olhe os itens faturados da padaria. Primeiro aparecem as linhas de consumo: dois mil e quinhentos quilowatts-hora, com a parcela de energia, a TE, e a parcela de uso da rede, a TUSD, com valores positivos — é o que ela pagaria sem geração distribuída. Logo abaixo, aparecem as linhas de energia injetada, ou compensada: dois mil e quatrocentos quilowatts-hora, também separados em TE e TUSD, e às vezes a bandeira, com valores negativos. São os créditos abatendo o consumo. No layout da nossa distribuidora de referência, essas linhas começam com "Energia Inj. OUC MPT", que quer dizer energia injetada em outra unidade consumidora, no mesmo posto tarifário — ou seja, créditos vindos de uma usina em outro endereço. Em outras distribuidoras, você vai ver nomes como "energia compensada" ou "injeção SCEE", do sistema de compensação de energia elétrica. Repare num detalhe importante: o valor negativo da TUSD compensada é menor do que o valor positivo da TUSD consumida, por quilowatt-hora. A diferença é justamente a parcela do Fio B que não é compensada para usinas GD dois — aquela transição que você estudou.</a:t>
+              <a:t>Nos itens faturados, o consumo aparece positivo e a energia compensada, negativa. A diferença por quilowatt-hora entre a TUSD consumida e a compensada é justamente o Fio B que não é compensado.</a:t>
             </a:r>
             <a:endParaRPr lang="en-US" dirty="0"/>
           </a:p>
@@ -2738,7 +3094,7 @@
           <a:p>
             <a:r>
               <a:rPr lang="en-US" dirty="0"/>
-              <a:t>De todas essas linhas, um número é o mais importante para você: o valor total da energia compensada, que a plataforma chama de consumo injetado. É a soma, em reais, das linhas de compensação — TE, TUSD e bandeira. No exemplo, dois mil, cento e dezenove reais. Esse é o valor que o cliente deixou de pagar à distribuidora graças aos créditos. A sua cobrança parte dele: aplica a margem de desconto do cliente, vinte por cento, e chega a mil, seiscentos e noventa e cinco reais e vinte centavos. Por isso a plataforma cobra sobre o consumo injetado, e não sobre o valor total da fatura: o valor total inclui coisas que não têm nada a ver com a sua operação, como a iluminação pública, multas da distribuidora e o consumo que ficou descoberto.</a:t>
+              <a:t>O número que importa é o consumo injetado: a soma em reais das linhas compensadas. É o que o cliente deixou de pagar à distribuidora, e a sua cobrança parte dele, com o desconto. Não use o valor total da fatura, que inclui itens que não são da sua operação.</a:t>
             </a:r>
             <a:endParaRPr lang="en-US" dirty="0"/>
           </a:p>
@@ -2826,7 +3182,7 @@
           <a:p>
             <a:r>
               <a:rPr lang="en-US" dirty="0"/>
-              <a:t>Por fim, o bloco de informações da geração distribuída. Ele mostra quantos créditos a unidade recebeu no mês, quantos foram utilizados, o saldo anterior, o saldo atual e, em muitas distribuidoras, os créditos que vão expirar nos próximos meses. Esse bloco é o seu termômetro. Saldo crescendo mês a mês significa que a cota do cliente está alta demais. Créditos recebidos abaixo do esperado significam que algo aconteceu no rateio ou na geração. Créditos a expirar exigem ação imediata, como reduzir a cota ou, se o contrato permitir, redistribuir.</a:t>
+              <a:t>O bloco de informações da geração distribuída é o seu termômetro: saldo crescendo indica cota alta; créditos a expirar exigem ação.</a:t>
             </a:r>
             <a:endParaRPr lang="en-US" dirty="0"/>
           </a:p>
@@ -2914,7 +3270,7 @@
           <a:p>
             <a:r>
               <a:rPr lang="en-US" dirty="0"/>
-              <a:t>Resumindo: na fatura com compensação, o consumo aparece positivo e a energia compensada aparece negativa, separada em TE, TUSD e bandeira. A soma da compensação em reais, o consumo injetado, é a base da sua cobrança. E o bloco de informações da GD é o seu termômetro de créditos e saldo. Na próxima aula, o que fazer quando esses números não batem com o esperado.</a:t>
+              <a:t/>
             </a:r>
             <a:endParaRPr lang="en-US" dirty="0"/>
           </a:p>
@@ -3090,7 +3446,7 @@
           <a:p>
             <a:r>
               <a:rPr lang="en-US" dirty="0"/>
-              <a:t>O esperado é simples: o percentual do cliente no rateio vezes a energia injetada pela usina no ciclo. Se a padaria tem quatro por cento e a usina injetou cinquenta e oito mil quilowatts-hora, ela deveria receber dois mil, trezentos e vinte. Uma diferença pequena pode vir dos ciclos de leitura, que não coincidem entre a usina e cada cliente. Uma diferença grande exige investigação.</a:t>
+              <a:t>O esperado é o percentual do rateio vezes a energia injetada pela usina no ciclo. Pequenas diferenças vêm dos ciclos de leitura; grandes exigem investigação.</a:t>
             </a:r>
             <a:endParaRPr lang="en-US" dirty="0"/>
           </a:p>
@@ -4303,7 +4659,7 @@
         <p:spPr>
           <a:xfrm>
             <a:off x="548640" y="1325880"/>
-            <a:ext cx="11155680" cy="4937760"/>
+            <a:ext cx="11155680" cy="3977640"/>
           </a:xfrm>
           <a:prstGeom prst="rect">
             <a:avLst/>
@@ -4435,6 +4791,92 @@
               <a:t>6. Créditos a expirar → cota alta ou cliente consumindo menos → reduzir cota/redistribuir</a:t>
             </a:r>
             <a:endParaRPr lang="en-US" sz="1300" dirty="0"/>
+          </a:p>
+        </p:txBody>
+      </p:sp>
+      <p:sp>
+        <p:nvSpPr>
+          <p:cNvPr id="10" name="Shape 7"/>
+          <p:cNvSpPr/>
+          <p:nvPr/>
+        </p:nvSpPr>
+        <p:spPr>
+          <a:xfrm>
+            <a:off x="548640" y="5413248"/>
+            <a:ext cx="11091672" cy="868680"/>
+          </a:xfrm>
+          <a:prstGeom prst="roundRect">
+            <a:avLst>
+              <a:gd name="adj" fmla="val 8421"/>
+            </a:avLst>
+          </a:prstGeom>
+          <a:solidFill>
+            <a:srgbClr val="EEF3FA"/>
+          </a:solidFill>
+          <a:ln w="6350">
+            <a:solidFill>
+              <a:srgbClr val="D8E0EC"/>
+            </a:solidFill>
+            <a:prstDash val="solid"/>
+          </a:ln>
+        </p:spPr>
+      </p:sp>
+      <p:sp>
+        <p:nvSpPr>
+          <p:cNvPr id="11" name="Shape 8"/>
+          <p:cNvSpPr/>
+          <p:nvPr/>
+        </p:nvSpPr>
+        <p:spPr>
+          <a:xfrm>
+            <a:off x="548640" y="5413248"/>
+            <a:ext cx="91440" cy="868680"/>
+          </a:xfrm>
+          <a:prstGeom prst="rect">
+            <a:avLst/>
+          </a:prstGeom>
+          <a:solidFill>
+            <a:srgbClr val="F7A23B"/>
+          </a:solidFill>
+          <a:ln/>
+        </p:spPr>
+      </p:sp>
+      <p:sp>
+        <p:nvSpPr>
+          <p:cNvPr id="12" name="Text 9"/>
+          <p:cNvSpPr/>
+          <p:nvPr/>
+        </p:nvSpPr>
+        <p:spPr>
+          <a:xfrm>
+            <a:off x="777240" y="5458968"/>
+            <a:ext cx="10744200" cy="777240"/>
+          </a:xfrm>
+          <a:prstGeom prst="rect">
+            <a:avLst/>
+          </a:prstGeom>
+          <a:noFill/>
+          <a:ln/>
+        </p:spPr>
+        <p:txBody>
+          <a:bodyPr wrap="square" rtlCol="0" anchor="ctr"/>
+          <a:lstStyle/>
+          <a:p>
+            <a:pPr indent="0" marL="0">
+              <a:buNone/>
+            </a:pPr>
+            <a:r>
+              <a:rPr lang="en-US" sz="1500" dirty="0">
+                <a:solidFill>
+                  <a:srgbClr val="1F2937"/>
+                </a:solidFill>
+                <a:latin typeface="Arial" pitchFamily="34" charset="0"/>
+                <a:ea typeface="Arial" pitchFamily="34" charset="-122"/>
+                <a:cs typeface="Arial" pitchFamily="34" charset="-120"/>
+              </a:rPr>
+              <a:t>As seis situações da tela cobrem quase tudo. Um princípio vale para todas: você cobra só o que foi compensado no mês. Crédito parado no saldo é receita adiada e, se expirar, perdida.</a:t>
+            </a:r>
+            <a:endParaRPr lang="en-US" sz="1500" dirty="0"/>
           </a:p>
         </p:txBody>
       </p:sp>
@@ -4754,11 +5196,11 @@
         <p:spPr>
           <a:xfrm>
             <a:off x="548640" y="1325880"/>
-            <a:ext cx="5431536" cy="2331720"/>
+            <a:ext cx="5431536" cy="1874520"/>
           </a:xfrm>
           <a:prstGeom prst="roundRect">
             <a:avLst>
-              <a:gd name="adj" fmla="val 3137"/>
+              <a:gd name="adj" fmla="val 3902"/>
             </a:avLst>
           </a:prstGeom>
           <a:solidFill>
@@ -4847,7 +5289,7 @@
         <p:spPr>
           <a:xfrm>
             <a:off x="1325880" y="1435608"/>
-            <a:ext cx="4517136" cy="2112264"/>
+            <a:ext cx="4517136" cy="1655064"/>
           </a:xfrm>
           <a:prstGeom prst="rect">
             <a:avLst/>
@@ -4888,11 +5330,11 @@
         <p:spPr>
           <a:xfrm>
             <a:off x="6208776" y="1325880"/>
-            <a:ext cx="5431536" cy="2331720"/>
+            <a:ext cx="5431536" cy="1874520"/>
           </a:xfrm>
           <a:prstGeom prst="roundRect">
             <a:avLst>
-              <a:gd name="adj" fmla="val 3137"/>
+              <a:gd name="adj" fmla="val 3902"/>
             </a:avLst>
           </a:prstGeom>
           <a:solidFill>
@@ -4981,7 +5423,7 @@
         <p:spPr>
           <a:xfrm>
             <a:off x="6986016" y="1435608"/>
-            <a:ext cx="4517136" cy="2112264"/>
+            <a:ext cx="4517136" cy="1655064"/>
           </a:xfrm>
           <a:prstGeom prst="rect">
             <a:avLst/>
@@ -5021,12 +5463,12 @@
         </p:nvSpPr>
         <p:spPr>
           <a:xfrm>
-            <a:off x="548640" y="3886200"/>
-            <a:ext cx="5431536" cy="2331720"/>
+            <a:off x="548640" y="3429000"/>
+            <a:ext cx="5431536" cy="1874520"/>
           </a:xfrm>
           <a:prstGeom prst="roundRect">
             <a:avLst>
-              <a:gd name="adj" fmla="val 3137"/>
+              <a:gd name="adj" fmla="val 3902"/>
             </a:avLst>
           </a:prstGeom>
           <a:solidFill>
@@ -5055,7 +5497,7 @@
         </p:nvSpPr>
         <p:spPr>
           <a:xfrm>
-            <a:off x="731520" y="4069080"/>
+            <a:off x="731520" y="3611880"/>
             <a:ext cx="457200" cy="457200"/>
           </a:xfrm>
           <a:prstGeom prst="ellipse">
@@ -5075,7 +5517,7 @@
         </p:nvSpPr>
         <p:spPr>
           <a:xfrm>
-            <a:off x="731520" y="4069080"/>
+            <a:off x="731520" y="3611880"/>
             <a:ext cx="457200" cy="457200"/>
           </a:xfrm>
           <a:prstGeom prst="rect">
@@ -5114,8 +5556,8 @@
         </p:nvSpPr>
         <p:spPr>
           <a:xfrm>
-            <a:off x="1325880" y="3995928"/>
-            <a:ext cx="4517136" cy="2112264"/>
+            <a:off x="1325880" y="3538728"/>
+            <a:ext cx="4517136" cy="1655064"/>
           </a:xfrm>
           <a:prstGeom prst="rect">
             <a:avLst/>
@@ -5155,12 +5597,12 @@
         </p:nvSpPr>
         <p:spPr>
           <a:xfrm>
-            <a:off x="6208776" y="3886200"/>
-            <a:ext cx="5431536" cy="2331720"/>
+            <a:off x="6208776" y="3429000"/>
+            <a:ext cx="5431536" cy="1874520"/>
           </a:xfrm>
           <a:prstGeom prst="roundRect">
             <a:avLst>
-              <a:gd name="adj" fmla="val 3137"/>
+              <a:gd name="adj" fmla="val 3902"/>
             </a:avLst>
           </a:prstGeom>
           <a:solidFill>
@@ -5189,7 +5631,7 @@
         </p:nvSpPr>
         <p:spPr>
           <a:xfrm>
-            <a:off x="6391656" y="4069080"/>
+            <a:off x="6391656" y="3611880"/>
             <a:ext cx="457200" cy="457200"/>
           </a:xfrm>
           <a:prstGeom prst="ellipse">
@@ -5209,7 +5651,7 @@
         </p:nvSpPr>
         <p:spPr>
           <a:xfrm>
-            <a:off x="6391656" y="4069080"/>
+            <a:off x="6391656" y="3611880"/>
             <a:ext cx="457200" cy="457200"/>
           </a:xfrm>
           <a:prstGeom prst="rect">
@@ -5248,8 +5690,8 @@
         </p:nvSpPr>
         <p:spPr>
           <a:xfrm>
-            <a:off x="6986016" y="3995928"/>
-            <a:ext cx="4517136" cy="2112264"/>
+            <a:off x="6986016" y="3538728"/>
+            <a:ext cx="4517136" cy="1655064"/>
           </a:xfrm>
           <a:prstGeom prst="rect">
             <a:avLst/>
@@ -5278,6 +5720,92 @@
               <a:t>ouvidoria/ANEEL se necessário</a:t>
             </a:r>
             <a:endParaRPr lang="en-US" sz="1800" dirty="0"/>
+          </a:p>
+        </p:txBody>
+      </p:sp>
+      <p:sp>
+        <p:nvSpPr>
+          <p:cNvPr id="25" name="Shape 22"/>
+          <p:cNvSpPr/>
+          <p:nvPr/>
+        </p:nvSpPr>
+        <p:spPr>
+          <a:xfrm>
+            <a:off x="548640" y="5413248"/>
+            <a:ext cx="11091672" cy="868680"/>
+          </a:xfrm>
+          <a:prstGeom prst="roundRect">
+            <a:avLst>
+              <a:gd name="adj" fmla="val 8421"/>
+            </a:avLst>
+          </a:prstGeom>
+          <a:solidFill>
+            <a:srgbClr val="EEF3FA"/>
+          </a:solidFill>
+          <a:ln w="6350">
+            <a:solidFill>
+              <a:srgbClr val="D8E0EC"/>
+            </a:solidFill>
+            <a:prstDash val="solid"/>
+          </a:ln>
+        </p:spPr>
+      </p:sp>
+      <p:sp>
+        <p:nvSpPr>
+          <p:cNvPr id="26" name="Shape 23"/>
+          <p:cNvSpPr/>
+          <p:nvPr/>
+        </p:nvSpPr>
+        <p:spPr>
+          <a:xfrm>
+            <a:off x="548640" y="5413248"/>
+            <a:ext cx="91440" cy="868680"/>
+          </a:xfrm>
+          <a:prstGeom prst="rect">
+            <a:avLst/>
+          </a:prstGeom>
+          <a:solidFill>
+            <a:srgbClr val="F7A23B"/>
+          </a:solidFill>
+          <a:ln/>
+        </p:spPr>
+      </p:sp>
+      <p:sp>
+        <p:nvSpPr>
+          <p:cNvPr id="27" name="Text 24"/>
+          <p:cNvSpPr/>
+          <p:nvPr/>
+        </p:nvSpPr>
+        <p:spPr>
+          <a:xfrm>
+            <a:off x="777240" y="5458968"/>
+            <a:ext cx="10744200" cy="777240"/>
+          </a:xfrm>
+          <a:prstGeom prst="rect">
+            <a:avLst/>
+          </a:prstGeom>
+          <a:noFill/>
+          <a:ln/>
+        </p:spPr>
+        <p:txBody>
+          <a:bodyPr wrap="square" rtlCol="0" anchor="ctr"/>
+          <a:lstStyle/>
+          <a:p>
+            <a:pPr indent="0" marL="0">
+              <a:buNone/>
+            </a:pPr>
+            <a:r>
+              <a:rPr lang="en-US" sz="1500" dirty="0">
+                <a:solidFill>
+                  <a:srgbClr val="1F2937"/>
+                </a:solidFill>
+                <a:latin typeface="Arial" pitchFamily="34" charset="0"/>
+                <a:ea typeface="Arial" pitchFamily="34" charset="-122"/>
+                <a:cs typeface="Arial" pitchFamily="34" charset="-120"/>
+              </a:rPr>
+              <a:t>Quando o erro é da distribuidora, registre nas observações da fatura, guarde o protocolo e acompanhe o prazo.</a:t>
+            </a:r>
+            <a:endParaRPr lang="en-US" sz="1500" dirty="0"/>
           </a:p>
         </p:txBody>
       </p:sp>
@@ -6706,7 +7234,7 @@
         </p:nvSpPr>
         <p:spPr>
           <a:xfrm>
-            <a:off x="548640" y="2651760"/>
+            <a:off x="548640" y="2583180"/>
             <a:ext cx="2852928" cy="1463040"/>
           </a:xfrm>
           <a:prstGeom prst="chevron">
@@ -6731,7 +7259,7 @@
         </p:nvSpPr>
         <p:spPr>
           <a:xfrm>
-            <a:off x="868680" y="2651760"/>
+            <a:off x="868680" y="2583180"/>
             <a:ext cx="2331720" cy="1463040"/>
           </a:xfrm>
           <a:prstGeom prst="rect">
@@ -6772,7 +7300,7 @@
         </p:nvSpPr>
         <p:spPr>
           <a:xfrm>
-            <a:off x="3291840" y="2651760"/>
+            <a:off x="3291840" y="2583180"/>
             <a:ext cx="2852928" cy="1463040"/>
           </a:xfrm>
           <a:prstGeom prst="chevron">
@@ -6797,7 +7325,7 @@
         </p:nvSpPr>
         <p:spPr>
           <a:xfrm>
-            <a:off x="3611880" y="2651760"/>
+            <a:off x="3611880" y="2583180"/>
             <a:ext cx="2331720" cy="1463040"/>
           </a:xfrm>
           <a:prstGeom prst="rect">
@@ -6838,7 +7366,7 @@
         </p:nvSpPr>
         <p:spPr>
           <a:xfrm>
-            <a:off x="6035040" y="2651760"/>
+            <a:off x="6035040" y="2583180"/>
             <a:ext cx="2852928" cy="1463040"/>
           </a:xfrm>
           <a:prstGeom prst="chevron">
@@ -6863,7 +7391,7 @@
         </p:nvSpPr>
         <p:spPr>
           <a:xfrm>
-            <a:off x="6355080" y="2651760"/>
+            <a:off x="6355080" y="2583180"/>
             <a:ext cx="2331720" cy="1463040"/>
           </a:xfrm>
           <a:prstGeom prst="rect">
@@ -6904,7 +7432,7 @@
         </p:nvSpPr>
         <p:spPr>
           <a:xfrm>
-            <a:off x="8778240" y="2651760"/>
+            <a:off x="8778240" y="2583180"/>
             <a:ext cx="2852928" cy="1463040"/>
           </a:xfrm>
           <a:prstGeom prst="chevron">
@@ -6929,7 +7457,7 @@
         </p:nvSpPr>
         <p:spPr>
           <a:xfrm>
-            <a:off x="9098280" y="2651760"/>
+            <a:off x="9098280" y="2583180"/>
             <a:ext cx="2331720" cy="1463040"/>
           </a:xfrm>
           <a:prstGeom prst="rect">
@@ -6957,6 +7485,92 @@
                 <a:cs typeface="Arial" pitchFamily="34" charset="-120"/>
               </a:rPr>
               <a:t>revisão</a:t>
+            </a:r>
+            <a:endParaRPr lang="en-US" sz="1500" dirty="0"/>
+          </a:p>
+        </p:txBody>
+      </p:sp>
+      <p:sp>
+        <p:nvSpPr>
+          <p:cNvPr id="17" name="Shape 14"/>
+          <p:cNvSpPr/>
+          <p:nvPr/>
+        </p:nvSpPr>
+        <p:spPr>
+          <a:xfrm>
+            <a:off x="548640" y="5413248"/>
+            <a:ext cx="11091672" cy="868680"/>
+          </a:xfrm>
+          <a:prstGeom prst="roundRect">
+            <a:avLst>
+              <a:gd name="adj" fmla="val 8421"/>
+            </a:avLst>
+          </a:prstGeom>
+          <a:solidFill>
+            <a:srgbClr val="EEF3FA"/>
+          </a:solidFill>
+          <a:ln w="6350">
+            <a:solidFill>
+              <a:srgbClr val="D8E0EC"/>
+            </a:solidFill>
+            <a:prstDash val="solid"/>
+          </a:ln>
+        </p:spPr>
+      </p:sp>
+      <p:sp>
+        <p:nvSpPr>
+          <p:cNvPr id="18" name="Shape 15"/>
+          <p:cNvSpPr/>
+          <p:nvPr/>
+        </p:nvSpPr>
+        <p:spPr>
+          <a:xfrm>
+            <a:off x="548640" y="5413248"/>
+            <a:ext cx="91440" cy="868680"/>
+          </a:xfrm>
+          <a:prstGeom prst="rect">
+            <a:avLst/>
+          </a:prstGeom>
+          <a:solidFill>
+            <a:srgbClr val="F7A23B"/>
+          </a:solidFill>
+          <a:ln/>
+        </p:spPr>
+      </p:sp>
+      <p:sp>
+        <p:nvSpPr>
+          <p:cNvPr id="19" name="Text 16"/>
+          <p:cNvSpPr/>
+          <p:nvPr/>
+        </p:nvSpPr>
+        <p:spPr>
+          <a:xfrm>
+            <a:off x="777240" y="5458968"/>
+            <a:ext cx="10744200" cy="777240"/>
+          </a:xfrm>
+          <a:prstGeom prst="rect">
+            <a:avLst/>
+          </a:prstGeom>
+          <a:noFill/>
+          <a:ln/>
+        </p:spPr>
+        <p:txBody>
+          <a:bodyPr wrap="square" rtlCol="0" anchor="ctr"/>
+          <a:lstStyle/>
+          <a:p>
+            <a:pPr indent="0" marL="0">
+              <a:buNone/>
+            </a:pPr>
+            <a:r>
+              <a:rPr lang="en-US" sz="1500" dirty="0">
+                <a:solidFill>
+                  <a:srgbClr val="1F2937"/>
+                </a:solidFill>
+                <a:latin typeface="Arial" pitchFamily="34" charset="0"/>
+                <a:ea typeface="Arial" pitchFamily="34" charset="-122"/>
+                <a:cs typeface="Arial" pitchFamily="34" charset="-120"/>
+              </a:rPr>
+              <a:t>Você cadastra na distribuidora um e-mail da sua empresa, um por cliente. De hora em hora, a plataforma lê as caixas, desbloqueia o PDF, extrai os dados e coloca a fatura na fila de revisão.</a:t>
             </a:r>
             <a:endParaRPr lang="en-US" sz="1500" dirty="0"/>
           </a:p>
@@ -7278,11 +7892,11 @@
         <p:spPr>
           <a:xfrm>
             <a:off x="548640" y="1325880"/>
-            <a:ext cx="5431536" cy="2331720"/>
+            <a:ext cx="5431536" cy="1874520"/>
           </a:xfrm>
           <a:prstGeom prst="roundRect">
             <a:avLst>
-              <a:gd name="adj" fmla="val 3137"/>
+              <a:gd name="adj" fmla="val 3902"/>
             </a:avLst>
           </a:prstGeom>
           <a:solidFill>
@@ -7371,7 +7985,7 @@
         <p:spPr>
           <a:xfrm>
             <a:off x="1325880" y="1435608"/>
-            <a:ext cx="4517136" cy="2112264"/>
+            <a:ext cx="4517136" cy="1655064"/>
           </a:xfrm>
           <a:prstGeom prst="rect">
             <a:avLst/>
@@ -7412,11 +8026,11 @@
         <p:spPr>
           <a:xfrm>
             <a:off x="6208776" y="1325880"/>
-            <a:ext cx="5431536" cy="2331720"/>
+            <a:ext cx="5431536" cy="1874520"/>
           </a:xfrm>
           <a:prstGeom prst="roundRect">
             <a:avLst>
-              <a:gd name="adj" fmla="val 3137"/>
+              <a:gd name="adj" fmla="val 3902"/>
             </a:avLst>
           </a:prstGeom>
           <a:solidFill>
@@ -7505,7 +8119,7 @@
         <p:spPr>
           <a:xfrm>
             <a:off x="6986016" y="1435608"/>
-            <a:ext cx="4517136" cy="2112264"/>
+            <a:ext cx="4517136" cy="1655064"/>
           </a:xfrm>
           <a:prstGeom prst="rect">
             <a:avLst/>
@@ -7545,12 +8159,12 @@
         </p:nvSpPr>
         <p:spPr>
           <a:xfrm>
-            <a:off x="548640" y="3886200"/>
-            <a:ext cx="5431536" cy="2331720"/>
+            <a:off x="548640" y="3429000"/>
+            <a:ext cx="5431536" cy="1874520"/>
           </a:xfrm>
           <a:prstGeom prst="roundRect">
             <a:avLst>
-              <a:gd name="adj" fmla="val 3137"/>
+              <a:gd name="adj" fmla="val 3902"/>
             </a:avLst>
           </a:prstGeom>
           <a:solidFill>
@@ -7579,7 +8193,7 @@
         </p:nvSpPr>
         <p:spPr>
           <a:xfrm>
-            <a:off x="731520" y="4069080"/>
+            <a:off x="731520" y="3611880"/>
             <a:ext cx="457200" cy="457200"/>
           </a:xfrm>
           <a:prstGeom prst="ellipse">
@@ -7599,7 +8213,7 @@
         </p:nvSpPr>
         <p:spPr>
           <a:xfrm>
-            <a:off x="731520" y="4069080"/>
+            <a:off x="731520" y="3611880"/>
             <a:ext cx="457200" cy="457200"/>
           </a:xfrm>
           <a:prstGeom prst="rect">
@@ -7638,8 +8252,8 @@
         </p:nvSpPr>
         <p:spPr>
           <a:xfrm>
-            <a:off x="1325880" y="3995928"/>
-            <a:ext cx="4517136" cy="2112264"/>
+            <a:off x="1325880" y="3538728"/>
+            <a:ext cx="4517136" cy="1655064"/>
           </a:xfrm>
           <a:prstGeom prst="rect">
             <a:avLst/>
@@ -7679,12 +8293,12 @@
         </p:nvSpPr>
         <p:spPr>
           <a:xfrm>
-            <a:off x="6208776" y="3886200"/>
-            <a:ext cx="5431536" cy="2331720"/>
+            <a:off x="6208776" y="3429000"/>
+            <a:ext cx="5431536" cy="1874520"/>
           </a:xfrm>
           <a:prstGeom prst="roundRect">
             <a:avLst>
-              <a:gd name="adj" fmla="val 3137"/>
+              <a:gd name="adj" fmla="val 3902"/>
             </a:avLst>
           </a:prstGeom>
           <a:solidFill>
@@ -7713,7 +8327,7 @@
         </p:nvSpPr>
         <p:spPr>
           <a:xfrm>
-            <a:off x="6391656" y="4069080"/>
+            <a:off x="6391656" y="3611880"/>
             <a:ext cx="457200" cy="457200"/>
           </a:xfrm>
           <a:prstGeom prst="ellipse">
@@ -7733,7 +8347,7 @@
         </p:nvSpPr>
         <p:spPr>
           <a:xfrm>
-            <a:off x="6391656" y="4069080"/>
+            <a:off x="6391656" y="3611880"/>
             <a:ext cx="457200" cy="457200"/>
           </a:xfrm>
           <a:prstGeom prst="rect">
@@ -7772,8 +8386,8 @@
         </p:nvSpPr>
         <p:spPr>
           <a:xfrm>
-            <a:off x="6986016" y="3995928"/>
-            <a:ext cx="4517136" cy="2112264"/>
+            <a:off x="6986016" y="3538728"/>
+            <a:ext cx="4517136" cy="1655064"/>
           </a:xfrm>
           <a:prstGeom prst="rect">
             <a:avLst/>
@@ -7802,6 +8416,92 @@
               <a:t>layout não reconhecido</a:t>
             </a:r>
             <a:endParaRPr lang="en-US" sz="1800" dirty="0"/>
+          </a:p>
+        </p:txBody>
+      </p:sp>
+      <p:sp>
+        <p:nvSpPr>
+          <p:cNvPr id="25" name="Shape 22"/>
+          <p:cNvSpPr/>
+          <p:nvPr/>
+        </p:nvSpPr>
+        <p:spPr>
+          <a:xfrm>
+            <a:off x="548640" y="5413248"/>
+            <a:ext cx="11091672" cy="868680"/>
+          </a:xfrm>
+          <a:prstGeom prst="roundRect">
+            <a:avLst>
+              <a:gd name="adj" fmla="val 8421"/>
+            </a:avLst>
+          </a:prstGeom>
+          <a:solidFill>
+            <a:srgbClr val="EEF3FA"/>
+          </a:solidFill>
+          <a:ln w="6350">
+            <a:solidFill>
+              <a:srgbClr val="D8E0EC"/>
+            </a:solidFill>
+            <a:prstDash val="solid"/>
+          </a:ln>
+        </p:spPr>
+      </p:sp>
+      <p:sp>
+        <p:nvSpPr>
+          <p:cNvPr id="26" name="Shape 23"/>
+          <p:cNvSpPr/>
+          <p:nvPr/>
+        </p:nvSpPr>
+        <p:spPr>
+          <a:xfrm>
+            <a:off x="548640" y="5413248"/>
+            <a:ext cx="91440" cy="868680"/>
+          </a:xfrm>
+          <a:prstGeom prst="rect">
+            <a:avLst/>
+          </a:prstGeom>
+          <a:solidFill>
+            <a:srgbClr val="F7A23B"/>
+          </a:solidFill>
+          <a:ln/>
+        </p:spPr>
+      </p:sp>
+      <p:sp>
+        <p:nvSpPr>
+          <p:cNvPr id="27" name="Text 24"/>
+          <p:cNvSpPr/>
+          <p:nvPr/>
+        </p:nvSpPr>
+        <p:spPr>
+          <a:xfrm>
+            <a:off x="777240" y="5458968"/>
+            <a:ext cx="10744200" cy="777240"/>
+          </a:xfrm>
+          <a:prstGeom prst="rect">
+            <a:avLst/>
+          </a:prstGeom>
+          <a:noFill/>
+          <a:ln/>
+        </p:spPr>
+        <p:txBody>
+          <a:bodyPr wrap="square" rtlCol="0" anchor="ctr"/>
+          <a:lstStyle/>
+          <a:p>
+            <a:pPr indent="0" marL="0">
+              <a:buNone/>
+            </a:pPr>
+            <a:r>
+              <a:rPr lang="en-US" sz="1500" dirty="0">
+                <a:solidFill>
+                  <a:srgbClr val="1F2937"/>
+                </a:solidFill>
+                <a:latin typeface="Arial" pitchFamily="34" charset="0"/>
+                <a:ea typeface="Arial" pitchFamily="34" charset="-122"/>
+                <a:cs typeface="Arial" pitchFamily="34" charset="-120"/>
+              </a:rPr>
+              <a:t>O upload manual continua útil nos casos da tela. E, quando algo falha na importação, um alerta operacional avisa e se resolve sozinho quando volta a funcionar.</a:t>
+            </a:r>
+            <a:endParaRPr lang="en-US" sz="1500" dirty="0"/>
           </a:p>
         </p:txBody>
       </p:sp>
@@ -10201,7 +10901,7 @@
         <p:spPr>
           <a:xfrm>
             <a:off x="548640" y="1325880"/>
-            <a:ext cx="5486400" cy="4937760"/>
+            <a:ext cx="5486400" cy="3977640"/>
           </a:xfrm>
           <a:prstGeom prst="rect">
             <a:avLst/>
@@ -10309,7 +11009,7 @@
         <p:spPr>
           <a:xfrm>
             <a:off x="6263640" y="1325880"/>
-            <a:ext cx="5486400" cy="4937760"/>
+            <a:ext cx="5486400" cy="3977640"/>
           </a:xfrm>
           <a:prstGeom prst="rect">
             <a:avLst/>
@@ -10405,6 +11105,92 @@
               <a:t>rejeitada</a:t>
             </a:r>
             <a:endParaRPr lang="en-US" sz="1800" dirty="0"/>
+          </a:p>
+        </p:txBody>
+      </p:sp>
+      <p:sp>
+        <p:nvSpPr>
+          <p:cNvPr id="11" name="Shape 8"/>
+          <p:cNvSpPr/>
+          <p:nvPr/>
+        </p:nvSpPr>
+        <p:spPr>
+          <a:xfrm>
+            <a:off x="548640" y="5413248"/>
+            <a:ext cx="11091672" cy="868680"/>
+          </a:xfrm>
+          <a:prstGeom prst="roundRect">
+            <a:avLst>
+              <a:gd name="adj" fmla="val 8421"/>
+            </a:avLst>
+          </a:prstGeom>
+          <a:solidFill>
+            <a:srgbClr val="EEF3FA"/>
+          </a:solidFill>
+          <a:ln w="6350">
+            <a:solidFill>
+              <a:srgbClr val="D8E0EC"/>
+            </a:solidFill>
+            <a:prstDash val="solid"/>
+          </a:ln>
+        </p:spPr>
+      </p:sp>
+      <p:sp>
+        <p:nvSpPr>
+          <p:cNvPr id="12" name="Shape 9"/>
+          <p:cNvSpPr/>
+          <p:nvPr/>
+        </p:nvSpPr>
+        <p:spPr>
+          <a:xfrm>
+            <a:off x="548640" y="5413248"/>
+            <a:ext cx="91440" cy="868680"/>
+          </a:xfrm>
+          <a:prstGeom prst="rect">
+            <a:avLst/>
+          </a:prstGeom>
+          <a:solidFill>
+            <a:srgbClr val="F7A23B"/>
+          </a:solidFill>
+          <a:ln/>
+        </p:spPr>
+      </p:sp>
+      <p:sp>
+        <p:nvSpPr>
+          <p:cNvPr id="13" name="Text 10"/>
+          <p:cNvSpPr/>
+          <p:nvPr/>
+        </p:nvSpPr>
+        <p:spPr>
+          <a:xfrm>
+            <a:off x="777240" y="5458968"/>
+            <a:ext cx="10744200" cy="777240"/>
+          </a:xfrm>
+          <a:prstGeom prst="rect">
+            <a:avLst/>
+          </a:prstGeom>
+          <a:noFill/>
+          <a:ln/>
+        </p:spPr>
+        <p:txBody>
+          <a:bodyPr wrap="square" rtlCol="0" anchor="ctr"/>
+          <a:lstStyle/>
+          <a:p>
+            <a:pPr indent="0" marL="0">
+              <a:buNone/>
+            </a:pPr>
+            <a:r>
+              <a:rPr lang="en-US" sz="1500" dirty="0">
+                <a:solidFill>
+                  <a:srgbClr val="1F2937"/>
+                </a:solidFill>
+                <a:latin typeface="Arial" pitchFamily="34" charset="0"/>
+                <a:ea typeface="Arial" pitchFamily="34" charset="-122"/>
+                <a:cs typeface="Arial" pitchFamily="34" charset="-120"/>
+              </a:rPr>
+              <a:t>Cada fatura tem dois status: o da leitura automática e o da revisão humana. Só a aprovada gera cobrança.</a:t>
+            </a:r>
+            <a:endParaRPr lang="en-US" sz="1500" dirty="0"/>
           </a:p>
         </p:txBody>
       </p:sp>
@@ -11146,11 +11932,11 @@
         <p:spPr>
           <a:xfrm>
             <a:off x="548640" y="1325880"/>
-            <a:ext cx="3544824" cy="2331720"/>
+            <a:ext cx="3544824" cy="1874520"/>
           </a:xfrm>
           <a:prstGeom prst="roundRect">
             <a:avLst>
-              <a:gd name="adj" fmla="val 3137"/>
+              <a:gd name="adj" fmla="val 3902"/>
             </a:avLst>
           </a:prstGeom>
           <a:solidFill>
@@ -11239,7 +12025,7 @@
         <p:spPr>
           <a:xfrm>
             <a:off x="1325880" y="1435608"/>
-            <a:ext cx="2630424" cy="2112264"/>
+            <a:ext cx="2630424" cy="1655064"/>
           </a:xfrm>
           <a:prstGeom prst="rect">
             <a:avLst/>
@@ -11280,11 +12066,11 @@
         <p:spPr>
           <a:xfrm>
             <a:off x="4322064" y="1325880"/>
-            <a:ext cx="3544824" cy="2331720"/>
+            <a:ext cx="3544824" cy="1874520"/>
           </a:xfrm>
           <a:prstGeom prst="roundRect">
             <a:avLst>
-              <a:gd name="adj" fmla="val 3137"/>
+              <a:gd name="adj" fmla="val 3902"/>
             </a:avLst>
           </a:prstGeom>
           <a:solidFill>
@@ -11373,7 +12159,7 @@
         <p:spPr>
           <a:xfrm>
             <a:off x="5099304" y="1435608"/>
-            <a:ext cx="2630424" cy="2112264"/>
+            <a:ext cx="2630424" cy="1655064"/>
           </a:xfrm>
           <a:prstGeom prst="rect">
             <a:avLst/>
@@ -11414,11 +12200,11 @@
         <p:spPr>
           <a:xfrm>
             <a:off x="8095488" y="1325880"/>
-            <a:ext cx="3544824" cy="2331720"/>
+            <a:ext cx="3544824" cy="1874520"/>
           </a:xfrm>
           <a:prstGeom prst="roundRect">
             <a:avLst>
-              <a:gd name="adj" fmla="val 3137"/>
+              <a:gd name="adj" fmla="val 3902"/>
             </a:avLst>
           </a:prstGeom>
           <a:solidFill>
@@ -11507,7 +12293,7 @@
         <p:spPr>
           <a:xfrm>
             <a:off x="8872728" y="1435608"/>
-            <a:ext cx="2630424" cy="2112264"/>
+            <a:ext cx="2630424" cy="1655064"/>
           </a:xfrm>
           <a:prstGeom prst="rect">
             <a:avLst/>
@@ -11547,12 +12333,12 @@
         </p:nvSpPr>
         <p:spPr>
           <a:xfrm>
-            <a:off x="548640" y="3886200"/>
-            <a:ext cx="3544824" cy="2331720"/>
+            <a:off x="548640" y="3429000"/>
+            <a:ext cx="3544824" cy="1874520"/>
           </a:xfrm>
           <a:prstGeom prst="roundRect">
             <a:avLst>
-              <a:gd name="adj" fmla="val 3137"/>
+              <a:gd name="adj" fmla="val 3902"/>
             </a:avLst>
           </a:prstGeom>
           <a:solidFill>
@@ -11581,7 +12367,7 @@
         </p:nvSpPr>
         <p:spPr>
           <a:xfrm>
-            <a:off x="731520" y="4069080"/>
+            <a:off x="731520" y="3611880"/>
             <a:ext cx="457200" cy="457200"/>
           </a:xfrm>
           <a:prstGeom prst="ellipse">
@@ -11601,7 +12387,7 @@
         </p:nvSpPr>
         <p:spPr>
           <a:xfrm>
-            <a:off x="731520" y="4069080"/>
+            <a:off x="731520" y="3611880"/>
             <a:ext cx="457200" cy="457200"/>
           </a:xfrm>
           <a:prstGeom prst="rect">
@@ -11640,8 +12426,8 @@
         </p:nvSpPr>
         <p:spPr>
           <a:xfrm>
-            <a:off x="1325880" y="3995928"/>
-            <a:ext cx="2630424" cy="2112264"/>
+            <a:off x="1325880" y="3538728"/>
+            <a:ext cx="2630424" cy="1655064"/>
           </a:xfrm>
           <a:prstGeom prst="rect">
             <a:avLst/>
@@ -11681,12 +12467,12 @@
         </p:nvSpPr>
         <p:spPr>
           <a:xfrm>
-            <a:off x="4322064" y="3886200"/>
-            <a:ext cx="3544824" cy="2331720"/>
+            <a:off x="4322064" y="3429000"/>
+            <a:ext cx="3544824" cy="1874520"/>
           </a:xfrm>
           <a:prstGeom prst="roundRect">
             <a:avLst>
-              <a:gd name="adj" fmla="val 3137"/>
+              <a:gd name="adj" fmla="val 3902"/>
             </a:avLst>
           </a:prstGeom>
           <a:solidFill>
@@ -11715,7 +12501,7 @@
         </p:nvSpPr>
         <p:spPr>
           <a:xfrm>
-            <a:off x="4504944" y="4069080"/>
+            <a:off x="4504944" y="3611880"/>
             <a:ext cx="457200" cy="457200"/>
           </a:xfrm>
           <a:prstGeom prst="ellipse">
@@ -11735,7 +12521,7 @@
         </p:nvSpPr>
         <p:spPr>
           <a:xfrm>
-            <a:off x="4504944" y="4069080"/>
+            <a:off x="4504944" y="3611880"/>
             <a:ext cx="457200" cy="457200"/>
           </a:xfrm>
           <a:prstGeom prst="rect">
@@ -11774,8 +12560,8 @@
         </p:nvSpPr>
         <p:spPr>
           <a:xfrm>
-            <a:off x="5099304" y="3995928"/>
-            <a:ext cx="2630424" cy="2112264"/>
+            <a:off x="5099304" y="3538728"/>
+            <a:ext cx="2630424" cy="1655064"/>
           </a:xfrm>
           <a:prstGeom prst="rect">
             <a:avLst/>
@@ -11815,12 +12601,12 @@
         </p:nvSpPr>
         <p:spPr>
           <a:xfrm>
-            <a:off x="8095488" y="3886200"/>
-            <a:ext cx="3544824" cy="2331720"/>
+            <a:off x="8095488" y="3429000"/>
+            <a:ext cx="3544824" cy="1874520"/>
           </a:xfrm>
           <a:prstGeom prst="roundRect">
             <a:avLst>
-              <a:gd name="adj" fmla="val 3137"/>
+              <a:gd name="adj" fmla="val 3902"/>
             </a:avLst>
           </a:prstGeom>
           <a:solidFill>
@@ -11849,7 +12635,7 @@
         </p:nvSpPr>
         <p:spPr>
           <a:xfrm>
-            <a:off x="8278368" y="4069080"/>
+            <a:off x="8278368" y="3611880"/>
             <a:ext cx="457200" cy="457200"/>
           </a:xfrm>
           <a:prstGeom prst="ellipse">
@@ -11869,7 +12655,7 @@
         </p:nvSpPr>
         <p:spPr>
           <a:xfrm>
-            <a:off x="8278368" y="4069080"/>
+            <a:off x="8278368" y="3611880"/>
             <a:ext cx="457200" cy="457200"/>
           </a:xfrm>
           <a:prstGeom prst="rect">
@@ -11908,8 +12694,8 @@
         </p:nvSpPr>
         <p:spPr>
           <a:xfrm>
-            <a:off x="8872728" y="3995928"/>
-            <a:ext cx="2630424" cy="2112264"/>
+            <a:off x="8872728" y="3538728"/>
+            <a:ext cx="2630424" cy="1655064"/>
           </a:xfrm>
           <a:prstGeom prst="rect">
             <a:avLst/>
@@ -11938,6 +12724,92 @@
               <a:t>Usina vinculada e pendências zeradas</a:t>
             </a:r>
             <a:endParaRPr lang="en-US" sz="1800" dirty="0"/>
+          </a:p>
+        </p:txBody>
+      </p:sp>
+      <p:sp>
+        <p:nvSpPr>
+          <p:cNvPr id="33" name="Shape 30"/>
+          <p:cNvSpPr/>
+          <p:nvPr/>
+        </p:nvSpPr>
+        <p:spPr>
+          <a:xfrm>
+            <a:off x="548640" y="5413248"/>
+            <a:ext cx="11091672" cy="868680"/>
+          </a:xfrm>
+          <a:prstGeom prst="roundRect">
+            <a:avLst>
+              <a:gd name="adj" fmla="val 8421"/>
+            </a:avLst>
+          </a:prstGeom>
+          <a:solidFill>
+            <a:srgbClr val="EEF3FA"/>
+          </a:solidFill>
+          <a:ln w="6350">
+            <a:solidFill>
+              <a:srgbClr val="D8E0EC"/>
+            </a:solidFill>
+            <a:prstDash val="solid"/>
+          </a:ln>
+        </p:spPr>
+      </p:sp>
+      <p:sp>
+        <p:nvSpPr>
+          <p:cNvPr id="34" name="Shape 31"/>
+          <p:cNvSpPr/>
+          <p:nvPr/>
+        </p:nvSpPr>
+        <p:spPr>
+          <a:xfrm>
+            <a:off x="548640" y="5413248"/>
+            <a:ext cx="91440" cy="868680"/>
+          </a:xfrm>
+          <a:prstGeom prst="rect">
+            <a:avLst/>
+          </a:prstGeom>
+          <a:solidFill>
+            <a:srgbClr val="F7A23B"/>
+          </a:solidFill>
+          <a:ln/>
+        </p:spPr>
+      </p:sp>
+      <p:sp>
+        <p:nvSpPr>
+          <p:cNvPr id="35" name="Text 32"/>
+          <p:cNvSpPr/>
+          <p:nvPr/>
+        </p:nvSpPr>
+        <p:spPr>
+          <a:xfrm>
+            <a:off x="777240" y="5458968"/>
+            <a:ext cx="10744200" cy="777240"/>
+          </a:xfrm>
+          <a:prstGeom prst="rect">
+            <a:avLst/>
+          </a:prstGeom>
+          <a:noFill/>
+          <a:ln/>
+        </p:spPr>
+        <p:txBody>
+          <a:bodyPr wrap="square" rtlCol="0" anchor="ctr"/>
+          <a:lstStyle/>
+          <a:p>
+            <a:pPr indent="0" marL="0">
+              <a:buNone/>
+            </a:pPr>
+            <a:r>
+              <a:rPr lang="en-US" sz="1500" dirty="0">
+                <a:solidFill>
+                  <a:srgbClr val="1F2937"/>
+                </a:solidFill>
+                <a:latin typeface="Arial" pitchFamily="34" charset="0"/>
+                <a:ea typeface="Arial" pitchFamily="34" charset="-122"/>
+                <a:cs typeface="Arial" pitchFamily="34" charset="-120"/>
+              </a:rPr>
+              <a:t>Siga sempre os seis passos da tela. Leva menos de dois minutos por fatura e evita a maioria dos erros de cobrança.</a:t>
+            </a:r>
+            <a:endParaRPr lang="en-US" sz="1500" dirty="0"/>
           </a:p>
         </p:txBody>
       </p:sp>
@@ -12257,7 +13129,7 @@
         <p:spPr>
           <a:xfrm>
             <a:off x="548640" y="1325880"/>
-            <a:ext cx="5486400" cy="4937760"/>
+            <a:ext cx="5486400" cy="3977640"/>
           </a:xfrm>
           <a:prstGeom prst="rect">
             <a:avLst/>
@@ -12365,7 +13237,7 @@
         <p:spPr>
           <a:xfrm>
             <a:off x="6263640" y="1325880"/>
-            <a:ext cx="5486400" cy="4937760"/>
+            <a:ext cx="5486400" cy="3977640"/>
           </a:xfrm>
           <a:prstGeom prst="rect">
             <a:avLst/>
@@ -12440,6 +13312,92 @@
               <a:t>Usina da fatura ≠ vínculo ativo da UC (aviso)</a:t>
             </a:r>
             <a:endParaRPr lang="en-US" sz="1800" dirty="0"/>
+          </a:p>
+        </p:txBody>
+      </p:sp>
+      <p:sp>
+        <p:nvSpPr>
+          <p:cNvPr id="11" name="Shape 8"/>
+          <p:cNvSpPr/>
+          <p:nvPr/>
+        </p:nvSpPr>
+        <p:spPr>
+          <a:xfrm>
+            <a:off x="548640" y="5413248"/>
+            <a:ext cx="11091672" cy="868680"/>
+          </a:xfrm>
+          <a:prstGeom prst="roundRect">
+            <a:avLst>
+              <a:gd name="adj" fmla="val 8421"/>
+            </a:avLst>
+          </a:prstGeom>
+          <a:solidFill>
+            <a:srgbClr val="EEF3FA"/>
+          </a:solidFill>
+          <a:ln w="6350">
+            <a:solidFill>
+              <a:srgbClr val="D8E0EC"/>
+            </a:solidFill>
+            <a:prstDash val="solid"/>
+          </a:ln>
+        </p:spPr>
+      </p:sp>
+      <p:sp>
+        <p:nvSpPr>
+          <p:cNvPr id="12" name="Shape 9"/>
+          <p:cNvSpPr/>
+          <p:nvPr/>
+        </p:nvSpPr>
+        <p:spPr>
+          <a:xfrm>
+            <a:off x="548640" y="5413248"/>
+            <a:ext cx="91440" cy="868680"/>
+          </a:xfrm>
+          <a:prstGeom prst="rect">
+            <a:avLst/>
+          </a:prstGeom>
+          <a:solidFill>
+            <a:srgbClr val="F7A23B"/>
+          </a:solidFill>
+          <a:ln/>
+        </p:spPr>
+      </p:sp>
+      <p:sp>
+        <p:nvSpPr>
+          <p:cNvPr id="13" name="Text 10"/>
+          <p:cNvSpPr/>
+          <p:nvPr/>
+        </p:nvSpPr>
+        <p:spPr>
+          <a:xfrm>
+            <a:off x="777240" y="5458968"/>
+            <a:ext cx="10744200" cy="777240"/>
+          </a:xfrm>
+          <a:prstGeom prst="rect">
+            <a:avLst/>
+          </a:prstGeom>
+          <a:noFill/>
+          <a:ln/>
+        </p:spPr>
+        <p:txBody>
+          <a:bodyPr wrap="square" rtlCol="0" anchor="ctr"/>
+          <a:lstStyle/>
+          <a:p>
+            <a:pPr indent="0" marL="0">
+              <a:buNone/>
+            </a:pPr>
+            <a:r>
+              <a:rPr lang="en-US" sz="1500" dirty="0">
+                <a:solidFill>
+                  <a:srgbClr val="1F2937"/>
+                </a:solidFill>
+                <a:latin typeface="Arial" pitchFamily="34" charset="0"/>
+                <a:ea typeface="Arial" pitchFamily="34" charset="-122"/>
+                <a:cs typeface="Arial" pitchFamily="34" charset="-120"/>
+              </a:rPr>
+              <a:t>As pendências automáticas ajudam. As de erro impedem uma aprovação segura; as de aviso pedem atenção.</a:t>
+            </a:r>
+            <a:endParaRPr lang="en-US" sz="1500" dirty="0"/>
           </a:p>
         </p:txBody>
       </p:sp>
@@ -12759,11 +13717,11 @@
         <p:spPr>
           <a:xfrm>
             <a:off x="548640" y="1325880"/>
-            <a:ext cx="5431536" cy="2331720"/>
+            <a:ext cx="5431536" cy="1874520"/>
           </a:xfrm>
           <a:prstGeom prst="roundRect">
             <a:avLst>
-              <a:gd name="adj" fmla="val 3137"/>
+              <a:gd name="adj" fmla="val 3902"/>
             </a:avLst>
           </a:prstGeom>
           <a:solidFill>
@@ -12852,7 +13810,7 @@
         <p:spPr>
           <a:xfrm>
             <a:off x="1325880" y="1435608"/>
-            <a:ext cx="4517136" cy="2112264"/>
+            <a:ext cx="4517136" cy="1655064"/>
           </a:xfrm>
           <a:prstGeom prst="rect">
             <a:avLst/>
@@ -12893,11 +13851,11 @@
         <p:spPr>
           <a:xfrm>
             <a:off x="6208776" y="1325880"/>
-            <a:ext cx="5431536" cy="2331720"/>
+            <a:ext cx="5431536" cy="1874520"/>
           </a:xfrm>
           <a:prstGeom prst="roundRect">
             <a:avLst>
-              <a:gd name="adj" fmla="val 3137"/>
+              <a:gd name="adj" fmla="val 3902"/>
             </a:avLst>
           </a:prstGeom>
           <a:solidFill>
@@ -12986,7 +13944,7 @@
         <p:spPr>
           <a:xfrm>
             <a:off x="6986016" y="1435608"/>
-            <a:ext cx="4517136" cy="2112264"/>
+            <a:ext cx="4517136" cy="1655064"/>
           </a:xfrm>
           <a:prstGeom prst="rect">
             <a:avLst/>
@@ -13026,12 +13984,12 @@
         </p:nvSpPr>
         <p:spPr>
           <a:xfrm>
-            <a:off x="548640" y="3886200"/>
-            <a:ext cx="5431536" cy="2331720"/>
+            <a:off x="548640" y="3429000"/>
+            <a:ext cx="5431536" cy="1874520"/>
           </a:xfrm>
           <a:prstGeom prst="roundRect">
             <a:avLst>
-              <a:gd name="adj" fmla="val 3137"/>
+              <a:gd name="adj" fmla="val 3902"/>
             </a:avLst>
           </a:prstGeom>
           <a:solidFill>
@@ -13060,7 +14018,7 @@
         </p:nvSpPr>
         <p:spPr>
           <a:xfrm>
-            <a:off x="731520" y="4069080"/>
+            <a:off x="731520" y="3611880"/>
             <a:ext cx="457200" cy="457200"/>
           </a:xfrm>
           <a:prstGeom prst="ellipse">
@@ -13080,7 +14038,7 @@
         </p:nvSpPr>
         <p:spPr>
           <a:xfrm>
-            <a:off x="731520" y="4069080"/>
+            <a:off x="731520" y="3611880"/>
             <a:ext cx="457200" cy="457200"/>
           </a:xfrm>
           <a:prstGeom prst="rect">
@@ -13119,8 +14077,8 @@
         </p:nvSpPr>
         <p:spPr>
           <a:xfrm>
-            <a:off x="1325880" y="3995928"/>
-            <a:ext cx="4517136" cy="2112264"/>
+            <a:off x="1325880" y="3538728"/>
+            <a:ext cx="4517136" cy="1655064"/>
           </a:xfrm>
           <a:prstGeom prst="rect">
             <a:avLst/>
@@ -13160,12 +14118,12 @@
         </p:nvSpPr>
         <p:spPr>
           <a:xfrm>
-            <a:off x="6208776" y="3886200"/>
-            <a:ext cx="5431536" cy="2331720"/>
+            <a:off x="6208776" y="3429000"/>
+            <a:ext cx="5431536" cy="1874520"/>
           </a:xfrm>
           <a:prstGeom prst="roundRect">
             <a:avLst>
-              <a:gd name="adj" fmla="val 3137"/>
+              <a:gd name="adj" fmla="val 3902"/>
             </a:avLst>
           </a:prstGeom>
           <a:solidFill>
@@ -13194,7 +14152,7 @@
         </p:nvSpPr>
         <p:spPr>
           <a:xfrm>
-            <a:off x="6391656" y="4069080"/>
+            <a:off x="6391656" y="3611880"/>
             <a:ext cx="457200" cy="457200"/>
           </a:xfrm>
           <a:prstGeom prst="ellipse">
@@ -13214,7 +14172,7 @@
         </p:nvSpPr>
         <p:spPr>
           <a:xfrm>
-            <a:off x="6391656" y="4069080"/>
+            <a:off x="6391656" y="3611880"/>
             <a:ext cx="457200" cy="457200"/>
           </a:xfrm>
           <a:prstGeom prst="rect">
@@ -13253,8 +14211,8 @@
         </p:nvSpPr>
         <p:spPr>
           <a:xfrm>
-            <a:off x="6986016" y="3995928"/>
-            <a:ext cx="4517136" cy="2112264"/>
+            <a:off x="6986016" y="3538728"/>
+            <a:ext cx="4517136" cy="1655064"/>
           </a:xfrm>
           <a:prstGeom prst="rect">
             <a:avLst/>
@@ -13283,6 +14241,92 @@
               <a:t>dupla checagem acima de um valor</a:t>
             </a:r>
             <a:endParaRPr lang="en-US" sz="1800" dirty="0"/>
+          </a:p>
+        </p:txBody>
+      </p:sp>
+      <p:sp>
+        <p:nvSpPr>
+          <p:cNvPr id="25" name="Shape 22"/>
+          <p:cNvSpPr/>
+          <p:nvPr/>
+        </p:nvSpPr>
+        <p:spPr>
+          <a:xfrm>
+            <a:off x="548640" y="5413248"/>
+            <a:ext cx="11091672" cy="868680"/>
+          </a:xfrm>
+          <a:prstGeom prst="roundRect">
+            <a:avLst>
+              <a:gd name="adj" fmla="val 8421"/>
+            </a:avLst>
+          </a:prstGeom>
+          <a:solidFill>
+            <a:srgbClr val="EEF3FA"/>
+          </a:solidFill>
+          <a:ln w="6350">
+            <a:solidFill>
+              <a:srgbClr val="D8E0EC"/>
+            </a:solidFill>
+            <a:prstDash val="solid"/>
+          </a:ln>
+        </p:spPr>
+      </p:sp>
+      <p:sp>
+        <p:nvSpPr>
+          <p:cNvPr id="26" name="Shape 23"/>
+          <p:cNvSpPr/>
+          <p:nvPr/>
+        </p:nvSpPr>
+        <p:spPr>
+          <a:xfrm>
+            <a:off x="548640" y="5413248"/>
+            <a:ext cx="91440" cy="868680"/>
+          </a:xfrm>
+          <a:prstGeom prst="rect">
+            <a:avLst/>
+          </a:prstGeom>
+          <a:solidFill>
+            <a:srgbClr val="F7A23B"/>
+          </a:solidFill>
+          <a:ln/>
+        </p:spPr>
+      </p:sp>
+      <p:sp>
+        <p:nvSpPr>
+          <p:cNvPr id="27" name="Text 24"/>
+          <p:cNvSpPr/>
+          <p:nvPr/>
+        </p:nvSpPr>
+        <p:spPr>
+          <a:xfrm>
+            <a:off x="777240" y="5458968"/>
+            <a:ext cx="10744200" cy="777240"/>
+          </a:xfrm>
+          <a:prstGeom prst="rect">
+            <a:avLst/>
+          </a:prstGeom>
+          <a:noFill/>
+          <a:ln/>
+        </p:spPr>
+        <p:txBody>
+          <a:bodyPr wrap="square" rtlCol="0" anchor="ctr"/>
+          <a:lstStyle/>
+          <a:p>
+            <a:pPr indent="0" marL="0">
+              <a:buNone/>
+            </a:pPr>
+            <a:r>
+              <a:rPr lang="en-US" sz="1500" dirty="0">
+                <a:solidFill>
+                  <a:srgbClr val="1F2937"/>
+                </a:solidFill>
+                <a:latin typeface="Arial" pitchFamily="34" charset="0"/>
+                <a:ea typeface="Arial" pitchFamily="34" charset="-122"/>
+                <a:cs typeface="Arial" pitchFamily="34" charset="-120"/>
+              </a:rPr>
+              <a:t>Revise em lote, num horário fixo, e justifique toda correção manual.</a:t>
+            </a:r>
+            <a:endParaRPr lang="en-US" sz="1500" dirty="0"/>
           </a:p>
         </p:txBody>
       </p:sp>
@@ -14827,7 +15871,7 @@
                 <a:ea typeface="Arial" pitchFamily="34" charset="-122"/>
                 <a:cs typeface="Arial" pitchFamily="34" charset="-120"/>
               </a:rPr>
-              <a:t>Faturas de Concessionárias → Nova → cliente · UC · PDF</a:t>
+              <a:t>Em Financeiro, Faturas de Concessionárias, crie uma fatura: cliente, UC e o PDF da pasta do curso.</a:t>
             </a:r>
             <a:endParaRPr lang="en-US" sz="1500" dirty="0"/>
           </a:p>
@@ -14878,7 +15922,7 @@
                 <a:ea typeface="Arial" pitchFamily="34" charset="-122"/>
                 <a:cs typeface="Arial" pitchFamily="34" charset="-120"/>
               </a:rPr>
-              <a:t>Passos 1 a 4: cliente/UC · referência/vencimento · consumo/total · compensação</a:t>
+              <a:t>Confira titular, referência, vencimento, consumo e a energia compensada contra o esperado.</a:t>
             </a:r>
             <a:endParaRPr lang="en-US" sz="1500" dirty="0"/>
           </a:p>
@@ -14929,7 +15973,7 @@
                 <a:ea typeface="Arial" pitchFamily="34" charset="-122"/>
                 <a:cs typeface="Arial" pitchFamily="34" charset="-120"/>
               </a:rPr>
-              <a:t>Passo 5: consumo injetado × (1 − margem) = valor ao cliente · Passo 6: usina e pendências</a:t>
+              <a:t>Confira consumo injetado, margem de desconto e valor ao cliente. Usina vinculada correta e nenhuma pendência.</a:t>
             </a:r>
             <a:endParaRPr lang="en-US" sz="1500" dirty="0"/>
           </a:p>
@@ -14980,7 +16024,7 @@
                 <a:ea typeface="Arial" pitchFamily="34" charset="-122"/>
                 <a:cs typeface="Arial" pitchFamily="34" charset="-120"/>
               </a:rPr>
-              <a:t>Observações → revisada → aprovar · fica registrado quem revisou e quando</a:t>
+              <a:t>Escreva a observação da revisão e aprove: fica registrado quem revisou e quando.</a:t>
             </a:r>
             <a:endParaRPr lang="en-US" sz="1500" dirty="0"/>
           </a:p>
@@ -15459,7 +16503,7 @@
                 <a:ea typeface="Arial" pitchFamily="34" charset="-122"/>
                 <a:cs typeface="Arial" pitchFamily="34" charset="-120"/>
               </a:rPr>
-              <a:t>Filtre por status e por cliente · revise em lote</a:t>
+              <a:t>Repita para as outras faturas, usando os filtros por status e por cliente.</a:t>
             </a:r>
             <a:endParaRPr lang="en-US" sz="1500" dirty="0"/>
           </a:p>
@@ -16297,7 +17341,7 @@
                 <a:ea typeface="Arial" pitchFamily="34" charset="-122"/>
                 <a:cs typeface="Arial" pitchFamily="34" charset="-120"/>
               </a:rPr>
-              <a:t>Sem UC → cadastrar a UC (código + concessionária) → vincular na correção → resolver</a:t>
+              <a:t>Sem UC vinculada: cadastre a UC do número da instalação e vincule-a na correção manual.</a:t>
             </a:r>
             <a:endParaRPr lang="en-US" sz="1500" dirty="0"/>
           </a:p>
@@ -16348,7 +17392,7 @@
                 <a:ea typeface="Arial" pitchFamily="34" charset="-122"/>
                 <a:cs typeface="Arial" pitchFamily="34" charset="-120"/>
               </a:rPr>
-              <a:t>Duplicada → comparar → rejeitar (com observação)</a:t>
+              <a:t>Duplicada: compare com a existente e rejeite a duplicata, com observação.</a:t>
             </a:r>
             <a:endParaRPr lang="en-US" sz="1500" dirty="0"/>
           </a:p>
@@ -16399,7 +17443,7 @@
                 <a:ea typeface="Arial" pitchFamily="34" charset="-122"/>
                 <a:cs typeface="Arial" pitchFamily="34" charset="-120"/>
               </a:rPr>
-              <a:t>Leitura incompleta → correção manual a partir do PDF → status 'corrigida' · valor vazio é bloqueado</a:t>
+              <a:t>Valor ou consumo inválido: complete a correção manual a partir do PDF. A plataforma não aceita valor vazio.</a:t>
             </a:r>
             <a:endParaRPr lang="en-US" sz="1500" dirty="0"/>
           </a:p>
@@ -16450,7 +17494,7 @@
                 <a:ea typeface="Arial" pitchFamily="34" charset="-122"/>
                 <a:cs typeface="Arial" pitchFamily="34" charset="-120"/>
               </a:rPr>
-              <a:t>Sem desconto ativo → criar a regra na ficha do cliente → conferir a margem na fatura</a:t>
+              <a:t>Sem regra de desconto: crie a regra na ficha do cliente e confira a margem na fatura.</a:t>
             </a:r>
             <a:endParaRPr lang="en-US" sz="1500" dirty="0"/>
           </a:p>
@@ -16927,24 +17971,7 @@
                 <a:ea typeface="Arial" pitchFamily="34" charset="-122"/>
                 <a:cs typeface="Arial" pitchFamily="34" charset="-120"/>
               </a:rPr>
-              <a:t>Entregável do M7: mês 1 aprovado</a:t>
-            </a:r>
-            <a:endParaRPr lang="en-US" sz="1500" dirty="0"/>
-          </a:p>
-          <a:p>
-            <a:pPr indent="0" marL="0">
-              <a:buNone/>
-            </a:pPr>
-            <a:r>
-              <a:rPr lang="en-US" sz="1500" dirty="0">
-                <a:solidFill>
-                  <a:srgbClr val="1F2937"/>
-                </a:solidFill>
-                <a:latin typeface="Arial" pitchFamily="34" charset="0"/>
-                <a:ea typeface="Arial" pitchFamily="34" charset="-122"/>
-                <a:cs typeface="Arial" pitchFamily="34" charset="-120"/>
-              </a:rPr>
-              <a:t>3+ pendências resolvidas com justificativa</a:t>
+              <a:t>Em Alertas Operacionais, filtre por faturas e confira se não restou problema de importação.</a:t>
             </a:r>
             <a:endParaRPr lang="en-US" sz="1500" dirty="0"/>
           </a:p>
@@ -17266,11 +18293,11 @@
         <p:spPr>
           <a:xfrm>
             <a:off x="548640" y="1325880"/>
-            <a:ext cx="3544824" cy="2331720"/>
+            <a:ext cx="3544824" cy="1874520"/>
           </a:xfrm>
           <a:prstGeom prst="roundRect">
             <a:avLst>
-              <a:gd name="adj" fmla="val 3137"/>
+              <a:gd name="adj" fmla="val 3902"/>
             </a:avLst>
           </a:prstGeom>
           <a:solidFill>
@@ -17359,7 +18386,7 @@
         <p:spPr>
           <a:xfrm>
             <a:off x="1325880" y="1435608"/>
-            <a:ext cx="2630424" cy="2112264"/>
+            <a:ext cx="2630424" cy="1655064"/>
           </a:xfrm>
           <a:prstGeom prst="rect">
             <a:avLst/>
@@ -17400,11 +18427,11 @@
         <p:spPr>
           <a:xfrm>
             <a:off x="4322064" y="1325880"/>
-            <a:ext cx="3544824" cy="2331720"/>
+            <a:ext cx="3544824" cy="1874520"/>
           </a:xfrm>
           <a:prstGeom prst="roundRect">
             <a:avLst>
-              <a:gd name="adj" fmla="val 3137"/>
+              <a:gd name="adj" fmla="val 3902"/>
             </a:avLst>
           </a:prstGeom>
           <a:solidFill>
@@ -17493,7 +18520,7 @@
         <p:spPr>
           <a:xfrm>
             <a:off x="5099304" y="1435608"/>
-            <a:ext cx="2630424" cy="2112264"/>
+            <a:ext cx="2630424" cy="1655064"/>
           </a:xfrm>
           <a:prstGeom prst="rect">
             <a:avLst/>
@@ -17534,11 +18561,11 @@
         <p:spPr>
           <a:xfrm>
             <a:off x="8095488" y="1325880"/>
-            <a:ext cx="3544824" cy="2331720"/>
+            <a:ext cx="3544824" cy="1874520"/>
           </a:xfrm>
           <a:prstGeom prst="roundRect">
             <a:avLst>
-              <a:gd name="adj" fmla="val 3137"/>
+              <a:gd name="adj" fmla="val 3902"/>
             </a:avLst>
           </a:prstGeom>
           <a:solidFill>
@@ -17627,7 +18654,7 @@
         <p:spPr>
           <a:xfrm>
             <a:off x="8872728" y="1435608"/>
-            <a:ext cx="2630424" cy="2112264"/>
+            <a:ext cx="2630424" cy="1655064"/>
           </a:xfrm>
           <a:prstGeom prst="rect">
             <a:avLst/>
@@ -17667,12 +18694,12 @@
         </p:nvSpPr>
         <p:spPr>
           <a:xfrm>
-            <a:off x="548640" y="3886200"/>
-            <a:ext cx="3544824" cy="2331720"/>
+            <a:off x="548640" y="3429000"/>
+            <a:ext cx="3544824" cy="1874520"/>
           </a:xfrm>
           <a:prstGeom prst="roundRect">
             <a:avLst>
-              <a:gd name="adj" fmla="val 3137"/>
+              <a:gd name="adj" fmla="val 3902"/>
             </a:avLst>
           </a:prstGeom>
           <a:solidFill>
@@ -17701,7 +18728,7 @@
         </p:nvSpPr>
         <p:spPr>
           <a:xfrm>
-            <a:off x="731520" y="4069080"/>
+            <a:off x="731520" y="3611880"/>
             <a:ext cx="457200" cy="457200"/>
           </a:xfrm>
           <a:prstGeom prst="ellipse">
@@ -17721,7 +18748,7 @@
         </p:nvSpPr>
         <p:spPr>
           <a:xfrm>
-            <a:off x="731520" y="4069080"/>
+            <a:off x="731520" y="3611880"/>
             <a:ext cx="457200" cy="457200"/>
           </a:xfrm>
           <a:prstGeom prst="rect">
@@ -17760,8 +18787,8 @@
         </p:nvSpPr>
         <p:spPr>
           <a:xfrm>
-            <a:off x="1325880" y="3995928"/>
-            <a:ext cx="2630424" cy="2112264"/>
+            <a:off x="1325880" y="3538728"/>
+            <a:ext cx="2630424" cy="1655064"/>
           </a:xfrm>
           <a:prstGeom prst="rect">
             <a:avLst/>
@@ -17801,12 +18828,12 @@
         </p:nvSpPr>
         <p:spPr>
           <a:xfrm>
-            <a:off x="4322064" y="3886200"/>
-            <a:ext cx="3544824" cy="2331720"/>
+            <a:off x="4322064" y="3429000"/>
+            <a:ext cx="3544824" cy="1874520"/>
           </a:xfrm>
           <a:prstGeom prst="roundRect">
             <a:avLst>
-              <a:gd name="adj" fmla="val 3137"/>
+              <a:gd name="adj" fmla="val 3902"/>
             </a:avLst>
           </a:prstGeom>
           <a:solidFill>
@@ -17835,7 +18862,7 @@
         </p:nvSpPr>
         <p:spPr>
           <a:xfrm>
-            <a:off x="4504944" y="4069080"/>
+            <a:off x="4504944" y="3611880"/>
             <a:ext cx="457200" cy="457200"/>
           </a:xfrm>
           <a:prstGeom prst="ellipse">
@@ -17855,7 +18882,7 @@
         </p:nvSpPr>
         <p:spPr>
           <a:xfrm>
-            <a:off x="4504944" y="4069080"/>
+            <a:off x="4504944" y="3611880"/>
             <a:ext cx="457200" cy="457200"/>
           </a:xfrm>
           <a:prstGeom prst="rect">
@@ -17894,8 +18921,8 @@
         </p:nvSpPr>
         <p:spPr>
           <a:xfrm>
-            <a:off x="5099304" y="3995928"/>
-            <a:ext cx="2630424" cy="2112264"/>
+            <a:off x="5099304" y="3538728"/>
+            <a:ext cx="2630424" cy="1655064"/>
           </a:xfrm>
           <a:prstGeom prst="rect">
             <a:avLst/>
@@ -17935,12 +18962,12 @@
         </p:nvSpPr>
         <p:spPr>
           <a:xfrm>
-            <a:off x="8095488" y="3886200"/>
-            <a:ext cx="3544824" cy="2331720"/>
+            <a:off x="8095488" y="3429000"/>
+            <a:ext cx="3544824" cy="1874520"/>
           </a:xfrm>
           <a:prstGeom prst="roundRect">
             <a:avLst>
-              <a:gd name="adj" fmla="val 3137"/>
+              <a:gd name="adj" fmla="val 3902"/>
             </a:avLst>
           </a:prstGeom>
           <a:solidFill>
@@ -17969,7 +18996,7 @@
         </p:nvSpPr>
         <p:spPr>
           <a:xfrm>
-            <a:off x="8278368" y="4069080"/>
+            <a:off x="8278368" y="3611880"/>
             <a:ext cx="457200" cy="457200"/>
           </a:xfrm>
           <a:prstGeom prst="ellipse">
@@ -17989,7 +19016,7 @@
         </p:nvSpPr>
         <p:spPr>
           <a:xfrm>
-            <a:off x="8278368" y="4069080"/>
+            <a:off x="8278368" y="3611880"/>
             <a:ext cx="457200" cy="457200"/>
           </a:xfrm>
           <a:prstGeom prst="rect">
@@ -18028,8 +19055,8 @@
         </p:nvSpPr>
         <p:spPr>
           <a:xfrm>
-            <a:off x="8872728" y="3995928"/>
-            <a:ext cx="2630424" cy="2112264"/>
+            <a:off x="8872728" y="3538728"/>
+            <a:ext cx="2630424" cy="1655064"/>
           </a:xfrm>
           <a:prstGeom prst="rect">
             <a:avLst/>
@@ -18058,6 +19085,92 @@
               <a:t>Histórico</a:t>
             </a:r>
             <a:endParaRPr lang="en-US" sz="1800" dirty="0"/>
+          </a:p>
+        </p:txBody>
+      </p:sp>
+      <p:sp>
+        <p:nvSpPr>
+          <p:cNvPr id="33" name="Shape 30"/>
+          <p:cNvSpPr/>
+          <p:nvPr/>
+        </p:nvSpPr>
+        <p:spPr>
+          <a:xfrm>
+            <a:off x="548640" y="5413248"/>
+            <a:ext cx="11091672" cy="868680"/>
+          </a:xfrm>
+          <a:prstGeom prst="roundRect">
+            <a:avLst>
+              <a:gd name="adj" fmla="val 8421"/>
+            </a:avLst>
+          </a:prstGeom>
+          <a:solidFill>
+            <a:srgbClr val="EEF3FA"/>
+          </a:solidFill>
+          <a:ln w="6350">
+            <a:solidFill>
+              <a:srgbClr val="D8E0EC"/>
+            </a:solidFill>
+            <a:prstDash val="solid"/>
+          </a:ln>
+        </p:spPr>
+      </p:sp>
+      <p:sp>
+        <p:nvSpPr>
+          <p:cNvPr id="34" name="Shape 31"/>
+          <p:cNvSpPr/>
+          <p:nvPr/>
+        </p:nvSpPr>
+        <p:spPr>
+          <a:xfrm>
+            <a:off x="548640" y="5413248"/>
+            <a:ext cx="91440" cy="868680"/>
+          </a:xfrm>
+          <a:prstGeom prst="rect">
+            <a:avLst/>
+          </a:prstGeom>
+          <a:solidFill>
+            <a:srgbClr val="F7A23B"/>
+          </a:solidFill>
+          <a:ln/>
+        </p:spPr>
+      </p:sp>
+      <p:sp>
+        <p:nvSpPr>
+          <p:cNvPr id="35" name="Text 32"/>
+          <p:cNvSpPr/>
+          <p:nvPr/>
+        </p:nvSpPr>
+        <p:spPr>
+          <a:xfrm>
+            <a:off x="777240" y="5458968"/>
+            <a:ext cx="10744200" cy="777240"/>
+          </a:xfrm>
+          <a:prstGeom prst="rect">
+            <a:avLst/>
+          </a:prstGeom>
+          <a:noFill/>
+          <a:ln/>
+        </p:spPr>
+        <p:txBody>
+          <a:bodyPr wrap="square" rtlCol="0" anchor="ctr"/>
+          <a:lstStyle/>
+          <a:p>
+            <a:pPr indent="0" marL="0">
+              <a:buNone/>
+            </a:pPr>
+            <a:r>
+              <a:rPr lang="en-US" sz="1500" dirty="0">
+                <a:solidFill>
+                  <a:srgbClr val="1F2937"/>
+                </a:solidFill>
+                <a:latin typeface="Arial" pitchFamily="34" charset="0"/>
+                <a:ea typeface="Arial" pitchFamily="34" charset="-122"/>
+                <a:cs typeface="Arial" pitchFamily="34" charset="-120"/>
+              </a:rPr>
+              <a:t>A fatura com geração distribuída tem os blocos de sempre e mais um: as informações da geração distribuída.</a:t>
+            </a:r>
+            <a:endParaRPr lang="en-US" sz="1500" dirty="0"/>
           </a:p>
         </p:txBody>
       </p:sp>
@@ -18262,7 +19375,7 @@
                 <a:ea typeface="Arial" pitchFamily="34" charset="-122"/>
                 <a:cs typeface="Arial" pitchFamily="34" charset="-120"/>
               </a:rPr>
-              <a:t>M7 · Fechamento</a:t>
+              <a:t>M7 · Teste rápido</a:t>
             </a:r>
             <a:endParaRPr lang="en-US" sz="900" dirty="0"/>
           </a:p>
@@ -18321,7 +19434,7 @@
                 <a:ea typeface="Arial" pitchFamily="34" charset="-122"/>
                 <a:cs typeface="Arial" pitchFamily="34" charset="-120"/>
               </a:rPr>
-              <a:t>FECHAMENTO DO MÓDULO</a:t>
+              <a:t>QUESTÕES 1–2 DE 6</a:t>
             </a:r>
             <a:endParaRPr lang="en-US" sz="1000" dirty="0"/>
           </a:p>
@@ -18362,7 +19475,7 @@
                 <a:ea typeface="Arial" pitchFamily="34" charset="-122"/>
                 <a:cs typeface="Arial" pitchFamily="34" charset="-120"/>
               </a:rPr>
-              <a:t>Pratique e entregue</a:t>
+              <a:t>Teste rápido</a:t>
             </a:r>
             <a:endParaRPr lang="en-US" sz="2600" dirty="0"/>
           </a:p>
@@ -18370,142 +19483,17 @@
       </p:sp>
       <p:sp>
         <p:nvSpPr>
-          <p:cNvPr id="9" name="Text 6"/>
+          <p:cNvPr id="9" name="Shape 6"/>
           <p:cNvSpPr/>
           <p:nvPr/>
         </p:nvSpPr>
         <p:spPr>
           <a:xfrm>
             <a:off x="548640" y="1325880"/>
-            <a:ext cx="5394960" cy="411480"/>
-          </a:xfrm>
-          <a:prstGeom prst="rect">
-            <a:avLst/>
-          </a:prstGeom>
-          <a:noFill/>
-          <a:ln/>
-        </p:spPr>
-        <p:txBody>
-          <a:bodyPr wrap="square" rtlCol="0" anchor="ctr"/>
-          <a:lstStyle/>
-          <a:p>
-            <a:pPr indent="0" marL="0">
-              <a:buNone/>
-            </a:pPr>
-            <a:r>
-              <a:rPr lang="en-US" sz="1600" b="1" dirty="0">
-                <a:solidFill>
-                  <a:srgbClr val="1B3A6B"/>
-                </a:solidFill>
-                <a:latin typeface="Arial" pitchFamily="34" charset="0"/>
-                <a:ea typeface="Arial" pitchFamily="34" charset="-122"/>
-                <a:cs typeface="Arial" pitchFamily="34" charset="-120"/>
-              </a:rPr>
-              <a:t>Exercícios</a:t>
-            </a:r>
-            <a:endParaRPr lang="en-US" sz="1600" dirty="0"/>
-          </a:p>
-        </p:txBody>
-      </p:sp>
-      <p:sp>
-        <p:nvSpPr>
-          <p:cNvPr id="10" name="Text 7"/>
-          <p:cNvSpPr/>
-          <p:nvPr/>
-        </p:nvSpPr>
-        <p:spPr>
-          <a:xfrm>
-            <a:off x="548640" y="1783080"/>
-            <a:ext cx="5394960" cy="4480560"/>
-          </a:xfrm>
-          <a:prstGeom prst="rect">
-            <a:avLst/>
-          </a:prstGeom>
-          <a:noFill/>
-          <a:ln/>
-        </p:spPr>
-        <p:txBody>
-          <a:bodyPr wrap="square" rtlCol="0" anchor="t">
-            <a:normAutofit/>
-          </a:bodyPr>
-          <a:lstStyle/>
-          <a:p>
-            <a:pPr indent="0" marL="0">
-              <a:spcAft>
-                <a:spcPts val="800"/>
-              </a:spcAft>
-              <a:buNone/>
-            </a:pPr>
-            <a:r>
-              <a:rPr lang="en-US" sz="1600" dirty="0">
-                <a:solidFill>
-                  <a:srgbClr val="1F2937"/>
-                </a:solidFill>
-                <a:latin typeface="Arial" pitchFamily="34" charset="0"/>
-                <a:ea typeface="Arial" pitchFamily="34" charset="-122"/>
-                <a:cs typeface="Arial" pitchFamily="34" charset="-120"/>
-              </a:rPr>
-              <a:t>1. A fatura mostra 2.400 kWh de energia compensada e o rateio previa 4% de uma usina que gerou 58.000 kWh. Bate?</a:t>
-            </a:r>
-            <a:endParaRPr lang="en-US" sz="1600" dirty="0"/>
-          </a:p>
-          <a:p>
-            <a:pPr indent="0" marL="0">
-              <a:spcAft>
-                <a:spcPts val="800"/>
-              </a:spcAft>
-              <a:buNone/>
-            </a:pPr>
-            <a:r>
-              <a:rPr lang="en-US" sz="1600" dirty="0">
-                <a:solidFill>
-                  <a:srgbClr val="1F2937"/>
-                </a:solidFill>
-                <a:latin typeface="Arial" pitchFamily="34" charset="0"/>
-                <a:ea typeface="Arial" pitchFamily="34" charset="-122"/>
-                <a:cs typeface="Arial" pitchFamily="34" charset="-120"/>
-              </a:rPr>
-              <a:t>2. A fatura veio sem nenhuma linha de energia injetada. Liste três causas possíveis.</a:t>
-            </a:r>
-            <a:endParaRPr lang="en-US" sz="1600" dirty="0"/>
-          </a:p>
-          <a:p>
-            <a:pPr indent="0" marL="0">
-              <a:spcAft>
-                <a:spcPts val="800"/>
-              </a:spcAft>
-              <a:buNone/>
-            </a:pPr>
-            <a:r>
-              <a:rPr lang="en-US" sz="1600" dirty="0">
-                <a:solidFill>
-                  <a:srgbClr val="1F2937"/>
-                </a:solidFill>
-                <a:latin typeface="Arial" pitchFamily="34" charset="0"/>
-                <a:ea typeface="Arial" pitchFamily="34" charset="-122"/>
-                <a:cs typeface="Arial" pitchFamily="34" charset="-120"/>
-              </a:rPr>
-              <a:t>3. Valor do consumo injetado R$ 2.119,00 e margem de desconto 20%: valor ao cliente?</a:t>
-            </a:r>
-            <a:endParaRPr lang="en-US" sz="1600" dirty="0"/>
-          </a:p>
-        </p:txBody>
-      </p:sp>
-      <p:sp>
-        <p:nvSpPr>
-          <p:cNvPr id="11" name="Shape 8"/>
-          <p:cNvSpPr/>
-          <p:nvPr/>
-        </p:nvSpPr>
-        <p:spPr>
-          <a:xfrm>
-            <a:off x="6172200" y="1325880"/>
-            <a:ext cx="5468112" cy="4937760"/>
-          </a:xfrm>
-          <a:prstGeom prst="roundRect">
-            <a:avLst>
-              <a:gd name="adj" fmla="val 1852"/>
-            </a:avLst>
+            <a:ext cx="502920" cy="502920"/>
+          </a:xfrm>
+          <a:prstGeom prst="ellipse">
+            <a:avLst/>
           </a:prstGeom>
           <a:solidFill>
             <a:srgbClr val="1B3A6B"/>
@@ -18515,32 +19503,135 @@
       </p:sp>
       <p:sp>
         <p:nvSpPr>
-          <p:cNvPr id="12" name="Text 9"/>
-          <p:cNvSpPr/>
-          <p:nvPr/>
-        </p:nvSpPr>
-        <p:spPr>
-          <a:xfrm>
-            <a:off x="6492240" y="1554480"/>
-            <a:ext cx="4828032" cy="4480560"/>
-          </a:xfrm>
-          <a:prstGeom prst="rect">
-            <a:avLst/>
-          </a:prstGeom>
-          <a:noFill/>
-          <a:ln/>
-        </p:spPr>
-        <p:txBody>
-          <a:bodyPr wrap="square" rtlCol="0" anchor="t">
-            <a:normAutofit/>
-          </a:bodyPr>
-          <a:lstStyle/>
-          <a:p>
-            <a:pPr indent="0" marL="0">
-              <a:buNone/>
-            </a:pPr>
-            <a:r>
-              <a:rPr lang="en-US" sz="1300" b="1" spc="100" kern="0" dirty="0">
+          <p:cNvPr id="10" name="Text 7"/>
+          <p:cNvSpPr/>
+          <p:nvPr/>
+        </p:nvSpPr>
+        <p:spPr>
+          <a:xfrm>
+            <a:off x="548640" y="1325880"/>
+            <a:ext cx="502920" cy="502920"/>
+          </a:xfrm>
+          <a:prstGeom prst="rect">
+            <a:avLst/>
+          </a:prstGeom>
+          <a:noFill/>
+          <a:ln/>
+        </p:spPr>
+        <p:txBody>
+          <a:bodyPr wrap="square" rtlCol="0" anchor="ctr"/>
+          <a:lstStyle/>
+          <a:p>
+            <a:pPr algn="ctr" indent="0" marL="0">
+              <a:buNone/>
+            </a:pPr>
+            <a:r>
+              <a:rPr lang="en-US" sz="1600" b="1" dirty="0">
+                <a:solidFill>
+                  <a:srgbClr val="FFFFFF"/>
+                </a:solidFill>
+                <a:latin typeface="Arial" pitchFamily="34" charset="0"/>
+                <a:ea typeface="Arial" pitchFamily="34" charset="-122"/>
+                <a:cs typeface="Arial" pitchFamily="34" charset="-120"/>
+              </a:rPr>
+              <a:t>1</a:t>
+            </a:r>
+            <a:endParaRPr lang="en-US" sz="1600" dirty="0"/>
+          </a:p>
+        </p:txBody>
+      </p:sp>
+      <p:sp>
+        <p:nvSpPr>
+          <p:cNvPr id="11" name="Text 8"/>
+          <p:cNvSpPr/>
+          <p:nvPr/>
+        </p:nvSpPr>
+        <p:spPr>
+          <a:xfrm>
+            <a:off x="1234440" y="1280160"/>
+            <a:ext cx="10424160" cy="640080"/>
+          </a:xfrm>
+          <a:prstGeom prst="rect">
+            <a:avLst/>
+          </a:prstGeom>
+          <a:noFill/>
+          <a:ln/>
+        </p:spPr>
+        <p:txBody>
+          <a:bodyPr wrap="square" rtlCol="0" anchor="ctr"/>
+          <a:lstStyle/>
+          <a:p>
+            <a:pPr indent="0" marL="0">
+              <a:buNone/>
+            </a:pPr>
+            <a:r>
+              <a:rPr lang="en-US" sz="1800" b="1" dirty="0">
+                <a:solidFill>
+                  <a:srgbClr val="1B3A6B"/>
+                </a:solidFill>
+                <a:latin typeface="Arial" pitchFamily="34" charset="0"/>
+                <a:ea typeface="Arial" pitchFamily="34" charset="-122"/>
+                <a:cs typeface="Arial" pitchFamily="34" charset="-120"/>
+              </a:rPr>
+              <a:t>Na fatura, as linhas de energia injetada/compensada costumam aparecer com valores:</a:t>
+            </a:r>
+            <a:endParaRPr lang="en-US" sz="1800" dirty="0"/>
+          </a:p>
+        </p:txBody>
+      </p:sp>
+      <p:sp>
+        <p:nvSpPr>
+          <p:cNvPr id="12" name="Shape 9"/>
+          <p:cNvSpPr/>
+          <p:nvPr/>
+        </p:nvSpPr>
+        <p:spPr>
+          <a:xfrm>
+            <a:off x="548640" y="2057400"/>
+            <a:ext cx="2601468" cy="1463040"/>
+          </a:xfrm>
+          <a:prstGeom prst="roundRect">
+            <a:avLst>
+              <a:gd name="adj" fmla="val 5000"/>
+            </a:avLst>
+          </a:prstGeom>
+          <a:solidFill>
+            <a:srgbClr val="FFFFFF"/>
+          </a:solidFill>
+          <a:ln w="9525">
+            <a:solidFill>
+              <a:srgbClr val="D8E0EC"/>
+            </a:solidFill>
+            <a:prstDash val="solid"/>
+          </a:ln>
+        </p:spPr>
+      </p:sp>
+      <p:sp>
+        <p:nvSpPr>
+          <p:cNvPr id="13" name="Text 10"/>
+          <p:cNvSpPr/>
+          <p:nvPr/>
+        </p:nvSpPr>
+        <p:spPr>
+          <a:xfrm>
+            <a:off x="685800" y="2148840"/>
+            <a:ext cx="365760" cy="365760"/>
+          </a:xfrm>
+          <a:prstGeom prst="rect">
+            <a:avLst/>
+          </a:prstGeom>
+          <a:noFill/>
+          <a:ln/>
+        </p:spPr>
+        <p:txBody>
+          <a:bodyPr wrap="square" rtlCol="0" anchor="ctr"/>
+          <a:lstStyle/>
+          <a:p>
+            <a:pPr indent="0" marL="0">
+              <a:buNone/>
+            </a:pPr>
+            <a:r>
+              <a:rPr lang="en-US" sz="1400" b="1" dirty="0">
                 <a:solidFill>
                   <a:srgbClr val="F7A23B"/>
                 </a:solidFill>
@@ -18548,14 +19639,307 @@
                 <a:ea typeface="Arial" pitchFamily="34" charset="-122"/>
                 <a:cs typeface="Arial" pitchFamily="34" charset="-120"/>
               </a:rPr>
-              <a:t>ENTREGÁVEL DO MÓDULO
-</a:t>
-            </a:r>
-            <a:pPr indent="0" marL="0">
-              <a:buNone/>
-            </a:pPr>
-            <a:r>
-              <a:rPr lang="en-US" sz="1600" dirty="0">
+              <a:t>B</a:t>
+            </a:r>
+            <a:endParaRPr lang="en-US" sz="1400" dirty="0"/>
+          </a:p>
+        </p:txBody>
+      </p:sp>
+      <p:sp>
+        <p:nvSpPr>
+          <p:cNvPr id="14" name="Text 11"/>
+          <p:cNvSpPr/>
+          <p:nvPr/>
+        </p:nvSpPr>
+        <p:spPr>
+          <a:xfrm>
+            <a:off x="685800" y="2514600"/>
+            <a:ext cx="2327148" cy="914400"/>
+          </a:xfrm>
+          <a:prstGeom prst="rect">
+            <a:avLst/>
+          </a:prstGeom>
+          <a:noFill/>
+          <a:ln/>
+        </p:spPr>
+        <p:txBody>
+          <a:bodyPr wrap="square" rtlCol="0" anchor="t"/>
+          <a:lstStyle/>
+          <a:p>
+            <a:pPr indent="0" marL="0">
+              <a:buNone/>
+            </a:pPr>
+            <a:r>
+              <a:rPr lang="en-US" sz="1500" dirty="0">
+                <a:solidFill>
+                  <a:srgbClr val="1F2937"/>
+                </a:solidFill>
+                <a:latin typeface="Arial" pitchFamily="34" charset="0"/>
+                <a:ea typeface="Arial" pitchFamily="34" charset="-122"/>
+                <a:cs typeface="Arial" pitchFamily="34" charset="-120"/>
+              </a:rPr>
+              <a:t>positivos</a:t>
+            </a:r>
+            <a:endParaRPr lang="en-US" sz="1500" dirty="0"/>
+          </a:p>
+        </p:txBody>
+      </p:sp>
+      <p:sp>
+        <p:nvSpPr>
+          <p:cNvPr id="15" name="Shape 12"/>
+          <p:cNvSpPr/>
+          <p:nvPr/>
+        </p:nvSpPr>
+        <p:spPr>
+          <a:xfrm>
+            <a:off x="3378708" y="2057400"/>
+            <a:ext cx="2601468" cy="1463040"/>
+          </a:xfrm>
+          <a:prstGeom prst="roundRect">
+            <a:avLst>
+              <a:gd name="adj" fmla="val 5000"/>
+            </a:avLst>
+          </a:prstGeom>
+          <a:solidFill>
+            <a:srgbClr val="FFFFFF"/>
+          </a:solidFill>
+          <a:ln w="9525">
+            <a:solidFill>
+              <a:srgbClr val="D8E0EC"/>
+            </a:solidFill>
+            <a:prstDash val="solid"/>
+          </a:ln>
+        </p:spPr>
+      </p:sp>
+      <p:sp>
+        <p:nvSpPr>
+          <p:cNvPr id="16" name="Text 13"/>
+          <p:cNvSpPr/>
+          <p:nvPr/>
+        </p:nvSpPr>
+        <p:spPr>
+          <a:xfrm>
+            <a:off x="3515868" y="2148840"/>
+            <a:ext cx="365760" cy="365760"/>
+          </a:xfrm>
+          <a:prstGeom prst="rect">
+            <a:avLst/>
+          </a:prstGeom>
+          <a:noFill/>
+          <a:ln/>
+        </p:spPr>
+        <p:txBody>
+          <a:bodyPr wrap="square" rtlCol="0" anchor="ctr"/>
+          <a:lstStyle/>
+          <a:p>
+            <a:pPr indent="0" marL="0">
+              <a:buNone/>
+            </a:pPr>
+            <a:r>
+              <a:rPr lang="en-US" sz="1400" b="1" dirty="0">
+                <a:solidFill>
+                  <a:srgbClr val="F7A23B"/>
+                </a:solidFill>
+                <a:latin typeface="Arial" pitchFamily="34" charset="0"/>
+                <a:ea typeface="Arial" pitchFamily="34" charset="-122"/>
+                <a:cs typeface="Arial" pitchFamily="34" charset="-120"/>
+              </a:rPr>
+              <a:t>C</a:t>
+            </a:r>
+            <a:endParaRPr lang="en-US" sz="1400" dirty="0"/>
+          </a:p>
+        </p:txBody>
+      </p:sp>
+      <p:sp>
+        <p:nvSpPr>
+          <p:cNvPr id="17" name="Text 14"/>
+          <p:cNvSpPr/>
+          <p:nvPr/>
+        </p:nvSpPr>
+        <p:spPr>
+          <a:xfrm>
+            <a:off x="3515868" y="2514600"/>
+            <a:ext cx="2327148" cy="914400"/>
+          </a:xfrm>
+          <a:prstGeom prst="rect">
+            <a:avLst/>
+          </a:prstGeom>
+          <a:noFill/>
+          <a:ln/>
+        </p:spPr>
+        <p:txBody>
+          <a:bodyPr wrap="square" rtlCol="0" anchor="t"/>
+          <a:lstStyle/>
+          <a:p>
+            <a:pPr indent="0" marL="0">
+              <a:buNone/>
+            </a:pPr>
+            <a:r>
+              <a:rPr lang="en-US" sz="1500" dirty="0">
+                <a:solidFill>
+                  <a:srgbClr val="1F2937"/>
+                </a:solidFill>
+                <a:latin typeface="Arial" pitchFamily="34" charset="0"/>
+                <a:ea typeface="Arial" pitchFamily="34" charset="-122"/>
+                <a:cs typeface="Arial" pitchFamily="34" charset="-120"/>
+              </a:rPr>
+              <a:t>em branco</a:t>
+            </a:r>
+            <a:endParaRPr lang="en-US" sz="1500" dirty="0"/>
+          </a:p>
+        </p:txBody>
+      </p:sp>
+      <p:sp>
+        <p:nvSpPr>
+          <p:cNvPr id="18" name="Shape 15"/>
+          <p:cNvSpPr/>
+          <p:nvPr/>
+        </p:nvSpPr>
+        <p:spPr>
+          <a:xfrm>
+            <a:off x="6208776" y="2057400"/>
+            <a:ext cx="2601468" cy="1463040"/>
+          </a:xfrm>
+          <a:prstGeom prst="roundRect">
+            <a:avLst>
+              <a:gd name="adj" fmla="val 5000"/>
+            </a:avLst>
+          </a:prstGeom>
+          <a:solidFill>
+            <a:srgbClr val="FFFFFF"/>
+          </a:solidFill>
+          <a:ln w="9525">
+            <a:solidFill>
+              <a:srgbClr val="D8E0EC"/>
+            </a:solidFill>
+            <a:prstDash val="solid"/>
+          </a:ln>
+        </p:spPr>
+      </p:sp>
+      <p:sp>
+        <p:nvSpPr>
+          <p:cNvPr id="19" name="Text 16"/>
+          <p:cNvSpPr/>
+          <p:nvPr/>
+        </p:nvSpPr>
+        <p:spPr>
+          <a:xfrm>
+            <a:off x="6345936" y="2148840"/>
+            <a:ext cx="365760" cy="365760"/>
+          </a:xfrm>
+          <a:prstGeom prst="rect">
+            <a:avLst/>
+          </a:prstGeom>
+          <a:noFill/>
+          <a:ln/>
+        </p:spPr>
+        <p:txBody>
+          <a:bodyPr wrap="square" rtlCol="0" anchor="ctr"/>
+          <a:lstStyle/>
+          <a:p>
+            <a:pPr indent="0" marL="0">
+              <a:buNone/>
+            </a:pPr>
+            <a:r>
+              <a:rPr lang="en-US" sz="1400" b="1" dirty="0">
+                <a:solidFill>
+                  <a:srgbClr val="F7A23B"/>
+                </a:solidFill>
+                <a:latin typeface="Arial" pitchFamily="34" charset="0"/>
+                <a:ea typeface="Arial" pitchFamily="34" charset="-122"/>
+                <a:cs typeface="Arial" pitchFamily="34" charset="-120"/>
+              </a:rPr>
+              <a:t>D</a:t>
+            </a:r>
+            <a:endParaRPr lang="en-US" sz="1400" dirty="0"/>
+          </a:p>
+        </p:txBody>
+      </p:sp>
+      <p:sp>
+        <p:nvSpPr>
+          <p:cNvPr id="20" name="Text 17"/>
+          <p:cNvSpPr/>
+          <p:nvPr/>
+        </p:nvSpPr>
+        <p:spPr>
+          <a:xfrm>
+            <a:off x="6345936" y="2514600"/>
+            <a:ext cx="2327148" cy="914400"/>
+          </a:xfrm>
+          <a:prstGeom prst="rect">
+            <a:avLst/>
+          </a:prstGeom>
+          <a:noFill/>
+          <a:ln/>
+        </p:spPr>
+        <p:txBody>
+          <a:bodyPr wrap="square" rtlCol="0" anchor="t"/>
+          <a:lstStyle/>
+          <a:p>
+            <a:pPr indent="0" marL="0">
+              <a:buNone/>
+            </a:pPr>
+            <a:r>
+              <a:rPr lang="en-US" sz="1500" dirty="0">
+                <a:solidFill>
+                  <a:srgbClr val="1F2937"/>
+                </a:solidFill>
+                <a:latin typeface="Arial" pitchFamily="34" charset="0"/>
+                <a:ea typeface="Arial" pitchFamily="34" charset="-122"/>
+                <a:cs typeface="Arial" pitchFamily="34" charset="-120"/>
+              </a:rPr>
+              <a:t>só em kWh</a:t>
+            </a:r>
+            <a:endParaRPr lang="en-US" sz="1500" dirty="0"/>
+          </a:p>
+        </p:txBody>
+      </p:sp>
+      <p:sp>
+        <p:nvSpPr>
+          <p:cNvPr id="21" name="Shape 18"/>
+          <p:cNvSpPr/>
+          <p:nvPr/>
+        </p:nvSpPr>
+        <p:spPr>
+          <a:xfrm>
+            <a:off x="548640" y="3840480"/>
+            <a:ext cx="502920" cy="502920"/>
+          </a:xfrm>
+          <a:prstGeom prst="ellipse">
+            <a:avLst/>
+          </a:prstGeom>
+          <a:solidFill>
+            <a:srgbClr val="1B3A6B"/>
+          </a:solidFill>
+          <a:ln/>
+        </p:spPr>
+      </p:sp>
+      <p:sp>
+        <p:nvSpPr>
+          <p:cNvPr id="22" name="Text 19"/>
+          <p:cNvSpPr/>
+          <p:nvPr/>
+        </p:nvSpPr>
+        <p:spPr>
+          <a:xfrm>
+            <a:off x="548640" y="3840480"/>
+            <a:ext cx="502920" cy="502920"/>
+          </a:xfrm>
+          <a:prstGeom prst="rect">
+            <a:avLst/>
+          </a:prstGeom>
+          <a:noFill/>
+          <a:ln/>
+        </p:spPr>
+        <p:txBody>
+          <a:bodyPr wrap="square" rtlCol="0" anchor="ctr"/>
+          <a:lstStyle/>
+          <a:p>
+            <a:pPr algn="ctr" indent="0" marL="0">
+              <a:buNone/>
+            </a:pPr>
+            <a:r>
+              <a:rPr lang="en-US" sz="1600" b="1" dirty="0">
                 <a:solidFill>
                   <a:srgbClr val="FFFFFF"/>
                 </a:solidFill>
@@ -18563,9 +19947,468 @@
                 <a:ea typeface="Arial" pitchFamily="34" charset="-122"/>
                 <a:cs typeface="Arial" pitchFamily="34" charset="-120"/>
               </a:rPr>
-              <a:t>Primeiro ciclo de faturas: faturas de 1 mês dos 15 clientes importadas (PDFs fictícios do curso), revisadas e aprovadas; registro de pelo menos 3 pendências resolvidas (UC ausente, fatura duplicada, dado corrigido manualmente), com a justificativa nas observações da revisão.</a:t>
-            </a:r>
-            <a:endParaRPr lang="en-US" sz="1300" dirty="0"/>
+              <a:t>2</a:t>
+            </a:r>
+            <a:endParaRPr lang="en-US" sz="1600" dirty="0"/>
+          </a:p>
+        </p:txBody>
+      </p:sp>
+      <p:sp>
+        <p:nvSpPr>
+          <p:cNvPr id="23" name="Text 20"/>
+          <p:cNvSpPr/>
+          <p:nvPr/>
+        </p:nvSpPr>
+        <p:spPr>
+          <a:xfrm>
+            <a:off x="1234440" y="3794760"/>
+            <a:ext cx="10424160" cy="640080"/>
+          </a:xfrm>
+          <a:prstGeom prst="rect">
+            <a:avLst/>
+          </a:prstGeom>
+          <a:noFill/>
+          <a:ln/>
+        </p:spPr>
+        <p:txBody>
+          <a:bodyPr wrap="square" rtlCol="0" anchor="ctr"/>
+          <a:lstStyle/>
+          <a:p>
+            <a:pPr indent="0" marL="0">
+              <a:buNone/>
+            </a:pPr>
+            <a:r>
+              <a:rPr lang="en-US" sz="1800" b="1" dirty="0">
+                <a:solidFill>
+                  <a:srgbClr val="1B3A6B"/>
+                </a:solidFill>
+                <a:latin typeface="Arial" pitchFamily="34" charset="0"/>
+                <a:ea typeface="Arial" pitchFamily="34" charset="-122"/>
+                <a:cs typeface="Arial" pitchFamily="34" charset="-120"/>
+              </a:rPr>
+              <a:t>Se o cliente recebeu mais créditos do que consumiu, o excedente:</a:t>
+            </a:r>
+            <a:endParaRPr lang="en-US" sz="1800" dirty="0"/>
+          </a:p>
+        </p:txBody>
+      </p:sp>
+      <p:sp>
+        <p:nvSpPr>
+          <p:cNvPr id="24" name="Shape 21"/>
+          <p:cNvSpPr/>
+          <p:nvPr/>
+        </p:nvSpPr>
+        <p:spPr>
+          <a:xfrm>
+            <a:off x="548640" y="4572000"/>
+            <a:ext cx="2601468" cy="1463040"/>
+          </a:xfrm>
+          <a:prstGeom prst="roundRect">
+            <a:avLst>
+              <a:gd name="adj" fmla="val 5000"/>
+            </a:avLst>
+          </a:prstGeom>
+          <a:solidFill>
+            <a:srgbClr val="FFFFFF"/>
+          </a:solidFill>
+          <a:ln w="9525">
+            <a:solidFill>
+              <a:srgbClr val="D8E0EC"/>
+            </a:solidFill>
+            <a:prstDash val="solid"/>
+          </a:ln>
+        </p:spPr>
+      </p:sp>
+      <p:sp>
+        <p:nvSpPr>
+          <p:cNvPr id="25" name="Text 22"/>
+          <p:cNvSpPr/>
+          <p:nvPr/>
+        </p:nvSpPr>
+        <p:spPr>
+          <a:xfrm>
+            <a:off x="685800" y="4663440"/>
+            <a:ext cx="365760" cy="365760"/>
+          </a:xfrm>
+          <a:prstGeom prst="rect">
+            <a:avLst/>
+          </a:prstGeom>
+          <a:noFill/>
+          <a:ln/>
+        </p:spPr>
+        <p:txBody>
+          <a:bodyPr wrap="square" rtlCol="0" anchor="ctr"/>
+          <a:lstStyle/>
+          <a:p>
+            <a:pPr indent="0" marL="0">
+              <a:buNone/>
+            </a:pPr>
+            <a:r>
+              <a:rPr lang="en-US" sz="1400" b="1" dirty="0">
+                <a:solidFill>
+                  <a:srgbClr val="F7A23B"/>
+                </a:solidFill>
+                <a:latin typeface="Arial" pitchFamily="34" charset="0"/>
+                <a:ea typeface="Arial" pitchFamily="34" charset="-122"/>
+                <a:cs typeface="Arial" pitchFamily="34" charset="-120"/>
+              </a:rPr>
+              <a:t>A</a:t>
+            </a:r>
+            <a:endParaRPr lang="en-US" sz="1400" dirty="0"/>
+          </a:p>
+        </p:txBody>
+      </p:sp>
+      <p:sp>
+        <p:nvSpPr>
+          <p:cNvPr id="26" name="Text 23"/>
+          <p:cNvSpPr/>
+          <p:nvPr/>
+        </p:nvSpPr>
+        <p:spPr>
+          <a:xfrm>
+            <a:off x="685800" y="5029200"/>
+            <a:ext cx="2327148" cy="914400"/>
+          </a:xfrm>
+          <a:prstGeom prst="rect">
+            <a:avLst/>
+          </a:prstGeom>
+          <a:noFill/>
+          <a:ln/>
+        </p:spPr>
+        <p:txBody>
+          <a:bodyPr wrap="square" rtlCol="0" anchor="t"/>
+          <a:lstStyle/>
+          <a:p>
+            <a:pPr indent="0" marL="0">
+              <a:buNone/>
+            </a:pPr>
+            <a:r>
+              <a:rPr lang="en-US" sz="1500" dirty="0">
+                <a:solidFill>
+                  <a:srgbClr val="1F2937"/>
+                </a:solidFill>
+                <a:latin typeface="Arial" pitchFamily="34" charset="0"/>
+                <a:ea typeface="Arial" pitchFamily="34" charset="-122"/>
+                <a:cs typeface="Arial" pitchFamily="34" charset="-120"/>
+              </a:rPr>
+              <a:t>é perdido na hora</a:t>
+            </a:r>
+            <a:endParaRPr lang="en-US" sz="1500" dirty="0"/>
+          </a:p>
+        </p:txBody>
+      </p:sp>
+      <p:sp>
+        <p:nvSpPr>
+          <p:cNvPr id="27" name="Shape 24"/>
+          <p:cNvSpPr/>
+          <p:nvPr/>
+        </p:nvSpPr>
+        <p:spPr>
+          <a:xfrm>
+            <a:off x="3378708" y="4572000"/>
+            <a:ext cx="2601468" cy="1463040"/>
+          </a:xfrm>
+          <a:prstGeom prst="roundRect">
+            <a:avLst>
+              <a:gd name="adj" fmla="val 5000"/>
+            </a:avLst>
+          </a:prstGeom>
+          <a:solidFill>
+            <a:srgbClr val="FFFFFF"/>
+          </a:solidFill>
+          <a:ln w="9525">
+            <a:solidFill>
+              <a:srgbClr val="D8E0EC"/>
+            </a:solidFill>
+            <a:prstDash val="solid"/>
+          </a:ln>
+        </p:spPr>
+      </p:sp>
+      <p:sp>
+        <p:nvSpPr>
+          <p:cNvPr id="28" name="Text 25"/>
+          <p:cNvSpPr/>
+          <p:nvPr/>
+        </p:nvSpPr>
+        <p:spPr>
+          <a:xfrm>
+            <a:off x="3515868" y="4663440"/>
+            <a:ext cx="365760" cy="365760"/>
+          </a:xfrm>
+          <a:prstGeom prst="rect">
+            <a:avLst/>
+          </a:prstGeom>
+          <a:noFill/>
+          <a:ln/>
+        </p:spPr>
+        <p:txBody>
+          <a:bodyPr wrap="square" rtlCol="0" anchor="ctr"/>
+          <a:lstStyle/>
+          <a:p>
+            <a:pPr indent="0" marL="0">
+              <a:buNone/>
+            </a:pPr>
+            <a:r>
+              <a:rPr lang="en-US" sz="1400" b="1" dirty="0">
+                <a:solidFill>
+                  <a:srgbClr val="F7A23B"/>
+                </a:solidFill>
+                <a:latin typeface="Arial" pitchFamily="34" charset="0"/>
+                <a:ea typeface="Arial" pitchFamily="34" charset="-122"/>
+                <a:cs typeface="Arial" pitchFamily="34" charset="-120"/>
+              </a:rPr>
+              <a:t>B</a:t>
+            </a:r>
+            <a:endParaRPr lang="en-US" sz="1400" dirty="0"/>
+          </a:p>
+        </p:txBody>
+      </p:sp>
+      <p:sp>
+        <p:nvSpPr>
+          <p:cNvPr id="29" name="Text 26"/>
+          <p:cNvSpPr/>
+          <p:nvPr/>
+        </p:nvSpPr>
+        <p:spPr>
+          <a:xfrm>
+            <a:off x="3515868" y="5029200"/>
+            <a:ext cx="2327148" cy="914400"/>
+          </a:xfrm>
+          <a:prstGeom prst="rect">
+            <a:avLst/>
+          </a:prstGeom>
+          <a:noFill/>
+          <a:ln/>
+        </p:spPr>
+        <p:txBody>
+          <a:bodyPr wrap="square" rtlCol="0" anchor="t"/>
+          <a:lstStyle/>
+          <a:p>
+            <a:pPr indent="0" marL="0">
+              <a:buNone/>
+            </a:pPr>
+            <a:r>
+              <a:rPr lang="en-US" sz="1500" dirty="0">
+                <a:solidFill>
+                  <a:srgbClr val="1F2937"/>
+                </a:solidFill>
+                <a:latin typeface="Arial" pitchFamily="34" charset="0"/>
+                <a:ea typeface="Arial" pitchFamily="34" charset="-122"/>
+                <a:cs typeface="Arial" pitchFamily="34" charset="-120"/>
+              </a:rPr>
+              <a:t>fica como saldo por até 60 meses</a:t>
+            </a:r>
+            <a:endParaRPr lang="en-US" sz="1500" dirty="0"/>
+          </a:p>
+        </p:txBody>
+      </p:sp>
+      <p:sp>
+        <p:nvSpPr>
+          <p:cNvPr id="30" name="Shape 27"/>
+          <p:cNvSpPr/>
+          <p:nvPr/>
+        </p:nvSpPr>
+        <p:spPr>
+          <a:xfrm>
+            <a:off x="6208776" y="4572000"/>
+            <a:ext cx="2601468" cy="1463040"/>
+          </a:xfrm>
+          <a:prstGeom prst="roundRect">
+            <a:avLst>
+              <a:gd name="adj" fmla="val 5000"/>
+            </a:avLst>
+          </a:prstGeom>
+          <a:solidFill>
+            <a:srgbClr val="FFFFFF"/>
+          </a:solidFill>
+          <a:ln w="9525">
+            <a:solidFill>
+              <a:srgbClr val="D8E0EC"/>
+            </a:solidFill>
+            <a:prstDash val="solid"/>
+          </a:ln>
+        </p:spPr>
+      </p:sp>
+      <p:sp>
+        <p:nvSpPr>
+          <p:cNvPr id="31" name="Text 28"/>
+          <p:cNvSpPr/>
+          <p:nvPr/>
+        </p:nvSpPr>
+        <p:spPr>
+          <a:xfrm>
+            <a:off x="6345936" y="4663440"/>
+            <a:ext cx="365760" cy="365760"/>
+          </a:xfrm>
+          <a:prstGeom prst="rect">
+            <a:avLst/>
+          </a:prstGeom>
+          <a:noFill/>
+          <a:ln/>
+        </p:spPr>
+        <p:txBody>
+          <a:bodyPr wrap="square" rtlCol="0" anchor="ctr"/>
+          <a:lstStyle/>
+          <a:p>
+            <a:pPr indent="0" marL="0">
+              <a:buNone/>
+            </a:pPr>
+            <a:r>
+              <a:rPr lang="en-US" sz="1400" b="1" dirty="0">
+                <a:solidFill>
+                  <a:srgbClr val="F7A23B"/>
+                </a:solidFill>
+                <a:latin typeface="Arial" pitchFamily="34" charset="0"/>
+                <a:ea typeface="Arial" pitchFamily="34" charset="-122"/>
+                <a:cs typeface="Arial" pitchFamily="34" charset="-120"/>
+              </a:rPr>
+              <a:t>C</a:t>
+            </a:r>
+            <a:endParaRPr lang="en-US" sz="1400" dirty="0"/>
+          </a:p>
+        </p:txBody>
+      </p:sp>
+      <p:sp>
+        <p:nvSpPr>
+          <p:cNvPr id="32" name="Text 29"/>
+          <p:cNvSpPr/>
+          <p:nvPr/>
+        </p:nvSpPr>
+        <p:spPr>
+          <a:xfrm>
+            <a:off x="6345936" y="5029200"/>
+            <a:ext cx="2327148" cy="914400"/>
+          </a:xfrm>
+          <a:prstGeom prst="rect">
+            <a:avLst/>
+          </a:prstGeom>
+          <a:noFill/>
+          <a:ln/>
+        </p:spPr>
+        <p:txBody>
+          <a:bodyPr wrap="square" rtlCol="0" anchor="t"/>
+          <a:lstStyle/>
+          <a:p>
+            <a:pPr indent="0" marL="0">
+              <a:buNone/>
+            </a:pPr>
+            <a:r>
+              <a:rPr lang="en-US" sz="1500" dirty="0">
+                <a:solidFill>
+                  <a:srgbClr val="1F2937"/>
+                </a:solidFill>
+                <a:latin typeface="Arial" pitchFamily="34" charset="0"/>
+                <a:ea typeface="Arial" pitchFamily="34" charset="-122"/>
+                <a:cs typeface="Arial" pitchFamily="34" charset="-120"/>
+              </a:rPr>
+              <a:t>volta para a usina</a:t>
+            </a:r>
+            <a:endParaRPr lang="en-US" sz="1500" dirty="0"/>
+          </a:p>
+        </p:txBody>
+      </p:sp>
+      <p:sp>
+        <p:nvSpPr>
+          <p:cNvPr id="33" name="Shape 30"/>
+          <p:cNvSpPr/>
+          <p:nvPr/>
+        </p:nvSpPr>
+        <p:spPr>
+          <a:xfrm>
+            <a:off x="9038844" y="4572000"/>
+            <a:ext cx="2601468" cy="1463040"/>
+          </a:xfrm>
+          <a:prstGeom prst="roundRect">
+            <a:avLst>
+              <a:gd name="adj" fmla="val 5000"/>
+            </a:avLst>
+          </a:prstGeom>
+          <a:solidFill>
+            <a:srgbClr val="FFFFFF"/>
+          </a:solidFill>
+          <a:ln w="9525">
+            <a:solidFill>
+              <a:srgbClr val="D8E0EC"/>
+            </a:solidFill>
+            <a:prstDash val="solid"/>
+          </a:ln>
+        </p:spPr>
+      </p:sp>
+      <p:sp>
+        <p:nvSpPr>
+          <p:cNvPr id="34" name="Text 31"/>
+          <p:cNvSpPr/>
+          <p:nvPr/>
+        </p:nvSpPr>
+        <p:spPr>
+          <a:xfrm>
+            <a:off x="9176004" y="4663440"/>
+            <a:ext cx="365760" cy="365760"/>
+          </a:xfrm>
+          <a:prstGeom prst="rect">
+            <a:avLst/>
+          </a:prstGeom>
+          <a:noFill/>
+          <a:ln/>
+        </p:spPr>
+        <p:txBody>
+          <a:bodyPr wrap="square" rtlCol="0" anchor="ctr"/>
+          <a:lstStyle/>
+          <a:p>
+            <a:pPr indent="0" marL="0">
+              <a:buNone/>
+            </a:pPr>
+            <a:r>
+              <a:rPr lang="en-US" sz="1400" b="1" dirty="0">
+                <a:solidFill>
+                  <a:srgbClr val="F7A23B"/>
+                </a:solidFill>
+                <a:latin typeface="Arial" pitchFamily="34" charset="0"/>
+                <a:ea typeface="Arial" pitchFamily="34" charset="-122"/>
+                <a:cs typeface="Arial" pitchFamily="34" charset="-120"/>
+              </a:rPr>
+              <a:t>D</a:t>
+            </a:r>
+            <a:endParaRPr lang="en-US" sz="1400" dirty="0"/>
+          </a:p>
+        </p:txBody>
+      </p:sp>
+      <p:sp>
+        <p:nvSpPr>
+          <p:cNvPr id="35" name="Text 32"/>
+          <p:cNvSpPr/>
+          <p:nvPr/>
+        </p:nvSpPr>
+        <p:spPr>
+          <a:xfrm>
+            <a:off x="9176004" y="5029200"/>
+            <a:ext cx="2327148" cy="914400"/>
+          </a:xfrm>
+          <a:prstGeom prst="rect">
+            <a:avLst/>
+          </a:prstGeom>
+          <a:noFill/>
+          <a:ln/>
+        </p:spPr>
+        <p:txBody>
+          <a:bodyPr wrap="square" rtlCol="0" anchor="t"/>
+          <a:lstStyle/>
+          <a:p>
+            <a:pPr indent="0" marL="0">
+              <a:buNone/>
+            </a:pPr>
+            <a:r>
+              <a:rPr lang="en-US" sz="1500" dirty="0">
+                <a:solidFill>
+                  <a:srgbClr val="1F2937"/>
+                </a:solidFill>
+                <a:latin typeface="Arial" pitchFamily="34" charset="0"/>
+                <a:ea typeface="Arial" pitchFamily="34" charset="-122"/>
+                <a:cs typeface="Arial" pitchFamily="34" charset="-120"/>
+              </a:rPr>
+              <a:t>vira dinheiro</a:t>
+            </a:r>
+            <a:endParaRPr lang="en-US" sz="1500" dirty="0"/>
           </a:p>
         </p:txBody>
       </p:sp>
@@ -18612,6 +20455,4101 @@
             <a:fld id="{F7021451-1387-4CA6-816F-3879F97B5CBC}" type="slidenum">
               <a:rPr b="1" lang="en-US"/>
               <a:t>30</a:t>
+            </a:fld>
+            <a:endParaRPr lang="en-US"/>
+          </a:p>
+        </p:txBody>
+      </p:sp>
+    </p:spTree>
+  </p:cSld>
+  <p:clrMapOvr>
+    <a:masterClrMapping/>
+  </p:clrMapOvr>
+</p:sld>
+</file>
+
+<file path=ppt/slides/slide31.xml><?xml version="1.0" encoding="utf-8"?>
+<p:sld xmlns:a="http://schemas.openxmlformats.org/drawingml/2006/main" xmlns:r="http://schemas.openxmlformats.org/officeDocument/2006/relationships" xmlns:p="http://schemas.openxmlformats.org/presentationml/2006/main">
+  <p:cSld name="Slide 31">
+    <p:bg>
+      <p:bgPr>
+        <a:solidFill>
+          <a:srgbClr val="F6F8FB"/>
+        </a:solidFill>
+      </p:bgPr>
+    </p:bg>
+    <p:spTree>
+      <p:nvGrpSpPr>
+        <p:cNvPr id="1" name=""/>
+        <p:cNvGrpSpPr/>
+        <p:nvPr/>
+      </p:nvGrpSpPr>
+      <p:grpSpPr>
+        <a:xfrm>
+          <a:off x="0" y="0"/>
+          <a:ext cx="0" cy="0"/>
+          <a:chOff x="0" y="0"/>
+          <a:chExt cx="0" cy="0"/>
+        </a:xfrm>
+      </p:grpSpPr>
+      <p:sp>
+        <p:nvSpPr>
+          <p:cNvPr id="2" name="Shape 0"/>
+          <p:cNvSpPr/>
+          <p:nvPr/>
+        </p:nvSpPr>
+        <p:spPr>
+          <a:xfrm>
+            <a:off x="0" y="6510528"/>
+            <a:ext cx="12191695" cy="347472"/>
+          </a:xfrm>
+          <a:prstGeom prst="rect">
+            <a:avLst/>
+          </a:prstGeom>
+          <a:solidFill>
+            <a:srgbClr val="FFFFFF"/>
+          </a:solidFill>
+          <a:ln w="6350">
+            <a:solidFill>
+              <a:srgbClr val="D8E0EC"/>
+            </a:solidFill>
+            <a:prstDash val="solid"/>
+          </a:ln>
+        </p:spPr>
+      </p:sp>
+      <p:pic>
+        <p:nvPicPr>
+          <p:cNvPr id="3" name="Image 0" descr="/www/wwwroot/rexar/gdsolar/docs/curso/slides/assets/logo-gdsolar.png">    </p:cNvPr>
+          <p:cNvPicPr>
+            <a:picLocks noChangeAspect="1"/>
+          </p:cNvPicPr>
+          <p:nvPr/>
+        </p:nvPicPr>
+        <p:blipFill>
+          <a:blip r:embed="rId1"/>
+          <a:stretch>
+            <a:fillRect/>
+          </a:stretch>
+        </p:blipFill>
+        <p:spPr>
+          <a:xfrm>
+            <a:off x="548640" y="6547104"/>
+            <a:ext cx="274320" cy="274320"/>
+          </a:xfrm>
+          <a:prstGeom prst="rect">
+            <a:avLst/>
+          </a:prstGeom>
+        </p:spPr>
+      </p:pic>
+      <p:sp>
+        <p:nvSpPr>
+          <p:cNvPr id="4" name="Text 1"/>
+          <p:cNvSpPr/>
+          <p:nvPr/>
+        </p:nvSpPr>
+        <p:spPr>
+          <a:xfrm>
+            <a:off x="886968" y="6528816"/>
+            <a:ext cx="6400800" cy="310896"/>
+          </a:xfrm>
+          <a:prstGeom prst="rect">
+            <a:avLst/>
+          </a:prstGeom>
+          <a:noFill/>
+          <a:ln/>
+        </p:spPr>
+        <p:txBody>
+          <a:bodyPr wrap="square" rtlCol="0" anchor="ctr"/>
+          <a:lstStyle/>
+          <a:p>
+            <a:pPr indent="0" marL="0">
+              <a:buNone/>
+            </a:pPr>
+            <a:r>
+              <a:rPr lang="en-US" sz="900" b="1" dirty="0">
+                <a:solidFill>
+                  <a:srgbClr val="64748B"/>
+                </a:solidFill>
+                <a:latin typeface="Arial" pitchFamily="34" charset="0"/>
+                <a:ea typeface="Arial" pitchFamily="34" charset="-122"/>
+                <a:cs typeface="Arial" pitchFamily="34" charset="-120"/>
+              </a:rPr>
+              <a:t>GD Solar  ·  Formação em Energia por Assinatura</a:t>
+            </a:r>
+            <a:endParaRPr lang="en-US" sz="900" dirty="0"/>
+          </a:p>
+        </p:txBody>
+      </p:sp>
+      <p:sp>
+        <p:nvSpPr>
+          <p:cNvPr id="5" name="Text 2"/>
+          <p:cNvSpPr/>
+          <p:nvPr/>
+        </p:nvSpPr>
+        <p:spPr>
+          <a:xfrm>
+            <a:off x="7132320" y="6528816"/>
+            <a:ext cx="4023360" cy="310896"/>
+          </a:xfrm>
+          <a:prstGeom prst="rect">
+            <a:avLst/>
+          </a:prstGeom>
+          <a:noFill/>
+          <a:ln/>
+        </p:spPr>
+        <p:txBody>
+          <a:bodyPr wrap="square" rtlCol="0" anchor="ctr"/>
+          <a:lstStyle/>
+          <a:p>
+            <a:pPr algn="r" indent="0" marL="0">
+              <a:buNone/>
+            </a:pPr>
+            <a:r>
+              <a:rPr lang="en-US" sz="900" dirty="0">
+                <a:solidFill>
+                  <a:srgbClr val="64748B"/>
+                </a:solidFill>
+                <a:latin typeface="Arial" pitchFamily="34" charset="0"/>
+                <a:ea typeface="Arial" pitchFamily="34" charset="-122"/>
+                <a:cs typeface="Arial" pitchFamily="34" charset="-120"/>
+              </a:rPr>
+              <a:t>M7 · Teste rápido</a:t>
+            </a:r>
+            <a:endParaRPr lang="en-US" sz="900" dirty="0"/>
+          </a:p>
+        </p:txBody>
+      </p:sp>
+      <p:sp>
+        <p:nvSpPr>
+          <p:cNvPr id="6" name="Shape 3"/>
+          <p:cNvSpPr/>
+          <p:nvPr/>
+        </p:nvSpPr>
+        <p:spPr>
+          <a:xfrm>
+            <a:off x="548640" y="384048"/>
+            <a:ext cx="82296" cy="658368"/>
+          </a:xfrm>
+          <a:prstGeom prst="rect">
+            <a:avLst/>
+          </a:prstGeom>
+          <a:solidFill>
+            <a:srgbClr val="F7A23B"/>
+          </a:solidFill>
+          <a:ln/>
+        </p:spPr>
+      </p:sp>
+      <p:sp>
+        <p:nvSpPr>
+          <p:cNvPr id="7" name="Text 4"/>
+          <p:cNvSpPr/>
+          <p:nvPr/>
+        </p:nvSpPr>
+        <p:spPr>
+          <a:xfrm>
+            <a:off x="777240" y="292608"/>
+            <a:ext cx="10972800" cy="274320"/>
+          </a:xfrm>
+          <a:prstGeom prst="rect">
+            <a:avLst/>
+          </a:prstGeom>
+          <a:noFill/>
+          <a:ln/>
+        </p:spPr>
+        <p:txBody>
+          <a:bodyPr wrap="square" rtlCol="0" anchor="ctr"/>
+          <a:lstStyle/>
+          <a:p>
+            <a:pPr indent="0" marL="0">
+              <a:buNone/>
+            </a:pPr>
+            <a:r>
+              <a:rPr lang="en-US" sz="1000" b="1" spc="100" kern="0" dirty="0">
+                <a:solidFill>
+                  <a:srgbClr val="F7A23B"/>
+                </a:solidFill>
+                <a:latin typeface="Arial" pitchFamily="34" charset="0"/>
+                <a:ea typeface="Arial" pitchFamily="34" charset="-122"/>
+                <a:cs typeface="Arial" pitchFamily="34" charset="-120"/>
+              </a:rPr>
+              <a:t>QUESTÕES 3–4 DE 6</a:t>
+            </a:r>
+            <a:endParaRPr lang="en-US" sz="1000" dirty="0"/>
+          </a:p>
+        </p:txBody>
+      </p:sp>
+      <p:sp>
+        <p:nvSpPr>
+          <p:cNvPr id="8" name="Text 5"/>
+          <p:cNvSpPr/>
+          <p:nvPr/>
+        </p:nvSpPr>
+        <p:spPr>
+          <a:xfrm>
+            <a:off x="777240" y="530352"/>
+            <a:ext cx="10881360" cy="566928"/>
+          </a:xfrm>
+          <a:prstGeom prst="rect">
+            <a:avLst/>
+          </a:prstGeom>
+          <a:noFill/>
+          <a:ln/>
+        </p:spPr>
+        <p:txBody>
+          <a:bodyPr wrap="square" rtlCol="0" anchor="ctr">
+            <a:normAutofit/>
+          </a:bodyPr>
+          <a:lstStyle/>
+          <a:p>
+            <a:pPr indent="0" marL="0">
+              <a:buNone/>
+            </a:pPr>
+            <a:r>
+              <a:rPr lang="en-US" sz="2600" b="1" dirty="0">
+                <a:solidFill>
+                  <a:srgbClr val="1B3A6B"/>
+                </a:solidFill>
+                <a:latin typeface="Arial" pitchFamily="34" charset="0"/>
+                <a:ea typeface="Arial" pitchFamily="34" charset="-122"/>
+                <a:cs typeface="Arial" pitchFamily="34" charset="-120"/>
+              </a:rPr>
+              <a:t>Teste rápido</a:t>
+            </a:r>
+            <a:endParaRPr lang="en-US" sz="2600" dirty="0"/>
+          </a:p>
+        </p:txBody>
+      </p:sp>
+      <p:sp>
+        <p:nvSpPr>
+          <p:cNvPr id="9" name="Shape 6"/>
+          <p:cNvSpPr/>
+          <p:nvPr/>
+        </p:nvSpPr>
+        <p:spPr>
+          <a:xfrm>
+            <a:off x="548640" y="1325880"/>
+            <a:ext cx="502920" cy="502920"/>
+          </a:xfrm>
+          <a:prstGeom prst="ellipse">
+            <a:avLst/>
+          </a:prstGeom>
+          <a:solidFill>
+            <a:srgbClr val="1B3A6B"/>
+          </a:solidFill>
+          <a:ln/>
+        </p:spPr>
+      </p:sp>
+      <p:sp>
+        <p:nvSpPr>
+          <p:cNvPr id="10" name="Text 7"/>
+          <p:cNvSpPr/>
+          <p:nvPr/>
+        </p:nvSpPr>
+        <p:spPr>
+          <a:xfrm>
+            <a:off x="548640" y="1325880"/>
+            <a:ext cx="502920" cy="502920"/>
+          </a:xfrm>
+          <a:prstGeom prst="rect">
+            <a:avLst/>
+          </a:prstGeom>
+          <a:noFill/>
+          <a:ln/>
+        </p:spPr>
+        <p:txBody>
+          <a:bodyPr wrap="square" rtlCol="0" anchor="ctr"/>
+          <a:lstStyle/>
+          <a:p>
+            <a:pPr algn="ctr" indent="0" marL="0">
+              <a:buNone/>
+            </a:pPr>
+            <a:r>
+              <a:rPr lang="en-US" sz="1600" b="1" dirty="0">
+                <a:solidFill>
+                  <a:srgbClr val="FFFFFF"/>
+                </a:solidFill>
+                <a:latin typeface="Arial" pitchFamily="34" charset="0"/>
+                <a:ea typeface="Arial" pitchFamily="34" charset="-122"/>
+                <a:cs typeface="Arial" pitchFamily="34" charset="-120"/>
+              </a:rPr>
+              <a:t>3</a:t>
+            </a:r>
+            <a:endParaRPr lang="en-US" sz="1600" dirty="0"/>
+          </a:p>
+        </p:txBody>
+      </p:sp>
+      <p:sp>
+        <p:nvSpPr>
+          <p:cNvPr id="11" name="Text 8"/>
+          <p:cNvSpPr/>
+          <p:nvPr/>
+        </p:nvSpPr>
+        <p:spPr>
+          <a:xfrm>
+            <a:off x="1234440" y="1280160"/>
+            <a:ext cx="10424160" cy="640080"/>
+          </a:xfrm>
+          <a:prstGeom prst="rect">
+            <a:avLst/>
+          </a:prstGeom>
+          <a:noFill/>
+          <a:ln/>
+        </p:spPr>
+        <p:txBody>
+          <a:bodyPr wrap="square" rtlCol="0" anchor="ctr"/>
+          <a:lstStyle/>
+          <a:p>
+            <a:pPr indent="0" marL="0">
+              <a:buNone/>
+            </a:pPr>
+            <a:r>
+              <a:rPr lang="en-US" sz="1800" b="1" dirty="0">
+                <a:solidFill>
+                  <a:srgbClr val="1B3A6B"/>
+                </a:solidFill>
+                <a:latin typeface="Arial" pitchFamily="34" charset="0"/>
+                <a:ea typeface="Arial" pitchFamily="34" charset="-122"/>
+                <a:cs typeface="Arial" pitchFamily="34" charset="-120"/>
+              </a:rPr>
+              <a:t>A cobrança da plataforma incide sobre:</a:t>
+            </a:r>
+            <a:endParaRPr lang="en-US" sz="1800" dirty="0"/>
+          </a:p>
+        </p:txBody>
+      </p:sp>
+      <p:sp>
+        <p:nvSpPr>
+          <p:cNvPr id="12" name="Shape 9"/>
+          <p:cNvSpPr/>
+          <p:nvPr/>
+        </p:nvSpPr>
+        <p:spPr>
+          <a:xfrm>
+            <a:off x="548640" y="2057400"/>
+            <a:ext cx="2601468" cy="1463040"/>
+          </a:xfrm>
+          <a:prstGeom prst="roundRect">
+            <a:avLst>
+              <a:gd name="adj" fmla="val 5000"/>
+            </a:avLst>
+          </a:prstGeom>
+          <a:solidFill>
+            <a:srgbClr val="FFFFFF"/>
+          </a:solidFill>
+          <a:ln w="9525">
+            <a:solidFill>
+              <a:srgbClr val="D8E0EC"/>
+            </a:solidFill>
+            <a:prstDash val="solid"/>
+          </a:ln>
+        </p:spPr>
+      </p:sp>
+      <p:sp>
+        <p:nvSpPr>
+          <p:cNvPr id="13" name="Text 10"/>
+          <p:cNvSpPr/>
+          <p:nvPr/>
+        </p:nvSpPr>
+        <p:spPr>
+          <a:xfrm>
+            <a:off x="685800" y="2148840"/>
+            <a:ext cx="365760" cy="365760"/>
+          </a:xfrm>
+          <a:prstGeom prst="rect">
+            <a:avLst/>
+          </a:prstGeom>
+          <a:noFill/>
+          <a:ln/>
+        </p:spPr>
+        <p:txBody>
+          <a:bodyPr wrap="square" rtlCol="0" anchor="ctr"/>
+          <a:lstStyle/>
+          <a:p>
+            <a:pPr indent="0" marL="0">
+              <a:buNone/>
+            </a:pPr>
+            <a:r>
+              <a:rPr lang="en-US" sz="1400" b="1" dirty="0">
+                <a:solidFill>
+                  <a:srgbClr val="F7A23B"/>
+                </a:solidFill>
+                <a:latin typeface="Arial" pitchFamily="34" charset="0"/>
+                <a:ea typeface="Arial" pitchFamily="34" charset="-122"/>
+                <a:cs typeface="Arial" pitchFamily="34" charset="-120"/>
+              </a:rPr>
+              <a:t>A</a:t>
+            </a:r>
+            <a:endParaRPr lang="en-US" sz="1400" dirty="0"/>
+          </a:p>
+        </p:txBody>
+      </p:sp>
+      <p:sp>
+        <p:nvSpPr>
+          <p:cNvPr id="14" name="Text 11"/>
+          <p:cNvSpPr/>
+          <p:nvPr/>
+        </p:nvSpPr>
+        <p:spPr>
+          <a:xfrm>
+            <a:off x="685800" y="2514600"/>
+            <a:ext cx="2327148" cy="914400"/>
+          </a:xfrm>
+          <a:prstGeom prst="rect">
+            <a:avLst/>
+          </a:prstGeom>
+          <a:noFill/>
+          <a:ln/>
+        </p:spPr>
+        <p:txBody>
+          <a:bodyPr wrap="square" rtlCol="0" anchor="t"/>
+          <a:lstStyle/>
+          <a:p>
+            <a:pPr indent="0" marL="0">
+              <a:buNone/>
+            </a:pPr>
+            <a:r>
+              <a:rPr lang="en-US" sz="1500" dirty="0">
+                <a:solidFill>
+                  <a:srgbClr val="1F2937"/>
+                </a:solidFill>
+                <a:latin typeface="Arial" pitchFamily="34" charset="0"/>
+                <a:ea typeface="Arial" pitchFamily="34" charset="-122"/>
+                <a:cs typeface="Arial" pitchFamily="34" charset="-120"/>
+              </a:rPr>
+              <a:t>o valor total da fatura</a:t>
+            </a:r>
+            <a:endParaRPr lang="en-US" sz="1500" dirty="0"/>
+          </a:p>
+        </p:txBody>
+      </p:sp>
+      <p:sp>
+        <p:nvSpPr>
+          <p:cNvPr id="15" name="Shape 12"/>
+          <p:cNvSpPr/>
+          <p:nvPr/>
+        </p:nvSpPr>
+        <p:spPr>
+          <a:xfrm>
+            <a:off x="3378708" y="2057400"/>
+            <a:ext cx="2601468" cy="1463040"/>
+          </a:xfrm>
+          <a:prstGeom prst="roundRect">
+            <a:avLst>
+              <a:gd name="adj" fmla="val 5000"/>
+            </a:avLst>
+          </a:prstGeom>
+          <a:solidFill>
+            <a:srgbClr val="FFFFFF"/>
+          </a:solidFill>
+          <a:ln w="9525">
+            <a:solidFill>
+              <a:srgbClr val="D8E0EC"/>
+            </a:solidFill>
+            <a:prstDash val="solid"/>
+          </a:ln>
+        </p:spPr>
+      </p:sp>
+      <p:sp>
+        <p:nvSpPr>
+          <p:cNvPr id="16" name="Text 13"/>
+          <p:cNvSpPr/>
+          <p:nvPr/>
+        </p:nvSpPr>
+        <p:spPr>
+          <a:xfrm>
+            <a:off x="3515868" y="2148840"/>
+            <a:ext cx="365760" cy="365760"/>
+          </a:xfrm>
+          <a:prstGeom prst="rect">
+            <a:avLst/>
+          </a:prstGeom>
+          <a:noFill/>
+          <a:ln/>
+        </p:spPr>
+        <p:txBody>
+          <a:bodyPr wrap="square" rtlCol="0" anchor="ctr"/>
+          <a:lstStyle/>
+          <a:p>
+            <a:pPr indent="0" marL="0">
+              <a:buNone/>
+            </a:pPr>
+            <a:r>
+              <a:rPr lang="en-US" sz="1400" b="1" dirty="0">
+                <a:solidFill>
+                  <a:srgbClr val="F7A23B"/>
+                </a:solidFill>
+                <a:latin typeface="Arial" pitchFamily="34" charset="0"/>
+                <a:ea typeface="Arial" pitchFamily="34" charset="-122"/>
+                <a:cs typeface="Arial" pitchFamily="34" charset="-120"/>
+              </a:rPr>
+              <a:t>C</a:t>
+            </a:r>
+            <a:endParaRPr lang="en-US" sz="1400" dirty="0"/>
+          </a:p>
+        </p:txBody>
+      </p:sp>
+      <p:sp>
+        <p:nvSpPr>
+          <p:cNvPr id="17" name="Text 14"/>
+          <p:cNvSpPr/>
+          <p:nvPr/>
+        </p:nvSpPr>
+        <p:spPr>
+          <a:xfrm>
+            <a:off x="3515868" y="2514600"/>
+            <a:ext cx="2327148" cy="914400"/>
+          </a:xfrm>
+          <a:prstGeom prst="rect">
+            <a:avLst/>
+          </a:prstGeom>
+          <a:noFill/>
+          <a:ln/>
+        </p:spPr>
+        <p:txBody>
+          <a:bodyPr wrap="square" rtlCol="0" anchor="t"/>
+          <a:lstStyle/>
+          <a:p>
+            <a:pPr indent="0" marL="0">
+              <a:buNone/>
+            </a:pPr>
+            <a:r>
+              <a:rPr lang="en-US" sz="1500" dirty="0">
+                <a:solidFill>
+                  <a:srgbClr val="1F2937"/>
+                </a:solidFill>
+                <a:latin typeface="Arial" pitchFamily="34" charset="0"/>
+                <a:ea typeface="Arial" pitchFamily="34" charset="-122"/>
+                <a:cs typeface="Arial" pitchFamily="34" charset="-120"/>
+              </a:rPr>
+              <a:t>a tarifa cheia</a:t>
+            </a:r>
+            <a:endParaRPr lang="en-US" sz="1500" dirty="0"/>
+          </a:p>
+        </p:txBody>
+      </p:sp>
+      <p:sp>
+        <p:nvSpPr>
+          <p:cNvPr id="18" name="Shape 15"/>
+          <p:cNvSpPr/>
+          <p:nvPr/>
+        </p:nvSpPr>
+        <p:spPr>
+          <a:xfrm>
+            <a:off x="6208776" y="2057400"/>
+            <a:ext cx="2601468" cy="1463040"/>
+          </a:xfrm>
+          <a:prstGeom prst="roundRect">
+            <a:avLst>
+              <a:gd name="adj" fmla="val 5000"/>
+            </a:avLst>
+          </a:prstGeom>
+          <a:solidFill>
+            <a:srgbClr val="FFFFFF"/>
+          </a:solidFill>
+          <a:ln w="9525">
+            <a:solidFill>
+              <a:srgbClr val="D8E0EC"/>
+            </a:solidFill>
+            <a:prstDash val="solid"/>
+          </a:ln>
+        </p:spPr>
+      </p:sp>
+      <p:sp>
+        <p:nvSpPr>
+          <p:cNvPr id="19" name="Text 16"/>
+          <p:cNvSpPr/>
+          <p:nvPr/>
+        </p:nvSpPr>
+        <p:spPr>
+          <a:xfrm>
+            <a:off x="6345936" y="2148840"/>
+            <a:ext cx="365760" cy="365760"/>
+          </a:xfrm>
+          <a:prstGeom prst="rect">
+            <a:avLst/>
+          </a:prstGeom>
+          <a:noFill/>
+          <a:ln/>
+        </p:spPr>
+        <p:txBody>
+          <a:bodyPr wrap="square" rtlCol="0" anchor="ctr"/>
+          <a:lstStyle/>
+          <a:p>
+            <a:pPr indent="0" marL="0">
+              <a:buNone/>
+            </a:pPr>
+            <a:r>
+              <a:rPr lang="en-US" sz="1400" b="1" dirty="0">
+                <a:solidFill>
+                  <a:srgbClr val="F7A23B"/>
+                </a:solidFill>
+                <a:latin typeface="Arial" pitchFamily="34" charset="0"/>
+                <a:ea typeface="Arial" pitchFamily="34" charset="-122"/>
+                <a:cs typeface="Arial" pitchFamily="34" charset="-120"/>
+              </a:rPr>
+              <a:t>D</a:t>
+            </a:r>
+            <a:endParaRPr lang="en-US" sz="1400" dirty="0"/>
+          </a:p>
+        </p:txBody>
+      </p:sp>
+      <p:sp>
+        <p:nvSpPr>
+          <p:cNvPr id="20" name="Text 17"/>
+          <p:cNvSpPr/>
+          <p:nvPr/>
+        </p:nvSpPr>
+        <p:spPr>
+          <a:xfrm>
+            <a:off x="6345936" y="2514600"/>
+            <a:ext cx="2327148" cy="914400"/>
+          </a:xfrm>
+          <a:prstGeom prst="rect">
+            <a:avLst/>
+          </a:prstGeom>
+          <a:noFill/>
+          <a:ln/>
+        </p:spPr>
+        <p:txBody>
+          <a:bodyPr wrap="square" rtlCol="0" anchor="t"/>
+          <a:lstStyle/>
+          <a:p>
+            <a:pPr indent="0" marL="0">
+              <a:buNone/>
+            </a:pPr>
+            <a:r>
+              <a:rPr lang="en-US" sz="1500" dirty="0">
+                <a:solidFill>
+                  <a:srgbClr val="1F2937"/>
+                </a:solidFill>
+                <a:latin typeface="Arial" pitchFamily="34" charset="0"/>
+                <a:ea typeface="Arial" pitchFamily="34" charset="-122"/>
+                <a:cs typeface="Arial" pitchFamily="34" charset="-120"/>
+              </a:rPr>
+              <a:t>o saldo de créditos</a:t>
+            </a:r>
+            <a:endParaRPr lang="en-US" sz="1500" dirty="0"/>
+          </a:p>
+        </p:txBody>
+      </p:sp>
+      <p:sp>
+        <p:nvSpPr>
+          <p:cNvPr id="21" name="Shape 18"/>
+          <p:cNvSpPr/>
+          <p:nvPr/>
+        </p:nvSpPr>
+        <p:spPr>
+          <a:xfrm>
+            <a:off x="548640" y="3840480"/>
+            <a:ext cx="502920" cy="502920"/>
+          </a:xfrm>
+          <a:prstGeom prst="ellipse">
+            <a:avLst/>
+          </a:prstGeom>
+          <a:solidFill>
+            <a:srgbClr val="1B3A6B"/>
+          </a:solidFill>
+          <a:ln/>
+        </p:spPr>
+      </p:sp>
+      <p:sp>
+        <p:nvSpPr>
+          <p:cNvPr id="22" name="Text 19"/>
+          <p:cNvSpPr/>
+          <p:nvPr/>
+        </p:nvSpPr>
+        <p:spPr>
+          <a:xfrm>
+            <a:off x="548640" y="3840480"/>
+            <a:ext cx="502920" cy="502920"/>
+          </a:xfrm>
+          <a:prstGeom prst="rect">
+            <a:avLst/>
+          </a:prstGeom>
+          <a:noFill/>
+          <a:ln/>
+        </p:spPr>
+        <p:txBody>
+          <a:bodyPr wrap="square" rtlCol="0" anchor="ctr"/>
+          <a:lstStyle/>
+          <a:p>
+            <a:pPr algn="ctr" indent="0" marL="0">
+              <a:buNone/>
+            </a:pPr>
+            <a:r>
+              <a:rPr lang="en-US" sz="1600" b="1" dirty="0">
+                <a:solidFill>
+                  <a:srgbClr val="FFFFFF"/>
+                </a:solidFill>
+                <a:latin typeface="Arial" pitchFamily="34" charset="0"/>
+                <a:ea typeface="Arial" pitchFamily="34" charset="-122"/>
+                <a:cs typeface="Arial" pitchFamily="34" charset="-120"/>
+              </a:rPr>
+              <a:t>4</a:t>
+            </a:r>
+            <a:endParaRPr lang="en-US" sz="1600" dirty="0"/>
+          </a:p>
+        </p:txBody>
+      </p:sp>
+      <p:sp>
+        <p:nvSpPr>
+          <p:cNvPr id="23" name="Text 20"/>
+          <p:cNvSpPr/>
+          <p:nvPr/>
+        </p:nvSpPr>
+        <p:spPr>
+          <a:xfrm>
+            <a:off x="1234440" y="3794760"/>
+            <a:ext cx="10424160" cy="640080"/>
+          </a:xfrm>
+          <a:prstGeom prst="rect">
+            <a:avLst/>
+          </a:prstGeom>
+          <a:noFill/>
+          <a:ln/>
+        </p:spPr>
+        <p:txBody>
+          <a:bodyPr wrap="square" rtlCol="0" anchor="ctr"/>
+          <a:lstStyle/>
+          <a:p>
+            <a:pPr indent="0" marL="0">
+              <a:buNone/>
+            </a:pPr>
+            <a:r>
+              <a:rPr lang="en-US" sz="1800" b="1" dirty="0">
+                <a:solidFill>
+                  <a:srgbClr val="1B3A6B"/>
+                </a:solidFill>
+                <a:latin typeface="Arial" pitchFamily="34" charset="0"/>
+                <a:ea typeface="Arial" pitchFamily="34" charset="-122"/>
+                <a:cs typeface="Arial" pitchFamily="34" charset="-120"/>
+              </a:rPr>
+              <a:t>A senha de PDF das faturas costuma ser cadastrada:</a:t>
+            </a:r>
+            <a:endParaRPr lang="en-US" sz="1800" dirty="0"/>
+          </a:p>
+        </p:txBody>
+      </p:sp>
+      <p:sp>
+        <p:nvSpPr>
+          <p:cNvPr id="24" name="Shape 21"/>
+          <p:cNvSpPr/>
+          <p:nvPr/>
+        </p:nvSpPr>
+        <p:spPr>
+          <a:xfrm>
+            <a:off x="548640" y="4572000"/>
+            <a:ext cx="2601468" cy="1463040"/>
+          </a:xfrm>
+          <a:prstGeom prst="roundRect">
+            <a:avLst>
+              <a:gd name="adj" fmla="val 5000"/>
+            </a:avLst>
+          </a:prstGeom>
+          <a:solidFill>
+            <a:srgbClr val="FFFFFF"/>
+          </a:solidFill>
+          <a:ln w="9525">
+            <a:solidFill>
+              <a:srgbClr val="D8E0EC"/>
+            </a:solidFill>
+            <a:prstDash val="solid"/>
+          </a:ln>
+        </p:spPr>
+      </p:sp>
+      <p:sp>
+        <p:nvSpPr>
+          <p:cNvPr id="25" name="Text 22"/>
+          <p:cNvSpPr/>
+          <p:nvPr/>
+        </p:nvSpPr>
+        <p:spPr>
+          <a:xfrm>
+            <a:off x="685800" y="4663440"/>
+            <a:ext cx="365760" cy="365760"/>
+          </a:xfrm>
+          <a:prstGeom prst="rect">
+            <a:avLst/>
+          </a:prstGeom>
+          <a:noFill/>
+          <a:ln/>
+        </p:spPr>
+        <p:txBody>
+          <a:bodyPr wrap="square" rtlCol="0" anchor="ctr"/>
+          <a:lstStyle/>
+          <a:p>
+            <a:pPr indent="0" marL="0">
+              <a:buNone/>
+            </a:pPr>
+            <a:r>
+              <a:rPr lang="en-US" sz="1400" b="1" dirty="0">
+                <a:solidFill>
+                  <a:srgbClr val="F7A23B"/>
+                </a:solidFill>
+                <a:latin typeface="Arial" pitchFamily="34" charset="0"/>
+                <a:ea typeface="Arial" pitchFamily="34" charset="-122"/>
+                <a:cs typeface="Arial" pitchFamily="34" charset="-120"/>
+              </a:rPr>
+              <a:t>B</a:t>
+            </a:r>
+            <a:endParaRPr lang="en-US" sz="1400" dirty="0"/>
+          </a:p>
+        </p:txBody>
+      </p:sp>
+      <p:sp>
+        <p:nvSpPr>
+          <p:cNvPr id="26" name="Text 23"/>
+          <p:cNvSpPr/>
+          <p:nvPr/>
+        </p:nvSpPr>
+        <p:spPr>
+          <a:xfrm>
+            <a:off x="685800" y="5029200"/>
+            <a:ext cx="2327148" cy="914400"/>
+          </a:xfrm>
+          <a:prstGeom prst="rect">
+            <a:avLst/>
+          </a:prstGeom>
+          <a:noFill/>
+          <a:ln/>
+        </p:spPr>
+        <p:txBody>
+          <a:bodyPr wrap="square" rtlCol="0" anchor="t"/>
+          <a:lstStyle/>
+          <a:p>
+            <a:pPr indent="0" marL="0">
+              <a:buNone/>
+            </a:pPr>
+            <a:r>
+              <a:rPr lang="en-US" sz="1500" dirty="0">
+                <a:solidFill>
+                  <a:srgbClr val="1F2937"/>
+                </a:solidFill>
+                <a:latin typeface="Arial" pitchFamily="34" charset="0"/>
+                <a:ea typeface="Arial" pitchFamily="34" charset="-122"/>
+                <a:cs typeface="Arial" pitchFamily="34" charset="-120"/>
+              </a:rPr>
+              <a:t>no navegador</a:t>
+            </a:r>
+            <a:endParaRPr lang="en-US" sz="1500" dirty="0"/>
+          </a:p>
+        </p:txBody>
+      </p:sp>
+      <p:sp>
+        <p:nvSpPr>
+          <p:cNvPr id="27" name="Shape 24"/>
+          <p:cNvSpPr/>
+          <p:nvPr/>
+        </p:nvSpPr>
+        <p:spPr>
+          <a:xfrm>
+            <a:off x="3378708" y="4572000"/>
+            <a:ext cx="2601468" cy="1463040"/>
+          </a:xfrm>
+          <a:prstGeom prst="roundRect">
+            <a:avLst>
+              <a:gd name="adj" fmla="val 5000"/>
+            </a:avLst>
+          </a:prstGeom>
+          <a:solidFill>
+            <a:srgbClr val="FFFFFF"/>
+          </a:solidFill>
+          <a:ln w="9525">
+            <a:solidFill>
+              <a:srgbClr val="D8E0EC"/>
+            </a:solidFill>
+            <a:prstDash val="solid"/>
+          </a:ln>
+        </p:spPr>
+      </p:sp>
+      <p:sp>
+        <p:nvSpPr>
+          <p:cNvPr id="28" name="Text 25"/>
+          <p:cNvSpPr/>
+          <p:nvPr/>
+        </p:nvSpPr>
+        <p:spPr>
+          <a:xfrm>
+            <a:off x="3515868" y="4663440"/>
+            <a:ext cx="365760" cy="365760"/>
+          </a:xfrm>
+          <a:prstGeom prst="rect">
+            <a:avLst/>
+          </a:prstGeom>
+          <a:noFill/>
+          <a:ln/>
+        </p:spPr>
+        <p:txBody>
+          <a:bodyPr wrap="square" rtlCol="0" anchor="ctr"/>
+          <a:lstStyle/>
+          <a:p>
+            <a:pPr indent="0" marL="0">
+              <a:buNone/>
+            </a:pPr>
+            <a:r>
+              <a:rPr lang="en-US" sz="1400" b="1" dirty="0">
+                <a:solidFill>
+                  <a:srgbClr val="F7A23B"/>
+                </a:solidFill>
+                <a:latin typeface="Arial" pitchFamily="34" charset="0"/>
+                <a:ea typeface="Arial" pitchFamily="34" charset="-122"/>
+                <a:cs typeface="Arial" pitchFamily="34" charset="-120"/>
+              </a:rPr>
+              <a:t>C</a:t>
+            </a:r>
+            <a:endParaRPr lang="en-US" sz="1400" dirty="0"/>
+          </a:p>
+        </p:txBody>
+      </p:sp>
+      <p:sp>
+        <p:nvSpPr>
+          <p:cNvPr id="29" name="Text 26"/>
+          <p:cNvSpPr/>
+          <p:nvPr/>
+        </p:nvSpPr>
+        <p:spPr>
+          <a:xfrm>
+            <a:off x="3515868" y="5029200"/>
+            <a:ext cx="2327148" cy="914400"/>
+          </a:xfrm>
+          <a:prstGeom prst="rect">
+            <a:avLst/>
+          </a:prstGeom>
+          <a:noFill/>
+          <a:ln/>
+        </p:spPr>
+        <p:txBody>
+          <a:bodyPr wrap="square" rtlCol="0" anchor="t"/>
+          <a:lstStyle/>
+          <a:p>
+            <a:pPr indent="0" marL="0">
+              <a:buNone/>
+            </a:pPr>
+            <a:r>
+              <a:rPr lang="en-US" sz="1500" dirty="0">
+                <a:solidFill>
+                  <a:srgbClr val="1F2937"/>
+                </a:solidFill>
+                <a:latin typeface="Arial" pitchFamily="34" charset="0"/>
+                <a:ea typeface="Arial" pitchFamily="34" charset="-122"/>
+                <a:cs typeface="Arial" pitchFamily="34" charset="-120"/>
+              </a:rPr>
+              <a:t>na distribuidora</a:t>
+            </a:r>
+            <a:endParaRPr lang="en-US" sz="1500" dirty="0"/>
+          </a:p>
+        </p:txBody>
+      </p:sp>
+      <p:sp>
+        <p:nvSpPr>
+          <p:cNvPr id="30" name="Shape 27"/>
+          <p:cNvSpPr/>
+          <p:nvPr/>
+        </p:nvSpPr>
+        <p:spPr>
+          <a:xfrm>
+            <a:off x="6208776" y="4572000"/>
+            <a:ext cx="2601468" cy="1463040"/>
+          </a:xfrm>
+          <a:prstGeom prst="roundRect">
+            <a:avLst>
+              <a:gd name="adj" fmla="val 5000"/>
+            </a:avLst>
+          </a:prstGeom>
+          <a:solidFill>
+            <a:srgbClr val="FFFFFF"/>
+          </a:solidFill>
+          <a:ln w="9525">
+            <a:solidFill>
+              <a:srgbClr val="D8E0EC"/>
+            </a:solidFill>
+            <a:prstDash val="solid"/>
+          </a:ln>
+        </p:spPr>
+      </p:sp>
+      <p:sp>
+        <p:nvSpPr>
+          <p:cNvPr id="31" name="Text 28"/>
+          <p:cNvSpPr/>
+          <p:nvPr/>
+        </p:nvSpPr>
+        <p:spPr>
+          <a:xfrm>
+            <a:off x="6345936" y="4663440"/>
+            <a:ext cx="365760" cy="365760"/>
+          </a:xfrm>
+          <a:prstGeom prst="rect">
+            <a:avLst/>
+          </a:prstGeom>
+          <a:noFill/>
+          <a:ln/>
+        </p:spPr>
+        <p:txBody>
+          <a:bodyPr wrap="square" rtlCol="0" anchor="ctr"/>
+          <a:lstStyle/>
+          <a:p>
+            <a:pPr indent="0" marL="0">
+              <a:buNone/>
+            </a:pPr>
+            <a:r>
+              <a:rPr lang="en-US" sz="1400" b="1" dirty="0">
+                <a:solidFill>
+                  <a:srgbClr val="F7A23B"/>
+                </a:solidFill>
+                <a:latin typeface="Arial" pitchFamily="34" charset="0"/>
+                <a:ea typeface="Arial" pitchFamily="34" charset="-122"/>
+                <a:cs typeface="Arial" pitchFamily="34" charset="-120"/>
+              </a:rPr>
+              <a:t>D</a:t>
+            </a:r>
+            <a:endParaRPr lang="en-US" sz="1400" dirty="0"/>
+          </a:p>
+        </p:txBody>
+      </p:sp>
+      <p:sp>
+        <p:nvSpPr>
+          <p:cNvPr id="32" name="Text 29"/>
+          <p:cNvSpPr/>
+          <p:nvPr/>
+        </p:nvSpPr>
+        <p:spPr>
+          <a:xfrm>
+            <a:off x="6345936" y="5029200"/>
+            <a:ext cx="2327148" cy="914400"/>
+          </a:xfrm>
+          <a:prstGeom prst="rect">
+            <a:avLst/>
+          </a:prstGeom>
+          <a:noFill/>
+          <a:ln/>
+        </p:spPr>
+        <p:txBody>
+          <a:bodyPr wrap="square" rtlCol="0" anchor="t"/>
+          <a:lstStyle/>
+          <a:p>
+            <a:pPr indent="0" marL="0">
+              <a:buNone/>
+            </a:pPr>
+            <a:r>
+              <a:rPr lang="en-US" sz="1500" dirty="0">
+                <a:solidFill>
+                  <a:srgbClr val="1F2937"/>
+                </a:solidFill>
+                <a:latin typeface="Arial" pitchFamily="34" charset="0"/>
+                <a:ea typeface="Arial" pitchFamily="34" charset="-122"/>
+                <a:cs typeface="Arial" pitchFamily="34" charset="-120"/>
+              </a:rPr>
+              <a:t>não é possível</a:t>
+            </a:r>
+            <a:endParaRPr lang="en-US" sz="1500" dirty="0"/>
+          </a:p>
+        </p:txBody>
+      </p:sp>
+      <p:sp>
+        <p:nvSpPr>
+          <p:cNvPr id="25" name="Slide Number Placeholder 0"/>
+          <p:cNvSpPr>
+            <a:spLocks noGrp="1"/>
+          </p:cNvSpPr>
+          <p:nvPr>
+            <p:ph type="sldNum" sz="quarter" idx="4294967295"/>
+          </p:nvPr>
+        </p:nvSpPr>
+        <p:spPr>
+          <a:xfrm>
+            <a:off x="11292840" y="6556248"/>
+            <a:ext cx="548640" cy="256032"/>
+          </a:xfrm>
+          <a:prstGeom prst="rect">
+            <a:avLst/>
+          </a:prstGeom>
+          <a:extLst>
+            <a:ext uri="{C572A759-6A51-4108-AA02-DFA0A04FC94B}">
+              <ma14:wrappingTextBoxFlag xmlns:ma14="http://schemas.microsoft.com/office/mac/drawingml/2011/main" val="0"/>
+            </a:ext>
+          </a:extLst>
+        </p:spPr>
+        <p:txBody>
+          <a:bodyPr/>
+          <a:lstStyle>
+            <a:lvl1pPr>
+              <a:defRPr sz="900">
+                <a:solidFill>
+                  <a:srgbClr val="1B3A6B"/>
+                </a:solidFill>
+                <a:latin typeface="Arial"/>
+                <a:ea typeface="Arial"/>
+                <a:cs typeface="Arial"/>
+              </a:defRPr>
+            </a:lvl1pPr>
+          </a:lstStyle>
+          <a:p>
+            <a:pPr algn="r"/>
+            <a:fld id="{F7021451-1387-4CA6-816F-3879F97B5CBC}" type="slidenum">
+              <a:rPr b="1" lang="en-US"/>
+              <a:t>31</a:t>
+            </a:fld>
+            <a:endParaRPr lang="en-US"/>
+          </a:p>
+        </p:txBody>
+      </p:sp>
+    </p:spTree>
+  </p:cSld>
+  <p:clrMapOvr>
+    <a:masterClrMapping/>
+  </p:clrMapOvr>
+</p:sld>
+</file>
+
+<file path=ppt/slides/slide32.xml><?xml version="1.0" encoding="utf-8"?>
+<p:sld xmlns:a="http://schemas.openxmlformats.org/drawingml/2006/main" xmlns:r="http://schemas.openxmlformats.org/officeDocument/2006/relationships" xmlns:p="http://schemas.openxmlformats.org/presentationml/2006/main">
+  <p:cSld name="Slide 32">
+    <p:bg>
+      <p:bgPr>
+        <a:solidFill>
+          <a:srgbClr val="F6F8FB"/>
+        </a:solidFill>
+      </p:bgPr>
+    </p:bg>
+    <p:spTree>
+      <p:nvGrpSpPr>
+        <p:cNvPr id="1" name=""/>
+        <p:cNvGrpSpPr/>
+        <p:nvPr/>
+      </p:nvGrpSpPr>
+      <p:grpSpPr>
+        <a:xfrm>
+          <a:off x="0" y="0"/>
+          <a:ext cx="0" cy="0"/>
+          <a:chOff x="0" y="0"/>
+          <a:chExt cx="0" cy="0"/>
+        </a:xfrm>
+      </p:grpSpPr>
+      <p:sp>
+        <p:nvSpPr>
+          <p:cNvPr id="2" name="Shape 0"/>
+          <p:cNvSpPr/>
+          <p:nvPr/>
+        </p:nvSpPr>
+        <p:spPr>
+          <a:xfrm>
+            <a:off x="0" y="6510528"/>
+            <a:ext cx="12191695" cy="347472"/>
+          </a:xfrm>
+          <a:prstGeom prst="rect">
+            <a:avLst/>
+          </a:prstGeom>
+          <a:solidFill>
+            <a:srgbClr val="FFFFFF"/>
+          </a:solidFill>
+          <a:ln w="6350">
+            <a:solidFill>
+              <a:srgbClr val="D8E0EC"/>
+            </a:solidFill>
+            <a:prstDash val="solid"/>
+          </a:ln>
+        </p:spPr>
+      </p:sp>
+      <p:pic>
+        <p:nvPicPr>
+          <p:cNvPr id="3" name="Image 0" descr="/www/wwwroot/rexar/gdsolar/docs/curso/slides/assets/logo-gdsolar.png">    </p:cNvPr>
+          <p:cNvPicPr>
+            <a:picLocks noChangeAspect="1"/>
+          </p:cNvPicPr>
+          <p:nvPr/>
+        </p:nvPicPr>
+        <p:blipFill>
+          <a:blip r:embed="rId1"/>
+          <a:stretch>
+            <a:fillRect/>
+          </a:stretch>
+        </p:blipFill>
+        <p:spPr>
+          <a:xfrm>
+            <a:off x="548640" y="6547104"/>
+            <a:ext cx="274320" cy="274320"/>
+          </a:xfrm>
+          <a:prstGeom prst="rect">
+            <a:avLst/>
+          </a:prstGeom>
+        </p:spPr>
+      </p:pic>
+      <p:sp>
+        <p:nvSpPr>
+          <p:cNvPr id="4" name="Text 1"/>
+          <p:cNvSpPr/>
+          <p:nvPr/>
+        </p:nvSpPr>
+        <p:spPr>
+          <a:xfrm>
+            <a:off x="886968" y="6528816"/>
+            <a:ext cx="6400800" cy="310896"/>
+          </a:xfrm>
+          <a:prstGeom prst="rect">
+            <a:avLst/>
+          </a:prstGeom>
+          <a:noFill/>
+          <a:ln/>
+        </p:spPr>
+        <p:txBody>
+          <a:bodyPr wrap="square" rtlCol="0" anchor="ctr"/>
+          <a:lstStyle/>
+          <a:p>
+            <a:pPr indent="0" marL="0">
+              <a:buNone/>
+            </a:pPr>
+            <a:r>
+              <a:rPr lang="en-US" sz="900" b="1" dirty="0">
+                <a:solidFill>
+                  <a:srgbClr val="64748B"/>
+                </a:solidFill>
+                <a:latin typeface="Arial" pitchFamily="34" charset="0"/>
+                <a:ea typeface="Arial" pitchFamily="34" charset="-122"/>
+                <a:cs typeface="Arial" pitchFamily="34" charset="-120"/>
+              </a:rPr>
+              <a:t>GD Solar  ·  Formação em Energia por Assinatura</a:t>
+            </a:r>
+            <a:endParaRPr lang="en-US" sz="900" dirty="0"/>
+          </a:p>
+        </p:txBody>
+      </p:sp>
+      <p:sp>
+        <p:nvSpPr>
+          <p:cNvPr id="5" name="Text 2"/>
+          <p:cNvSpPr/>
+          <p:nvPr/>
+        </p:nvSpPr>
+        <p:spPr>
+          <a:xfrm>
+            <a:off x="7132320" y="6528816"/>
+            <a:ext cx="4023360" cy="310896"/>
+          </a:xfrm>
+          <a:prstGeom prst="rect">
+            <a:avLst/>
+          </a:prstGeom>
+          <a:noFill/>
+          <a:ln/>
+        </p:spPr>
+        <p:txBody>
+          <a:bodyPr wrap="square" rtlCol="0" anchor="ctr"/>
+          <a:lstStyle/>
+          <a:p>
+            <a:pPr algn="r" indent="0" marL="0">
+              <a:buNone/>
+            </a:pPr>
+            <a:r>
+              <a:rPr lang="en-US" sz="900" dirty="0">
+                <a:solidFill>
+                  <a:srgbClr val="64748B"/>
+                </a:solidFill>
+                <a:latin typeface="Arial" pitchFamily="34" charset="0"/>
+                <a:ea typeface="Arial" pitchFamily="34" charset="-122"/>
+                <a:cs typeface="Arial" pitchFamily="34" charset="-120"/>
+              </a:rPr>
+              <a:t>M7 · Teste rápido</a:t>
+            </a:r>
+            <a:endParaRPr lang="en-US" sz="900" dirty="0"/>
+          </a:p>
+        </p:txBody>
+      </p:sp>
+      <p:sp>
+        <p:nvSpPr>
+          <p:cNvPr id="6" name="Shape 3"/>
+          <p:cNvSpPr/>
+          <p:nvPr/>
+        </p:nvSpPr>
+        <p:spPr>
+          <a:xfrm>
+            <a:off x="548640" y="384048"/>
+            <a:ext cx="82296" cy="658368"/>
+          </a:xfrm>
+          <a:prstGeom prst="rect">
+            <a:avLst/>
+          </a:prstGeom>
+          <a:solidFill>
+            <a:srgbClr val="F7A23B"/>
+          </a:solidFill>
+          <a:ln/>
+        </p:spPr>
+      </p:sp>
+      <p:sp>
+        <p:nvSpPr>
+          <p:cNvPr id="7" name="Text 4"/>
+          <p:cNvSpPr/>
+          <p:nvPr/>
+        </p:nvSpPr>
+        <p:spPr>
+          <a:xfrm>
+            <a:off x="777240" y="292608"/>
+            <a:ext cx="10972800" cy="274320"/>
+          </a:xfrm>
+          <a:prstGeom prst="rect">
+            <a:avLst/>
+          </a:prstGeom>
+          <a:noFill/>
+          <a:ln/>
+        </p:spPr>
+        <p:txBody>
+          <a:bodyPr wrap="square" rtlCol="0" anchor="ctr"/>
+          <a:lstStyle/>
+          <a:p>
+            <a:pPr indent="0" marL="0">
+              <a:buNone/>
+            </a:pPr>
+            <a:r>
+              <a:rPr lang="en-US" sz="1000" b="1" spc="100" kern="0" dirty="0">
+                <a:solidFill>
+                  <a:srgbClr val="F7A23B"/>
+                </a:solidFill>
+                <a:latin typeface="Arial" pitchFamily="34" charset="0"/>
+                <a:ea typeface="Arial" pitchFamily="34" charset="-122"/>
+                <a:cs typeface="Arial" pitchFamily="34" charset="-120"/>
+              </a:rPr>
+              <a:t>QUESTÕES 5–6 DE 6</a:t>
+            </a:r>
+            <a:endParaRPr lang="en-US" sz="1000" dirty="0"/>
+          </a:p>
+        </p:txBody>
+      </p:sp>
+      <p:sp>
+        <p:nvSpPr>
+          <p:cNvPr id="8" name="Text 5"/>
+          <p:cNvSpPr/>
+          <p:nvPr/>
+        </p:nvSpPr>
+        <p:spPr>
+          <a:xfrm>
+            <a:off x="777240" y="530352"/>
+            <a:ext cx="10881360" cy="566928"/>
+          </a:xfrm>
+          <a:prstGeom prst="rect">
+            <a:avLst/>
+          </a:prstGeom>
+          <a:noFill/>
+          <a:ln/>
+        </p:spPr>
+        <p:txBody>
+          <a:bodyPr wrap="square" rtlCol="0" anchor="ctr">
+            <a:normAutofit/>
+          </a:bodyPr>
+          <a:lstStyle/>
+          <a:p>
+            <a:pPr indent="0" marL="0">
+              <a:buNone/>
+            </a:pPr>
+            <a:r>
+              <a:rPr lang="en-US" sz="2600" b="1" dirty="0">
+                <a:solidFill>
+                  <a:srgbClr val="1B3A6B"/>
+                </a:solidFill>
+                <a:latin typeface="Arial" pitchFamily="34" charset="0"/>
+                <a:ea typeface="Arial" pitchFamily="34" charset="-122"/>
+                <a:cs typeface="Arial" pitchFamily="34" charset="-120"/>
+              </a:rPr>
+              <a:t>Teste rápido</a:t>
+            </a:r>
+            <a:endParaRPr lang="en-US" sz="2600" dirty="0"/>
+          </a:p>
+        </p:txBody>
+      </p:sp>
+      <p:sp>
+        <p:nvSpPr>
+          <p:cNvPr id="9" name="Shape 6"/>
+          <p:cNvSpPr/>
+          <p:nvPr/>
+        </p:nvSpPr>
+        <p:spPr>
+          <a:xfrm>
+            <a:off x="548640" y="1325880"/>
+            <a:ext cx="502920" cy="502920"/>
+          </a:xfrm>
+          <a:prstGeom prst="ellipse">
+            <a:avLst/>
+          </a:prstGeom>
+          <a:solidFill>
+            <a:srgbClr val="1B3A6B"/>
+          </a:solidFill>
+          <a:ln/>
+        </p:spPr>
+      </p:sp>
+      <p:sp>
+        <p:nvSpPr>
+          <p:cNvPr id="10" name="Text 7"/>
+          <p:cNvSpPr/>
+          <p:nvPr/>
+        </p:nvSpPr>
+        <p:spPr>
+          <a:xfrm>
+            <a:off x="548640" y="1325880"/>
+            <a:ext cx="502920" cy="502920"/>
+          </a:xfrm>
+          <a:prstGeom prst="rect">
+            <a:avLst/>
+          </a:prstGeom>
+          <a:noFill/>
+          <a:ln/>
+        </p:spPr>
+        <p:txBody>
+          <a:bodyPr wrap="square" rtlCol="0" anchor="ctr"/>
+          <a:lstStyle/>
+          <a:p>
+            <a:pPr algn="ctr" indent="0" marL="0">
+              <a:buNone/>
+            </a:pPr>
+            <a:r>
+              <a:rPr lang="en-US" sz="1600" b="1" dirty="0">
+                <a:solidFill>
+                  <a:srgbClr val="FFFFFF"/>
+                </a:solidFill>
+                <a:latin typeface="Arial" pitchFamily="34" charset="0"/>
+                <a:ea typeface="Arial" pitchFamily="34" charset="-122"/>
+                <a:cs typeface="Arial" pitchFamily="34" charset="-120"/>
+              </a:rPr>
+              <a:t>5</a:t>
+            </a:r>
+            <a:endParaRPr lang="en-US" sz="1600" dirty="0"/>
+          </a:p>
+        </p:txBody>
+      </p:sp>
+      <p:sp>
+        <p:nvSpPr>
+          <p:cNvPr id="11" name="Text 8"/>
+          <p:cNvSpPr/>
+          <p:nvPr/>
+        </p:nvSpPr>
+        <p:spPr>
+          <a:xfrm>
+            <a:off x="1234440" y="1280160"/>
+            <a:ext cx="10424160" cy="640080"/>
+          </a:xfrm>
+          <a:prstGeom prst="rect">
+            <a:avLst/>
+          </a:prstGeom>
+          <a:noFill/>
+          <a:ln/>
+        </p:spPr>
+        <p:txBody>
+          <a:bodyPr wrap="square" rtlCol="0" anchor="ctr"/>
+          <a:lstStyle/>
+          <a:p>
+            <a:pPr indent="0" marL="0">
+              <a:buNone/>
+            </a:pPr>
+            <a:r>
+              <a:rPr lang="en-US" sz="1800" b="1" dirty="0">
+                <a:solidFill>
+                  <a:srgbClr val="1B3A6B"/>
+                </a:solidFill>
+                <a:latin typeface="Arial" pitchFamily="34" charset="0"/>
+                <a:ea typeface="Arial" pitchFamily="34" charset="-122"/>
+                <a:cs typeface="Arial" pitchFamily="34" charset="-120"/>
+              </a:rPr>
+              <a:t>Pendência "duplicate_reference" significa:</a:t>
+            </a:r>
+            <a:endParaRPr lang="en-US" sz="1800" dirty="0"/>
+          </a:p>
+        </p:txBody>
+      </p:sp>
+      <p:sp>
+        <p:nvSpPr>
+          <p:cNvPr id="12" name="Shape 9"/>
+          <p:cNvSpPr/>
+          <p:nvPr/>
+        </p:nvSpPr>
+        <p:spPr>
+          <a:xfrm>
+            <a:off x="548640" y="2057400"/>
+            <a:ext cx="2601468" cy="1463040"/>
+          </a:xfrm>
+          <a:prstGeom prst="roundRect">
+            <a:avLst>
+              <a:gd name="adj" fmla="val 5000"/>
+            </a:avLst>
+          </a:prstGeom>
+          <a:solidFill>
+            <a:srgbClr val="FFFFFF"/>
+          </a:solidFill>
+          <a:ln w="9525">
+            <a:solidFill>
+              <a:srgbClr val="D8E0EC"/>
+            </a:solidFill>
+            <a:prstDash val="solid"/>
+          </a:ln>
+        </p:spPr>
+      </p:sp>
+      <p:sp>
+        <p:nvSpPr>
+          <p:cNvPr id="13" name="Text 10"/>
+          <p:cNvSpPr/>
+          <p:nvPr/>
+        </p:nvSpPr>
+        <p:spPr>
+          <a:xfrm>
+            <a:off x="685800" y="2148840"/>
+            <a:ext cx="365760" cy="365760"/>
+          </a:xfrm>
+          <a:prstGeom prst="rect">
+            <a:avLst/>
+          </a:prstGeom>
+          <a:noFill/>
+          <a:ln/>
+        </p:spPr>
+        <p:txBody>
+          <a:bodyPr wrap="square" rtlCol="0" anchor="ctr"/>
+          <a:lstStyle/>
+          <a:p>
+            <a:pPr indent="0" marL="0">
+              <a:buNone/>
+            </a:pPr>
+            <a:r>
+              <a:rPr lang="en-US" sz="1400" b="1" dirty="0">
+                <a:solidFill>
+                  <a:srgbClr val="F7A23B"/>
+                </a:solidFill>
+                <a:latin typeface="Arial" pitchFamily="34" charset="0"/>
+                <a:ea typeface="Arial" pitchFamily="34" charset="-122"/>
+                <a:cs typeface="Arial" pitchFamily="34" charset="-120"/>
+              </a:rPr>
+              <a:t>A</a:t>
+            </a:r>
+            <a:endParaRPr lang="en-US" sz="1400" dirty="0"/>
+          </a:p>
+        </p:txBody>
+      </p:sp>
+      <p:sp>
+        <p:nvSpPr>
+          <p:cNvPr id="14" name="Text 11"/>
+          <p:cNvSpPr/>
+          <p:nvPr/>
+        </p:nvSpPr>
+        <p:spPr>
+          <a:xfrm>
+            <a:off x="685800" y="2514600"/>
+            <a:ext cx="2327148" cy="914400"/>
+          </a:xfrm>
+          <a:prstGeom prst="rect">
+            <a:avLst/>
+          </a:prstGeom>
+          <a:noFill/>
+          <a:ln/>
+        </p:spPr>
+        <p:txBody>
+          <a:bodyPr wrap="square" rtlCol="0" anchor="t"/>
+          <a:lstStyle/>
+          <a:p>
+            <a:pPr indent="0" marL="0">
+              <a:buNone/>
+            </a:pPr>
+            <a:r>
+              <a:rPr lang="en-US" sz="1500" dirty="0">
+                <a:solidFill>
+                  <a:srgbClr val="1F2937"/>
+                </a:solidFill>
+                <a:latin typeface="Arial" pitchFamily="34" charset="0"/>
+                <a:ea typeface="Arial" pitchFamily="34" charset="-122"/>
+                <a:cs typeface="Arial" pitchFamily="34" charset="-120"/>
+              </a:rPr>
+              <a:t>PDF ilegível</a:t>
+            </a:r>
+            <a:endParaRPr lang="en-US" sz="1500" dirty="0"/>
+          </a:p>
+        </p:txBody>
+      </p:sp>
+      <p:sp>
+        <p:nvSpPr>
+          <p:cNvPr id="15" name="Shape 12"/>
+          <p:cNvSpPr/>
+          <p:nvPr/>
+        </p:nvSpPr>
+        <p:spPr>
+          <a:xfrm>
+            <a:off x="3378708" y="2057400"/>
+            <a:ext cx="2601468" cy="1463040"/>
+          </a:xfrm>
+          <a:prstGeom prst="roundRect">
+            <a:avLst>
+              <a:gd name="adj" fmla="val 5000"/>
+            </a:avLst>
+          </a:prstGeom>
+          <a:solidFill>
+            <a:srgbClr val="FFFFFF"/>
+          </a:solidFill>
+          <a:ln w="9525">
+            <a:solidFill>
+              <a:srgbClr val="D8E0EC"/>
+            </a:solidFill>
+            <a:prstDash val="solid"/>
+          </a:ln>
+        </p:spPr>
+      </p:sp>
+      <p:sp>
+        <p:nvSpPr>
+          <p:cNvPr id="16" name="Text 13"/>
+          <p:cNvSpPr/>
+          <p:nvPr/>
+        </p:nvSpPr>
+        <p:spPr>
+          <a:xfrm>
+            <a:off x="3515868" y="2148840"/>
+            <a:ext cx="365760" cy="365760"/>
+          </a:xfrm>
+          <a:prstGeom prst="rect">
+            <a:avLst/>
+          </a:prstGeom>
+          <a:noFill/>
+          <a:ln/>
+        </p:spPr>
+        <p:txBody>
+          <a:bodyPr wrap="square" rtlCol="0" anchor="ctr"/>
+          <a:lstStyle/>
+          <a:p>
+            <a:pPr indent="0" marL="0">
+              <a:buNone/>
+            </a:pPr>
+            <a:r>
+              <a:rPr lang="en-US" sz="1400" b="1" dirty="0">
+                <a:solidFill>
+                  <a:srgbClr val="F7A23B"/>
+                </a:solidFill>
+                <a:latin typeface="Arial" pitchFamily="34" charset="0"/>
+                <a:ea typeface="Arial" pitchFamily="34" charset="-122"/>
+                <a:cs typeface="Arial" pitchFamily="34" charset="-120"/>
+              </a:rPr>
+              <a:t>B</a:t>
+            </a:r>
+            <a:endParaRPr lang="en-US" sz="1400" dirty="0"/>
+          </a:p>
+        </p:txBody>
+      </p:sp>
+      <p:sp>
+        <p:nvSpPr>
+          <p:cNvPr id="17" name="Text 14"/>
+          <p:cNvSpPr/>
+          <p:nvPr/>
+        </p:nvSpPr>
+        <p:spPr>
+          <a:xfrm>
+            <a:off x="3515868" y="2514600"/>
+            <a:ext cx="2327148" cy="914400"/>
+          </a:xfrm>
+          <a:prstGeom prst="rect">
+            <a:avLst/>
+          </a:prstGeom>
+          <a:noFill/>
+          <a:ln/>
+        </p:spPr>
+        <p:txBody>
+          <a:bodyPr wrap="square" rtlCol="0" anchor="t"/>
+          <a:lstStyle/>
+          <a:p>
+            <a:pPr indent="0" marL="0">
+              <a:buNone/>
+            </a:pPr>
+            <a:r>
+              <a:rPr lang="en-US" sz="1500" dirty="0">
+                <a:solidFill>
+                  <a:srgbClr val="1F2937"/>
+                </a:solidFill>
+                <a:latin typeface="Arial" pitchFamily="34" charset="0"/>
+                <a:ea typeface="Arial" pitchFamily="34" charset="-122"/>
+                <a:cs typeface="Arial" pitchFamily="34" charset="-120"/>
+              </a:rPr>
+              <a:t>já existe outra fatura para a mesma UC e referência</a:t>
+            </a:r>
+            <a:endParaRPr lang="en-US" sz="1500" dirty="0"/>
+          </a:p>
+        </p:txBody>
+      </p:sp>
+      <p:sp>
+        <p:nvSpPr>
+          <p:cNvPr id="18" name="Shape 15"/>
+          <p:cNvSpPr/>
+          <p:nvPr/>
+        </p:nvSpPr>
+        <p:spPr>
+          <a:xfrm>
+            <a:off x="6208776" y="2057400"/>
+            <a:ext cx="2601468" cy="1463040"/>
+          </a:xfrm>
+          <a:prstGeom prst="roundRect">
+            <a:avLst>
+              <a:gd name="adj" fmla="val 5000"/>
+            </a:avLst>
+          </a:prstGeom>
+          <a:solidFill>
+            <a:srgbClr val="FFFFFF"/>
+          </a:solidFill>
+          <a:ln w="9525">
+            <a:solidFill>
+              <a:srgbClr val="D8E0EC"/>
+            </a:solidFill>
+            <a:prstDash val="solid"/>
+          </a:ln>
+        </p:spPr>
+      </p:sp>
+      <p:sp>
+        <p:nvSpPr>
+          <p:cNvPr id="19" name="Text 16"/>
+          <p:cNvSpPr/>
+          <p:nvPr/>
+        </p:nvSpPr>
+        <p:spPr>
+          <a:xfrm>
+            <a:off x="6345936" y="2148840"/>
+            <a:ext cx="365760" cy="365760"/>
+          </a:xfrm>
+          <a:prstGeom prst="rect">
+            <a:avLst/>
+          </a:prstGeom>
+          <a:noFill/>
+          <a:ln/>
+        </p:spPr>
+        <p:txBody>
+          <a:bodyPr wrap="square" rtlCol="0" anchor="ctr"/>
+          <a:lstStyle/>
+          <a:p>
+            <a:pPr indent="0" marL="0">
+              <a:buNone/>
+            </a:pPr>
+            <a:r>
+              <a:rPr lang="en-US" sz="1400" b="1" dirty="0">
+                <a:solidFill>
+                  <a:srgbClr val="F7A23B"/>
+                </a:solidFill>
+                <a:latin typeface="Arial" pitchFamily="34" charset="0"/>
+                <a:ea typeface="Arial" pitchFamily="34" charset="-122"/>
+                <a:cs typeface="Arial" pitchFamily="34" charset="-120"/>
+              </a:rPr>
+              <a:t>C</a:t>
+            </a:r>
+            <a:endParaRPr lang="en-US" sz="1400" dirty="0"/>
+          </a:p>
+        </p:txBody>
+      </p:sp>
+      <p:sp>
+        <p:nvSpPr>
+          <p:cNvPr id="20" name="Text 17"/>
+          <p:cNvSpPr/>
+          <p:nvPr/>
+        </p:nvSpPr>
+        <p:spPr>
+          <a:xfrm>
+            <a:off x="6345936" y="2514600"/>
+            <a:ext cx="2327148" cy="914400"/>
+          </a:xfrm>
+          <a:prstGeom prst="rect">
+            <a:avLst/>
+          </a:prstGeom>
+          <a:noFill/>
+          <a:ln/>
+        </p:spPr>
+        <p:txBody>
+          <a:bodyPr wrap="square" rtlCol="0" anchor="t"/>
+          <a:lstStyle/>
+          <a:p>
+            <a:pPr indent="0" marL="0">
+              <a:buNone/>
+            </a:pPr>
+            <a:r>
+              <a:rPr lang="en-US" sz="1500" dirty="0">
+                <a:solidFill>
+                  <a:srgbClr val="1F2937"/>
+                </a:solidFill>
+                <a:latin typeface="Arial" pitchFamily="34" charset="0"/>
+                <a:ea typeface="Arial" pitchFamily="34" charset="-122"/>
+                <a:cs typeface="Arial" pitchFamily="34" charset="-120"/>
+              </a:rPr>
+              <a:t>cliente sem desconto</a:t>
+            </a:r>
+            <a:endParaRPr lang="en-US" sz="1500" dirty="0"/>
+          </a:p>
+        </p:txBody>
+      </p:sp>
+      <p:sp>
+        <p:nvSpPr>
+          <p:cNvPr id="21" name="Shape 18"/>
+          <p:cNvSpPr/>
+          <p:nvPr/>
+        </p:nvSpPr>
+        <p:spPr>
+          <a:xfrm>
+            <a:off x="9038844" y="2057400"/>
+            <a:ext cx="2601468" cy="1463040"/>
+          </a:xfrm>
+          <a:prstGeom prst="roundRect">
+            <a:avLst>
+              <a:gd name="adj" fmla="val 5000"/>
+            </a:avLst>
+          </a:prstGeom>
+          <a:solidFill>
+            <a:srgbClr val="FFFFFF"/>
+          </a:solidFill>
+          <a:ln w="9525">
+            <a:solidFill>
+              <a:srgbClr val="D8E0EC"/>
+            </a:solidFill>
+            <a:prstDash val="solid"/>
+          </a:ln>
+        </p:spPr>
+      </p:sp>
+      <p:sp>
+        <p:nvSpPr>
+          <p:cNvPr id="22" name="Text 19"/>
+          <p:cNvSpPr/>
+          <p:nvPr/>
+        </p:nvSpPr>
+        <p:spPr>
+          <a:xfrm>
+            <a:off x="9176004" y="2148840"/>
+            <a:ext cx="365760" cy="365760"/>
+          </a:xfrm>
+          <a:prstGeom prst="rect">
+            <a:avLst/>
+          </a:prstGeom>
+          <a:noFill/>
+          <a:ln/>
+        </p:spPr>
+        <p:txBody>
+          <a:bodyPr wrap="square" rtlCol="0" anchor="ctr"/>
+          <a:lstStyle/>
+          <a:p>
+            <a:pPr indent="0" marL="0">
+              <a:buNone/>
+            </a:pPr>
+            <a:r>
+              <a:rPr lang="en-US" sz="1400" b="1" dirty="0">
+                <a:solidFill>
+                  <a:srgbClr val="F7A23B"/>
+                </a:solidFill>
+                <a:latin typeface="Arial" pitchFamily="34" charset="0"/>
+                <a:ea typeface="Arial" pitchFamily="34" charset="-122"/>
+                <a:cs typeface="Arial" pitchFamily="34" charset="-120"/>
+              </a:rPr>
+              <a:t>D</a:t>
+            </a:r>
+            <a:endParaRPr lang="en-US" sz="1400" dirty="0"/>
+          </a:p>
+        </p:txBody>
+      </p:sp>
+      <p:sp>
+        <p:nvSpPr>
+          <p:cNvPr id="23" name="Text 20"/>
+          <p:cNvSpPr/>
+          <p:nvPr/>
+        </p:nvSpPr>
+        <p:spPr>
+          <a:xfrm>
+            <a:off x="9176004" y="2514600"/>
+            <a:ext cx="2327148" cy="914400"/>
+          </a:xfrm>
+          <a:prstGeom prst="rect">
+            <a:avLst/>
+          </a:prstGeom>
+          <a:noFill/>
+          <a:ln/>
+        </p:spPr>
+        <p:txBody>
+          <a:bodyPr wrap="square" rtlCol="0" anchor="t"/>
+          <a:lstStyle/>
+          <a:p>
+            <a:pPr indent="0" marL="0">
+              <a:buNone/>
+            </a:pPr>
+            <a:r>
+              <a:rPr lang="en-US" sz="1500" dirty="0">
+                <a:solidFill>
+                  <a:srgbClr val="1F2937"/>
+                </a:solidFill>
+                <a:latin typeface="Arial" pitchFamily="34" charset="0"/>
+                <a:ea typeface="Arial" pitchFamily="34" charset="-122"/>
+                <a:cs typeface="Arial" pitchFamily="34" charset="-120"/>
+              </a:rPr>
+              <a:t>usina errada</a:t>
+            </a:r>
+            <a:endParaRPr lang="en-US" sz="1500" dirty="0"/>
+          </a:p>
+        </p:txBody>
+      </p:sp>
+      <p:sp>
+        <p:nvSpPr>
+          <p:cNvPr id="24" name="Shape 21"/>
+          <p:cNvSpPr/>
+          <p:nvPr/>
+        </p:nvSpPr>
+        <p:spPr>
+          <a:xfrm>
+            <a:off x="548640" y="3840480"/>
+            <a:ext cx="502920" cy="502920"/>
+          </a:xfrm>
+          <a:prstGeom prst="ellipse">
+            <a:avLst/>
+          </a:prstGeom>
+          <a:solidFill>
+            <a:srgbClr val="1B3A6B"/>
+          </a:solidFill>
+          <a:ln/>
+        </p:spPr>
+      </p:sp>
+      <p:sp>
+        <p:nvSpPr>
+          <p:cNvPr id="25" name="Text 22"/>
+          <p:cNvSpPr/>
+          <p:nvPr/>
+        </p:nvSpPr>
+        <p:spPr>
+          <a:xfrm>
+            <a:off x="548640" y="3840480"/>
+            <a:ext cx="502920" cy="502920"/>
+          </a:xfrm>
+          <a:prstGeom prst="rect">
+            <a:avLst/>
+          </a:prstGeom>
+          <a:noFill/>
+          <a:ln/>
+        </p:spPr>
+        <p:txBody>
+          <a:bodyPr wrap="square" rtlCol="0" anchor="ctr"/>
+          <a:lstStyle/>
+          <a:p>
+            <a:pPr algn="ctr" indent="0" marL="0">
+              <a:buNone/>
+            </a:pPr>
+            <a:r>
+              <a:rPr lang="en-US" sz="1600" b="1" dirty="0">
+                <a:solidFill>
+                  <a:srgbClr val="FFFFFF"/>
+                </a:solidFill>
+                <a:latin typeface="Arial" pitchFamily="34" charset="0"/>
+                <a:ea typeface="Arial" pitchFamily="34" charset="-122"/>
+                <a:cs typeface="Arial" pitchFamily="34" charset="-120"/>
+              </a:rPr>
+              <a:t>6</a:t>
+            </a:r>
+            <a:endParaRPr lang="en-US" sz="1600" dirty="0"/>
+          </a:p>
+        </p:txBody>
+      </p:sp>
+      <p:sp>
+        <p:nvSpPr>
+          <p:cNvPr id="26" name="Text 23"/>
+          <p:cNvSpPr/>
+          <p:nvPr/>
+        </p:nvSpPr>
+        <p:spPr>
+          <a:xfrm>
+            <a:off x="1234440" y="3794760"/>
+            <a:ext cx="10424160" cy="640080"/>
+          </a:xfrm>
+          <a:prstGeom prst="rect">
+            <a:avLst/>
+          </a:prstGeom>
+          <a:noFill/>
+          <a:ln/>
+        </p:spPr>
+        <p:txBody>
+          <a:bodyPr wrap="square" rtlCol="0" anchor="ctr"/>
+          <a:lstStyle/>
+          <a:p>
+            <a:pPr indent="0" marL="0">
+              <a:buNone/>
+            </a:pPr>
+            <a:r>
+              <a:rPr lang="en-US" sz="1800" b="1" dirty="0">
+                <a:solidFill>
+                  <a:srgbClr val="1B3A6B"/>
+                </a:solidFill>
+                <a:latin typeface="Arial" pitchFamily="34" charset="0"/>
+                <a:ea typeface="Arial" pitchFamily="34" charset="-122"/>
+                <a:cs typeface="Arial" pitchFamily="34" charset="-120"/>
+              </a:rPr>
+              <a:t>Uma fatura com valor total vazio ou zero pode ser aprovada?</a:t>
+            </a:r>
+            <a:endParaRPr lang="en-US" sz="1800" dirty="0"/>
+          </a:p>
+        </p:txBody>
+      </p:sp>
+      <p:sp>
+        <p:nvSpPr>
+          <p:cNvPr id="27" name="Shape 24"/>
+          <p:cNvSpPr/>
+          <p:nvPr/>
+        </p:nvSpPr>
+        <p:spPr>
+          <a:xfrm>
+            <a:off x="548640" y="4572000"/>
+            <a:ext cx="2601468" cy="1463040"/>
+          </a:xfrm>
+          <a:prstGeom prst="roundRect">
+            <a:avLst>
+              <a:gd name="adj" fmla="val 5000"/>
+            </a:avLst>
+          </a:prstGeom>
+          <a:solidFill>
+            <a:srgbClr val="FFFFFF"/>
+          </a:solidFill>
+          <a:ln w="9525">
+            <a:solidFill>
+              <a:srgbClr val="D8E0EC"/>
+            </a:solidFill>
+            <a:prstDash val="solid"/>
+          </a:ln>
+        </p:spPr>
+      </p:sp>
+      <p:sp>
+        <p:nvSpPr>
+          <p:cNvPr id="28" name="Text 25"/>
+          <p:cNvSpPr/>
+          <p:nvPr/>
+        </p:nvSpPr>
+        <p:spPr>
+          <a:xfrm>
+            <a:off x="685800" y="4663440"/>
+            <a:ext cx="365760" cy="365760"/>
+          </a:xfrm>
+          <a:prstGeom prst="rect">
+            <a:avLst/>
+          </a:prstGeom>
+          <a:noFill/>
+          <a:ln/>
+        </p:spPr>
+        <p:txBody>
+          <a:bodyPr wrap="square" rtlCol="0" anchor="ctr"/>
+          <a:lstStyle/>
+          <a:p>
+            <a:pPr indent="0" marL="0">
+              <a:buNone/>
+            </a:pPr>
+            <a:r>
+              <a:rPr lang="en-US" sz="1400" b="1" dirty="0">
+                <a:solidFill>
+                  <a:srgbClr val="F7A23B"/>
+                </a:solidFill>
+                <a:latin typeface="Arial" pitchFamily="34" charset="0"/>
+                <a:ea typeface="Arial" pitchFamily="34" charset="-122"/>
+                <a:cs typeface="Arial" pitchFamily="34" charset="-120"/>
+              </a:rPr>
+              <a:t>A</a:t>
+            </a:r>
+            <a:endParaRPr lang="en-US" sz="1400" dirty="0"/>
+          </a:p>
+        </p:txBody>
+      </p:sp>
+      <p:sp>
+        <p:nvSpPr>
+          <p:cNvPr id="29" name="Text 26"/>
+          <p:cNvSpPr/>
+          <p:nvPr/>
+        </p:nvSpPr>
+        <p:spPr>
+          <a:xfrm>
+            <a:off x="685800" y="5029200"/>
+            <a:ext cx="2327148" cy="914400"/>
+          </a:xfrm>
+          <a:prstGeom prst="rect">
+            <a:avLst/>
+          </a:prstGeom>
+          <a:noFill/>
+          <a:ln/>
+        </p:spPr>
+        <p:txBody>
+          <a:bodyPr wrap="square" rtlCol="0" anchor="t"/>
+          <a:lstStyle/>
+          <a:p>
+            <a:pPr indent="0" marL="0">
+              <a:buNone/>
+            </a:pPr>
+            <a:r>
+              <a:rPr lang="en-US" sz="1500" dirty="0">
+                <a:solidFill>
+                  <a:srgbClr val="1F2937"/>
+                </a:solidFill>
+                <a:latin typeface="Arial" pitchFamily="34" charset="0"/>
+                <a:ea typeface="Arial" pitchFamily="34" charset="-122"/>
+                <a:cs typeface="Arial" pitchFamily="34" charset="-120"/>
+              </a:rPr>
+              <a:t>Sim</a:t>
+            </a:r>
+            <a:endParaRPr lang="en-US" sz="1500" dirty="0"/>
+          </a:p>
+        </p:txBody>
+      </p:sp>
+      <p:sp>
+        <p:nvSpPr>
+          <p:cNvPr id="30" name="Shape 27"/>
+          <p:cNvSpPr/>
+          <p:nvPr/>
+        </p:nvSpPr>
+        <p:spPr>
+          <a:xfrm>
+            <a:off x="3378708" y="4572000"/>
+            <a:ext cx="2601468" cy="1463040"/>
+          </a:xfrm>
+          <a:prstGeom prst="roundRect">
+            <a:avLst>
+              <a:gd name="adj" fmla="val 5000"/>
+            </a:avLst>
+          </a:prstGeom>
+          <a:solidFill>
+            <a:srgbClr val="FFFFFF"/>
+          </a:solidFill>
+          <a:ln w="9525">
+            <a:solidFill>
+              <a:srgbClr val="D8E0EC"/>
+            </a:solidFill>
+            <a:prstDash val="solid"/>
+          </a:ln>
+        </p:spPr>
+      </p:sp>
+      <p:sp>
+        <p:nvSpPr>
+          <p:cNvPr id="31" name="Text 28"/>
+          <p:cNvSpPr/>
+          <p:nvPr/>
+        </p:nvSpPr>
+        <p:spPr>
+          <a:xfrm>
+            <a:off x="3515868" y="4663440"/>
+            <a:ext cx="365760" cy="365760"/>
+          </a:xfrm>
+          <a:prstGeom prst="rect">
+            <a:avLst/>
+          </a:prstGeom>
+          <a:noFill/>
+          <a:ln/>
+        </p:spPr>
+        <p:txBody>
+          <a:bodyPr wrap="square" rtlCol="0" anchor="ctr"/>
+          <a:lstStyle/>
+          <a:p>
+            <a:pPr indent="0" marL="0">
+              <a:buNone/>
+            </a:pPr>
+            <a:r>
+              <a:rPr lang="en-US" sz="1400" b="1" dirty="0">
+                <a:solidFill>
+                  <a:srgbClr val="F7A23B"/>
+                </a:solidFill>
+                <a:latin typeface="Arial" pitchFamily="34" charset="0"/>
+                <a:ea typeface="Arial" pitchFamily="34" charset="-122"/>
+                <a:cs typeface="Arial" pitchFamily="34" charset="-120"/>
+              </a:rPr>
+              <a:t>B</a:t>
+            </a:r>
+            <a:endParaRPr lang="en-US" sz="1400" dirty="0"/>
+          </a:p>
+        </p:txBody>
+      </p:sp>
+      <p:sp>
+        <p:nvSpPr>
+          <p:cNvPr id="32" name="Text 29"/>
+          <p:cNvSpPr/>
+          <p:nvPr/>
+        </p:nvSpPr>
+        <p:spPr>
+          <a:xfrm>
+            <a:off x="3515868" y="5029200"/>
+            <a:ext cx="2327148" cy="914400"/>
+          </a:xfrm>
+          <a:prstGeom prst="rect">
+            <a:avLst/>
+          </a:prstGeom>
+          <a:noFill/>
+          <a:ln/>
+        </p:spPr>
+        <p:txBody>
+          <a:bodyPr wrap="square" rtlCol="0" anchor="t"/>
+          <a:lstStyle/>
+          <a:p>
+            <a:pPr indent="0" marL="0">
+              <a:buNone/>
+            </a:pPr>
+            <a:r>
+              <a:rPr lang="en-US" sz="1500" dirty="0">
+                <a:solidFill>
+                  <a:srgbClr val="1F2937"/>
+                </a:solidFill>
+                <a:latin typeface="Arial" pitchFamily="34" charset="0"/>
+                <a:ea typeface="Arial" pitchFamily="34" charset="-122"/>
+                <a:cs typeface="Arial" pitchFamily="34" charset="-120"/>
+              </a:rPr>
+              <a:t>Não, a revisão exige valor válido</a:t>
+            </a:r>
+            <a:endParaRPr lang="en-US" sz="1500" dirty="0"/>
+          </a:p>
+        </p:txBody>
+      </p:sp>
+      <p:sp>
+        <p:nvSpPr>
+          <p:cNvPr id="33" name="Shape 30"/>
+          <p:cNvSpPr/>
+          <p:nvPr/>
+        </p:nvSpPr>
+        <p:spPr>
+          <a:xfrm>
+            <a:off x="6208776" y="4572000"/>
+            <a:ext cx="2601468" cy="1463040"/>
+          </a:xfrm>
+          <a:prstGeom prst="roundRect">
+            <a:avLst>
+              <a:gd name="adj" fmla="val 5000"/>
+            </a:avLst>
+          </a:prstGeom>
+          <a:solidFill>
+            <a:srgbClr val="FFFFFF"/>
+          </a:solidFill>
+          <a:ln w="9525">
+            <a:solidFill>
+              <a:srgbClr val="D8E0EC"/>
+            </a:solidFill>
+            <a:prstDash val="solid"/>
+          </a:ln>
+        </p:spPr>
+      </p:sp>
+      <p:sp>
+        <p:nvSpPr>
+          <p:cNvPr id="34" name="Text 31"/>
+          <p:cNvSpPr/>
+          <p:nvPr/>
+        </p:nvSpPr>
+        <p:spPr>
+          <a:xfrm>
+            <a:off x="6345936" y="4663440"/>
+            <a:ext cx="365760" cy="365760"/>
+          </a:xfrm>
+          <a:prstGeom prst="rect">
+            <a:avLst/>
+          </a:prstGeom>
+          <a:noFill/>
+          <a:ln/>
+        </p:spPr>
+        <p:txBody>
+          <a:bodyPr wrap="square" rtlCol="0" anchor="ctr"/>
+          <a:lstStyle/>
+          <a:p>
+            <a:pPr indent="0" marL="0">
+              <a:buNone/>
+            </a:pPr>
+            <a:r>
+              <a:rPr lang="en-US" sz="1400" b="1" dirty="0">
+                <a:solidFill>
+                  <a:srgbClr val="F7A23B"/>
+                </a:solidFill>
+                <a:latin typeface="Arial" pitchFamily="34" charset="0"/>
+                <a:ea typeface="Arial" pitchFamily="34" charset="-122"/>
+                <a:cs typeface="Arial" pitchFamily="34" charset="-120"/>
+              </a:rPr>
+              <a:t>C</a:t>
+            </a:r>
+            <a:endParaRPr lang="en-US" sz="1400" dirty="0"/>
+          </a:p>
+        </p:txBody>
+      </p:sp>
+      <p:sp>
+        <p:nvSpPr>
+          <p:cNvPr id="35" name="Text 32"/>
+          <p:cNvSpPr/>
+          <p:nvPr/>
+        </p:nvSpPr>
+        <p:spPr>
+          <a:xfrm>
+            <a:off x="6345936" y="5029200"/>
+            <a:ext cx="2327148" cy="914400"/>
+          </a:xfrm>
+          <a:prstGeom prst="rect">
+            <a:avLst/>
+          </a:prstGeom>
+          <a:noFill/>
+          <a:ln/>
+        </p:spPr>
+        <p:txBody>
+          <a:bodyPr wrap="square" rtlCol="0" anchor="t"/>
+          <a:lstStyle/>
+          <a:p>
+            <a:pPr indent="0" marL="0">
+              <a:buNone/>
+            </a:pPr>
+            <a:r>
+              <a:rPr lang="en-US" sz="1500" dirty="0">
+                <a:solidFill>
+                  <a:srgbClr val="1F2937"/>
+                </a:solidFill>
+                <a:latin typeface="Arial" pitchFamily="34" charset="0"/>
+                <a:ea typeface="Arial" pitchFamily="34" charset="-122"/>
+                <a:cs typeface="Arial" pitchFamily="34" charset="-120"/>
+              </a:rPr>
+              <a:t>Só pelo consultor</a:t>
+            </a:r>
+            <a:endParaRPr lang="en-US" sz="1500" dirty="0"/>
+          </a:p>
+        </p:txBody>
+      </p:sp>
+      <p:sp>
+        <p:nvSpPr>
+          <p:cNvPr id="36" name="Shape 33"/>
+          <p:cNvSpPr/>
+          <p:nvPr/>
+        </p:nvSpPr>
+        <p:spPr>
+          <a:xfrm>
+            <a:off x="9038844" y="4572000"/>
+            <a:ext cx="2601468" cy="1463040"/>
+          </a:xfrm>
+          <a:prstGeom prst="roundRect">
+            <a:avLst>
+              <a:gd name="adj" fmla="val 5000"/>
+            </a:avLst>
+          </a:prstGeom>
+          <a:solidFill>
+            <a:srgbClr val="FFFFFF"/>
+          </a:solidFill>
+          <a:ln w="9525">
+            <a:solidFill>
+              <a:srgbClr val="D8E0EC"/>
+            </a:solidFill>
+            <a:prstDash val="solid"/>
+          </a:ln>
+        </p:spPr>
+      </p:sp>
+      <p:sp>
+        <p:nvSpPr>
+          <p:cNvPr id="37" name="Text 34"/>
+          <p:cNvSpPr/>
+          <p:nvPr/>
+        </p:nvSpPr>
+        <p:spPr>
+          <a:xfrm>
+            <a:off x="9176004" y="4663440"/>
+            <a:ext cx="365760" cy="365760"/>
+          </a:xfrm>
+          <a:prstGeom prst="rect">
+            <a:avLst/>
+          </a:prstGeom>
+          <a:noFill/>
+          <a:ln/>
+        </p:spPr>
+        <p:txBody>
+          <a:bodyPr wrap="square" rtlCol="0" anchor="ctr"/>
+          <a:lstStyle/>
+          <a:p>
+            <a:pPr indent="0" marL="0">
+              <a:buNone/>
+            </a:pPr>
+            <a:r>
+              <a:rPr lang="en-US" sz="1400" b="1" dirty="0">
+                <a:solidFill>
+                  <a:srgbClr val="F7A23B"/>
+                </a:solidFill>
+                <a:latin typeface="Arial" pitchFamily="34" charset="0"/>
+                <a:ea typeface="Arial" pitchFamily="34" charset="-122"/>
+                <a:cs typeface="Arial" pitchFamily="34" charset="-120"/>
+              </a:rPr>
+              <a:t>D</a:t>
+            </a:r>
+            <a:endParaRPr lang="en-US" sz="1400" dirty="0"/>
+          </a:p>
+        </p:txBody>
+      </p:sp>
+      <p:sp>
+        <p:nvSpPr>
+          <p:cNvPr id="38" name="Text 35"/>
+          <p:cNvSpPr/>
+          <p:nvPr/>
+        </p:nvSpPr>
+        <p:spPr>
+          <a:xfrm>
+            <a:off x="9176004" y="5029200"/>
+            <a:ext cx="2327148" cy="914400"/>
+          </a:xfrm>
+          <a:prstGeom prst="rect">
+            <a:avLst/>
+          </a:prstGeom>
+          <a:noFill/>
+          <a:ln/>
+        </p:spPr>
+        <p:txBody>
+          <a:bodyPr wrap="square" rtlCol="0" anchor="t"/>
+          <a:lstStyle/>
+          <a:p>
+            <a:pPr indent="0" marL="0">
+              <a:buNone/>
+            </a:pPr>
+            <a:r>
+              <a:rPr lang="en-US" sz="1500" dirty="0">
+                <a:solidFill>
+                  <a:srgbClr val="1F2937"/>
+                </a:solidFill>
+                <a:latin typeface="Arial" pitchFamily="34" charset="0"/>
+                <a:ea typeface="Arial" pitchFamily="34" charset="-122"/>
+                <a:cs typeface="Arial" pitchFamily="34" charset="-120"/>
+              </a:rPr>
+              <a:t>Só no fim do mês</a:t>
+            </a:r>
+            <a:endParaRPr lang="en-US" sz="1500" dirty="0"/>
+          </a:p>
+        </p:txBody>
+      </p:sp>
+      <p:sp>
+        <p:nvSpPr>
+          <p:cNvPr id="25" name="Slide Number Placeholder 0"/>
+          <p:cNvSpPr>
+            <a:spLocks noGrp="1"/>
+          </p:cNvSpPr>
+          <p:nvPr>
+            <p:ph type="sldNum" sz="quarter" idx="4294967295"/>
+          </p:nvPr>
+        </p:nvSpPr>
+        <p:spPr>
+          <a:xfrm>
+            <a:off x="11292840" y="6556248"/>
+            <a:ext cx="548640" cy="256032"/>
+          </a:xfrm>
+          <a:prstGeom prst="rect">
+            <a:avLst/>
+          </a:prstGeom>
+          <a:extLst>
+            <a:ext uri="{C572A759-6A51-4108-AA02-DFA0A04FC94B}">
+              <ma14:wrappingTextBoxFlag xmlns:ma14="http://schemas.microsoft.com/office/mac/drawingml/2011/main" val="0"/>
+            </a:ext>
+          </a:extLst>
+        </p:spPr>
+        <p:txBody>
+          <a:bodyPr/>
+          <a:lstStyle>
+            <a:lvl1pPr>
+              <a:defRPr sz="900">
+                <a:solidFill>
+                  <a:srgbClr val="1B3A6B"/>
+                </a:solidFill>
+                <a:latin typeface="Arial"/>
+                <a:ea typeface="Arial"/>
+                <a:cs typeface="Arial"/>
+              </a:defRPr>
+            </a:lvl1pPr>
+          </a:lstStyle>
+          <a:p>
+            <a:pPr algn="r"/>
+            <a:fld id="{F7021451-1387-4CA6-816F-3879F97B5CBC}" type="slidenum">
+              <a:rPr b="1" lang="en-US"/>
+              <a:t>32</a:t>
+            </a:fld>
+            <a:endParaRPr lang="en-US"/>
+          </a:p>
+        </p:txBody>
+      </p:sp>
+    </p:spTree>
+  </p:cSld>
+  <p:clrMapOvr>
+    <a:masterClrMapping/>
+  </p:clrMapOvr>
+</p:sld>
+</file>
+
+<file path=ppt/slides/slide33.xml><?xml version="1.0" encoding="utf-8"?>
+<p:sld xmlns:a="http://schemas.openxmlformats.org/drawingml/2006/main" xmlns:r="http://schemas.openxmlformats.org/officeDocument/2006/relationships" xmlns:p="http://schemas.openxmlformats.org/presentationml/2006/main">
+  <p:cSld name="Slide 33">
+    <p:bg>
+      <p:bgPr>
+        <a:solidFill>
+          <a:srgbClr val="EEF3FA"/>
+        </a:solidFill>
+      </p:bgPr>
+    </p:bg>
+    <p:spTree>
+      <p:nvGrpSpPr>
+        <p:cNvPr id="1" name=""/>
+        <p:cNvGrpSpPr/>
+        <p:nvPr/>
+      </p:nvGrpSpPr>
+      <p:grpSpPr>
+        <a:xfrm>
+          <a:off x="0" y="0"/>
+          <a:ext cx="0" cy="0"/>
+          <a:chOff x="0" y="0"/>
+          <a:chExt cx="0" cy="0"/>
+        </a:xfrm>
+      </p:grpSpPr>
+      <p:sp>
+        <p:nvSpPr>
+          <p:cNvPr id="2" name="Shape 0"/>
+          <p:cNvSpPr/>
+          <p:nvPr/>
+        </p:nvSpPr>
+        <p:spPr>
+          <a:xfrm>
+            <a:off x="0" y="6510528"/>
+            <a:ext cx="12191695" cy="347472"/>
+          </a:xfrm>
+          <a:prstGeom prst="rect">
+            <a:avLst/>
+          </a:prstGeom>
+          <a:solidFill>
+            <a:srgbClr val="FFFFFF"/>
+          </a:solidFill>
+          <a:ln w="6350">
+            <a:solidFill>
+              <a:srgbClr val="D8E0EC"/>
+            </a:solidFill>
+            <a:prstDash val="solid"/>
+          </a:ln>
+        </p:spPr>
+      </p:sp>
+      <p:pic>
+        <p:nvPicPr>
+          <p:cNvPr id="3" name="Image 0" descr="/www/wwwroot/rexar/gdsolar/docs/curso/slides/assets/logo-gdsolar.png">    </p:cNvPr>
+          <p:cNvPicPr>
+            <a:picLocks noChangeAspect="1"/>
+          </p:cNvPicPr>
+          <p:nvPr/>
+        </p:nvPicPr>
+        <p:blipFill>
+          <a:blip r:embed="rId1"/>
+          <a:stretch>
+            <a:fillRect/>
+          </a:stretch>
+        </p:blipFill>
+        <p:spPr>
+          <a:xfrm>
+            <a:off x="548640" y="6547104"/>
+            <a:ext cx="274320" cy="274320"/>
+          </a:xfrm>
+          <a:prstGeom prst="rect">
+            <a:avLst/>
+          </a:prstGeom>
+        </p:spPr>
+      </p:pic>
+      <p:sp>
+        <p:nvSpPr>
+          <p:cNvPr id="4" name="Text 1"/>
+          <p:cNvSpPr/>
+          <p:nvPr/>
+        </p:nvSpPr>
+        <p:spPr>
+          <a:xfrm>
+            <a:off x="886968" y="6528816"/>
+            <a:ext cx="6400800" cy="310896"/>
+          </a:xfrm>
+          <a:prstGeom prst="rect">
+            <a:avLst/>
+          </a:prstGeom>
+          <a:noFill/>
+          <a:ln/>
+        </p:spPr>
+        <p:txBody>
+          <a:bodyPr wrap="square" rtlCol="0" anchor="ctr"/>
+          <a:lstStyle/>
+          <a:p>
+            <a:pPr indent="0" marL="0">
+              <a:buNone/>
+            </a:pPr>
+            <a:r>
+              <a:rPr lang="en-US" sz="900" b="1" dirty="0">
+                <a:solidFill>
+                  <a:srgbClr val="64748B"/>
+                </a:solidFill>
+                <a:latin typeface="Arial" pitchFamily="34" charset="0"/>
+                <a:ea typeface="Arial" pitchFamily="34" charset="-122"/>
+                <a:cs typeface="Arial" pitchFamily="34" charset="-120"/>
+              </a:rPr>
+              <a:t>GD Solar  ·  Formação em Energia por Assinatura</a:t>
+            </a:r>
+            <a:endParaRPr lang="en-US" sz="900" dirty="0"/>
+          </a:p>
+        </p:txBody>
+      </p:sp>
+      <p:sp>
+        <p:nvSpPr>
+          <p:cNvPr id="5" name="Text 2"/>
+          <p:cNvSpPr/>
+          <p:nvPr/>
+        </p:nvSpPr>
+        <p:spPr>
+          <a:xfrm>
+            <a:off x="7132320" y="6528816"/>
+            <a:ext cx="4023360" cy="310896"/>
+          </a:xfrm>
+          <a:prstGeom prst="rect">
+            <a:avLst/>
+          </a:prstGeom>
+          <a:noFill/>
+          <a:ln/>
+        </p:spPr>
+        <p:txBody>
+          <a:bodyPr wrap="square" rtlCol="0" anchor="ctr"/>
+          <a:lstStyle/>
+          <a:p>
+            <a:pPr algn="r" indent="0" marL="0">
+              <a:buNone/>
+            </a:pPr>
+            <a:r>
+              <a:rPr lang="en-US" sz="900" dirty="0">
+                <a:solidFill>
+                  <a:srgbClr val="64748B"/>
+                </a:solidFill>
+                <a:latin typeface="Arial" pitchFamily="34" charset="0"/>
+                <a:ea typeface="Arial" pitchFamily="34" charset="-122"/>
+                <a:cs typeface="Arial" pitchFamily="34" charset="-120"/>
+              </a:rPr>
+              <a:t>M7 · Teste rápido</a:t>
+            </a:r>
+            <a:endParaRPr lang="en-US" sz="900" dirty="0"/>
+          </a:p>
+        </p:txBody>
+      </p:sp>
+      <p:sp>
+        <p:nvSpPr>
+          <p:cNvPr id="6" name="Shape 3"/>
+          <p:cNvSpPr/>
+          <p:nvPr/>
+        </p:nvSpPr>
+        <p:spPr>
+          <a:xfrm>
+            <a:off x="548640" y="384048"/>
+            <a:ext cx="82296" cy="658368"/>
+          </a:xfrm>
+          <a:prstGeom prst="rect">
+            <a:avLst/>
+          </a:prstGeom>
+          <a:solidFill>
+            <a:srgbClr val="F7A23B"/>
+          </a:solidFill>
+          <a:ln/>
+        </p:spPr>
+      </p:sp>
+      <p:sp>
+        <p:nvSpPr>
+          <p:cNvPr id="7" name="Text 4"/>
+          <p:cNvSpPr/>
+          <p:nvPr/>
+        </p:nvSpPr>
+        <p:spPr>
+          <a:xfrm>
+            <a:off x="777240" y="292608"/>
+            <a:ext cx="10972800" cy="274320"/>
+          </a:xfrm>
+          <a:prstGeom prst="rect">
+            <a:avLst/>
+          </a:prstGeom>
+          <a:noFill/>
+          <a:ln/>
+        </p:spPr>
+        <p:txBody>
+          <a:bodyPr wrap="square" rtlCol="0" anchor="ctr"/>
+          <a:lstStyle/>
+          <a:p>
+            <a:pPr indent="0" marL="0">
+              <a:buNone/>
+            </a:pPr>
+            <a:r>
+              <a:rPr lang="en-US" sz="1000" b="1" spc="100" kern="0" dirty="0">
+                <a:solidFill>
+                  <a:srgbClr val="F7A23B"/>
+                </a:solidFill>
+                <a:latin typeface="Arial" pitchFamily="34" charset="0"/>
+                <a:ea typeface="Arial" pitchFamily="34" charset="-122"/>
+                <a:cs typeface="Arial" pitchFamily="34" charset="-120"/>
+              </a:rPr>
+              <a:t>CONFIRA SUAS RESPOSTAS</a:t>
+            </a:r>
+            <a:endParaRPr lang="en-US" sz="1000" dirty="0"/>
+          </a:p>
+        </p:txBody>
+      </p:sp>
+      <p:sp>
+        <p:nvSpPr>
+          <p:cNvPr id="8" name="Text 5"/>
+          <p:cNvSpPr/>
+          <p:nvPr/>
+        </p:nvSpPr>
+        <p:spPr>
+          <a:xfrm>
+            <a:off x="777240" y="530352"/>
+            <a:ext cx="10881360" cy="566928"/>
+          </a:xfrm>
+          <a:prstGeom prst="rect">
+            <a:avLst/>
+          </a:prstGeom>
+          <a:noFill/>
+          <a:ln/>
+        </p:spPr>
+        <p:txBody>
+          <a:bodyPr wrap="square" rtlCol="0" anchor="ctr">
+            <a:normAutofit/>
+          </a:bodyPr>
+          <a:lstStyle/>
+          <a:p>
+            <a:pPr indent="0" marL="0">
+              <a:buNone/>
+            </a:pPr>
+            <a:r>
+              <a:rPr lang="en-US" sz="2600" b="1" dirty="0">
+                <a:solidFill>
+                  <a:srgbClr val="1B3A6B"/>
+                </a:solidFill>
+                <a:latin typeface="Arial" pitchFamily="34" charset="0"/>
+                <a:ea typeface="Arial" pitchFamily="34" charset="-122"/>
+                <a:cs typeface="Arial" pitchFamily="34" charset="-120"/>
+              </a:rPr>
+              <a:t>Gabarito do teste rápido</a:t>
+            </a:r>
+            <a:endParaRPr lang="en-US" sz="2600" dirty="0"/>
+          </a:p>
+        </p:txBody>
+      </p:sp>
+      <p:sp>
+        <p:nvSpPr>
+          <p:cNvPr id="9" name="Shape 6"/>
+          <p:cNvSpPr/>
+          <p:nvPr/>
+        </p:nvSpPr>
+        <p:spPr>
+          <a:xfrm>
+            <a:off x="548640" y="1325880"/>
+            <a:ext cx="3544824" cy="2331720"/>
+          </a:xfrm>
+          <a:prstGeom prst="roundRect">
+            <a:avLst>
+              <a:gd name="adj" fmla="val 3137"/>
+            </a:avLst>
+          </a:prstGeom>
+          <a:solidFill>
+            <a:srgbClr val="FFFFFF"/>
+          </a:solidFill>
+          <a:ln w="9525">
+            <a:solidFill>
+              <a:srgbClr val="D8E0EC"/>
+            </a:solidFill>
+            <a:prstDash val="solid"/>
+          </a:ln>
+          <a:effectLst>
+            <a:outerShdw sx="100000" sy="100000" kx="0" ky="0" algn="bl" rotWithShape="0" blurRad="38100" dist="12700" dir="5400000">
+              <a:srgbClr val="000000">
+                <a:alpha val="8000"/>
+              </a:srgbClr>
+            </a:outerShdw>
+          </a:effectLst>
+        </p:spPr>
+      </p:sp>
+      <p:sp>
+        <p:nvSpPr>
+          <p:cNvPr id="10" name="Shape 7"/>
+          <p:cNvSpPr/>
+          <p:nvPr/>
+        </p:nvSpPr>
+        <p:spPr>
+          <a:xfrm>
+            <a:off x="731520" y="1508760"/>
+            <a:ext cx="457200" cy="457200"/>
+          </a:xfrm>
+          <a:prstGeom prst="ellipse">
+            <a:avLst/>
+          </a:prstGeom>
+          <a:solidFill>
+            <a:srgbClr val="1B3A6B"/>
+          </a:solidFill>
+          <a:ln/>
+        </p:spPr>
+      </p:sp>
+      <p:sp>
+        <p:nvSpPr>
+          <p:cNvPr id="11" name="Text 8"/>
+          <p:cNvSpPr/>
+          <p:nvPr/>
+        </p:nvSpPr>
+        <p:spPr>
+          <a:xfrm>
+            <a:off x="731520" y="1508760"/>
+            <a:ext cx="457200" cy="457200"/>
+          </a:xfrm>
+          <a:prstGeom prst="rect">
+            <a:avLst/>
+          </a:prstGeom>
+          <a:noFill/>
+          <a:ln/>
+        </p:spPr>
+        <p:txBody>
+          <a:bodyPr wrap="square" rtlCol="0" anchor="ctr"/>
+          <a:lstStyle/>
+          <a:p>
+            <a:pPr algn="ctr" indent="0" marL="0">
+              <a:buNone/>
+            </a:pPr>
+            <a:r>
+              <a:rPr lang="en-US" sz="1400" b="1" dirty="0">
+                <a:solidFill>
+                  <a:srgbClr val="FFFFFF"/>
+                </a:solidFill>
+                <a:latin typeface="Arial" pitchFamily="34" charset="0"/>
+                <a:ea typeface="Arial" pitchFamily="34" charset="-122"/>
+                <a:cs typeface="Arial" pitchFamily="34" charset="-120"/>
+              </a:rPr>
+              <a:t>1</a:t>
+            </a:r>
+            <a:endParaRPr lang="en-US" sz="1400" dirty="0"/>
+          </a:p>
+        </p:txBody>
+      </p:sp>
+      <p:sp>
+        <p:nvSpPr>
+          <p:cNvPr id="12" name="Text 9"/>
+          <p:cNvSpPr/>
+          <p:nvPr/>
+        </p:nvSpPr>
+        <p:spPr>
+          <a:xfrm>
+            <a:off x="1325880" y="1435608"/>
+            <a:ext cx="2630424" cy="2112264"/>
+          </a:xfrm>
+          <a:prstGeom prst="rect">
+            <a:avLst/>
+          </a:prstGeom>
+          <a:noFill/>
+          <a:ln/>
+        </p:spPr>
+        <p:txBody>
+          <a:bodyPr wrap="square" rtlCol="0" anchor="ctr">
+            <a:normAutofit/>
+          </a:bodyPr>
+          <a:lstStyle/>
+          <a:p>
+            <a:pPr indent="0" marL="0">
+              <a:buNone/>
+            </a:pPr>
+            <a:r>
+              <a:rPr lang="en-US" sz="1800" dirty="0">
+                <a:solidFill>
+                  <a:srgbClr val="1F2937"/>
+                </a:solidFill>
+                <a:latin typeface="Arial" pitchFamily="34" charset="0"/>
+                <a:ea typeface="Arial" pitchFamily="34" charset="-122"/>
+                <a:cs typeface="Arial" pitchFamily="34" charset="-120"/>
+              </a:rPr>
+              <a:t>-) </a:t>
+            </a:r>
+            <a:endParaRPr lang="en-US" sz="1800" dirty="0"/>
+          </a:p>
+        </p:txBody>
+      </p:sp>
+      <p:sp>
+        <p:nvSpPr>
+          <p:cNvPr id="13" name="Shape 10"/>
+          <p:cNvSpPr/>
+          <p:nvPr/>
+        </p:nvSpPr>
+        <p:spPr>
+          <a:xfrm>
+            <a:off x="4322064" y="1325880"/>
+            <a:ext cx="3544824" cy="2331720"/>
+          </a:xfrm>
+          <a:prstGeom prst="roundRect">
+            <a:avLst>
+              <a:gd name="adj" fmla="val 3137"/>
+            </a:avLst>
+          </a:prstGeom>
+          <a:solidFill>
+            <a:srgbClr val="FFFFFF"/>
+          </a:solidFill>
+          <a:ln w="9525">
+            <a:solidFill>
+              <a:srgbClr val="D8E0EC"/>
+            </a:solidFill>
+            <a:prstDash val="solid"/>
+          </a:ln>
+          <a:effectLst>
+            <a:outerShdw sx="100000" sy="100000" kx="0" ky="0" algn="bl" rotWithShape="0" blurRad="38100" dist="12700" dir="5400000">
+              <a:srgbClr val="000000">
+                <a:alpha val="8000"/>
+              </a:srgbClr>
+            </a:outerShdw>
+          </a:effectLst>
+        </p:spPr>
+      </p:sp>
+      <p:sp>
+        <p:nvSpPr>
+          <p:cNvPr id="14" name="Shape 11"/>
+          <p:cNvSpPr/>
+          <p:nvPr/>
+        </p:nvSpPr>
+        <p:spPr>
+          <a:xfrm>
+            <a:off x="4504944" y="1508760"/>
+            <a:ext cx="457200" cy="457200"/>
+          </a:xfrm>
+          <a:prstGeom prst="ellipse">
+            <a:avLst/>
+          </a:prstGeom>
+          <a:solidFill>
+            <a:srgbClr val="F7A23B"/>
+          </a:solidFill>
+          <a:ln/>
+        </p:spPr>
+      </p:sp>
+      <p:sp>
+        <p:nvSpPr>
+          <p:cNvPr id="15" name="Text 12"/>
+          <p:cNvSpPr/>
+          <p:nvPr/>
+        </p:nvSpPr>
+        <p:spPr>
+          <a:xfrm>
+            <a:off x="4504944" y="1508760"/>
+            <a:ext cx="457200" cy="457200"/>
+          </a:xfrm>
+          <a:prstGeom prst="rect">
+            <a:avLst/>
+          </a:prstGeom>
+          <a:noFill/>
+          <a:ln/>
+        </p:spPr>
+        <p:txBody>
+          <a:bodyPr wrap="square" rtlCol="0" anchor="ctr"/>
+          <a:lstStyle/>
+          <a:p>
+            <a:pPr algn="ctr" indent="0" marL="0">
+              <a:buNone/>
+            </a:pPr>
+            <a:r>
+              <a:rPr lang="en-US" sz="1400" b="1" dirty="0">
+                <a:solidFill>
+                  <a:srgbClr val="FFFFFF"/>
+                </a:solidFill>
+                <a:latin typeface="Arial" pitchFamily="34" charset="0"/>
+                <a:ea typeface="Arial" pitchFamily="34" charset="-122"/>
+                <a:cs typeface="Arial" pitchFamily="34" charset="-120"/>
+              </a:rPr>
+              <a:t>2</a:t>
+            </a:r>
+            <a:endParaRPr lang="en-US" sz="1400" dirty="0"/>
+          </a:p>
+        </p:txBody>
+      </p:sp>
+      <p:sp>
+        <p:nvSpPr>
+          <p:cNvPr id="16" name="Text 13"/>
+          <p:cNvSpPr/>
+          <p:nvPr/>
+        </p:nvSpPr>
+        <p:spPr>
+          <a:xfrm>
+            <a:off x="5099304" y="1435608"/>
+            <a:ext cx="2630424" cy="2112264"/>
+          </a:xfrm>
+          <a:prstGeom prst="rect">
+            <a:avLst/>
+          </a:prstGeom>
+          <a:noFill/>
+          <a:ln/>
+        </p:spPr>
+        <p:txBody>
+          <a:bodyPr wrap="square" rtlCol="0" anchor="ctr">
+            <a:normAutofit/>
+          </a:bodyPr>
+          <a:lstStyle/>
+          <a:p>
+            <a:pPr indent="0" marL="0">
+              <a:buNone/>
+            </a:pPr>
+            <a:r>
+              <a:rPr lang="en-US" sz="1800" dirty="0">
+                <a:solidFill>
+                  <a:srgbClr val="1F2937"/>
+                </a:solidFill>
+                <a:latin typeface="Arial" pitchFamily="34" charset="0"/>
+                <a:ea typeface="Arial" pitchFamily="34" charset="-122"/>
+                <a:cs typeface="Arial" pitchFamily="34" charset="-120"/>
+              </a:rPr>
+              <a:t>B) fica como saldo por até 60 meses</a:t>
+            </a:r>
+            <a:endParaRPr lang="en-US" sz="1800" dirty="0"/>
+          </a:p>
+        </p:txBody>
+      </p:sp>
+      <p:sp>
+        <p:nvSpPr>
+          <p:cNvPr id="17" name="Shape 14"/>
+          <p:cNvSpPr/>
+          <p:nvPr/>
+        </p:nvSpPr>
+        <p:spPr>
+          <a:xfrm>
+            <a:off x="8095488" y="1325880"/>
+            <a:ext cx="3544824" cy="2331720"/>
+          </a:xfrm>
+          <a:prstGeom prst="roundRect">
+            <a:avLst>
+              <a:gd name="adj" fmla="val 3137"/>
+            </a:avLst>
+          </a:prstGeom>
+          <a:solidFill>
+            <a:srgbClr val="FFFFFF"/>
+          </a:solidFill>
+          <a:ln w="9525">
+            <a:solidFill>
+              <a:srgbClr val="D8E0EC"/>
+            </a:solidFill>
+            <a:prstDash val="solid"/>
+          </a:ln>
+          <a:effectLst>
+            <a:outerShdw sx="100000" sy="100000" kx="0" ky="0" algn="bl" rotWithShape="0" blurRad="38100" dist="12700" dir="5400000">
+              <a:srgbClr val="000000">
+                <a:alpha val="8000"/>
+              </a:srgbClr>
+            </a:outerShdw>
+          </a:effectLst>
+        </p:spPr>
+      </p:sp>
+      <p:sp>
+        <p:nvSpPr>
+          <p:cNvPr id="18" name="Shape 15"/>
+          <p:cNvSpPr/>
+          <p:nvPr/>
+        </p:nvSpPr>
+        <p:spPr>
+          <a:xfrm>
+            <a:off x="8278368" y="1508760"/>
+            <a:ext cx="457200" cy="457200"/>
+          </a:xfrm>
+          <a:prstGeom prst="ellipse">
+            <a:avLst/>
+          </a:prstGeom>
+          <a:solidFill>
+            <a:srgbClr val="1B3A6B"/>
+          </a:solidFill>
+          <a:ln/>
+        </p:spPr>
+      </p:sp>
+      <p:sp>
+        <p:nvSpPr>
+          <p:cNvPr id="19" name="Text 16"/>
+          <p:cNvSpPr/>
+          <p:nvPr/>
+        </p:nvSpPr>
+        <p:spPr>
+          <a:xfrm>
+            <a:off x="8278368" y="1508760"/>
+            <a:ext cx="457200" cy="457200"/>
+          </a:xfrm>
+          <a:prstGeom prst="rect">
+            <a:avLst/>
+          </a:prstGeom>
+          <a:noFill/>
+          <a:ln/>
+        </p:spPr>
+        <p:txBody>
+          <a:bodyPr wrap="square" rtlCol="0" anchor="ctr"/>
+          <a:lstStyle/>
+          <a:p>
+            <a:pPr algn="ctr" indent="0" marL="0">
+              <a:buNone/>
+            </a:pPr>
+            <a:r>
+              <a:rPr lang="en-US" sz="1400" b="1" dirty="0">
+                <a:solidFill>
+                  <a:srgbClr val="FFFFFF"/>
+                </a:solidFill>
+                <a:latin typeface="Arial" pitchFamily="34" charset="0"/>
+                <a:ea typeface="Arial" pitchFamily="34" charset="-122"/>
+                <a:cs typeface="Arial" pitchFamily="34" charset="-120"/>
+              </a:rPr>
+              <a:t>3</a:t>
+            </a:r>
+            <a:endParaRPr lang="en-US" sz="1400" dirty="0"/>
+          </a:p>
+        </p:txBody>
+      </p:sp>
+      <p:sp>
+        <p:nvSpPr>
+          <p:cNvPr id="20" name="Text 17"/>
+          <p:cNvSpPr/>
+          <p:nvPr/>
+        </p:nvSpPr>
+        <p:spPr>
+          <a:xfrm>
+            <a:off x="8872728" y="1435608"/>
+            <a:ext cx="2630424" cy="2112264"/>
+          </a:xfrm>
+          <a:prstGeom prst="rect">
+            <a:avLst/>
+          </a:prstGeom>
+          <a:noFill/>
+          <a:ln/>
+        </p:spPr>
+        <p:txBody>
+          <a:bodyPr wrap="square" rtlCol="0" anchor="ctr">
+            <a:normAutofit/>
+          </a:bodyPr>
+          <a:lstStyle/>
+          <a:p>
+            <a:pPr indent="0" marL="0">
+              <a:buNone/>
+            </a:pPr>
+            <a:r>
+              <a:rPr lang="en-US" sz="1800" dirty="0">
+                <a:solidFill>
+                  <a:srgbClr val="1F2937"/>
+                </a:solidFill>
+                <a:latin typeface="Arial" pitchFamily="34" charset="0"/>
+                <a:ea typeface="Arial" pitchFamily="34" charset="-122"/>
+                <a:cs typeface="Arial" pitchFamily="34" charset="-120"/>
+              </a:rPr>
+              <a:t>-) </a:t>
+            </a:r>
+            <a:endParaRPr lang="en-US" sz="1800" dirty="0"/>
+          </a:p>
+        </p:txBody>
+      </p:sp>
+      <p:sp>
+        <p:nvSpPr>
+          <p:cNvPr id="21" name="Shape 18"/>
+          <p:cNvSpPr/>
+          <p:nvPr/>
+        </p:nvSpPr>
+        <p:spPr>
+          <a:xfrm>
+            <a:off x="548640" y="3886200"/>
+            <a:ext cx="3544824" cy="2331720"/>
+          </a:xfrm>
+          <a:prstGeom prst="roundRect">
+            <a:avLst>
+              <a:gd name="adj" fmla="val 3137"/>
+            </a:avLst>
+          </a:prstGeom>
+          <a:solidFill>
+            <a:srgbClr val="FFFFFF"/>
+          </a:solidFill>
+          <a:ln w="9525">
+            <a:solidFill>
+              <a:srgbClr val="D8E0EC"/>
+            </a:solidFill>
+            <a:prstDash val="solid"/>
+          </a:ln>
+          <a:effectLst>
+            <a:outerShdw sx="100000" sy="100000" kx="0" ky="0" algn="bl" rotWithShape="0" blurRad="38100" dist="12700" dir="5400000">
+              <a:srgbClr val="000000">
+                <a:alpha val="8000"/>
+              </a:srgbClr>
+            </a:outerShdw>
+          </a:effectLst>
+        </p:spPr>
+      </p:sp>
+      <p:sp>
+        <p:nvSpPr>
+          <p:cNvPr id="22" name="Shape 19"/>
+          <p:cNvSpPr/>
+          <p:nvPr/>
+        </p:nvSpPr>
+        <p:spPr>
+          <a:xfrm>
+            <a:off x="731520" y="4069080"/>
+            <a:ext cx="457200" cy="457200"/>
+          </a:xfrm>
+          <a:prstGeom prst="ellipse">
+            <a:avLst/>
+          </a:prstGeom>
+          <a:solidFill>
+            <a:srgbClr val="F7A23B"/>
+          </a:solidFill>
+          <a:ln/>
+        </p:spPr>
+      </p:sp>
+      <p:sp>
+        <p:nvSpPr>
+          <p:cNvPr id="23" name="Text 20"/>
+          <p:cNvSpPr/>
+          <p:nvPr/>
+        </p:nvSpPr>
+        <p:spPr>
+          <a:xfrm>
+            <a:off x="731520" y="4069080"/>
+            <a:ext cx="457200" cy="457200"/>
+          </a:xfrm>
+          <a:prstGeom prst="rect">
+            <a:avLst/>
+          </a:prstGeom>
+          <a:noFill/>
+          <a:ln/>
+        </p:spPr>
+        <p:txBody>
+          <a:bodyPr wrap="square" rtlCol="0" anchor="ctr"/>
+          <a:lstStyle/>
+          <a:p>
+            <a:pPr algn="ctr" indent="0" marL="0">
+              <a:buNone/>
+            </a:pPr>
+            <a:r>
+              <a:rPr lang="en-US" sz="1400" b="1" dirty="0">
+                <a:solidFill>
+                  <a:srgbClr val="FFFFFF"/>
+                </a:solidFill>
+                <a:latin typeface="Arial" pitchFamily="34" charset="0"/>
+                <a:ea typeface="Arial" pitchFamily="34" charset="-122"/>
+                <a:cs typeface="Arial" pitchFamily="34" charset="-120"/>
+              </a:rPr>
+              <a:t>4</a:t>
+            </a:r>
+            <a:endParaRPr lang="en-US" sz="1400" dirty="0"/>
+          </a:p>
+        </p:txBody>
+      </p:sp>
+      <p:sp>
+        <p:nvSpPr>
+          <p:cNvPr id="24" name="Text 21"/>
+          <p:cNvSpPr/>
+          <p:nvPr/>
+        </p:nvSpPr>
+        <p:spPr>
+          <a:xfrm>
+            <a:off x="1325880" y="3995928"/>
+            <a:ext cx="2630424" cy="2112264"/>
+          </a:xfrm>
+          <a:prstGeom prst="rect">
+            <a:avLst/>
+          </a:prstGeom>
+          <a:noFill/>
+          <a:ln/>
+        </p:spPr>
+        <p:txBody>
+          <a:bodyPr wrap="square" rtlCol="0" anchor="ctr">
+            <a:normAutofit/>
+          </a:bodyPr>
+          <a:lstStyle/>
+          <a:p>
+            <a:pPr indent="0" marL="0">
+              <a:buNone/>
+            </a:pPr>
+            <a:r>
+              <a:rPr lang="en-US" sz="1800" dirty="0">
+                <a:solidFill>
+                  <a:srgbClr val="1F2937"/>
+                </a:solidFill>
+                <a:latin typeface="Arial" pitchFamily="34" charset="0"/>
+                <a:ea typeface="Arial" pitchFamily="34" charset="-122"/>
+                <a:cs typeface="Arial" pitchFamily="34" charset="-120"/>
+              </a:rPr>
+              <a:t>-) </a:t>
+            </a:r>
+            <a:endParaRPr lang="en-US" sz="1800" dirty="0"/>
+          </a:p>
+        </p:txBody>
+      </p:sp>
+      <p:sp>
+        <p:nvSpPr>
+          <p:cNvPr id="25" name="Shape 22"/>
+          <p:cNvSpPr/>
+          <p:nvPr/>
+        </p:nvSpPr>
+        <p:spPr>
+          <a:xfrm>
+            <a:off x="4322064" y="3886200"/>
+            <a:ext cx="3544824" cy="2331720"/>
+          </a:xfrm>
+          <a:prstGeom prst="roundRect">
+            <a:avLst>
+              <a:gd name="adj" fmla="val 3137"/>
+            </a:avLst>
+          </a:prstGeom>
+          <a:solidFill>
+            <a:srgbClr val="FFFFFF"/>
+          </a:solidFill>
+          <a:ln w="9525">
+            <a:solidFill>
+              <a:srgbClr val="D8E0EC"/>
+            </a:solidFill>
+            <a:prstDash val="solid"/>
+          </a:ln>
+          <a:effectLst>
+            <a:outerShdw sx="100000" sy="100000" kx="0" ky="0" algn="bl" rotWithShape="0" blurRad="38100" dist="12700" dir="5400000">
+              <a:srgbClr val="000000">
+                <a:alpha val="8000"/>
+              </a:srgbClr>
+            </a:outerShdw>
+          </a:effectLst>
+        </p:spPr>
+      </p:sp>
+      <p:sp>
+        <p:nvSpPr>
+          <p:cNvPr id="26" name="Shape 23"/>
+          <p:cNvSpPr/>
+          <p:nvPr/>
+        </p:nvSpPr>
+        <p:spPr>
+          <a:xfrm>
+            <a:off x="4504944" y="4069080"/>
+            <a:ext cx="457200" cy="457200"/>
+          </a:xfrm>
+          <a:prstGeom prst="ellipse">
+            <a:avLst/>
+          </a:prstGeom>
+          <a:solidFill>
+            <a:srgbClr val="1B3A6B"/>
+          </a:solidFill>
+          <a:ln/>
+        </p:spPr>
+      </p:sp>
+      <p:sp>
+        <p:nvSpPr>
+          <p:cNvPr id="27" name="Text 24"/>
+          <p:cNvSpPr/>
+          <p:nvPr/>
+        </p:nvSpPr>
+        <p:spPr>
+          <a:xfrm>
+            <a:off x="4504944" y="4069080"/>
+            <a:ext cx="457200" cy="457200"/>
+          </a:xfrm>
+          <a:prstGeom prst="rect">
+            <a:avLst/>
+          </a:prstGeom>
+          <a:noFill/>
+          <a:ln/>
+        </p:spPr>
+        <p:txBody>
+          <a:bodyPr wrap="square" rtlCol="0" anchor="ctr"/>
+          <a:lstStyle/>
+          <a:p>
+            <a:pPr algn="ctr" indent="0" marL="0">
+              <a:buNone/>
+            </a:pPr>
+            <a:r>
+              <a:rPr lang="en-US" sz="1400" b="1" dirty="0">
+                <a:solidFill>
+                  <a:srgbClr val="FFFFFF"/>
+                </a:solidFill>
+                <a:latin typeface="Arial" pitchFamily="34" charset="0"/>
+                <a:ea typeface="Arial" pitchFamily="34" charset="-122"/>
+                <a:cs typeface="Arial" pitchFamily="34" charset="-120"/>
+              </a:rPr>
+              <a:t>5</a:t>
+            </a:r>
+            <a:endParaRPr lang="en-US" sz="1400" dirty="0"/>
+          </a:p>
+        </p:txBody>
+      </p:sp>
+      <p:sp>
+        <p:nvSpPr>
+          <p:cNvPr id="28" name="Text 25"/>
+          <p:cNvSpPr/>
+          <p:nvPr/>
+        </p:nvSpPr>
+        <p:spPr>
+          <a:xfrm>
+            <a:off x="5099304" y="3995928"/>
+            <a:ext cx="2630424" cy="2112264"/>
+          </a:xfrm>
+          <a:prstGeom prst="rect">
+            <a:avLst/>
+          </a:prstGeom>
+          <a:noFill/>
+          <a:ln/>
+        </p:spPr>
+        <p:txBody>
+          <a:bodyPr wrap="square" rtlCol="0" anchor="ctr">
+            <a:normAutofit/>
+          </a:bodyPr>
+          <a:lstStyle/>
+          <a:p>
+            <a:pPr indent="0" marL="0">
+              <a:buNone/>
+            </a:pPr>
+            <a:r>
+              <a:rPr lang="en-US" sz="1800" dirty="0">
+                <a:solidFill>
+                  <a:srgbClr val="1F2937"/>
+                </a:solidFill>
+                <a:latin typeface="Arial" pitchFamily="34" charset="0"/>
+                <a:ea typeface="Arial" pitchFamily="34" charset="-122"/>
+                <a:cs typeface="Arial" pitchFamily="34" charset="-120"/>
+              </a:rPr>
+              <a:t>B) já existe outra fatura para a mesma UC e referência</a:t>
+            </a:r>
+            <a:endParaRPr lang="en-US" sz="1800" dirty="0"/>
+          </a:p>
+        </p:txBody>
+      </p:sp>
+      <p:sp>
+        <p:nvSpPr>
+          <p:cNvPr id="29" name="Shape 26"/>
+          <p:cNvSpPr/>
+          <p:nvPr/>
+        </p:nvSpPr>
+        <p:spPr>
+          <a:xfrm>
+            <a:off x="8095488" y="3886200"/>
+            <a:ext cx="3544824" cy="2331720"/>
+          </a:xfrm>
+          <a:prstGeom prst="roundRect">
+            <a:avLst>
+              <a:gd name="adj" fmla="val 3137"/>
+            </a:avLst>
+          </a:prstGeom>
+          <a:solidFill>
+            <a:srgbClr val="FFFFFF"/>
+          </a:solidFill>
+          <a:ln w="9525">
+            <a:solidFill>
+              <a:srgbClr val="D8E0EC"/>
+            </a:solidFill>
+            <a:prstDash val="solid"/>
+          </a:ln>
+          <a:effectLst>
+            <a:outerShdw sx="100000" sy="100000" kx="0" ky="0" algn="bl" rotWithShape="0" blurRad="38100" dist="12700" dir="5400000">
+              <a:srgbClr val="000000">
+                <a:alpha val="8000"/>
+              </a:srgbClr>
+            </a:outerShdw>
+          </a:effectLst>
+        </p:spPr>
+      </p:sp>
+      <p:sp>
+        <p:nvSpPr>
+          <p:cNvPr id="30" name="Shape 27"/>
+          <p:cNvSpPr/>
+          <p:nvPr/>
+        </p:nvSpPr>
+        <p:spPr>
+          <a:xfrm>
+            <a:off x="8278368" y="4069080"/>
+            <a:ext cx="457200" cy="457200"/>
+          </a:xfrm>
+          <a:prstGeom prst="ellipse">
+            <a:avLst/>
+          </a:prstGeom>
+          <a:solidFill>
+            <a:srgbClr val="F7A23B"/>
+          </a:solidFill>
+          <a:ln/>
+        </p:spPr>
+      </p:sp>
+      <p:sp>
+        <p:nvSpPr>
+          <p:cNvPr id="31" name="Text 28"/>
+          <p:cNvSpPr/>
+          <p:nvPr/>
+        </p:nvSpPr>
+        <p:spPr>
+          <a:xfrm>
+            <a:off x="8278368" y="4069080"/>
+            <a:ext cx="457200" cy="457200"/>
+          </a:xfrm>
+          <a:prstGeom prst="rect">
+            <a:avLst/>
+          </a:prstGeom>
+          <a:noFill/>
+          <a:ln/>
+        </p:spPr>
+        <p:txBody>
+          <a:bodyPr wrap="square" rtlCol="0" anchor="ctr"/>
+          <a:lstStyle/>
+          <a:p>
+            <a:pPr algn="ctr" indent="0" marL="0">
+              <a:buNone/>
+            </a:pPr>
+            <a:r>
+              <a:rPr lang="en-US" sz="1400" b="1" dirty="0">
+                <a:solidFill>
+                  <a:srgbClr val="FFFFFF"/>
+                </a:solidFill>
+                <a:latin typeface="Arial" pitchFamily="34" charset="0"/>
+                <a:ea typeface="Arial" pitchFamily="34" charset="-122"/>
+                <a:cs typeface="Arial" pitchFamily="34" charset="-120"/>
+              </a:rPr>
+              <a:t>6</a:t>
+            </a:r>
+            <a:endParaRPr lang="en-US" sz="1400" dirty="0"/>
+          </a:p>
+        </p:txBody>
+      </p:sp>
+      <p:sp>
+        <p:nvSpPr>
+          <p:cNvPr id="32" name="Text 29"/>
+          <p:cNvSpPr/>
+          <p:nvPr/>
+        </p:nvSpPr>
+        <p:spPr>
+          <a:xfrm>
+            <a:off x="8872728" y="3995928"/>
+            <a:ext cx="2630424" cy="2112264"/>
+          </a:xfrm>
+          <a:prstGeom prst="rect">
+            <a:avLst/>
+          </a:prstGeom>
+          <a:noFill/>
+          <a:ln/>
+        </p:spPr>
+        <p:txBody>
+          <a:bodyPr wrap="square" rtlCol="0" anchor="ctr">
+            <a:normAutofit/>
+          </a:bodyPr>
+          <a:lstStyle/>
+          <a:p>
+            <a:pPr indent="0" marL="0">
+              <a:buNone/>
+            </a:pPr>
+            <a:r>
+              <a:rPr lang="en-US" sz="1800" dirty="0">
+                <a:solidFill>
+                  <a:srgbClr val="1F2937"/>
+                </a:solidFill>
+                <a:latin typeface="Arial" pitchFamily="34" charset="0"/>
+                <a:ea typeface="Arial" pitchFamily="34" charset="-122"/>
+                <a:cs typeface="Arial" pitchFamily="34" charset="-120"/>
+              </a:rPr>
+              <a:t>B) Não, a revisão exige valor válido</a:t>
+            </a:r>
+            <a:endParaRPr lang="en-US" sz="1800" dirty="0"/>
+          </a:p>
+        </p:txBody>
+      </p:sp>
+      <p:sp>
+        <p:nvSpPr>
+          <p:cNvPr id="25" name="Slide Number Placeholder 0"/>
+          <p:cNvSpPr>
+            <a:spLocks noGrp="1"/>
+          </p:cNvSpPr>
+          <p:nvPr>
+            <p:ph type="sldNum" sz="quarter" idx="4294967295"/>
+          </p:nvPr>
+        </p:nvSpPr>
+        <p:spPr>
+          <a:xfrm>
+            <a:off x="11292840" y="6556248"/>
+            <a:ext cx="548640" cy="256032"/>
+          </a:xfrm>
+          <a:prstGeom prst="rect">
+            <a:avLst/>
+          </a:prstGeom>
+          <a:extLst>
+            <a:ext uri="{C572A759-6A51-4108-AA02-DFA0A04FC94B}">
+              <ma14:wrappingTextBoxFlag xmlns:ma14="http://schemas.microsoft.com/office/mac/drawingml/2011/main" val="0"/>
+            </a:ext>
+          </a:extLst>
+        </p:spPr>
+        <p:txBody>
+          <a:bodyPr/>
+          <a:lstStyle>
+            <a:lvl1pPr>
+              <a:defRPr sz="900">
+                <a:solidFill>
+                  <a:srgbClr val="1B3A6B"/>
+                </a:solidFill>
+                <a:latin typeface="Arial"/>
+                <a:ea typeface="Arial"/>
+                <a:cs typeface="Arial"/>
+              </a:defRPr>
+            </a:lvl1pPr>
+          </a:lstStyle>
+          <a:p>
+            <a:pPr algn="r"/>
+            <a:fld id="{F7021451-1387-4CA6-816F-3879F97B5CBC}" type="slidenum">
+              <a:rPr b="1" lang="en-US"/>
+              <a:t>33</a:t>
+            </a:fld>
+            <a:endParaRPr lang="en-US"/>
+          </a:p>
+        </p:txBody>
+      </p:sp>
+    </p:spTree>
+  </p:cSld>
+  <p:clrMapOvr>
+    <a:masterClrMapping/>
+  </p:clrMapOvr>
+</p:sld>
+</file>
+
+<file path=ppt/slides/slide34.xml><?xml version="1.0" encoding="utf-8"?>
+<p:sld xmlns:a="http://schemas.openxmlformats.org/drawingml/2006/main" xmlns:r="http://schemas.openxmlformats.org/officeDocument/2006/relationships" xmlns:p="http://schemas.openxmlformats.org/presentationml/2006/main">
+  <p:cSld name="Slide 34">
+    <p:bg>
+      <p:bgPr>
+        <a:solidFill>
+          <a:srgbClr val="F6F8FB"/>
+        </a:solidFill>
+      </p:bgPr>
+    </p:bg>
+    <p:spTree>
+      <p:nvGrpSpPr>
+        <p:cNvPr id="1" name=""/>
+        <p:cNvGrpSpPr/>
+        <p:nvPr/>
+      </p:nvGrpSpPr>
+      <p:grpSpPr>
+        <a:xfrm>
+          <a:off x="0" y="0"/>
+          <a:ext cx="0" cy="0"/>
+          <a:chOff x="0" y="0"/>
+          <a:chExt cx="0" cy="0"/>
+        </a:xfrm>
+      </p:grpSpPr>
+      <p:sp>
+        <p:nvSpPr>
+          <p:cNvPr id="2" name="Shape 0"/>
+          <p:cNvSpPr/>
+          <p:nvPr/>
+        </p:nvSpPr>
+        <p:spPr>
+          <a:xfrm>
+            <a:off x="0" y="6510528"/>
+            <a:ext cx="12191695" cy="347472"/>
+          </a:xfrm>
+          <a:prstGeom prst="rect">
+            <a:avLst/>
+          </a:prstGeom>
+          <a:solidFill>
+            <a:srgbClr val="FFFFFF"/>
+          </a:solidFill>
+          <a:ln w="6350">
+            <a:solidFill>
+              <a:srgbClr val="D8E0EC"/>
+            </a:solidFill>
+            <a:prstDash val="solid"/>
+          </a:ln>
+        </p:spPr>
+      </p:sp>
+      <p:pic>
+        <p:nvPicPr>
+          <p:cNvPr id="3" name="Image 0" descr="/www/wwwroot/rexar/gdsolar/docs/curso/slides/assets/logo-gdsolar.png">    </p:cNvPr>
+          <p:cNvPicPr>
+            <a:picLocks noChangeAspect="1"/>
+          </p:cNvPicPr>
+          <p:nvPr/>
+        </p:nvPicPr>
+        <p:blipFill>
+          <a:blip r:embed="rId1"/>
+          <a:stretch>
+            <a:fillRect/>
+          </a:stretch>
+        </p:blipFill>
+        <p:spPr>
+          <a:xfrm>
+            <a:off x="548640" y="6547104"/>
+            <a:ext cx="274320" cy="274320"/>
+          </a:xfrm>
+          <a:prstGeom prst="rect">
+            <a:avLst/>
+          </a:prstGeom>
+        </p:spPr>
+      </p:pic>
+      <p:sp>
+        <p:nvSpPr>
+          <p:cNvPr id="4" name="Text 1"/>
+          <p:cNvSpPr/>
+          <p:nvPr/>
+        </p:nvSpPr>
+        <p:spPr>
+          <a:xfrm>
+            <a:off x="886968" y="6528816"/>
+            <a:ext cx="6400800" cy="310896"/>
+          </a:xfrm>
+          <a:prstGeom prst="rect">
+            <a:avLst/>
+          </a:prstGeom>
+          <a:noFill/>
+          <a:ln/>
+        </p:spPr>
+        <p:txBody>
+          <a:bodyPr wrap="square" rtlCol="0" anchor="ctr"/>
+          <a:lstStyle/>
+          <a:p>
+            <a:pPr indent="0" marL="0">
+              <a:buNone/>
+            </a:pPr>
+            <a:r>
+              <a:rPr lang="en-US" sz="900" b="1" dirty="0">
+                <a:solidFill>
+                  <a:srgbClr val="64748B"/>
+                </a:solidFill>
+                <a:latin typeface="Arial" pitchFamily="34" charset="0"/>
+                <a:ea typeface="Arial" pitchFamily="34" charset="-122"/>
+                <a:cs typeface="Arial" pitchFamily="34" charset="-120"/>
+              </a:rPr>
+              <a:t>GD Solar  ·  Formação em Energia por Assinatura</a:t>
+            </a:r>
+            <a:endParaRPr lang="en-US" sz="900" dirty="0"/>
+          </a:p>
+        </p:txBody>
+      </p:sp>
+      <p:sp>
+        <p:nvSpPr>
+          <p:cNvPr id="5" name="Text 2"/>
+          <p:cNvSpPr/>
+          <p:nvPr/>
+        </p:nvSpPr>
+        <p:spPr>
+          <a:xfrm>
+            <a:off x="7132320" y="6528816"/>
+            <a:ext cx="4023360" cy="310896"/>
+          </a:xfrm>
+          <a:prstGeom prst="rect">
+            <a:avLst/>
+          </a:prstGeom>
+          <a:noFill/>
+          <a:ln/>
+        </p:spPr>
+        <p:txBody>
+          <a:bodyPr wrap="square" rtlCol="0" anchor="ctr"/>
+          <a:lstStyle/>
+          <a:p>
+            <a:pPr algn="r" indent="0" marL="0">
+              <a:buNone/>
+            </a:pPr>
+            <a:r>
+              <a:rPr lang="en-US" sz="900" dirty="0">
+                <a:solidFill>
+                  <a:srgbClr val="64748B"/>
+                </a:solidFill>
+                <a:latin typeface="Arial" pitchFamily="34" charset="0"/>
+                <a:ea typeface="Arial" pitchFamily="34" charset="-122"/>
+                <a:cs typeface="Arial" pitchFamily="34" charset="-120"/>
+              </a:rPr>
+              <a:t>M7 · Fechamento</a:t>
+            </a:r>
+            <a:endParaRPr lang="en-US" sz="900" dirty="0"/>
+          </a:p>
+        </p:txBody>
+      </p:sp>
+      <p:sp>
+        <p:nvSpPr>
+          <p:cNvPr id="6" name="Shape 3"/>
+          <p:cNvSpPr/>
+          <p:nvPr/>
+        </p:nvSpPr>
+        <p:spPr>
+          <a:xfrm>
+            <a:off x="548640" y="384048"/>
+            <a:ext cx="82296" cy="658368"/>
+          </a:xfrm>
+          <a:prstGeom prst="rect">
+            <a:avLst/>
+          </a:prstGeom>
+          <a:solidFill>
+            <a:srgbClr val="F7A23B"/>
+          </a:solidFill>
+          <a:ln/>
+        </p:spPr>
+      </p:sp>
+      <p:sp>
+        <p:nvSpPr>
+          <p:cNvPr id="7" name="Text 4"/>
+          <p:cNvSpPr/>
+          <p:nvPr/>
+        </p:nvSpPr>
+        <p:spPr>
+          <a:xfrm>
+            <a:off x="777240" y="292608"/>
+            <a:ext cx="10972800" cy="274320"/>
+          </a:xfrm>
+          <a:prstGeom prst="rect">
+            <a:avLst/>
+          </a:prstGeom>
+          <a:noFill/>
+          <a:ln/>
+        </p:spPr>
+        <p:txBody>
+          <a:bodyPr wrap="square" rtlCol="0" anchor="ctr"/>
+          <a:lstStyle/>
+          <a:p>
+            <a:pPr indent="0" marL="0">
+              <a:buNone/>
+            </a:pPr>
+            <a:r>
+              <a:rPr lang="en-US" sz="1000" b="1" spc="100" kern="0" dirty="0">
+                <a:solidFill>
+                  <a:srgbClr val="F7A23B"/>
+                </a:solidFill>
+                <a:latin typeface="Arial" pitchFamily="34" charset="0"/>
+                <a:ea typeface="Arial" pitchFamily="34" charset="-122"/>
+                <a:cs typeface="Arial" pitchFamily="34" charset="-120"/>
+              </a:rPr>
+              <a:t>FECHAMENTO DO MÓDULO</a:t>
+            </a:r>
+            <a:endParaRPr lang="en-US" sz="1000" dirty="0"/>
+          </a:p>
+        </p:txBody>
+      </p:sp>
+      <p:sp>
+        <p:nvSpPr>
+          <p:cNvPr id="8" name="Text 5"/>
+          <p:cNvSpPr/>
+          <p:nvPr/>
+        </p:nvSpPr>
+        <p:spPr>
+          <a:xfrm>
+            <a:off x="777240" y="530352"/>
+            <a:ext cx="10881360" cy="566928"/>
+          </a:xfrm>
+          <a:prstGeom prst="rect">
+            <a:avLst/>
+          </a:prstGeom>
+          <a:noFill/>
+          <a:ln/>
+        </p:spPr>
+        <p:txBody>
+          <a:bodyPr wrap="square" rtlCol="0" anchor="ctr">
+            <a:normAutofit/>
+          </a:bodyPr>
+          <a:lstStyle/>
+          <a:p>
+            <a:pPr indent="0" marL="0">
+              <a:buNone/>
+            </a:pPr>
+            <a:r>
+              <a:rPr lang="en-US" sz="2600" b="1" dirty="0">
+                <a:solidFill>
+                  <a:srgbClr val="1B3A6B"/>
+                </a:solidFill>
+                <a:latin typeface="Arial" pitchFamily="34" charset="0"/>
+                <a:ea typeface="Arial" pitchFamily="34" charset="-122"/>
+                <a:cs typeface="Arial" pitchFamily="34" charset="-120"/>
+              </a:rPr>
+              <a:t>Pratique e entregue</a:t>
+            </a:r>
+            <a:endParaRPr lang="en-US" sz="2600" dirty="0"/>
+          </a:p>
+        </p:txBody>
+      </p:sp>
+      <p:sp>
+        <p:nvSpPr>
+          <p:cNvPr id="9" name="Text 6"/>
+          <p:cNvSpPr/>
+          <p:nvPr/>
+        </p:nvSpPr>
+        <p:spPr>
+          <a:xfrm>
+            <a:off x="548640" y="1325880"/>
+            <a:ext cx="5394960" cy="411480"/>
+          </a:xfrm>
+          <a:prstGeom prst="rect">
+            <a:avLst/>
+          </a:prstGeom>
+          <a:noFill/>
+          <a:ln/>
+        </p:spPr>
+        <p:txBody>
+          <a:bodyPr wrap="square" rtlCol="0" anchor="ctr"/>
+          <a:lstStyle/>
+          <a:p>
+            <a:pPr indent="0" marL="0">
+              <a:buNone/>
+            </a:pPr>
+            <a:r>
+              <a:rPr lang="en-US" sz="1600" b="1" dirty="0">
+                <a:solidFill>
+                  <a:srgbClr val="1B3A6B"/>
+                </a:solidFill>
+                <a:latin typeface="Arial" pitchFamily="34" charset="0"/>
+                <a:ea typeface="Arial" pitchFamily="34" charset="-122"/>
+                <a:cs typeface="Arial" pitchFamily="34" charset="-120"/>
+              </a:rPr>
+              <a:t>Exercícios</a:t>
+            </a:r>
+            <a:endParaRPr lang="en-US" sz="1600" dirty="0"/>
+          </a:p>
+        </p:txBody>
+      </p:sp>
+      <p:sp>
+        <p:nvSpPr>
+          <p:cNvPr id="10" name="Text 7"/>
+          <p:cNvSpPr/>
+          <p:nvPr/>
+        </p:nvSpPr>
+        <p:spPr>
+          <a:xfrm>
+            <a:off x="548640" y="1783080"/>
+            <a:ext cx="5394960" cy="4480560"/>
+          </a:xfrm>
+          <a:prstGeom prst="rect">
+            <a:avLst/>
+          </a:prstGeom>
+          <a:noFill/>
+          <a:ln/>
+        </p:spPr>
+        <p:txBody>
+          <a:bodyPr wrap="square" rtlCol="0" anchor="t">
+            <a:normAutofit/>
+          </a:bodyPr>
+          <a:lstStyle/>
+          <a:p>
+            <a:pPr indent="0" marL="0">
+              <a:spcAft>
+                <a:spcPts val="800"/>
+              </a:spcAft>
+              <a:buNone/>
+            </a:pPr>
+            <a:r>
+              <a:rPr lang="en-US" sz="1600" dirty="0">
+                <a:solidFill>
+                  <a:srgbClr val="1F2937"/>
+                </a:solidFill>
+                <a:latin typeface="Arial" pitchFamily="34" charset="0"/>
+                <a:ea typeface="Arial" pitchFamily="34" charset="-122"/>
+                <a:cs typeface="Arial" pitchFamily="34" charset="-120"/>
+              </a:rPr>
+              <a:t>1. A fatura mostra 2.400 kWh de energia compensada e o rateio previa 4% de uma usina que gerou 58.000 kWh. Bate?</a:t>
+            </a:r>
+            <a:endParaRPr lang="en-US" sz="1600" dirty="0"/>
+          </a:p>
+          <a:p>
+            <a:pPr indent="0" marL="0">
+              <a:spcAft>
+                <a:spcPts val="800"/>
+              </a:spcAft>
+              <a:buNone/>
+            </a:pPr>
+            <a:r>
+              <a:rPr lang="en-US" sz="1600" dirty="0">
+                <a:solidFill>
+                  <a:srgbClr val="1F2937"/>
+                </a:solidFill>
+                <a:latin typeface="Arial" pitchFamily="34" charset="0"/>
+                <a:ea typeface="Arial" pitchFamily="34" charset="-122"/>
+                <a:cs typeface="Arial" pitchFamily="34" charset="-120"/>
+              </a:rPr>
+              <a:t>2. A fatura veio sem nenhuma linha de energia injetada. Liste três causas possíveis.</a:t>
+            </a:r>
+            <a:endParaRPr lang="en-US" sz="1600" dirty="0"/>
+          </a:p>
+          <a:p>
+            <a:pPr indent="0" marL="0">
+              <a:spcAft>
+                <a:spcPts val="800"/>
+              </a:spcAft>
+              <a:buNone/>
+            </a:pPr>
+            <a:r>
+              <a:rPr lang="en-US" sz="1600" dirty="0">
+                <a:solidFill>
+                  <a:srgbClr val="1F2937"/>
+                </a:solidFill>
+                <a:latin typeface="Arial" pitchFamily="34" charset="0"/>
+                <a:ea typeface="Arial" pitchFamily="34" charset="-122"/>
+                <a:cs typeface="Arial" pitchFamily="34" charset="-120"/>
+              </a:rPr>
+              <a:t>3. Valor do consumo injetado R$ 2.119,00 e margem de desconto 20%: valor ao cliente?</a:t>
+            </a:r>
+            <a:endParaRPr lang="en-US" sz="1600" dirty="0"/>
+          </a:p>
+        </p:txBody>
+      </p:sp>
+      <p:sp>
+        <p:nvSpPr>
+          <p:cNvPr id="11" name="Shape 8"/>
+          <p:cNvSpPr/>
+          <p:nvPr/>
+        </p:nvSpPr>
+        <p:spPr>
+          <a:xfrm>
+            <a:off x="6172200" y="1325880"/>
+            <a:ext cx="5468112" cy="4937760"/>
+          </a:xfrm>
+          <a:prstGeom prst="roundRect">
+            <a:avLst>
+              <a:gd name="adj" fmla="val 1852"/>
+            </a:avLst>
+          </a:prstGeom>
+          <a:solidFill>
+            <a:srgbClr val="1B3A6B"/>
+          </a:solidFill>
+          <a:ln/>
+        </p:spPr>
+      </p:sp>
+      <p:sp>
+        <p:nvSpPr>
+          <p:cNvPr id="12" name="Text 9"/>
+          <p:cNvSpPr/>
+          <p:nvPr/>
+        </p:nvSpPr>
+        <p:spPr>
+          <a:xfrm>
+            <a:off x="6492240" y="1554480"/>
+            <a:ext cx="4828032" cy="4480560"/>
+          </a:xfrm>
+          <a:prstGeom prst="rect">
+            <a:avLst/>
+          </a:prstGeom>
+          <a:noFill/>
+          <a:ln/>
+        </p:spPr>
+        <p:txBody>
+          <a:bodyPr wrap="square" rtlCol="0" anchor="t">
+            <a:normAutofit/>
+          </a:bodyPr>
+          <a:lstStyle/>
+          <a:p>
+            <a:pPr indent="0" marL="0">
+              <a:buNone/>
+            </a:pPr>
+            <a:r>
+              <a:rPr lang="en-US" sz="1300" b="1" spc="100" kern="0" dirty="0">
+                <a:solidFill>
+                  <a:srgbClr val="F7A23B"/>
+                </a:solidFill>
+                <a:latin typeface="Arial" pitchFamily="34" charset="0"/>
+                <a:ea typeface="Arial" pitchFamily="34" charset="-122"/>
+                <a:cs typeface="Arial" pitchFamily="34" charset="-120"/>
+              </a:rPr>
+              <a:t>ENTREGÁVEL DO MÓDULO
+</a:t>
+            </a:r>
+            <a:pPr indent="0" marL="0">
+              <a:buNone/>
+            </a:pPr>
+            <a:r>
+              <a:rPr lang="en-US" sz="1600" dirty="0">
+                <a:solidFill>
+                  <a:srgbClr val="FFFFFF"/>
+                </a:solidFill>
+                <a:latin typeface="Arial" pitchFamily="34" charset="0"/>
+                <a:ea typeface="Arial" pitchFamily="34" charset="-122"/>
+                <a:cs typeface="Arial" pitchFamily="34" charset="-120"/>
+              </a:rPr>
+              <a:t>Primeiro ciclo de faturas: faturas de 1 mês dos 15 clientes importadas (PDFs fictícios do curso), revisadas e aprovadas; registro de pelo menos 3 pendências resolvidas (UC ausente, fatura duplicada, dado corrigido manualmente), com a justificativa nas observações da revisão.</a:t>
+            </a:r>
+            <a:endParaRPr lang="en-US" sz="1300" dirty="0"/>
+          </a:p>
+        </p:txBody>
+      </p:sp>
+      <p:sp>
+        <p:nvSpPr>
+          <p:cNvPr id="25" name="Slide Number Placeholder 0"/>
+          <p:cNvSpPr>
+            <a:spLocks noGrp="1"/>
+          </p:cNvSpPr>
+          <p:nvPr>
+            <p:ph type="sldNum" sz="quarter" idx="4294967295"/>
+          </p:nvPr>
+        </p:nvSpPr>
+        <p:spPr>
+          <a:xfrm>
+            <a:off x="11292840" y="6556248"/>
+            <a:ext cx="548640" cy="256032"/>
+          </a:xfrm>
+          <a:prstGeom prst="rect">
+            <a:avLst/>
+          </a:prstGeom>
+          <a:extLst>
+            <a:ext uri="{C572A759-6A51-4108-AA02-DFA0A04FC94B}">
+              <ma14:wrappingTextBoxFlag xmlns:ma14="http://schemas.microsoft.com/office/mac/drawingml/2011/main" val="0"/>
+            </a:ext>
+          </a:extLst>
+        </p:spPr>
+        <p:txBody>
+          <a:bodyPr/>
+          <a:lstStyle>
+            <a:lvl1pPr>
+              <a:defRPr sz="900">
+                <a:solidFill>
+                  <a:srgbClr val="1B3A6B"/>
+                </a:solidFill>
+                <a:latin typeface="Arial"/>
+                <a:ea typeface="Arial"/>
+                <a:cs typeface="Arial"/>
+              </a:defRPr>
+            </a:lvl1pPr>
+          </a:lstStyle>
+          <a:p>
+            <a:pPr algn="r"/>
+            <a:fld id="{F7021451-1387-4CA6-816F-3879F97B5CBC}" type="slidenum">
+              <a:rPr b="1" lang="en-US"/>
+              <a:t>34</a:t>
             </a:fld>
             <a:endParaRPr lang="en-US"/>
           </a:p>
@@ -18885,11 +24823,11 @@
         <p:spPr>
           <a:xfrm>
             <a:off x="548640" y="1325880"/>
-            <a:ext cx="11091672" cy="4892040"/>
+            <a:ext cx="11091672" cy="3977640"/>
           </a:xfrm>
           <a:prstGeom prst="roundRect">
             <a:avLst>
-              <a:gd name="adj" fmla="val 1495"/>
+              <a:gd name="adj" fmla="val 1839"/>
             </a:avLst>
           </a:prstGeom>
           <a:solidFill>
@@ -18978,7 +24916,7 @@
         <p:spPr>
           <a:xfrm>
             <a:off x="1325880" y="1435608"/>
-            <a:ext cx="10177272" cy="4672584"/>
+            <a:ext cx="10177272" cy="3758184"/>
           </a:xfrm>
           <a:prstGeom prst="rect">
             <a:avLst/>
@@ -19007,6 +24945,92 @@
               <a:t>Consumo (positivo) − Energia injetada/compensada (negativo) = o que sobra para pagar</a:t>
             </a:r>
             <a:endParaRPr lang="en-US" sz="1800" dirty="0"/>
+          </a:p>
+        </p:txBody>
+      </p:sp>
+      <p:sp>
+        <p:nvSpPr>
+          <p:cNvPr id="13" name="Shape 10"/>
+          <p:cNvSpPr/>
+          <p:nvPr/>
+        </p:nvSpPr>
+        <p:spPr>
+          <a:xfrm>
+            <a:off x="548640" y="5413248"/>
+            <a:ext cx="11091672" cy="868680"/>
+          </a:xfrm>
+          <a:prstGeom prst="roundRect">
+            <a:avLst>
+              <a:gd name="adj" fmla="val 8421"/>
+            </a:avLst>
+          </a:prstGeom>
+          <a:solidFill>
+            <a:srgbClr val="EEF3FA"/>
+          </a:solidFill>
+          <a:ln w="6350">
+            <a:solidFill>
+              <a:srgbClr val="D8E0EC"/>
+            </a:solidFill>
+            <a:prstDash val="solid"/>
+          </a:ln>
+        </p:spPr>
+      </p:sp>
+      <p:sp>
+        <p:nvSpPr>
+          <p:cNvPr id="14" name="Shape 11"/>
+          <p:cNvSpPr/>
+          <p:nvPr/>
+        </p:nvSpPr>
+        <p:spPr>
+          <a:xfrm>
+            <a:off x="548640" y="5413248"/>
+            <a:ext cx="91440" cy="868680"/>
+          </a:xfrm>
+          <a:prstGeom prst="rect">
+            <a:avLst/>
+          </a:prstGeom>
+          <a:solidFill>
+            <a:srgbClr val="F7A23B"/>
+          </a:solidFill>
+          <a:ln/>
+        </p:spPr>
+      </p:sp>
+      <p:sp>
+        <p:nvSpPr>
+          <p:cNvPr id="15" name="Text 12"/>
+          <p:cNvSpPr/>
+          <p:nvPr/>
+        </p:nvSpPr>
+        <p:spPr>
+          <a:xfrm>
+            <a:off x="777240" y="5458968"/>
+            <a:ext cx="10744200" cy="777240"/>
+          </a:xfrm>
+          <a:prstGeom prst="rect">
+            <a:avLst/>
+          </a:prstGeom>
+          <a:noFill/>
+          <a:ln/>
+        </p:spPr>
+        <p:txBody>
+          <a:bodyPr wrap="square" rtlCol="0" anchor="ctr"/>
+          <a:lstStyle/>
+          <a:p>
+            <a:pPr indent="0" marL="0">
+              <a:buNone/>
+            </a:pPr>
+            <a:r>
+              <a:rPr lang="en-US" sz="1500" dirty="0">
+                <a:solidFill>
+                  <a:srgbClr val="1F2937"/>
+                </a:solidFill>
+                <a:latin typeface="Arial" pitchFamily="34" charset="0"/>
+                <a:ea typeface="Arial" pitchFamily="34" charset="-122"/>
+                <a:cs typeface="Arial" pitchFamily="34" charset="-120"/>
+              </a:rPr>
+              <a:t>Nos itens faturados, o consumo aparece positivo e a energia compensada, negativa. A diferença por quilowatt-hora entre a TUSD consumida e a compensada é justamente o Fio B que não é compensado.</a:t>
+            </a:r>
+            <a:endParaRPr lang="en-US" sz="1500" dirty="0"/>
           </a:p>
         </p:txBody>
       </p:sp>
@@ -19326,11 +25350,11 @@
         <p:spPr>
           <a:xfrm>
             <a:off x="548640" y="1325880"/>
-            <a:ext cx="11091672" cy="4937760"/>
+            <a:ext cx="11091672" cy="3977640"/>
           </a:xfrm>
           <a:prstGeom prst="roundRect">
             <a:avLst>
-              <a:gd name="adj" fmla="val 1852"/>
+              <a:gd name="adj" fmla="val 2299"/>
             </a:avLst>
           </a:prstGeom>
           <a:solidFill>
@@ -19348,7 +25372,7 @@
         <p:spPr>
           <a:xfrm>
             <a:off x="914400" y="1554480"/>
-            <a:ext cx="10360152" cy="4480560"/>
+            <a:ext cx="10360152" cy="3520440"/>
           </a:xfrm>
           <a:prstGeom prst="rect">
             <a:avLst/>
@@ -19400,6 +25424,92 @@
               <a:t>Ex.: R$ 2.119,00 → cobrança ao cliente = 2.119,00 × (1 − 20%) = R$ 1.695,20</a:t>
             </a:r>
             <a:endParaRPr lang="en-US" sz="2400" dirty="0"/>
+          </a:p>
+        </p:txBody>
+      </p:sp>
+      <p:sp>
+        <p:nvSpPr>
+          <p:cNvPr id="11" name="Shape 8"/>
+          <p:cNvSpPr/>
+          <p:nvPr/>
+        </p:nvSpPr>
+        <p:spPr>
+          <a:xfrm>
+            <a:off x="548640" y="5413248"/>
+            <a:ext cx="11091672" cy="868680"/>
+          </a:xfrm>
+          <a:prstGeom prst="roundRect">
+            <a:avLst>
+              <a:gd name="adj" fmla="val 8421"/>
+            </a:avLst>
+          </a:prstGeom>
+          <a:solidFill>
+            <a:srgbClr val="EEF3FA"/>
+          </a:solidFill>
+          <a:ln w="6350">
+            <a:solidFill>
+              <a:srgbClr val="D8E0EC"/>
+            </a:solidFill>
+            <a:prstDash val="solid"/>
+          </a:ln>
+        </p:spPr>
+      </p:sp>
+      <p:sp>
+        <p:nvSpPr>
+          <p:cNvPr id="12" name="Shape 9"/>
+          <p:cNvSpPr/>
+          <p:nvPr/>
+        </p:nvSpPr>
+        <p:spPr>
+          <a:xfrm>
+            <a:off x="548640" y="5413248"/>
+            <a:ext cx="91440" cy="868680"/>
+          </a:xfrm>
+          <a:prstGeom prst="rect">
+            <a:avLst/>
+          </a:prstGeom>
+          <a:solidFill>
+            <a:srgbClr val="F7A23B"/>
+          </a:solidFill>
+          <a:ln/>
+        </p:spPr>
+      </p:sp>
+      <p:sp>
+        <p:nvSpPr>
+          <p:cNvPr id="13" name="Text 10"/>
+          <p:cNvSpPr/>
+          <p:nvPr/>
+        </p:nvSpPr>
+        <p:spPr>
+          <a:xfrm>
+            <a:off x="777240" y="5458968"/>
+            <a:ext cx="10744200" cy="777240"/>
+          </a:xfrm>
+          <a:prstGeom prst="rect">
+            <a:avLst/>
+          </a:prstGeom>
+          <a:noFill/>
+          <a:ln/>
+        </p:spPr>
+        <p:txBody>
+          <a:bodyPr wrap="square" rtlCol="0" anchor="ctr"/>
+          <a:lstStyle/>
+          <a:p>
+            <a:pPr indent="0" marL="0">
+              <a:buNone/>
+            </a:pPr>
+            <a:r>
+              <a:rPr lang="en-US" sz="1500" dirty="0">
+                <a:solidFill>
+                  <a:srgbClr val="1F2937"/>
+                </a:solidFill>
+                <a:latin typeface="Arial" pitchFamily="34" charset="0"/>
+                <a:ea typeface="Arial" pitchFamily="34" charset="-122"/>
+                <a:cs typeface="Arial" pitchFamily="34" charset="-120"/>
+              </a:rPr>
+              <a:t>O número que importa é o consumo injetado: a soma em reais das linhas compensadas. É o que o cliente deixou de pagar à distribuidora, e a sua cobrança parte dele, com o desconto. Não use o valor total da fatura, que inclui itens que não são da sua operação.</a:t>
+            </a:r>
+            <a:endParaRPr lang="en-US" sz="1500" dirty="0"/>
           </a:p>
         </p:txBody>
       </p:sp>
@@ -19719,11 +25829,11 @@
         <p:spPr>
           <a:xfrm>
             <a:off x="548640" y="1325880"/>
-            <a:ext cx="5431536" cy="2331720"/>
+            <a:ext cx="5431536" cy="1874520"/>
           </a:xfrm>
           <a:prstGeom prst="roundRect">
             <a:avLst>
-              <a:gd name="adj" fmla="val 3137"/>
+              <a:gd name="adj" fmla="val 3902"/>
             </a:avLst>
           </a:prstGeom>
           <a:solidFill>
@@ -19812,7 +25922,7 @@
         <p:spPr>
           <a:xfrm>
             <a:off x="1325880" y="1435608"/>
-            <a:ext cx="4517136" cy="2112264"/>
+            <a:ext cx="4517136" cy="1655064"/>
           </a:xfrm>
           <a:prstGeom prst="rect">
             <a:avLst/>
@@ -19853,11 +25963,11 @@
         <p:spPr>
           <a:xfrm>
             <a:off x="6208776" y="1325880"/>
-            <a:ext cx="5431536" cy="2331720"/>
+            <a:ext cx="5431536" cy="1874520"/>
           </a:xfrm>
           <a:prstGeom prst="roundRect">
             <a:avLst>
-              <a:gd name="adj" fmla="val 3137"/>
+              <a:gd name="adj" fmla="val 3902"/>
             </a:avLst>
           </a:prstGeom>
           <a:solidFill>
@@ -19946,7 +26056,7 @@
         <p:spPr>
           <a:xfrm>
             <a:off x="6986016" y="1435608"/>
-            <a:ext cx="4517136" cy="2112264"/>
+            <a:ext cx="4517136" cy="1655064"/>
           </a:xfrm>
           <a:prstGeom prst="rect">
             <a:avLst/>
@@ -19986,12 +26096,12 @@
         </p:nvSpPr>
         <p:spPr>
           <a:xfrm>
-            <a:off x="548640" y="3886200"/>
-            <a:ext cx="5431536" cy="2331720"/>
+            <a:off x="548640" y="3429000"/>
+            <a:ext cx="5431536" cy="1874520"/>
           </a:xfrm>
           <a:prstGeom prst="roundRect">
             <a:avLst>
-              <a:gd name="adj" fmla="val 3137"/>
+              <a:gd name="adj" fmla="val 3902"/>
             </a:avLst>
           </a:prstGeom>
           <a:solidFill>
@@ -20020,7 +26130,7 @@
         </p:nvSpPr>
         <p:spPr>
           <a:xfrm>
-            <a:off x="731520" y="4069080"/>
+            <a:off x="731520" y="3611880"/>
             <a:ext cx="457200" cy="457200"/>
           </a:xfrm>
           <a:prstGeom prst="ellipse">
@@ -20040,7 +26150,7 @@
         </p:nvSpPr>
         <p:spPr>
           <a:xfrm>
-            <a:off x="731520" y="4069080"/>
+            <a:off x="731520" y="3611880"/>
             <a:ext cx="457200" cy="457200"/>
           </a:xfrm>
           <a:prstGeom prst="rect">
@@ -20079,8 +26189,8 @@
         </p:nvSpPr>
         <p:spPr>
           <a:xfrm>
-            <a:off x="1325880" y="3995928"/>
-            <a:ext cx="4517136" cy="2112264"/>
+            <a:off x="1325880" y="3538728"/>
+            <a:ext cx="4517136" cy="1655064"/>
           </a:xfrm>
           <a:prstGeom prst="rect">
             <a:avLst/>
@@ -20120,12 +26230,12 @@
         </p:nvSpPr>
         <p:spPr>
           <a:xfrm>
-            <a:off x="6208776" y="3886200"/>
-            <a:ext cx="5431536" cy="2331720"/>
+            <a:off x="6208776" y="3429000"/>
+            <a:ext cx="5431536" cy="1874520"/>
           </a:xfrm>
           <a:prstGeom prst="roundRect">
             <a:avLst>
-              <a:gd name="adj" fmla="val 3137"/>
+              <a:gd name="adj" fmla="val 3902"/>
             </a:avLst>
           </a:prstGeom>
           <a:solidFill>
@@ -20154,7 +26264,7 @@
         </p:nvSpPr>
         <p:spPr>
           <a:xfrm>
-            <a:off x="6391656" y="4069080"/>
+            <a:off x="6391656" y="3611880"/>
             <a:ext cx="457200" cy="457200"/>
           </a:xfrm>
           <a:prstGeom prst="ellipse">
@@ -20174,7 +26284,7 @@
         </p:nvSpPr>
         <p:spPr>
           <a:xfrm>
-            <a:off x="6391656" y="4069080"/>
+            <a:off x="6391656" y="3611880"/>
             <a:ext cx="457200" cy="457200"/>
           </a:xfrm>
           <a:prstGeom prst="rect">
@@ -20213,8 +26323,8 @@
         </p:nvSpPr>
         <p:spPr>
           <a:xfrm>
-            <a:off x="6986016" y="3995928"/>
-            <a:ext cx="4517136" cy="2112264"/>
+            <a:off x="6986016" y="3538728"/>
+            <a:ext cx="4517136" cy="1655064"/>
           </a:xfrm>
           <a:prstGeom prst="rect">
             <a:avLst/>
@@ -20243,6 +26353,92 @@
               <a:t>a expirar</a:t>
             </a:r>
             <a:endParaRPr lang="en-US" sz="1800" dirty="0"/>
+          </a:p>
+        </p:txBody>
+      </p:sp>
+      <p:sp>
+        <p:nvSpPr>
+          <p:cNvPr id="25" name="Shape 22"/>
+          <p:cNvSpPr/>
+          <p:nvPr/>
+        </p:nvSpPr>
+        <p:spPr>
+          <a:xfrm>
+            <a:off x="548640" y="5413248"/>
+            <a:ext cx="11091672" cy="868680"/>
+          </a:xfrm>
+          <a:prstGeom prst="roundRect">
+            <a:avLst>
+              <a:gd name="adj" fmla="val 8421"/>
+            </a:avLst>
+          </a:prstGeom>
+          <a:solidFill>
+            <a:srgbClr val="EEF3FA"/>
+          </a:solidFill>
+          <a:ln w="6350">
+            <a:solidFill>
+              <a:srgbClr val="D8E0EC"/>
+            </a:solidFill>
+            <a:prstDash val="solid"/>
+          </a:ln>
+        </p:spPr>
+      </p:sp>
+      <p:sp>
+        <p:nvSpPr>
+          <p:cNvPr id="26" name="Shape 23"/>
+          <p:cNvSpPr/>
+          <p:nvPr/>
+        </p:nvSpPr>
+        <p:spPr>
+          <a:xfrm>
+            <a:off x="548640" y="5413248"/>
+            <a:ext cx="91440" cy="868680"/>
+          </a:xfrm>
+          <a:prstGeom prst="rect">
+            <a:avLst/>
+          </a:prstGeom>
+          <a:solidFill>
+            <a:srgbClr val="F7A23B"/>
+          </a:solidFill>
+          <a:ln/>
+        </p:spPr>
+      </p:sp>
+      <p:sp>
+        <p:nvSpPr>
+          <p:cNvPr id="27" name="Text 24"/>
+          <p:cNvSpPr/>
+          <p:nvPr/>
+        </p:nvSpPr>
+        <p:spPr>
+          <a:xfrm>
+            <a:off x="777240" y="5458968"/>
+            <a:ext cx="10744200" cy="777240"/>
+          </a:xfrm>
+          <a:prstGeom prst="rect">
+            <a:avLst/>
+          </a:prstGeom>
+          <a:noFill/>
+          <a:ln/>
+        </p:spPr>
+        <p:txBody>
+          <a:bodyPr wrap="square" rtlCol="0" anchor="ctr"/>
+          <a:lstStyle/>
+          <a:p>
+            <a:pPr indent="0" marL="0">
+              <a:buNone/>
+            </a:pPr>
+            <a:r>
+              <a:rPr lang="en-US" sz="1500" dirty="0">
+                <a:solidFill>
+                  <a:srgbClr val="1F2937"/>
+                </a:solidFill>
+                <a:latin typeface="Arial" pitchFamily="34" charset="0"/>
+                <a:ea typeface="Arial" pitchFamily="34" charset="-122"/>
+                <a:cs typeface="Arial" pitchFamily="34" charset="-120"/>
+              </a:rPr>
+              <a:t>O bloco de informações da geração distribuída é o seu termômetro: saldo crescendo indica cota alta; créditos a expirar exigem ação.</a:t>
+            </a:r>
+            <a:endParaRPr lang="en-US" sz="1500" dirty="0"/>
           </a:p>
         </p:txBody>
       </p:sp>
@@ -21806,11 +28002,11 @@
         <p:spPr>
           <a:xfrm>
             <a:off x="548640" y="1325880"/>
-            <a:ext cx="11091672" cy="4937760"/>
+            <a:ext cx="11091672" cy="3977640"/>
           </a:xfrm>
           <a:prstGeom prst="roundRect">
             <a:avLst>
-              <a:gd name="adj" fmla="val 1852"/>
+              <a:gd name="adj" fmla="val 2299"/>
             </a:avLst>
           </a:prstGeom>
           <a:solidFill>
@@ -21828,7 +28024,7 @@
         <p:spPr>
           <a:xfrm>
             <a:off x="914400" y="1554480"/>
-            <a:ext cx="10360152" cy="4480560"/>
+            <a:ext cx="10360152" cy="3520440"/>
           </a:xfrm>
           <a:prstGeom prst="rect">
             <a:avLst/>
@@ -21880,6 +28076,92 @@
               <a:t>Ex.: 4% × 58.000 = 2.320 kWh</a:t>
             </a:r>
             <a:endParaRPr lang="en-US" sz="2400" dirty="0"/>
+          </a:p>
+        </p:txBody>
+      </p:sp>
+      <p:sp>
+        <p:nvSpPr>
+          <p:cNvPr id="11" name="Shape 8"/>
+          <p:cNvSpPr/>
+          <p:nvPr/>
+        </p:nvSpPr>
+        <p:spPr>
+          <a:xfrm>
+            <a:off x="548640" y="5413248"/>
+            <a:ext cx="11091672" cy="868680"/>
+          </a:xfrm>
+          <a:prstGeom prst="roundRect">
+            <a:avLst>
+              <a:gd name="adj" fmla="val 8421"/>
+            </a:avLst>
+          </a:prstGeom>
+          <a:solidFill>
+            <a:srgbClr val="EEF3FA"/>
+          </a:solidFill>
+          <a:ln w="6350">
+            <a:solidFill>
+              <a:srgbClr val="D8E0EC"/>
+            </a:solidFill>
+            <a:prstDash val="solid"/>
+          </a:ln>
+        </p:spPr>
+      </p:sp>
+      <p:sp>
+        <p:nvSpPr>
+          <p:cNvPr id="12" name="Shape 9"/>
+          <p:cNvSpPr/>
+          <p:nvPr/>
+        </p:nvSpPr>
+        <p:spPr>
+          <a:xfrm>
+            <a:off x="548640" y="5413248"/>
+            <a:ext cx="91440" cy="868680"/>
+          </a:xfrm>
+          <a:prstGeom prst="rect">
+            <a:avLst/>
+          </a:prstGeom>
+          <a:solidFill>
+            <a:srgbClr val="F7A23B"/>
+          </a:solidFill>
+          <a:ln/>
+        </p:spPr>
+      </p:sp>
+      <p:sp>
+        <p:nvSpPr>
+          <p:cNvPr id="13" name="Text 10"/>
+          <p:cNvSpPr/>
+          <p:nvPr/>
+        </p:nvSpPr>
+        <p:spPr>
+          <a:xfrm>
+            <a:off x="777240" y="5458968"/>
+            <a:ext cx="10744200" cy="777240"/>
+          </a:xfrm>
+          <a:prstGeom prst="rect">
+            <a:avLst/>
+          </a:prstGeom>
+          <a:noFill/>
+          <a:ln/>
+        </p:spPr>
+        <p:txBody>
+          <a:bodyPr wrap="square" rtlCol="0" anchor="ctr"/>
+          <a:lstStyle/>
+          <a:p>
+            <a:pPr indent="0" marL="0">
+              <a:buNone/>
+            </a:pPr>
+            <a:r>
+              <a:rPr lang="en-US" sz="1500" dirty="0">
+                <a:solidFill>
+                  <a:srgbClr val="1F2937"/>
+                </a:solidFill>
+                <a:latin typeface="Arial" pitchFamily="34" charset="0"/>
+                <a:ea typeface="Arial" pitchFamily="34" charset="-122"/>
+                <a:cs typeface="Arial" pitchFamily="34" charset="-120"/>
+              </a:rPr>
+              <a:t>O esperado é o percentual do rateio vezes a energia injetada pela usina no ciclo. Pequenas diferenças vêm dos ciclos de leitura; grandes exigem investigação.</a:t>
+            </a:r>
+            <a:endParaRPr lang="en-US" sz="1500" dirty="0"/>
           </a:p>
         </p:txBody>
       </p:sp>
